--- a/Slides/Lecture_11_ Recurrent_Neural_Networks.pptx
+++ b/Slides/Lecture_11_ Recurrent_Neural_Networks.pptx
@@ -16,6 +16,9 @@
     <p:sldId id="261" r:id="rId10"/>
     <p:sldId id="262" r:id="rId11"/>
     <p:sldId id="263" r:id="rId12"/>
+    <p:sldId id="264" r:id="rId13"/>
+    <p:sldId id="265" r:id="rId14"/>
+    <p:sldId id="266" r:id="rId15"/>
   </p:sldIdLst>
   <p:sldSz cy="6858000" cx="9144000"/>
   <p:notesSz cx="6858000" cy="9144000"/>
@@ -250,7 +253,7 @@
   </p:defaultTextStyle>
   <p:extLst>
     <p:ext uri="GoogleSlidesCustomDataVersion2">
-      <go:slidesCustomData xmlns:go="http://customooxmlschemas.google.com/" r:id="rId13" roundtripDataSignature="AMtx7mi0NMfLLPY90WTqJaxypBkpgzEYRw=="/>
+      <go:slidesCustomData xmlns:go="http://customooxmlschemas.google.com/" r:id="rId16" roundtripDataSignature="AMtx7mjpBgUwCm0byysC7PfJtfnXOY0Xcg=="/>
     </p:ext>
   </p:extLst>
 </p:presentation>
@@ -934,12 +937,12 @@
 </p:notes>
 </file>
 
-<file path=ppt/notesSlides/notesSlide2.xml><?xml version="1.0" encoding="utf-8"?>
+<file path=ppt/notesSlides/notesSlide10.xml><?xml version="1.0" encoding="utf-8"?>
 <p:notes xmlns:a="http://schemas.openxmlformats.org/drawingml/2006/main" xmlns:r="http://schemas.openxmlformats.org/officeDocument/2006/relationships" xmlns:mc="http://schemas.openxmlformats.org/markup-compatibility/2006" xmlns:mv="urn:schemas-microsoft-com:mac:vml" xmlns:p="http://schemas.openxmlformats.org/presentationml/2006/main" xmlns:c="http://schemas.openxmlformats.org/drawingml/2006/chart" xmlns:dgm="http://schemas.openxmlformats.org/drawingml/2006/diagram" xmlns:o="urn:schemas-microsoft-com:office:office" xmlns:v="urn:schemas-microsoft-com:vml" xmlns:pvml="urn:schemas-microsoft-com:office:powerpoint" xmlns:com="http://schemas.openxmlformats.org/drawingml/2006/compatibility" xmlns:p14="http://schemas.microsoft.com/office/powerpoint/2010/main" xmlns:p15="http://schemas.microsoft.com/office/powerpoint/2012/main" xmlns:ahyp="http://schemas.microsoft.com/office/drawing/2018/hyperlinkcolor" showMasterPhAnim="0" showMasterSp="0">
   <p:cSld>
     <p:spTree>
       <p:nvGrpSpPr>
-        <p:cNvPr id="36" name="Shape 36"/>
+        <p:cNvPr id="132" name="Shape 132"/>
         <p:cNvGrpSpPr/>
         <p:nvPr/>
       </p:nvGrpSpPr>
@@ -953,7 +956,7 @@
       </p:grpSpPr>
       <p:sp>
         <p:nvSpPr>
-          <p:cNvPr id="37" name="Google Shape;37;g3bdae2bb03d_0_50:notes"/>
+          <p:cNvPr id="133" name="Google Shape;133;g3c89c144ce9_0_143:notes"/>
           <p:cNvSpPr/>
           <p:nvPr>
             <p:ph idx="2" type="sldImg"/>
@@ -984,21 +987,11 @@
               </a:path>
             </a:pathLst>
           </a:custGeom>
-          <a:noFill/>
-          <a:ln cap="flat" cmpd="sng" w="9525">
-            <a:solidFill>
-              <a:srgbClr val="000000"/>
-            </a:solidFill>
-            <a:prstDash val="solid"/>
-            <a:round/>
-            <a:headEnd len="sm" w="sm" type="none"/>
-            <a:tailEnd len="sm" w="sm" type="none"/>
-          </a:ln>
         </p:spPr>
       </p:sp>
       <p:sp>
         <p:nvSpPr>
-          <p:cNvPr id="38" name="Google Shape;38;g3bdae2bb03d_0_50:notes"/>
+          <p:cNvPr id="134" name="Google Shape;134;g3c89c144ce9_0_143:notes"/>
           <p:cNvSpPr txBox="1"/>
           <p:nvPr>
             <p:ph idx="1" type="body"/>
@@ -1012,10 +1005,6 @@
           <a:prstGeom prst="rect">
             <a:avLst/>
           </a:prstGeom>
-          <a:noFill/>
-          <a:ln>
-            <a:noFill/>
-          </a:ln>
         </p:spPr>
         <p:txBody>
           <a:bodyPr anchorCtr="0" anchor="t" bIns="91425" lIns="91425" spcFirstLastPara="1" rIns="91425" wrap="square" tIns="91425">
@@ -1024,16 +1013,12 @@
           <a:lstStyle/>
           <a:p>
             <a:pPr indent="0" lvl="0" marL="0" rtl="0" algn="l">
-              <a:lnSpc>
-                <a:spcPct val="100000"/>
-              </a:lnSpc>
-              <a:spcBef>
-                <a:spcPts val="0"/>
-              </a:spcBef>
-              <a:spcAft>
-                <a:spcPts val="0"/>
-              </a:spcAft>
-              <a:buSzPts val="1400"/>
+              <a:spcBef>
+                <a:spcPts val="0"/>
+              </a:spcBef>
+              <a:spcAft>
+                <a:spcPts val="0"/>
+              </a:spcAft>
               <a:buNone/>
             </a:pPr>
             <a:r>
@@ -1051,12 +1036,12 @@
 </p:notes>
 </file>
 
-<file path=ppt/notesSlides/notesSlide3.xml><?xml version="1.0" encoding="utf-8"?>
+<file path=ppt/notesSlides/notesSlide11.xml><?xml version="1.0" encoding="utf-8"?>
 <p:notes xmlns:a="http://schemas.openxmlformats.org/drawingml/2006/main" xmlns:r="http://schemas.openxmlformats.org/officeDocument/2006/relationships" xmlns:mc="http://schemas.openxmlformats.org/markup-compatibility/2006" xmlns:mv="urn:schemas-microsoft-com:mac:vml" xmlns:p="http://schemas.openxmlformats.org/presentationml/2006/main" xmlns:c="http://schemas.openxmlformats.org/drawingml/2006/chart" xmlns:dgm="http://schemas.openxmlformats.org/drawingml/2006/diagram" xmlns:o="urn:schemas-microsoft-com:office:office" xmlns:v="urn:schemas-microsoft-com:vml" xmlns:pvml="urn:schemas-microsoft-com:office:powerpoint" xmlns:com="http://schemas.openxmlformats.org/drawingml/2006/compatibility" xmlns:p14="http://schemas.microsoft.com/office/powerpoint/2010/main" xmlns:p15="http://schemas.microsoft.com/office/powerpoint/2012/main" xmlns:ahyp="http://schemas.microsoft.com/office/drawing/2018/hyperlinkcolor" showMasterPhAnim="0" showMasterSp="0">
   <p:cSld>
     <p:spTree>
       <p:nvGrpSpPr>
-        <p:cNvPr id="44" name="Shape 44"/>
+        <p:cNvPr id="138" name="Shape 138"/>
         <p:cNvGrpSpPr/>
         <p:nvPr/>
       </p:nvGrpSpPr>
@@ -1070,7 +1055,7 @@
       </p:grpSpPr>
       <p:sp>
         <p:nvSpPr>
-          <p:cNvPr id="45" name="Google Shape;45;g3bbeee67e43_0_26:notes"/>
+          <p:cNvPr id="139" name="Google Shape;139;g3c89c144ce9_0_11:notes"/>
           <p:cNvSpPr/>
           <p:nvPr>
             <p:ph idx="2" type="sldImg"/>
@@ -1101,21 +1086,11 @@
               </a:path>
             </a:pathLst>
           </a:custGeom>
-          <a:noFill/>
-          <a:ln cap="flat" cmpd="sng" w="9525">
-            <a:solidFill>
-              <a:srgbClr val="000000"/>
-            </a:solidFill>
-            <a:prstDash val="solid"/>
-            <a:round/>
-            <a:headEnd len="sm" w="sm" type="none"/>
-            <a:tailEnd len="sm" w="sm" type="none"/>
-          </a:ln>
         </p:spPr>
       </p:sp>
       <p:sp>
         <p:nvSpPr>
-          <p:cNvPr id="46" name="Google Shape;46;g3bbeee67e43_0_26:notes"/>
+          <p:cNvPr id="140" name="Google Shape;140;g3c89c144ce9_0_11:notes"/>
           <p:cNvSpPr txBox="1"/>
           <p:nvPr>
             <p:ph idx="1" type="body"/>
@@ -1129,10 +1104,6 @@
           <a:prstGeom prst="rect">
             <a:avLst/>
           </a:prstGeom>
-          <a:noFill/>
-          <a:ln>
-            <a:noFill/>
-          </a:ln>
         </p:spPr>
         <p:txBody>
           <a:bodyPr anchorCtr="0" anchor="t" bIns="91425" lIns="91425" spcFirstLastPara="1" rIns="91425" wrap="square" tIns="91425">
@@ -1141,16 +1112,12 @@
           <a:lstStyle/>
           <a:p>
             <a:pPr indent="0" lvl="0" marL="0" rtl="0" algn="l">
-              <a:lnSpc>
-                <a:spcPct val="100000"/>
-              </a:lnSpc>
-              <a:spcBef>
-                <a:spcPts val="0"/>
-              </a:spcBef>
-              <a:spcAft>
-                <a:spcPts val="0"/>
-              </a:spcAft>
-              <a:buSzPts val="1400"/>
+              <a:spcBef>
+                <a:spcPts val="0"/>
+              </a:spcBef>
+              <a:spcAft>
+                <a:spcPts val="0"/>
+              </a:spcAft>
               <a:buNone/>
             </a:pPr>
             <a:r>
@@ -1168,12 +1135,12 @@
 </p:notes>
 </file>
 
-<file path=ppt/notesSlides/notesSlide4.xml><?xml version="1.0" encoding="utf-8"?>
+<file path=ppt/notesSlides/notesSlide2.xml><?xml version="1.0" encoding="utf-8"?>
 <p:notes xmlns:a="http://schemas.openxmlformats.org/drawingml/2006/main" xmlns:r="http://schemas.openxmlformats.org/officeDocument/2006/relationships" xmlns:mc="http://schemas.openxmlformats.org/markup-compatibility/2006" xmlns:mv="urn:schemas-microsoft-com:mac:vml" xmlns:p="http://schemas.openxmlformats.org/presentationml/2006/main" xmlns:c="http://schemas.openxmlformats.org/drawingml/2006/chart" xmlns:dgm="http://schemas.openxmlformats.org/drawingml/2006/diagram" xmlns:o="urn:schemas-microsoft-com:office:office" xmlns:v="urn:schemas-microsoft-com:vml" xmlns:pvml="urn:schemas-microsoft-com:office:powerpoint" xmlns:com="http://schemas.openxmlformats.org/drawingml/2006/compatibility" xmlns:p14="http://schemas.microsoft.com/office/powerpoint/2010/main" xmlns:p15="http://schemas.microsoft.com/office/powerpoint/2012/main" xmlns:ahyp="http://schemas.microsoft.com/office/drawing/2018/hyperlinkcolor" showMasterPhAnim="0" showMasterSp="0">
   <p:cSld>
     <p:spTree>
       <p:nvGrpSpPr>
-        <p:cNvPr id="49" name="Shape 49"/>
+        <p:cNvPr id="36" name="Shape 36"/>
         <p:cNvGrpSpPr/>
         <p:nvPr/>
       </p:nvGrpSpPr>
@@ -1187,7 +1154,7 @@
       </p:grpSpPr>
       <p:sp>
         <p:nvSpPr>
-          <p:cNvPr id="50" name="Google Shape;50;g3bd1f6d9d27_0_3:notes"/>
+          <p:cNvPr id="37" name="Google Shape;37;g3bbeee67e43_0_26:notes"/>
           <p:cNvSpPr/>
           <p:nvPr>
             <p:ph idx="2" type="sldImg"/>
@@ -1232,7 +1199,7 @@
       </p:sp>
       <p:sp>
         <p:nvSpPr>
-          <p:cNvPr id="51" name="Google Shape;51;g3bd1f6d9d27_0_3:notes"/>
+          <p:cNvPr id="38" name="Google Shape;38;g3bbeee67e43_0_26:notes"/>
           <p:cNvSpPr txBox="1"/>
           <p:nvPr>
             <p:ph idx="1" type="body"/>
@@ -1285,12 +1252,12 @@
 </p:notes>
 </file>
 
-<file path=ppt/notesSlides/notesSlide5.xml><?xml version="1.0" encoding="utf-8"?>
+<file path=ppt/notesSlides/notesSlide3.xml><?xml version="1.0" encoding="utf-8"?>
 <p:notes xmlns:a="http://schemas.openxmlformats.org/drawingml/2006/main" xmlns:r="http://schemas.openxmlformats.org/officeDocument/2006/relationships" xmlns:mc="http://schemas.openxmlformats.org/markup-compatibility/2006" xmlns:mv="urn:schemas-microsoft-com:mac:vml" xmlns:p="http://schemas.openxmlformats.org/presentationml/2006/main" xmlns:c="http://schemas.openxmlformats.org/drawingml/2006/chart" xmlns:dgm="http://schemas.openxmlformats.org/drawingml/2006/diagram" xmlns:o="urn:schemas-microsoft-com:office:office" xmlns:v="urn:schemas-microsoft-com:vml" xmlns:pvml="urn:schemas-microsoft-com:office:powerpoint" xmlns:com="http://schemas.openxmlformats.org/drawingml/2006/compatibility" xmlns:p14="http://schemas.microsoft.com/office/powerpoint/2010/main" xmlns:p15="http://schemas.microsoft.com/office/powerpoint/2012/main" xmlns:ahyp="http://schemas.microsoft.com/office/drawing/2018/hyperlinkcolor" showMasterPhAnim="0" showMasterSp="0">
   <p:cSld>
     <p:spTree>
       <p:nvGrpSpPr>
-        <p:cNvPr id="97" name="Shape 97"/>
+        <p:cNvPr id="41" name="Shape 41"/>
         <p:cNvGrpSpPr/>
         <p:nvPr/>
       </p:nvGrpSpPr>
@@ -1304,7 +1271,7 @@
       </p:grpSpPr>
       <p:sp>
         <p:nvSpPr>
-          <p:cNvPr id="98" name="Google Shape;98;g3c70c3f9d8e_0_10:notes"/>
+          <p:cNvPr id="42" name="Google Shape;42;g3bd1f6d9d27_0_3:notes"/>
           <p:cNvSpPr/>
           <p:nvPr>
             <p:ph idx="2" type="sldImg"/>
@@ -1349,7 +1316,7 @@
       </p:sp>
       <p:sp>
         <p:nvSpPr>
-          <p:cNvPr id="99" name="Google Shape;99;g3c70c3f9d8e_0_10:notes"/>
+          <p:cNvPr id="43" name="Google Shape;43;g3bd1f6d9d27_0_3:notes"/>
           <p:cNvSpPr txBox="1"/>
           <p:nvPr>
             <p:ph idx="1" type="body"/>
@@ -1402,12 +1369,12 @@
 </p:notes>
 </file>
 
-<file path=ppt/notesSlides/notesSlide6.xml><?xml version="1.0" encoding="utf-8"?>
+<file path=ppt/notesSlides/notesSlide4.xml><?xml version="1.0" encoding="utf-8"?>
 <p:notes xmlns:a="http://schemas.openxmlformats.org/drawingml/2006/main" xmlns:r="http://schemas.openxmlformats.org/officeDocument/2006/relationships" xmlns:mc="http://schemas.openxmlformats.org/markup-compatibility/2006" xmlns:mv="urn:schemas-microsoft-com:mac:vml" xmlns:p="http://schemas.openxmlformats.org/presentationml/2006/main" xmlns:c="http://schemas.openxmlformats.org/drawingml/2006/chart" xmlns:dgm="http://schemas.openxmlformats.org/drawingml/2006/diagram" xmlns:o="urn:schemas-microsoft-com:office:office" xmlns:v="urn:schemas-microsoft-com:vml" xmlns:pvml="urn:schemas-microsoft-com:office:powerpoint" xmlns:com="http://schemas.openxmlformats.org/drawingml/2006/compatibility" xmlns:p14="http://schemas.microsoft.com/office/powerpoint/2010/main" xmlns:p15="http://schemas.microsoft.com/office/powerpoint/2012/main" xmlns:ahyp="http://schemas.microsoft.com/office/drawing/2018/hyperlinkcolor" showMasterPhAnim="0" showMasterSp="0">
   <p:cSld>
     <p:spTree>
       <p:nvGrpSpPr>
-        <p:cNvPr id="104" name="Shape 104"/>
+        <p:cNvPr id="89" name="Shape 89"/>
         <p:cNvGrpSpPr/>
         <p:nvPr/>
       </p:nvGrpSpPr>
@@ -1421,7 +1388,7 @@
       </p:grpSpPr>
       <p:sp>
         <p:nvSpPr>
-          <p:cNvPr id="105" name="Google Shape;105;g3c70c3f9d8e_0_15:notes"/>
+          <p:cNvPr id="90" name="Google Shape;90;g3c70c3f9d8e_0_10:notes"/>
           <p:cNvSpPr/>
           <p:nvPr>
             <p:ph idx="2" type="sldImg"/>
@@ -1466,7 +1433,7 @@
       </p:sp>
       <p:sp>
         <p:nvSpPr>
-          <p:cNvPr id="106" name="Google Shape;106;g3c70c3f9d8e_0_15:notes"/>
+          <p:cNvPr id="91" name="Google Shape;91;g3c70c3f9d8e_0_10:notes"/>
           <p:cNvSpPr txBox="1"/>
           <p:nvPr>
             <p:ph idx="1" type="body"/>
@@ -1519,12 +1486,12 @@
 </p:notes>
 </file>
 
-<file path=ppt/notesSlides/notesSlide7.xml><?xml version="1.0" encoding="utf-8"?>
+<file path=ppt/notesSlides/notesSlide5.xml><?xml version="1.0" encoding="utf-8"?>
 <p:notes xmlns:a="http://schemas.openxmlformats.org/drawingml/2006/main" xmlns:r="http://schemas.openxmlformats.org/officeDocument/2006/relationships" xmlns:mc="http://schemas.openxmlformats.org/markup-compatibility/2006" xmlns:mv="urn:schemas-microsoft-com:mac:vml" xmlns:p="http://schemas.openxmlformats.org/presentationml/2006/main" xmlns:c="http://schemas.openxmlformats.org/drawingml/2006/chart" xmlns:dgm="http://schemas.openxmlformats.org/drawingml/2006/diagram" xmlns:o="urn:schemas-microsoft-com:office:office" xmlns:v="urn:schemas-microsoft-com:vml" xmlns:pvml="urn:schemas-microsoft-com:office:powerpoint" xmlns:com="http://schemas.openxmlformats.org/drawingml/2006/compatibility" xmlns:p14="http://schemas.microsoft.com/office/powerpoint/2010/main" xmlns:p15="http://schemas.microsoft.com/office/powerpoint/2012/main" xmlns:ahyp="http://schemas.microsoft.com/office/drawing/2018/hyperlinkcolor" showMasterPhAnim="0" showMasterSp="0">
   <p:cSld>
     <p:spTree>
       <p:nvGrpSpPr>
-        <p:cNvPr id="111" name="Shape 111"/>
+        <p:cNvPr id="96" name="Shape 96"/>
         <p:cNvGrpSpPr/>
         <p:nvPr/>
       </p:nvGrpSpPr>
@@ -1538,7 +1505,7 @@
       </p:grpSpPr>
       <p:sp>
         <p:nvSpPr>
-          <p:cNvPr id="112" name="Google Shape;112;g3c70c3f9d8e_0_74:notes"/>
+          <p:cNvPr id="97" name="Google Shape;97;g3c70c3f9d8e_0_15:notes"/>
           <p:cNvSpPr/>
           <p:nvPr>
             <p:ph idx="2" type="sldImg"/>
@@ -1583,7 +1550,7 @@
       </p:sp>
       <p:sp>
         <p:nvSpPr>
-          <p:cNvPr id="113" name="Google Shape;113;g3c70c3f9d8e_0_74:notes"/>
+          <p:cNvPr id="98" name="Google Shape;98;g3c70c3f9d8e_0_15:notes"/>
           <p:cNvSpPr txBox="1"/>
           <p:nvPr>
             <p:ph idx="1" type="body"/>
@@ -1636,12 +1603,12 @@
 </p:notes>
 </file>
 
-<file path=ppt/notesSlides/notesSlide8.xml><?xml version="1.0" encoding="utf-8"?>
+<file path=ppt/notesSlides/notesSlide6.xml><?xml version="1.0" encoding="utf-8"?>
 <p:notes xmlns:a="http://schemas.openxmlformats.org/drawingml/2006/main" xmlns:r="http://schemas.openxmlformats.org/officeDocument/2006/relationships" xmlns:mc="http://schemas.openxmlformats.org/markup-compatibility/2006" xmlns:mv="urn:schemas-microsoft-com:mac:vml" xmlns:p="http://schemas.openxmlformats.org/presentationml/2006/main" xmlns:c="http://schemas.openxmlformats.org/drawingml/2006/chart" xmlns:dgm="http://schemas.openxmlformats.org/drawingml/2006/diagram" xmlns:o="urn:schemas-microsoft-com:office:office" xmlns:v="urn:schemas-microsoft-com:vml" xmlns:pvml="urn:schemas-microsoft-com:office:powerpoint" xmlns:com="http://schemas.openxmlformats.org/drawingml/2006/compatibility" xmlns:p14="http://schemas.microsoft.com/office/powerpoint/2010/main" xmlns:p15="http://schemas.microsoft.com/office/powerpoint/2012/main" xmlns:ahyp="http://schemas.microsoft.com/office/drawing/2018/hyperlinkcolor" showMasterPhAnim="0" showMasterSp="0">
   <p:cSld>
     <p:spTree>
       <p:nvGrpSpPr>
-        <p:cNvPr id="117" name="Shape 117"/>
+        <p:cNvPr id="103" name="Shape 103"/>
         <p:cNvGrpSpPr/>
         <p:nvPr/>
       </p:nvGrpSpPr>
@@ -1655,7 +1622,7 @@
       </p:grpSpPr>
       <p:sp>
         <p:nvSpPr>
-          <p:cNvPr id="118" name="Google Shape;118;g3c70c3f9d8e_0_20:notes"/>
+          <p:cNvPr id="104" name="Google Shape;104;g3c70c3f9d8e_0_74:notes"/>
           <p:cNvSpPr/>
           <p:nvPr>
             <p:ph idx="2" type="sldImg"/>
@@ -1700,7 +1667,7 @@
       </p:sp>
       <p:sp>
         <p:nvSpPr>
-          <p:cNvPr id="119" name="Google Shape;119;g3c70c3f9d8e_0_20:notes"/>
+          <p:cNvPr id="105" name="Google Shape;105;g3c70c3f9d8e_0_74:notes"/>
           <p:cNvSpPr txBox="1"/>
           <p:nvPr>
             <p:ph idx="1" type="body"/>
@@ -1736,6 +1703,321 @@
                 <a:spcPts val="0"/>
               </a:spcAft>
               <a:buSzPts val="1400"/>
+              <a:buNone/>
+            </a:pPr>
+            <a:r>
+              <a:t/>
+            </a:r>
+            <a:endParaRPr/>
+          </a:p>
+        </p:txBody>
+      </p:sp>
+    </p:spTree>
+  </p:cSld>
+  <p:clrMapOvr>
+    <a:masterClrMapping/>
+  </p:clrMapOvr>
+</p:notes>
+</file>
+
+<file path=ppt/notesSlides/notesSlide7.xml><?xml version="1.0" encoding="utf-8"?>
+<p:notes xmlns:a="http://schemas.openxmlformats.org/drawingml/2006/main" xmlns:r="http://schemas.openxmlformats.org/officeDocument/2006/relationships" xmlns:mc="http://schemas.openxmlformats.org/markup-compatibility/2006" xmlns:mv="urn:schemas-microsoft-com:mac:vml" xmlns:p="http://schemas.openxmlformats.org/presentationml/2006/main" xmlns:c="http://schemas.openxmlformats.org/drawingml/2006/chart" xmlns:dgm="http://schemas.openxmlformats.org/drawingml/2006/diagram" xmlns:o="urn:schemas-microsoft-com:office:office" xmlns:v="urn:schemas-microsoft-com:vml" xmlns:pvml="urn:schemas-microsoft-com:office:powerpoint" xmlns:com="http://schemas.openxmlformats.org/drawingml/2006/compatibility" xmlns:p14="http://schemas.microsoft.com/office/powerpoint/2010/main" xmlns:p15="http://schemas.microsoft.com/office/powerpoint/2012/main" xmlns:ahyp="http://schemas.microsoft.com/office/drawing/2018/hyperlinkcolor" showMasterPhAnim="0" showMasterSp="0">
+  <p:cSld>
+    <p:spTree>
+      <p:nvGrpSpPr>
+        <p:cNvPr id="109" name="Shape 109"/>
+        <p:cNvGrpSpPr/>
+        <p:nvPr/>
+      </p:nvGrpSpPr>
+      <p:grpSpPr>
+        <a:xfrm>
+          <a:off x="0" y="0"/>
+          <a:ext cx="0" cy="0"/>
+          <a:chOff x="0" y="0"/>
+          <a:chExt cx="0" cy="0"/>
+        </a:xfrm>
+      </p:grpSpPr>
+      <p:sp>
+        <p:nvSpPr>
+          <p:cNvPr id="110" name="Google Shape;110;g3c70c3f9d8e_0_20:notes"/>
+          <p:cNvSpPr/>
+          <p:nvPr>
+            <p:ph idx="2" type="sldImg"/>
+          </p:nvPr>
+        </p:nvSpPr>
+        <p:spPr>
+          <a:xfrm>
+            <a:off x="1143309" y="685800"/>
+            <a:ext cx="4572000" cy="3429000"/>
+          </a:xfrm>
+          <a:custGeom>
+            <a:rect b="b" l="l" r="r" t="t"/>
+            <a:pathLst>
+              <a:path extrusionOk="0" h="120000" w="120000">
+                <a:moveTo>
+                  <a:pt x="0" y="0"/>
+                </a:moveTo>
+                <a:lnTo>
+                  <a:pt x="120000" y="0"/>
+                </a:lnTo>
+                <a:lnTo>
+                  <a:pt x="120000" y="120000"/>
+                </a:lnTo>
+                <a:lnTo>
+                  <a:pt x="0" y="120000"/>
+                </a:lnTo>
+                <a:close/>
+              </a:path>
+            </a:pathLst>
+          </a:custGeom>
+          <a:noFill/>
+          <a:ln cap="flat" cmpd="sng" w="9525">
+            <a:solidFill>
+              <a:srgbClr val="000000"/>
+            </a:solidFill>
+            <a:prstDash val="solid"/>
+            <a:round/>
+            <a:headEnd len="sm" w="sm" type="none"/>
+            <a:tailEnd len="sm" w="sm" type="none"/>
+          </a:ln>
+        </p:spPr>
+      </p:sp>
+      <p:sp>
+        <p:nvSpPr>
+          <p:cNvPr id="111" name="Google Shape;111;g3c70c3f9d8e_0_20:notes"/>
+          <p:cNvSpPr txBox="1"/>
+          <p:nvPr>
+            <p:ph idx="1" type="body"/>
+          </p:nvPr>
+        </p:nvSpPr>
+        <p:spPr>
+          <a:xfrm>
+            <a:off x="685800" y="4343400"/>
+            <a:ext cx="5486400" cy="4114800"/>
+          </a:xfrm>
+          <a:prstGeom prst="rect">
+            <a:avLst/>
+          </a:prstGeom>
+          <a:noFill/>
+          <a:ln>
+            <a:noFill/>
+          </a:ln>
+        </p:spPr>
+        <p:txBody>
+          <a:bodyPr anchorCtr="0" anchor="t" bIns="91425" lIns="91425" spcFirstLastPara="1" rIns="91425" wrap="square" tIns="91425">
+            <a:noAutofit/>
+          </a:bodyPr>
+          <a:lstStyle/>
+          <a:p>
+            <a:pPr indent="0" lvl="0" marL="0" rtl="0" algn="l">
+              <a:lnSpc>
+                <a:spcPct val="100000"/>
+              </a:lnSpc>
+              <a:spcBef>
+                <a:spcPts val="0"/>
+              </a:spcBef>
+              <a:spcAft>
+                <a:spcPts val="0"/>
+              </a:spcAft>
+              <a:buSzPts val="1400"/>
+              <a:buNone/>
+            </a:pPr>
+            <a:r>
+              <a:t/>
+            </a:r>
+            <a:endParaRPr/>
+          </a:p>
+        </p:txBody>
+      </p:sp>
+    </p:spTree>
+  </p:cSld>
+  <p:clrMapOvr>
+    <a:masterClrMapping/>
+  </p:clrMapOvr>
+</p:notes>
+</file>
+
+<file path=ppt/notesSlides/notesSlide8.xml><?xml version="1.0" encoding="utf-8"?>
+<p:notes xmlns:a="http://schemas.openxmlformats.org/drawingml/2006/main" xmlns:r="http://schemas.openxmlformats.org/officeDocument/2006/relationships" xmlns:mc="http://schemas.openxmlformats.org/markup-compatibility/2006" xmlns:mv="urn:schemas-microsoft-com:mac:vml" xmlns:p="http://schemas.openxmlformats.org/presentationml/2006/main" xmlns:c="http://schemas.openxmlformats.org/drawingml/2006/chart" xmlns:dgm="http://schemas.openxmlformats.org/drawingml/2006/diagram" xmlns:o="urn:schemas-microsoft-com:office:office" xmlns:v="urn:schemas-microsoft-com:vml" xmlns:pvml="urn:schemas-microsoft-com:office:powerpoint" xmlns:com="http://schemas.openxmlformats.org/drawingml/2006/compatibility" xmlns:p14="http://schemas.microsoft.com/office/powerpoint/2010/main" xmlns:p15="http://schemas.microsoft.com/office/powerpoint/2012/main" xmlns:ahyp="http://schemas.microsoft.com/office/drawing/2018/hyperlinkcolor" showMasterPhAnim="0" showMasterSp="0">
+  <p:cSld>
+    <p:spTree>
+      <p:nvGrpSpPr>
+        <p:cNvPr id="115" name="Shape 115"/>
+        <p:cNvGrpSpPr/>
+        <p:nvPr/>
+      </p:nvGrpSpPr>
+      <p:grpSpPr>
+        <a:xfrm>
+          <a:off x="0" y="0"/>
+          <a:ext cx="0" cy="0"/>
+          <a:chOff x="0" y="0"/>
+          <a:chExt cx="0" cy="0"/>
+        </a:xfrm>
+      </p:grpSpPr>
+      <p:sp>
+        <p:nvSpPr>
+          <p:cNvPr id="116" name="Google Shape;116;g3c89c144ce9_0_148:notes"/>
+          <p:cNvSpPr/>
+          <p:nvPr>
+            <p:ph idx="2" type="sldImg"/>
+          </p:nvPr>
+        </p:nvSpPr>
+        <p:spPr>
+          <a:xfrm>
+            <a:off x="1143309" y="685800"/>
+            <a:ext cx="4572000" cy="3429000"/>
+          </a:xfrm>
+          <a:custGeom>
+            <a:rect b="b" l="l" r="r" t="t"/>
+            <a:pathLst>
+              <a:path extrusionOk="0" h="120000" w="120000">
+                <a:moveTo>
+                  <a:pt x="0" y="0"/>
+                </a:moveTo>
+                <a:lnTo>
+                  <a:pt x="120000" y="0"/>
+                </a:lnTo>
+                <a:lnTo>
+                  <a:pt x="120000" y="120000"/>
+                </a:lnTo>
+                <a:lnTo>
+                  <a:pt x="0" y="120000"/>
+                </a:lnTo>
+                <a:close/>
+              </a:path>
+            </a:pathLst>
+          </a:custGeom>
+        </p:spPr>
+      </p:sp>
+      <p:sp>
+        <p:nvSpPr>
+          <p:cNvPr id="117" name="Google Shape;117;g3c89c144ce9_0_148:notes"/>
+          <p:cNvSpPr txBox="1"/>
+          <p:nvPr>
+            <p:ph idx="1" type="body"/>
+          </p:nvPr>
+        </p:nvSpPr>
+        <p:spPr>
+          <a:xfrm>
+            <a:off x="685800" y="4343400"/>
+            <a:ext cx="5486400" cy="4114800"/>
+          </a:xfrm>
+          <a:prstGeom prst="rect">
+            <a:avLst/>
+          </a:prstGeom>
+        </p:spPr>
+        <p:txBody>
+          <a:bodyPr anchorCtr="0" anchor="t" bIns="91425" lIns="91425" spcFirstLastPara="1" rIns="91425" wrap="square" tIns="91425">
+            <a:noAutofit/>
+          </a:bodyPr>
+          <a:lstStyle/>
+          <a:p>
+            <a:pPr indent="0" lvl="0" marL="0" rtl="0" algn="l">
+              <a:spcBef>
+                <a:spcPts val="0"/>
+              </a:spcBef>
+              <a:spcAft>
+                <a:spcPts val="0"/>
+              </a:spcAft>
+              <a:buNone/>
+            </a:pPr>
+            <a:r>
+              <a:t/>
+            </a:r>
+            <a:endParaRPr/>
+          </a:p>
+        </p:txBody>
+      </p:sp>
+    </p:spTree>
+  </p:cSld>
+  <p:clrMapOvr>
+    <a:masterClrMapping/>
+  </p:clrMapOvr>
+</p:notes>
+</file>
+
+<file path=ppt/notesSlides/notesSlide9.xml><?xml version="1.0" encoding="utf-8"?>
+<p:notes xmlns:a="http://schemas.openxmlformats.org/drawingml/2006/main" xmlns:r="http://schemas.openxmlformats.org/officeDocument/2006/relationships" xmlns:mc="http://schemas.openxmlformats.org/markup-compatibility/2006" xmlns:mv="urn:schemas-microsoft-com:mac:vml" xmlns:p="http://schemas.openxmlformats.org/presentationml/2006/main" xmlns:c="http://schemas.openxmlformats.org/drawingml/2006/chart" xmlns:dgm="http://schemas.openxmlformats.org/drawingml/2006/diagram" xmlns:o="urn:schemas-microsoft-com:office:office" xmlns:v="urn:schemas-microsoft-com:vml" xmlns:pvml="urn:schemas-microsoft-com:office:powerpoint" xmlns:com="http://schemas.openxmlformats.org/drawingml/2006/compatibility" xmlns:p14="http://schemas.microsoft.com/office/powerpoint/2010/main" xmlns:p15="http://schemas.microsoft.com/office/powerpoint/2012/main" xmlns:ahyp="http://schemas.microsoft.com/office/drawing/2018/hyperlinkcolor" showMasterPhAnim="0" showMasterSp="0">
+  <p:cSld>
+    <p:spTree>
+      <p:nvGrpSpPr>
+        <p:cNvPr id="120" name="Shape 120"/>
+        <p:cNvGrpSpPr/>
+        <p:nvPr/>
+      </p:nvGrpSpPr>
+      <p:grpSpPr>
+        <a:xfrm>
+          <a:off x="0" y="0"/>
+          <a:ext cx="0" cy="0"/>
+          <a:chOff x="0" y="0"/>
+          <a:chExt cx="0" cy="0"/>
+        </a:xfrm>
+      </p:grpSpPr>
+      <p:sp>
+        <p:nvSpPr>
+          <p:cNvPr id="121" name="Google Shape;121;g3c89c144ce9_0_1:notes"/>
+          <p:cNvSpPr/>
+          <p:nvPr>
+            <p:ph idx="2" type="sldImg"/>
+          </p:nvPr>
+        </p:nvSpPr>
+        <p:spPr>
+          <a:xfrm>
+            <a:off x="1143309" y="685800"/>
+            <a:ext cx="4572000" cy="3429000"/>
+          </a:xfrm>
+          <a:custGeom>
+            <a:rect b="b" l="l" r="r" t="t"/>
+            <a:pathLst>
+              <a:path extrusionOk="0" h="120000" w="120000">
+                <a:moveTo>
+                  <a:pt x="0" y="0"/>
+                </a:moveTo>
+                <a:lnTo>
+                  <a:pt x="120000" y="0"/>
+                </a:lnTo>
+                <a:lnTo>
+                  <a:pt x="120000" y="120000"/>
+                </a:lnTo>
+                <a:lnTo>
+                  <a:pt x="0" y="120000"/>
+                </a:lnTo>
+                <a:close/>
+              </a:path>
+            </a:pathLst>
+          </a:custGeom>
+        </p:spPr>
+      </p:sp>
+      <p:sp>
+        <p:nvSpPr>
+          <p:cNvPr id="122" name="Google Shape;122;g3c89c144ce9_0_1:notes"/>
+          <p:cNvSpPr txBox="1"/>
+          <p:nvPr>
+            <p:ph idx="1" type="body"/>
+          </p:nvPr>
+        </p:nvSpPr>
+        <p:spPr>
+          <a:xfrm>
+            <a:off x="685800" y="4343400"/>
+            <a:ext cx="5486400" cy="4114800"/>
+          </a:xfrm>
+          <a:prstGeom prst="rect">
+            <a:avLst/>
+          </a:prstGeom>
+        </p:spPr>
+        <p:txBody>
+          <a:bodyPr anchorCtr="0" anchor="t" bIns="91425" lIns="91425" spcFirstLastPara="1" rIns="91425" wrap="square" tIns="91425">
+            <a:noAutofit/>
+          </a:bodyPr>
+          <a:lstStyle/>
+          <a:p>
+            <a:pPr indent="0" lvl="0" marL="0" rtl="0" algn="l">
+              <a:spcBef>
+                <a:spcPts val="0"/>
+              </a:spcBef>
+              <a:spcAft>
+                <a:spcPts val="0"/>
+              </a:spcAft>
               <a:buNone/>
             </a:pPr>
             <a:r>
@@ -6554,7 +6836,100 @@
             </a:pPr>
             <a:r>
               <a:rPr lang="en"/>
-              <a:t>Programming Practice 01</a:t>
+              <a:t>Meme of the Day</a:t>
+            </a:r>
+            <a:endParaRPr/>
+          </a:p>
+        </p:txBody>
+      </p:sp>
+      <p:pic>
+        <p:nvPicPr>
+          <p:cNvPr id="35" name="Google Shape;35;g3bdae2bb03d_0_43" title="IMG_9568.JPG"/>
+          <p:cNvPicPr preferRelativeResize="0"/>
+          <p:nvPr/>
+        </p:nvPicPr>
+        <p:blipFill>
+          <a:blip r:embed="rId3">
+            <a:alphaModFix/>
+          </a:blip>
+          <a:stretch>
+            <a:fillRect/>
+          </a:stretch>
+        </p:blipFill>
+        <p:spPr>
+          <a:xfrm>
+            <a:off x="2549413" y="1417638"/>
+            <a:ext cx="4045181" cy="5135562"/>
+          </a:xfrm>
+          <a:prstGeom prst="rect">
+            <a:avLst/>
+          </a:prstGeom>
+          <a:noFill/>
+          <a:ln>
+            <a:noFill/>
+          </a:ln>
+        </p:spPr>
+      </p:pic>
+    </p:spTree>
+  </p:cSld>
+  <p:clrMapOvr>
+    <a:masterClrMapping/>
+  </p:clrMapOvr>
+</p:sld>
+</file>
+
+<file path=ppt/slides/slide10.xml><?xml version="1.0" encoding="utf-8"?>
+<p:sld xmlns:a="http://schemas.openxmlformats.org/drawingml/2006/main" xmlns:r="http://schemas.openxmlformats.org/officeDocument/2006/relationships" xmlns:mc="http://schemas.openxmlformats.org/markup-compatibility/2006" xmlns:mv="urn:schemas-microsoft-com:mac:vml" xmlns:p="http://schemas.openxmlformats.org/presentationml/2006/main" xmlns:c="http://schemas.openxmlformats.org/drawingml/2006/chart" xmlns:dgm="http://schemas.openxmlformats.org/drawingml/2006/diagram" xmlns:o="urn:schemas-microsoft-com:office:office" xmlns:v="urn:schemas-microsoft-com:vml" xmlns:pvml="urn:schemas-microsoft-com:office:powerpoint" xmlns:com="http://schemas.openxmlformats.org/drawingml/2006/compatibility" xmlns:p14="http://schemas.microsoft.com/office/powerpoint/2010/main" xmlns:p15="http://schemas.microsoft.com/office/powerpoint/2012/main" xmlns:ahyp="http://schemas.microsoft.com/office/drawing/2018/hyperlinkcolor">
+  <p:cSld>
+    <p:spTree>
+      <p:nvGrpSpPr>
+        <p:cNvPr id="135" name="Shape 135"/>
+        <p:cNvGrpSpPr/>
+        <p:nvPr/>
+      </p:nvGrpSpPr>
+      <p:grpSpPr>
+        <a:xfrm>
+          <a:off x="0" y="0"/>
+          <a:ext cx="0" cy="0"/>
+          <a:chOff x="0" y="0"/>
+          <a:chExt cx="0" cy="0"/>
+        </a:xfrm>
+      </p:grpSpPr>
+      <p:sp>
+        <p:nvSpPr>
+          <p:cNvPr id="136" name="Google Shape;136;g3c89c144ce9_0_143"/>
+          <p:cNvSpPr txBox="1"/>
+          <p:nvPr>
+            <p:ph type="title"/>
+          </p:nvPr>
+        </p:nvSpPr>
+        <p:spPr>
+          <a:xfrm>
+            <a:off x="457200" y="274638"/>
+            <a:ext cx="8229600" cy="1143000"/>
+          </a:xfrm>
+          <a:prstGeom prst="rect">
+            <a:avLst/>
+          </a:prstGeom>
+        </p:spPr>
+        <p:txBody>
+          <a:bodyPr anchorCtr="0" anchor="b" bIns="91425" lIns="91425" spcFirstLastPara="1" rIns="91425" wrap="square" tIns="91425">
+            <a:noAutofit/>
+          </a:bodyPr>
+          <a:lstStyle/>
+          <a:p>
+            <a:pPr indent="0" lvl="0" marL="0" rtl="0" algn="l">
+              <a:spcBef>
+                <a:spcPts val="0"/>
+              </a:spcBef>
+              <a:spcAft>
+                <a:spcPts val="0"/>
+              </a:spcAft>
+              <a:buNone/>
+            </a:pPr>
+            <a:r>
+              <a:rPr lang="en"/>
+              <a:t>Feed-Forward Neural Network</a:t>
             </a:r>
             <a:endParaRPr/>
           </a:p>
@@ -6562,7 +6937,7 @@
       </p:sp>
       <p:sp>
         <p:nvSpPr>
-          <p:cNvPr id="35" name="Google Shape;35;g3bdae2bb03d_0_43"/>
+          <p:cNvPr id="137" name="Google Shape;137;g3c89c144ce9_0_143"/>
           <p:cNvSpPr txBox="1"/>
           <p:nvPr>
             <p:ph idx="1" type="body"/>
@@ -6571,15 +6946,11 @@
         <p:spPr>
           <a:xfrm>
             <a:off x="457200" y="1600200"/>
-            <a:ext cx="8229600" cy="3801000"/>
+            <a:ext cx="8229600" cy="4967700"/>
           </a:xfrm>
           <a:prstGeom prst="rect">
             <a:avLst/>
           </a:prstGeom>
-          <a:noFill/>
-          <a:ln>
-            <a:noFill/>
-          </a:ln>
         </p:spPr>
         <p:txBody>
           <a:bodyPr anchorCtr="0" anchor="t" bIns="91425" lIns="91425" spcFirstLastPara="1" rIns="91425" wrap="square" tIns="91425">
@@ -6588,255 +6959,100 @@
           <a:lstStyle/>
           <a:p>
             <a:pPr indent="0" lvl="0" marL="0" rtl="0" algn="l">
-              <a:lnSpc>
-                <a:spcPct val="100000"/>
-              </a:lnSpc>
               <a:spcBef>
                 <a:spcPts val="600"/>
               </a:spcBef>
               <a:spcAft>
                 <a:spcPts val="0"/>
               </a:spcAft>
-              <a:buSzPts val="3000"/>
               <a:buNone/>
             </a:pPr>
             <a:r>
-              <a:rPr lang="en"/>
-              <a:t>Given a </a:t>
-            </a:r>
-            <a:r>
-              <a:rPr b="1" lang="en">
-                <a:solidFill>
-                  <a:srgbClr val="A31415"/>
-                </a:solidFill>
+              <a:t/>
+            </a:r>
+            <a:endParaRPr/>
+          </a:p>
+        </p:txBody>
+      </p:sp>
+    </p:spTree>
+  </p:cSld>
+  <p:clrMapOvr>
+    <a:masterClrMapping/>
+  </p:clrMapOvr>
+</p:sld>
+</file>
+
+<file path=ppt/slides/slide11.xml><?xml version="1.0" encoding="utf-8"?>
+<p:sld xmlns:a="http://schemas.openxmlformats.org/drawingml/2006/main" xmlns:r="http://schemas.openxmlformats.org/officeDocument/2006/relationships" xmlns:mc="http://schemas.openxmlformats.org/markup-compatibility/2006" xmlns:mv="urn:schemas-microsoft-com:mac:vml" xmlns:p="http://schemas.openxmlformats.org/presentationml/2006/main" xmlns:c="http://schemas.openxmlformats.org/drawingml/2006/chart" xmlns:dgm="http://schemas.openxmlformats.org/drawingml/2006/diagram" xmlns:o="urn:schemas-microsoft-com:office:office" xmlns:v="urn:schemas-microsoft-com:vml" xmlns:pvml="urn:schemas-microsoft-com:office:powerpoint" xmlns:com="http://schemas.openxmlformats.org/drawingml/2006/compatibility" xmlns:p14="http://schemas.microsoft.com/office/powerpoint/2010/main" xmlns:p15="http://schemas.microsoft.com/office/powerpoint/2012/main" xmlns:ahyp="http://schemas.microsoft.com/office/drawing/2018/hyperlinkcolor">
+  <p:cSld>
+    <p:spTree>
+      <p:nvGrpSpPr>
+        <p:cNvPr id="141" name="Shape 141"/>
+        <p:cNvGrpSpPr/>
+        <p:nvPr/>
+      </p:nvGrpSpPr>
+      <p:grpSpPr>
+        <a:xfrm>
+          <a:off x="0" y="0"/>
+          <a:ext cx="0" cy="0"/>
+          <a:chOff x="0" y="0"/>
+          <a:chExt cx="0" cy="0"/>
+        </a:xfrm>
+      </p:grpSpPr>
+      <p:sp>
+        <p:nvSpPr>
+          <p:cNvPr id="142" name="Google Shape;142;g3c89c144ce9_0_11"/>
+          <p:cNvSpPr/>
+          <p:nvPr/>
+        </p:nvSpPr>
+        <p:spPr>
+          <a:xfrm>
+            <a:off x="6859425" y="1659825"/>
+            <a:ext cx="1911600" cy="329700"/>
+          </a:xfrm>
+          <a:prstGeom prst="roundRect">
+            <a:avLst>
+              <a:gd fmla="val 16667" name="adj"/>
+            </a:avLst>
+          </a:prstGeom>
+          <a:solidFill>
+            <a:srgbClr val="D9D2E9"/>
+          </a:solidFill>
+          <a:ln cap="flat" cmpd="sng" w="8700">
+            <a:solidFill>
+              <a:schemeClr val="dk2"/>
+            </a:solidFill>
+            <a:prstDash val="solid"/>
+            <a:round/>
+            <a:headEnd len="sm" w="sm" type="none"/>
+            <a:tailEnd len="sm" w="sm" type="none"/>
+          </a:ln>
+        </p:spPr>
+        <p:txBody>
+          <a:bodyPr anchorCtr="0" anchor="ctr" bIns="83450" lIns="83450" spcFirstLastPara="1" rIns="83450" wrap="square" tIns="83450">
+            <a:noAutofit/>
+          </a:bodyPr>
+          <a:lstStyle/>
+          <a:p>
+            <a:pPr indent="0" lvl="0" marL="0" rtl="0" algn="ctr">
+              <a:spcBef>
+                <a:spcPts val="0"/>
+              </a:spcBef>
+              <a:spcAft>
+                <a:spcPts val="0"/>
+              </a:spcAft>
+              <a:buNone/>
+            </a:pPr>
+            <a:r>
+              <a:rPr lang="en" sz="1277">
                 <a:latin typeface="Consolas"/>
                 <a:ea typeface="Consolas"/>
                 <a:cs typeface="Consolas"/>
                 <a:sym typeface="Consolas"/>
               </a:rPr>
-              <a:t>list</a:t>
-            </a:r>
-            <a:r>
-              <a:rPr lang="en"/>
-              <a:t> of </a:t>
-            </a:r>
-            <a:r>
-              <a:rPr b="1" lang="en">
-                <a:solidFill>
-                  <a:srgbClr val="A31415"/>
-                </a:solidFill>
-                <a:latin typeface="Consolas"/>
-                <a:ea typeface="Consolas"/>
-                <a:cs typeface="Consolas"/>
-                <a:sym typeface="Consolas"/>
-              </a:rPr>
-              <a:t>floats</a:t>
-            </a:r>
-            <a:r>
-              <a:rPr lang="en"/>
-              <a:t>, </a:t>
-            </a:r>
-            <a:r>
-              <a:rPr b="1" lang="en">
-                <a:solidFill>
-                  <a:srgbClr val="A31415"/>
-                </a:solidFill>
-                <a:latin typeface="Consolas"/>
-                <a:ea typeface="Consolas"/>
-                <a:cs typeface="Consolas"/>
-                <a:sym typeface="Consolas"/>
-              </a:rPr>
-              <a:t>define</a:t>
-            </a:r>
-            <a:r>
-              <a:rPr lang="en"/>
-              <a:t> a </a:t>
-            </a:r>
-            <a:r>
-              <a:rPr b="1" lang="en">
-                <a:solidFill>
-                  <a:srgbClr val="5AABBC"/>
-                </a:solidFill>
-                <a:latin typeface="Consolas"/>
-                <a:ea typeface="Consolas"/>
-                <a:cs typeface="Consolas"/>
-                <a:sym typeface="Consolas"/>
-              </a:rPr>
-              <a:t>function</a:t>
-            </a:r>
-            <a:r>
-              <a:rPr lang="en"/>
-              <a:t> that will return the </a:t>
-            </a:r>
-            <a:r>
-              <a:rPr b="1" lang="en">
-                <a:solidFill>
-                  <a:srgbClr val="A31415"/>
-                </a:solidFill>
-                <a:latin typeface="Consolas"/>
-                <a:ea typeface="Consolas"/>
-                <a:cs typeface="Consolas"/>
-                <a:sym typeface="Consolas"/>
-              </a:rPr>
-              <a:t>list</a:t>
-            </a:r>
-            <a:r>
-              <a:rPr lang="en"/>
-              <a:t> with every number less than 0 replaced with a 0:</a:t>
-            </a:r>
-            <a:endParaRPr/>
-          </a:p>
-          <a:p>
-            <a:pPr indent="0" lvl="0" marL="0" rtl="0" algn="l">
-              <a:lnSpc>
-                <a:spcPct val="100000"/>
-              </a:lnSpc>
-              <a:spcBef>
-                <a:spcPts val="600"/>
-              </a:spcBef>
-              <a:spcAft>
-                <a:spcPts val="0"/>
-              </a:spcAft>
-              <a:buSzPts val="3000"/>
-              <a:buNone/>
-            </a:pPr>
-            <a:r>
-              <a:t/>
-            </a:r>
-            <a:endParaRPr/>
-          </a:p>
-          <a:p>
-            <a:pPr indent="0" lvl="0" marL="0" rtl="0" algn="l">
-              <a:lnSpc>
-                <a:spcPct val="100000"/>
-              </a:lnSpc>
-              <a:spcBef>
-                <a:spcPts val="600"/>
-              </a:spcBef>
-              <a:spcAft>
-                <a:spcPts val="0"/>
-              </a:spcAft>
-              <a:buSzPts val="3000"/>
-              <a:buNone/>
-            </a:pPr>
-            <a:r>
-              <a:rPr b="1" lang="en">
-                <a:solidFill>
-                  <a:srgbClr val="DCB439"/>
-                </a:solidFill>
-                <a:latin typeface="Consolas"/>
-                <a:ea typeface="Consolas"/>
-                <a:cs typeface="Consolas"/>
-                <a:sym typeface="Consolas"/>
-              </a:rPr>
-              <a:t>print</a:t>
-            </a:r>
-            <a:r>
-              <a:rPr lang="en">
-                <a:latin typeface="Consolas"/>
-                <a:ea typeface="Consolas"/>
-                <a:cs typeface="Consolas"/>
-                <a:sym typeface="Consolas"/>
-              </a:rPr>
-              <a:t>(</a:t>
-            </a:r>
-            <a:r>
-              <a:rPr b="1" lang="en">
-                <a:solidFill>
-                  <a:srgbClr val="5AABBC"/>
-                </a:solidFill>
-                <a:latin typeface="Consolas"/>
-                <a:ea typeface="Consolas"/>
-                <a:cs typeface="Consolas"/>
-                <a:sym typeface="Consolas"/>
-              </a:rPr>
-              <a:t>neg_to_zero</a:t>
-            </a:r>
-            <a:r>
-              <a:rPr lang="en">
-                <a:latin typeface="Consolas"/>
-                <a:ea typeface="Consolas"/>
-                <a:cs typeface="Consolas"/>
-                <a:sym typeface="Consolas"/>
-              </a:rPr>
-              <a:t>([</a:t>
-            </a:r>
-            <a:r>
-              <a:rPr b="1" lang="en" sz="2600">
-                <a:solidFill>
-                  <a:srgbClr val="465510"/>
-                </a:solidFill>
-                <a:latin typeface="Consolas"/>
-                <a:ea typeface="Consolas"/>
-                <a:cs typeface="Consolas"/>
-                <a:sym typeface="Consolas"/>
-              </a:rPr>
-              <a:t>3, 3, -1, -5, 2, 4</a:t>
-            </a:r>
-            <a:r>
-              <a:rPr lang="en">
-                <a:latin typeface="Consolas"/>
-                <a:ea typeface="Consolas"/>
-                <a:cs typeface="Consolas"/>
-                <a:sym typeface="Consolas"/>
-              </a:rPr>
-              <a:t>]))</a:t>
-            </a:r>
-            <a:endParaRPr>
-              <a:latin typeface="Consolas"/>
-              <a:ea typeface="Consolas"/>
-              <a:cs typeface="Consolas"/>
-              <a:sym typeface="Consolas"/>
-            </a:endParaRPr>
-          </a:p>
-          <a:p>
-            <a:pPr indent="0" lvl="0" marL="0" rtl="0" algn="l">
-              <a:lnSpc>
-                <a:spcPct val="100000"/>
-              </a:lnSpc>
-              <a:spcBef>
-                <a:spcPts val="600"/>
-              </a:spcBef>
-              <a:spcAft>
-                <a:spcPts val="0"/>
-              </a:spcAft>
-              <a:buSzPts val="3000"/>
-              <a:buNone/>
-            </a:pPr>
-            <a:r>
-              <a:rPr b="1" lang="en" sz="2600">
-                <a:latin typeface="Consolas"/>
-                <a:ea typeface="Consolas"/>
-                <a:cs typeface="Consolas"/>
-                <a:sym typeface="Consolas"/>
-              </a:rPr>
-              <a:t>&gt; [</a:t>
-            </a:r>
-            <a:r>
-              <a:rPr b="1" lang="en" sz="2600">
-                <a:solidFill>
-                  <a:srgbClr val="465510"/>
-                </a:solidFill>
-                <a:latin typeface="Consolas"/>
-                <a:ea typeface="Consolas"/>
-                <a:cs typeface="Consolas"/>
-                <a:sym typeface="Consolas"/>
-              </a:rPr>
-              <a:t>3, 3, 0, 0, 2, 4</a:t>
-            </a:r>
-            <a:r>
-              <a:rPr b="1" lang="en" sz="2600">
-                <a:latin typeface="Consolas"/>
-                <a:ea typeface="Consolas"/>
-                <a:cs typeface="Consolas"/>
-                <a:sym typeface="Consolas"/>
-              </a:rPr>
-              <a:t>]</a:t>
-            </a:r>
-            <a:endParaRPr b="1" sz="2600">
-              <a:solidFill>
-                <a:srgbClr val="465510"/>
-              </a:solidFill>
+              <a:t>tokenizer.decode(6) </a:t>
+            </a:r>
+            <a:endParaRPr sz="1277">
               <a:latin typeface="Consolas"/>
               <a:ea typeface="Consolas"/>
               <a:cs typeface="Consolas"/>
@@ -6845,6 +7061,4287 @@
           </a:p>
         </p:txBody>
       </p:sp>
+      <p:sp>
+        <p:nvSpPr>
+          <p:cNvPr id="143" name="Google Shape;143;g3c89c144ce9_0_11"/>
+          <p:cNvSpPr/>
+          <p:nvPr/>
+        </p:nvSpPr>
+        <p:spPr>
+          <a:xfrm>
+            <a:off x="3649700" y="1651525"/>
+            <a:ext cx="1911600" cy="329700"/>
+          </a:xfrm>
+          <a:prstGeom prst="roundRect">
+            <a:avLst>
+              <a:gd fmla="val 16667" name="adj"/>
+            </a:avLst>
+          </a:prstGeom>
+          <a:solidFill>
+            <a:srgbClr val="D9D2E9"/>
+          </a:solidFill>
+          <a:ln cap="flat" cmpd="sng" w="8700">
+            <a:solidFill>
+              <a:schemeClr val="dk2"/>
+            </a:solidFill>
+            <a:prstDash val="solid"/>
+            <a:round/>
+            <a:headEnd len="sm" w="sm" type="none"/>
+            <a:tailEnd len="sm" w="sm" type="none"/>
+          </a:ln>
+        </p:spPr>
+        <p:txBody>
+          <a:bodyPr anchorCtr="0" anchor="ctr" bIns="83450" lIns="83450" spcFirstLastPara="1" rIns="83450" wrap="square" tIns="83450">
+            <a:noAutofit/>
+          </a:bodyPr>
+          <a:lstStyle/>
+          <a:p>
+            <a:pPr indent="0" lvl="0" marL="0" rtl="0" algn="ctr">
+              <a:spcBef>
+                <a:spcPts val="0"/>
+              </a:spcBef>
+              <a:spcAft>
+                <a:spcPts val="0"/>
+              </a:spcAft>
+              <a:buNone/>
+            </a:pPr>
+            <a:r>
+              <a:rPr lang="en" sz="1277">
+                <a:latin typeface="Consolas"/>
+                <a:ea typeface="Consolas"/>
+                <a:cs typeface="Consolas"/>
+                <a:sym typeface="Consolas"/>
+              </a:rPr>
+              <a:t>tokenizer.decode(4) </a:t>
+            </a:r>
+            <a:endParaRPr sz="1277">
+              <a:latin typeface="Consolas"/>
+              <a:ea typeface="Consolas"/>
+              <a:cs typeface="Consolas"/>
+              <a:sym typeface="Consolas"/>
+            </a:endParaRPr>
+          </a:p>
+        </p:txBody>
+      </p:sp>
+      <p:sp>
+        <p:nvSpPr>
+          <p:cNvPr id="144" name="Google Shape;144;g3c89c144ce9_0_11"/>
+          <p:cNvSpPr/>
+          <p:nvPr/>
+        </p:nvSpPr>
+        <p:spPr>
+          <a:xfrm>
+            <a:off x="788815" y="2775163"/>
+            <a:ext cx="2460000" cy="1093200"/>
+          </a:xfrm>
+          <a:prstGeom prst="roundRect">
+            <a:avLst>
+              <a:gd fmla="val 16667" name="adj"/>
+            </a:avLst>
+          </a:prstGeom>
+          <a:solidFill>
+            <a:srgbClr val="C3DAEC"/>
+          </a:solidFill>
+          <a:ln cap="flat" cmpd="sng" w="8700">
+            <a:solidFill>
+              <a:schemeClr val="dk2"/>
+            </a:solidFill>
+            <a:prstDash val="solid"/>
+            <a:round/>
+            <a:headEnd len="sm" w="sm" type="none"/>
+            <a:tailEnd len="sm" w="sm" type="none"/>
+          </a:ln>
+        </p:spPr>
+        <p:txBody>
+          <a:bodyPr anchorCtr="0" anchor="ctr" bIns="83450" lIns="83450" spcFirstLastPara="1" rIns="83450" wrap="square" tIns="83450">
+            <a:noAutofit/>
+          </a:bodyPr>
+          <a:lstStyle/>
+          <a:p>
+            <a:pPr indent="0" lvl="0" marL="0" rtl="0" algn="ctr">
+              <a:spcBef>
+                <a:spcPts val="0"/>
+              </a:spcBef>
+              <a:spcAft>
+                <a:spcPts val="0"/>
+              </a:spcAft>
+              <a:buNone/>
+            </a:pPr>
+            <a:r>
+              <a:rPr lang="en" sz="1277"/>
+              <a:t>y</a:t>
+            </a:r>
+            <a:r>
+              <a:rPr baseline="-25000" lang="en" sz="1277"/>
+              <a:t>1</a:t>
+            </a:r>
+            <a:r>
+              <a:rPr lang="en" sz="1277"/>
+              <a:t> = softmax(b</a:t>
+            </a:r>
+            <a:r>
+              <a:rPr baseline="-25000" lang="en" sz="1277"/>
+              <a:t>y</a:t>
+            </a:r>
+            <a:r>
+              <a:rPr lang="en" sz="1277"/>
+              <a:t> + h</a:t>
+            </a:r>
+            <a:r>
+              <a:rPr baseline="-25000" lang="en" sz="1277"/>
+              <a:t>1</a:t>
+            </a:r>
+            <a:r>
+              <a:rPr lang="en" sz="1277"/>
+              <a:t>w</a:t>
+            </a:r>
+            <a:r>
+              <a:rPr baseline="-25000" lang="en" sz="1277"/>
+              <a:t>y</a:t>
+            </a:r>
+            <a:r>
+              <a:rPr lang="en" sz="1277"/>
+              <a:t>)</a:t>
+            </a:r>
+            <a:endParaRPr sz="1277"/>
+          </a:p>
+          <a:p>
+            <a:pPr indent="0" lvl="0" marL="0" rtl="0" algn="ctr">
+              <a:spcBef>
+                <a:spcPts val="0"/>
+              </a:spcBef>
+              <a:spcAft>
+                <a:spcPts val="0"/>
+              </a:spcAft>
+              <a:buNone/>
+            </a:pPr>
+            <a:r>
+              <a:t/>
+            </a:r>
+            <a:endParaRPr sz="1277"/>
+          </a:p>
+          <a:p>
+            <a:pPr indent="0" lvl="0" marL="0" rtl="0" algn="ctr">
+              <a:spcBef>
+                <a:spcPts val="0"/>
+              </a:spcBef>
+              <a:spcAft>
+                <a:spcPts val="0"/>
+              </a:spcAft>
+              <a:buNone/>
+            </a:pPr>
+            <a:r>
+              <a:rPr lang="en" sz="1277"/>
+              <a:t>tanh(</a:t>
+            </a:r>
+            <a:r>
+              <a:rPr lang="en" sz="1277"/>
+              <a:t>h</a:t>
+            </a:r>
+            <a:r>
+              <a:rPr baseline="-25000" lang="en" sz="1277"/>
+              <a:t>0</a:t>
+            </a:r>
+            <a:r>
+              <a:rPr lang="en" sz="1277"/>
+              <a:t>w</a:t>
+            </a:r>
+            <a:r>
+              <a:rPr baseline="-25000" lang="en" sz="1277"/>
+              <a:t>h</a:t>
+            </a:r>
+            <a:r>
+              <a:rPr lang="en" sz="1277"/>
+              <a:t>+ ex</a:t>
+            </a:r>
+            <a:r>
+              <a:rPr baseline="-25000" lang="en" sz="1277"/>
+              <a:t>0</a:t>
+            </a:r>
+            <a:r>
+              <a:rPr lang="en" sz="1277"/>
+              <a:t>w</a:t>
+            </a:r>
+            <a:r>
+              <a:rPr baseline="-25000" lang="en" sz="1277"/>
+              <a:t>x</a:t>
+            </a:r>
+            <a:r>
+              <a:rPr lang="en" sz="1277"/>
+              <a:t> + b</a:t>
+            </a:r>
+            <a:r>
+              <a:rPr baseline="-25000" lang="en" sz="1277"/>
+              <a:t>h</a:t>
+            </a:r>
+            <a:r>
+              <a:rPr lang="en" sz="1277"/>
+              <a:t>) = h</a:t>
+            </a:r>
+            <a:r>
+              <a:rPr baseline="-25000" lang="en" sz="1277"/>
+              <a:t>1</a:t>
+            </a:r>
+            <a:endParaRPr sz="1277"/>
+          </a:p>
+        </p:txBody>
+      </p:sp>
+      <p:sp>
+        <p:nvSpPr>
+          <p:cNvPr id="145" name="Google Shape;145;g3c89c144ce9_0_11"/>
+          <p:cNvSpPr/>
+          <p:nvPr/>
+        </p:nvSpPr>
+        <p:spPr>
+          <a:xfrm>
+            <a:off x="887775" y="2245263"/>
+            <a:ext cx="2262000" cy="266700"/>
+          </a:xfrm>
+          <a:prstGeom prst="roundRect">
+            <a:avLst>
+              <a:gd fmla="val 16667" name="adj"/>
+            </a:avLst>
+          </a:prstGeom>
+          <a:solidFill>
+            <a:srgbClr val="F9C9C5"/>
+          </a:solidFill>
+          <a:ln cap="flat" cmpd="sng" w="19050">
+            <a:solidFill>
+              <a:srgbClr val="E06666"/>
+            </a:solidFill>
+            <a:prstDash val="solid"/>
+            <a:round/>
+            <a:headEnd len="sm" w="sm" type="none"/>
+            <a:tailEnd len="sm" w="sm" type="none"/>
+          </a:ln>
+        </p:spPr>
+        <p:txBody>
+          <a:bodyPr anchorCtr="0" anchor="ctr" bIns="83450" lIns="83450" spcFirstLastPara="1" rIns="83450" wrap="square" tIns="83450">
+            <a:noAutofit/>
+          </a:bodyPr>
+          <a:lstStyle/>
+          <a:p>
+            <a:pPr indent="0" lvl="0" marL="0" rtl="0" algn="ctr">
+              <a:spcBef>
+                <a:spcPts val="1200"/>
+              </a:spcBef>
+              <a:spcAft>
+                <a:spcPts val="1200"/>
+              </a:spcAft>
+              <a:buNone/>
+            </a:pPr>
+            <a:r>
+              <a:rPr lang="en" sz="600">
+                <a:solidFill>
+                  <a:schemeClr val="dk1"/>
+                </a:solidFill>
+              </a:rPr>
+              <a:t>&lt;0.18, 0.14, 0.13, 0.12, 0.10, 0.09, 0.08, 0.07, 0.05, 0.04&gt;</a:t>
+            </a:r>
+            <a:endParaRPr sz="600"/>
+          </a:p>
+        </p:txBody>
+      </p:sp>
+      <p:sp>
+        <p:nvSpPr>
+          <p:cNvPr id="146" name="Google Shape;146;g3c89c144ce9_0_11"/>
+          <p:cNvSpPr/>
+          <p:nvPr/>
+        </p:nvSpPr>
+        <p:spPr>
+          <a:xfrm>
+            <a:off x="935033" y="4115789"/>
+            <a:ext cx="2167500" cy="480300"/>
+          </a:xfrm>
+          <a:prstGeom prst="roundRect">
+            <a:avLst>
+              <a:gd fmla="val 16667" name="adj"/>
+            </a:avLst>
+          </a:prstGeom>
+          <a:solidFill>
+            <a:srgbClr val="FFE599"/>
+          </a:solidFill>
+          <a:ln cap="flat" cmpd="sng" w="8700">
+            <a:solidFill>
+              <a:schemeClr val="dk2"/>
+            </a:solidFill>
+            <a:prstDash val="solid"/>
+            <a:round/>
+            <a:headEnd len="sm" w="sm" type="none"/>
+            <a:tailEnd len="sm" w="sm" type="none"/>
+          </a:ln>
+        </p:spPr>
+        <p:txBody>
+          <a:bodyPr anchorCtr="0" anchor="ctr" bIns="83450" lIns="83450" spcFirstLastPara="1" rIns="83450" wrap="square" tIns="83450">
+            <a:noAutofit/>
+          </a:bodyPr>
+          <a:lstStyle/>
+          <a:p>
+            <a:pPr indent="0" lvl="0" marL="0" rtl="0" algn="ctr">
+              <a:spcBef>
+                <a:spcPts val="0"/>
+              </a:spcBef>
+              <a:spcAft>
+                <a:spcPts val="0"/>
+              </a:spcAft>
+              <a:buNone/>
+            </a:pPr>
+            <a:r>
+              <a:rPr lang="en" sz="1277"/>
+              <a:t>e</a:t>
+            </a:r>
+            <a:r>
+              <a:rPr lang="en" sz="1277"/>
+              <a:t>x</a:t>
+            </a:r>
+            <a:r>
+              <a:rPr baseline="-25000" lang="en" sz="1277"/>
+              <a:t>0 </a:t>
+            </a:r>
+            <a:r>
+              <a:rPr lang="en" sz="1277"/>
+              <a:t>= embeddings[xt</a:t>
+            </a:r>
+            <a:r>
+              <a:rPr baseline="-25000" lang="en" sz="1277"/>
+              <a:t>0</a:t>
+            </a:r>
+            <a:r>
+              <a:rPr lang="en" sz="1277"/>
+              <a:t>] </a:t>
+            </a:r>
+            <a:endParaRPr sz="1277"/>
+          </a:p>
+        </p:txBody>
+      </p:sp>
+      <p:sp>
+        <p:nvSpPr>
+          <p:cNvPr id="147" name="Google Shape;147;g3c89c144ce9_0_11"/>
+          <p:cNvSpPr/>
+          <p:nvPr/>
+        </p:nvSpPr>
+        <p:spPr>
+          <a:xfrm>
+            <a:off x="1165860" y="3019955"/>
+            <a:ext cx="229200" cy="266700"/>
+          </a:xfrm>
+          <a:prstGeom prst="rect">
+            <a:avLst/>
+          </a:prstGeom>
+          <a:noFill/>
+          <a:ln cap="flat" cmpd="sng" w="17375">
+            <a:solidFill>
+              <a:srgbClr val="E06666"/>
+            </a:solidFill>
+            <a:prstDash val="solid"/>
+            <a:round/>
+            <a:headEnd len="sm" w="sm" type="none"/>
+            <a:tailEnd len="sm" w="sm" type="none"/>
+          </a:ln>
+        </p:spPr>
+        <p:txBody>
+          <a:bodyPr anchorCtr="0" anchor="ctr" bIns="83450" lIns="83450" spcFirstLastPara="1" rIns="83450" wrap="square" tIns="83450">
+            <a:noAutofit/>
+          </a:bodyPr>
+          <a:lstStyle/>
+          <a:p>
+            <a:pPr indent="0" lvl="0" marL="0" rtl="0" algn="ctr">
+              <a:spcBef>
+                <a:spcPts val="0"/>
+              </a:spcBef>
+              <a:spcAft>
+                <a:spcPts val="0"/>
+              </a:spcAft>
+              <a:buNone/>
+            </a:pPr>
+            <a:r>
+              <a:t/>
+            </a:r>
+            <a:endParaRPr sz="1277"/>
+          </a:p>
+        </p:txBody>
+      </p:sp>
+      <p:cxnSp>
+        <p:nvCxnSpPr>
+          <p:cNvPr id="148" name="Google Shape;148;g3c89c144ce9_0_11"/>
+          <p:cNvCxnSpPr>
+            <a:stCxn id="147" idx="0"/>
+            <a:endCxn id="145" idx="2"/>
+          </p:cNvCxnSpPr>
+          <p:nvPr/>
+        </p:nvCxnSpPr>
+        <p:spPr>
+          <a:xfrm rot="-5400000">
+            <a:off x="1395660" y="2396855"/>
+            <a:ext cx="507900" cy="738300"/>
+          </a:xfrm>
+          <a:prstGeom prst="curvedConnector3">
+            <a:avLst>
+              <a:gd fmla="val 50009" name="adj1"/>
+            </a:avLst>
+          </a:prstGeom>
+          <a:noFill/>
+          <a:ln cap="flat" cmpd="sng" w="17375">
+            <a:solidFill>
+              <a:srgbClr val="E06666"/>
+            </a:solidFill>
+            <a:prstDash val="solid"/>
+            <a:round/>
+            <a:headEnd len="med" w="med" type="none"/>
+            <a:tailEnd len="med" w="med" type="triangle"/>
+          </a:ln>
+        </p:spPr>
+      </p:cxnSp>
+      <p:sp>
+        <p:nvSpPr>
+          <p:cNvPr id="149" name="Google Shape;149;g3c89c144ce9_0_11"/>
+          <p:cNvSpPr/>
+          <p:nvPr/>
+        </p:nvSpPr>
+        <p:spPr>
+          <a:xfrm>
+            <a:off x="2811763" y="3382863"/>
+            <a:ext cx="189900" cy="266700"/>
+          </a:xfrm>
+          <a:prstGeom prst="rect">
+            <a:avLst/>
+          </a:prstGeom>
+          <a:noFill/>
+          <a:ln cap="flat" cmpd="sng" w="17375">
+            <a:solidFill>
+              <a:srgbClr val="6AA84F"/>
+            </a:solidFill>
+            <a:prstDash val="solid"/>
+            <a:round/>
+            <a:headEnd len="sm" w="sm" type="none"/>
+            <a:tailEnd len="sm" w="sm" type="none"/>
+          </a:ln>
+        </p:spPr>
+        <p:txBody>
+          <a:bodyPr anchorCtr="0" anchor="ctr" bIns="83450" lIns="83450" spcFirstLastPara="1" rIns="83450" wrap="square" tIns="83450">
+            <a:noAutofit/>
+          </a:bodyPr>
+          <a:lstStyle/>
+          <a:p>
+            <a:pPr indent="0" lvl="0" marL="0" rtl="0" algn="ctr">
+              <a:spcBef>
+                <a:spcPts val="0"/>
+              </a:spcBef>
+              <a:spcAft>
+                <a:spcPts val="0"/>
+              </a:spcAft>
+              <a:buNone/>
+            </a:pPr>
+            <a:r>
+              <a:t/>
+            </a:r>
+            <a:endParaRPr sz="1277"/>
+          </a:p>
+        </p:txBody>
+      </p:sp>
+      <p:sp>
+        <p:nvSpPr>
+          <p:cNvPr id="150" name="Google Shape;150;g3c89c144ce9_0_11"/>
+          <p:cNvSpPr/>
+          <p:nvPr/>
+        </p:nvSpPr>
+        <p:spPr>
+          <a:xfrm>
+            <a:off x="2442110" y="3019955"/>
+            <a:ext cx="174900" cy="266700"/>
+          </a:xfrm>
+          <a:prstGeom prst="rect">
+            <a:avLst/>
+          </a:prstGeom>
+          <a:noFill/>
+          <a:ln cap="flat" cmpd="sng" w="17375">
+            <a:solidFill>
+              <a:srgbClr val="6AA84F"/>
+            </a:solidFill>
+            <a:prstDash val="solid"/>
+            <a:round/>
+            <a:headEnd len="sm" w="sm" type="none"/>
+            <a:tailEnd len="sm" w="sm" type="none"/>
+          </a:ln>
+        </p:spPr>
+        <p:txBody>
+          <a:bodyPr anchorCtr="0" anchor="ctr" bIns="83450" lIns="83450" spcFirstLastPara="1" rIns="83450" wrap="square" tIns="83450">
+            <a:noAutofit/>
+          </a:bodyPr>
+          <a:lstStyle/>
+          <a:p>
+            <a:pPr indent="0" lvl="0" marL="0" rtl="0" algn="ctr">
+              <a:spcBef>
+                <a:spcPts val="0"/>
+              </a:spcBef>
+              <a:spcAft>
+                <a:spcPts val="0"/>
+              </a:spcAft>
+              <a:buNone/>
+            </a:pPr>
+            <a:r>
+              <a:t/>
+            </a:r>
+            <a:endParaRPr sz="1277"/>
+          </a:p>
+        </p:txBody>
+      </p:sp>
+      <p:cxnSp>
+        <p:nvCxnSpPr>
+          <p:cNvPr id="151" name="Google Shape;151;g3c89c144ce9_0_11"/>
+          <p:cNvCxnSpPr>
+            <a:stCxn id="149" idx="0"/>
+            <a:endCxn id="150" idx="2"/>
+          </p:cNvCxnSpPr>
+          <p:nvPr/>
+        </p:nvCxnSpPr>
+        <p:spPr>
+          <a:xfrm flipH="1" rot="5400000">
+            <a:off x="2670013" y="3146163"/>
+            <a:ext cx="96300" cy="377100"/>
+          </a:xfrm>
+          <a:prstGeom prst="curvedConnector3">
+            <a:avLst>
+              <a:gd fmla="val 49953" name="adj1"/>
+            </a:avLst>
+          </a:prstGeom>
+          <a:noFill/>
+          <a:ln cap="flat" cmpd="sng" w="17375">
+            <a:solidFill>
+              <a:srgbClr val="6AA84F"/>
+            </a:solidFill>
+            <a:prstDash val="solid"/>
+            <a:round/>
+            <a:headEnd len="med" w="med" type="none"/>
+            <a:tailEnd len="med" w="med" type="triangle"/>
+          </a:ln>
+        </p:spPr>
+      </p:cxnSp>
+      <p:sp>
+        <p:nvSpPr>
+          <p:cNvPr id="152" name="Google Shape;152;g3c89c144ce9_0_11"/>
+          <p:cNvSpPr/>
+          <p:nvPr/>
+        </p:nvSpPr>
+        <p:spPr>
+          <a:xfrm>
+            <a:off x="98775" y="3058015"/>
+            <a:ext cx="564300" cy="564300"/>
+          </a:xfrm>
+          <a:prstGeom prst="roundRect">
+            <a:avLst>
+              <a:gd fmla="val 16667" name="adj"/>
+            </a:avLst>
+          </a:prstGeom>
+          <a:solidFill>
+            <a:srgbClr val="C9E9C7"/>
+          </a:solidFill>
+          <a:ln cap="flat" cmpd="sng" w="19050">
+            <a:solidFill>
+              <a:srgbClr val="6AA84F"/>
+            </a:solidFill>
+            <a:prstDash val="solid"/>
+            <a:round/>
+            <a:headEnd len="sm" w="sm" type="none"/>
+            <a:tailEnd len="sm" w="sm" type="none"/>
+          </a:ln>
+        </p:spPr>
+        <p:txBody>
+          <a:bodyPr anchorCtr="0" anchor="ctr" bIns="83450" lIns="83450" spcFirstLastPara="1" rIns="83450" wrap="square" tIns="83450">
+            <a:noAutofit/>
+          </a:bodyPr>
+          <a:lstStyle/>
+          <a:p>
+            <a:pPr indent="0" lvl="0" marL="0" rtl="0" algn="ctr">
+              <a:spcBef>
+                <a:spcPts val="0"/>
+              </a:spcBef>
+              <a:spcAft>
+                <a:spcPts val="0"/>
+              </a:spcAft>
+              <a:buNone/>
+            </a:pPr>
+            <a:r>
+              <a:rPr lang="en" sz="2190"/>
+              <a:t>h</a:t>
+            </a:r>
+            <a:r>
+              <a:rPr baseline="-25000" lang="en" sz="2190"/>
+              <a:t>0</a:t>
+            </a:r>
+            <a:endParaRPr baseline="-25000" sz="2190"/>
+          </a:p>
+        </p:txBody>
+      </p:sp>
+      <p:sp>
+        <p:nvSpPr>
+          <p:cNvPr id="153" name="Google Shape;153;g3c89c144ce9_0_11"/>
+          <p:cNvSpPr/>
+          <p:nvPr/>
+        </p:nvSpPr>
+        <p:spPr>
+          <a:xfrm>
+            <a:off x="1385977" y="3393725"/>
+            <a:ext cx="189900" cy="266700"/>
+          </a:xfrm>
+          <a:prstGeom prst="rect">
+            <a:avLst/>
+          </a:prstGeom>
+          <a:noFill/>
+          <a:ln cap="flat" cmpd="sng" w="17375">
+            <a:solidFill>
+              <a:srgbClr val="6AA84F"/>
+            </a:solidFill>
+            <a:prstDash val="solid"/>
+            <a:round/>
+            <a:headEnd len="sm" w="sm" type="none"/>
+            <a:tailEnd len="sm" w="sm" type="none"/>
+          </a:ln>
+        </p:spPr>
+        <p:txBody>
+          <a:bodyPr anchorCtr="0" anchor="ctr" bIns="83450" lIns="83450" spcFirstLastPara="1" rIns="83450" wrap="square" tIns="83450">
+            <a:noAutofit/>
+          </a:bodyPr>
+          <a:lstStyle/>
+          <a:p>
+            <a:pPr indent="0" lvl="0" marL="0" rtl="0" algn="ctr">
+              <a:spcBef>
+                <a:spcPts val="0"/>
+              </a:spcBef>
+              <a:spcAft>
+                <a:spcPts val="0"/>
+              </a:spcAft>
+              <a:buNone/>
+            </a:pPr>
+            <a:r>
+              <a:t/>
+            </a:r>
+            <a:endParaRPr sz="1277"/>
+          </a:p>
+        </p:txBody>
+      </p:sp>
+      <p:cxnSp>
+        <p:nvCxnSpPr>
+          <p:cNvPr id="154" name="Google Shape;154;g3c89c144ce9_0_11"/>
+          <p:cNvCxnSpPr>
+            <a:stCxn id="152" idx="3"/>
+            <a:endCxn id="153" idx="2"/>
+          </p:cNvCxnSpPr>
+          <p:nvPr/>
+        </p:nvCxnSpPr>
+        <p:spPr>
+          <a:xfrm>
+            <a:off x="663075" y="3340165"/>
+            <a:ext cx="817800" cy="320400"/>
+          </a:xfrm>
+          <a:prstGeom prst="curvedConnector4">
+            <a:avLst>
+              <a:gd fmla="val 44198" name="adj1"/>
+              <a:gd fmla="val 174277" name="adj2"/>
+            </a:avLst>
+          </a:prstGeom>
+          <a:noFill/>
+          <a:ln cap="flat" cmpd="sng" w="17375">
+            <a:solidFill>
+              <a:srgbClr val="6AA84F"/>
+            </a:solidFill>
+            <a:prstDash val="solid"/>
+            <a:round/>
+            <a:headEnd len="med" w="med" type="none"/>
+            <a:tailEnd len="med" w="med" type="triangle"/>
+          </a:ln>
+        </p:spPr>
+      </p:cxnSp>
+      <p:sp>
+        <p:nvSpPr>
+          <p:cNvPr id="155" name="Google Shape;155;g3c89c144ce9_0_11"/>
+          <p:cNvSpPr/>
+          <p:nvPr/>
+        </p:nvSpPr>
+        <p:spPr>
+          <a:xfrm>
+            <a:off x="1191039" y="4237568"/>
+            <a:ext cx="325500" cy="266700"/>
+          </a:xfrm>
+          <a:prstGeom prst="rect">
+            <a:avLst/>
+          </a:prstGeom>
+          <a:noFill/>
+          <a:ln cap="flat" cmpd="sng" w="17375">
+            <a:solidFill>
+              <a:srgbClr val="F1C232"/>
+            </a:solidFill>
+            <a:prstDash val="solid"/>
+            <a:round/>
+            <a:headEnd len="sm" w="sm" type="none"/>
+            <a:tailEnd len="sm" w="sm" type="none"/>
+          </a:ln>
+        </p:spPr>
+        <p:txBody>
+          <a:bodyPr anchorCtr="0" anchor="ctr" bIns="83450" lIns="83450" spcFirstLastPara="1" rIns="83450" wrap="square" tIns="83450">
+            <a:noAutofit/>
+          </a:bodyPr>
+          <a:lstStyle/>
+          <a:p>
+            <a:pPr indent="0" lvl="0" marL="0" rtl="0" algn="ctr">
+              <a:spcBef>
+                <a:spcPts val="0"/>
+              </a:spcBef>
+              <a:spcAft>
+                <a:spcPts val="0"/>
+              </a:spcAft>
+              <a:buNone/>
+            </a:pPr>
+            <a:r>
+              <a:t/>
+            </a:r>
+            <a:endParaRPr sz="1277"/>
+          </a:p>
+        </p:txBody>
+      </p:sp>
+      <p:sp>
+        <p:nvSpPr>
+          <p:cNvPr id="156" name="Google Shape;156;g3c89c144ce9_0_11"/>
+          <p:cNvSpPr/>
+          <p:nvPr/>
+        </p:nvSpPr>
+        <p:spPr>
+          <a:xfrm>
+            <a:off x="1827606" y="3393713"/>
+            <a:ext cx="325500" cy="266700"/>
+          </a:xfrm>
+          <a:prstGeom prst="rect">
+            <a:avLst/>
+          </a:prstGeom>
+          <a:noFill/>
+          <a:ln cap="flat" cmpd="sng" w="17375">
+            <a:solidFill>
+              <a:srgbClr val="F1C232"/>
+            </a:solidFill>
+            <a:prstDash val="solid"/>
+            <a:round/>
+            <a:headEnd len="sm" w="sm" type="none"/>
+            <a:tailEnd len="sm" w="sm" type="none"/>
+          </a:ln>
+        </p:spPr>
+        <p:txBody>
+          <a:bodyPr anchorCtr="0" anchor="ctr" bIns="83450" lIns="83450" spcFirstLastPara="1" rIns="83450" wrap="square" tIns="83450">
+            <a:noAutofit/>
+          </a:bodyPr>
+          <a:lstStyle/>
+          <a:p>
+            <a:pPr indent="0" lvl="0" marL="0" rtl="0" algn="ctr">
+              <a:spcBef>
+                <a:spcPts val="0"/>
+              </a:spcBef>
+              <a:spcAft>
+                <a:spcPts val="0"/>
+              </a:spcAft>
+              <a:buNone/>
+            </a:pPr>
+            <a:r>
+              <a:t/>
+            </a:r>
+            <a:endParaRPr sz="1277"/>
+          </a:p>
+        </p:txBody>
+      </p:sp>
+      <p:cxnSp>
+        <p:nvCxnSpPr>
+          <p:cNvPr id="157" name="Google Shape;157;g3c89c144ce9_0_11"/>
+          <p:cNvCxnSpPr>
+            <a:endCxn id="156" idx="2"/>
+          </p:cNvCxnSpPr>
+          <p:nvPr/>
+        </p:nvCxnSpPr>
+        <p:spPr>
+          <a:xfrm flipH="1" rot="10800000">
+            <a:off x="1354956" y="3660413"/>
+            <a:ext cx="635400" cy="577200"/>
+          </a:xfrm>
+          <a:prstGeom prst="curvedConnector2">
+            <a:avLst/>
+          </a:prstGeom>
+          <a:noFill/>
+          <a:ln cap="flat" cmpd="sng" w="17375">
+            <a:solidFill>
+              <a:srgbClr val="F1C232"/>
+            </a:solidFill>
+            <a:prstDash val="solid"/>
+            <a:round/>
+            <a:headEnd len="med" w="med" type="none"/>
+            <a:tailEnd len="med" w="med" type="triangle"/>
+          </a:ln>
+        </p:spPr>
+      </p:cxnSp>
+      <p:sp>
+        <p:nvSpPr>
+          <p:cNvPr id="158" name="Google Shape;158;g3c89c144ce9_0_11"/>
+          <p:cNvSpPr/>
+          <p:nvPr/>
+        </p:nvSpPr>
+        <p:spPr>
+          <a:xfrm>
+            <a:off x="3509409" y="2775163"/>
+            <a:ext cx="2460000" cy="1093200"/>
+          </a:xfrm>
+          <a:prstGeom prst="roundRect">
+            <a:avLst>
+              <a:gd fmla="val 16667" name="adj"/>
+            </a:avLst>
+          </a:prstGeom>
+          <a:solidFill>
+            <a:srgbClr val="C3DAEC"/>
+          </a:solidFill>
+          <a:ln cap="flat" cmpd="sng" w="8700">
+            <a:solidFill>
+              <a:schemeClr val="dk2"/>
+            </a:solidFill>
+            <a:prstDash val="solid"/>
+            <a:round/>
+            <a:headEnd len="sm" w="sm" type="none"/>
+            <a:tailEnd len="sm" w="sm" type="none"/>
+          </a:ln>
+        </p:spPr>
+        <p:txBody>
+          <a:bodyPr anchorCtr="0" anchor="ctr" bIns="83450" lIns="83450" spcFirstLastPara="1" rIns="83450" wrap="square" tIns="83450">
+            <a:noAutofit/>
+          </a:bodyPr>
+          <a:lstStyle/>
+          <a:p>
+            <a:pPr indent="0" lvl="0" marL="0" rtl="0" algn="ctr">
+              <a:spcBef>
+                <a:spcPts val="0"/>
+              </a:spcBef>
+              <a:spcAft>
+                <a:spcPts val="0"/>
+              </a:spcAft>
+              <a:buNone/>
+            </a:pPr>
+            <a:r>
+              <a:rPr lang="en" sz="1277"/>
+              <a:t>y</a:t>
+            </a:r>
+            <a:r>
+              <a:rPr baseline="-25000" lang="en" sz="1277"/>
+              <a:t>2</a:t>
+            </a:r>
+            <a:r>
+              <a:rPr lang="en" sz="1277"/>
+              <a:t> = softmax(b</a:t>
+            </a:r>
+            <a:r>
+              <a:rPr baseline="-25000" lang="en" sz="1277"/>
+              <a:t>y</a:t>
+            </a:r>
+            <a:r>
+              <a:rPr lang="en" sz="1277"/>
+              <a:t> + h</a:t>
+            </a:r>
+            <a:r>
+              <a:rPr baseline="-25000" lang="en" sz="1277"/>
+              <a:t>2</a:t>
+            </a:r>
+            <a:r>
+              <a:rPr lang="en" sz="1277"/>
+              <a:t>w</a:t>
+            </a:r>
+            <a:r>
+              <a:rPr baseline="-25000" lang="en" sz="1277"/>
+              <a:t>y</a:t>
+            </a:r>
+            <a:r>
+              <a:rPr lang="en" sz="1277"/>
+              <a:t>)</a:t>
+            </a:r>
+            <a:endParaRPr sz="1277"/>
+          </a:p>
+          <a:p>
+            <a:pPr indent="0" lvl="0" marL="0" rtl="0" algn="ctr">
+              <a:spcBef>
+                <a:spcPts val="0"/>
+              </a:spcBef>
+              <a:spcAft>
+                <a:spcPts val="0"/>
+              </a:spcAft>
+              <a:buNone/>
+            </a:pPr>
+            <a:r>
+              <a:t/>
+            </a:r>
+            <a:endParaRPr sz="1277"/>
+          </a:p>
+          <a:p>
+            <a:pPr indent="0" lvl="0" marL="0" rtl="0" algn="ctr">
+              <a:spcBef>
+                <a:spcPts val="0"/>
+              </a:spcBef>
+              <a:spcAft>
+                <a:spcPts val="0"/>
+              </a:spcAft>
+              <a:buNone/>
+            </a:pPr>
+            <a:r>
+              <a:rPr lang="en" sz="1277"/>
+              <a:t>tanh(h</a:t>
+            </a:r>
+            <a:r>
+              <a:rPr baseline="-25000" lang="en" sz="1277"/>
+              <a:t>1</a:t>
+            </a:r>
+            <a:r>
+              <a:rPr lang="en" sz="1277"/>
+              <a:t>w</a:t>
+            </a:r>
+            <a:r>
+              <a:rPr baseline="-25000" lang="en" sz="1277"/>
+              <a:t>h</a:t>
+            </a:r>
+            <a:r>
+              <a:rPr lang="en" sz="1277"/>
+              <a:t>+ ex</a:t>
+            </a:r>
+            <a:r>
+              <a:rPr baseline="-25000" lang="en" sz="1277"/>
+              <a:t>1</a:t>
+            </a:r>
+            <a:r>
+              <a:rPr lang="en" sz="1277"/>
+              <a:t>w</a:t>
+            </a:r>
+            <a:r>
+              <a:rPr baseline="-25000" lang="en" sz="1277"/>
+              <a:t>x</a:t>
+            </a:r>
+            <a:r>
+              <a:rPr lang="en" sz="1277"/>
+              <a:t> + b</a:t>
+            </a:r>
+            <a:r>
+              <a:rPr baseline="-25000" lang="en" sz="1277"/>
+              <a:t>h</a:t>
+            </a:r>
+            <a:r>
+              <a:rPr lang="en" sz="1277"/>
+              <a:t>) = h</a:t>
+            </a:r>
+            <a:r>
+              <a:rPr baseline="-25000" lang="en" sz="1277"/>
+              <a:t>2</a:t>
+            </a:r>
+            <a:endParaRPr sz="1277"/>
+          </a:p>
+        </p:txBody>
+      </p:sp>
+      <p:sp>
+        <p:nvSpPr>
+          <p:cNvPr id="159" name="Google Shape;159;g3c89c144ce9_0_11"/>
+          <p:cNvSpPr/>
+          <p:nvPr/>
+        </p:nvSpPr>
+        <p:spPr>
+          <a:xfrm>
+            <a:off x="3655627" y="4115789"/>
+            <a:ext cx="2167500" cy="480300"/>
+          </a:xfrm>
+          <a:prstGeom prst="roundRect">
+            <a:avLst>
+              <a:gd fmla="val 16667" name="adj"/>
+            </a:avLst>
+          </a:prstGeom>
+          <a:solidFill>
+            <a:srgbClr val="FFE599"/>
+          </a:solidFill>
+          <a:ln cap="flat" cmpd="sng" w="8700">
+            <a:solidFill>
+              <a:schemeClr val="dk2"/>
+            </a:solidFill>
+            <a:prstDash val="solid"/>
+            <a:round/>
+            <a:headEnd len="sm" w="sm" type="none"/>
+            <a:tailEnd len="sm" w="sm" type="none"/>
+          </a:ln>
+        </p:spPr>
+        <p:txBody>
+          <a:bodyPr anchorCtr="0" anchor="ctr" bIns="83450" lIns="83450" spcFirstLastPara="1" rIns="83450" wrap="square" tIns="83450">
+            <a:noAutofit/>
+          </a:bodyPr>
+          <a:lstStyle/>
+          <a:p>
+            <a:pPr indent="0" lvl="0" marL="0" rtl="0" algn="ctr">
+              <a:spcBef>
+                <a:spcPts val="0"/>
+              </a:spcBef>
+              <a:spcAft>
+                <a:spcPts val="0"/>
+              </a:spcAft>
+              <a:buNone/>
+            </a:pPr>
+            <a:r>
+              <a:rPr lang="en" sz="1277"/>
+              <a:t>ex</a:t>
+            </a:r>
+            <a:r>
+              <a:rPr baseline="-25000" lang="en" sz="1277"/>
+              <a:t>1</a:t>
+            </a:r>
+            <a:r>
+              <a:rPr baseline="-25000" lang="en" sz="1277"/>
+              <a:t> </a:t>
+            </a:r>
+            <a:r>
+              <a:rPr lang="en" sz="1277"/>
+              <a:t>= embeddings[xt</a:t>
+            </a:r>
+            <a:r>
+              <a:rPr baseline="-25000" lang="en" sz="1277"/>
+              <a:t>1</a:t>
+            </a:r>
+            <a:r>
+              <a:rPr lang="en" sz="1277"/>
+              <a:t>] </a:t>
+            </a:r>
+            <a:endParaRPr sz="1277"/>
+          </a:p>
+        </p:txBody>
+      </p:sp>
+      <p:sp>
+        <p:nvSpPr>
+          <p:cNvPr id="160" name="Google Shape;160;g3c89c144ce9_0_11"/>
+          <p:cNvSpPr/>
+          <p:nvPr/>
+        </p:nvSpPr>
+        <p:spPr>
+          <a:xfrm>
+            <a:off x="3886454" y="3019955"/>
+            <a:ext cx="229200" cy="266700"/>
+          </a:xfrm>
+          <a:prstGeom prst="rect">
+            <a:avLst/>
+          </a:prstGeom>
+          <a:noFill/>
+          <a:ln cap="flat" cmpd="sng" w="17375">
+            <a:solidFill>
+              <a:srgbClr val="E06666"/>
+            </a:solidFill>
+            <a:prstDash val="solid"/>
+            <a:round/>
+            <a:headEnd len="sm" w="sm" type="none"/>
+            <a:tailEnd len="sm" w="sm" type="none"/>
+          </a:ln>
+        </p:spPr>
+        <p:txBody>
+          <a:bodyPr anchorCtr="0" anchor="ctr" bIns="83450" lIns="83450" spcFirstLastPara="1" rIns="83450" wrap="square" tIns="83450">
+            <a:noAutofit/>
+          </a:bodyPr>
+          <a:lstStyle/>
+          <a:p>
+            <a:pPr indent="0" lvl="0" marL="0" rtl="0" algn="ctr">
+              <a:spcBef>
+                <a:spcPts val="0"/>
+              </a:spcBef>
+              <a:spcAft>
+                <a:spcPts val="0"/>
+              </a:spcAft>
+              <a:buNone/>
+            </a:pPr>
+            <a:r>
+              <a:t/>
+            </a:r>
+            <a:endParaRPr sz="1277"/>
+          </a:p>
+        </p:txBody>
+      </p:sp>
+      <p:cxnSp>
+        <p:nvCxnSpPr>
+          <p:cNvPr id="161" name="Google Shape;161;g3c89c144ce9_0_11"/>
+          <p:cNvCxnSpPr>
+            <a:stCxn id="160" idx="0"/>
+            <a:endCxn id="162" idx="2"/>
+          </p:cNvCxnSpPr>
+          <p:nvPr/>
+        </p:nvCxnSpPr>
+        <p:spPr>
+          <a:xfrm rot="-5400000">
+            <a:off x="4106654" y="2406455"/>
+            <a:ext cx="507900" cy="719100"/>
+          </a:xfrm>
+          <a:prstGeom prst="curvedConnector3">
+            <a:avLst>
+              <a:gd fmla="val 50008" name="adj1"/>
+            </a:avLst>
+          </a:prstGeom>
+          <a:noFill/>
+          <a:ln cap="flat" cmpd="sng" w="17375">
+            <a:solidFill>
+              <a:srgbClr val="E06666"/>
+            </a:solidFill>
+            <a:prstDash val="solid"/>
+            <a:round/>
+            <a:headEnd len="med" w="med" type="none"/>
+            <a:tailEnd len="med" w="med" type="triangle"/>
+          </a:ln>
+        </p:spPr>
+      </p:cxnSp>
+      <p:sp>
+        <p:nvSpPr>
+          <p:cNvPr id="163" name="Google Shape;163;g3c89c144ce9_0_11"/>
+          <p:cNvSpPr/>
+          <p:nvPr/>
+        </p:nvSpPr>
+        <p:spPr>
+          <a:xfrm>
+            <a:off x="5547557" y="3393713"/>
+            <a:ext cx="189900" cy="266700"/>
+          </a:xfrm>
+          <a:prstGeom prst="rect">
+            <a:avLst/>
+          </a:prstGeom>
+          <a:noFill/>
+          <a:ln cap="flat" cmpd="sng" w="17375">
+            <a:solidFill>
+              <a:srgbClr val="6AA84F"/>
+            </a:solidFill>
+            <a:prstDash val="solid"/>
+            <a:round/>
+            <a:headEnd len="sm" w="sm" type="none"/>
+            <a:tailEnd len="sm" w="sm" type="none"/>
+          </a:ln>
+        </p:spPr>
+        <p:txBody>
+          <a:bodyPr anchorCtr="0" anchor="ctr" bIns="83450" lIns="83450" spcFirstLastPara="1" rIns="83450" wrap="square" tIns="83450">
+            <a:noAutofit/>
+          </a:bodyPr>
+          <a:lstStyle/>
+          <a:p>
+            <a:pPr indent="0" lvl="0" marL="0" rtl="0" algn="ctr">
+              <a:spcBef>
+                <a:spcPts val="0"/>
+              </a:spcBef>
+              <a:spcAft>
+                <a:spcPts val="0"/>
+              </a:spcAft>
+              <a:buNone/>
+            </a:pPr>
+            <a:r>
+              <a:t/>
+            </a:r>
+            <a:endParaRPr sz="1277"/>
+          </a:p>
+        </p:txBody>
+      </p:sp>
+      <p:sp>
+        <p:nvSpPr>
+          <p:cNvPr id="164" name="Google Shape;164;g3c89c144ce9_0_11"/>
+          <p:cNvSpPr/>
+          <p:nvPr/>
+        </p:nvSpPr>
+        <p:spPr>
+          <a:xfrm>
+            <a:off x="5170447" y="3019955"/>
+            <a:ext cx="174900" cy="266700"/>
+          </a:xfrm>
+          <a:prstGeom prst="rect">
+            <a:avLst/>
+          </a:prstGeom>
+          <a:noFill/>
+          <a:ln cap="flat" cmpd="sng" w="17375">
+            <a:solidFill>
+              <a:srgbClr val="6AA84F"/>
+            </a:solidFill>
+            <a:prstDash val="solid"/>
+            <a:round/>
+            <a:headEnd len="sm" w="sm" type="none"/>
+            <a:tailEnd len="sm" w="sm" type="none"/>
+          </a:ln>
+        </p:spPr>
+        <p:txBody>
+          <a:bodyPr anchorCtr="0" anchor="ctr" bIns="83450" lIns="83450" spcFirstLastPara="1" rIns="83450" wrap="square" tIns="83450">
+            <a:noAutofit/>
+          </a:bodyPr>
+          <a:lstStyle/>
+          <a:p>
+            <a:pPr indent="0" lvl="0" marL="0" rtl="0" algn="ctr">
+              <a:spcBef>
+                <a:spcPts val="0"/>
+              </a:spcBef>
+              <a:spcAft>
+                <a:spcPts val="0"/>
+              </a:spcAft>
+              <a:buNone/>
+            </a:pPr>
+            <a:r>
+              <a:t/>
+            </a:r>
+            <a:endParaRPr sz="1277"/>
+          </a:p>
+        </p:txBody>
+      </p:sp>
+      <p:cxnSp>
+        <p:nvCxnSpPr>
+          <p:cNvPr id="165" name="Google Shape;165;g3c89c144ce9_0_11"/>
+          <p:cNvCxnSpPr>
+            <a:stCxn id="163" idx="0"/>
+            <a:endCxn id="164" idx="2"/>
+          </p:cNvCxnSpPr>
+          <p:nvPr/>
+        </p:nvCxnSpPr>
+        <p:spPr>
+          <a:xfrm flipH="1" rot="5400000">
+            <a:off x="5396657" y="3147863"/>
+            <a:ext cx="107100" cy="384600"/>
+          </a:xfrm>
+          <a:prstGeom prst="curvedConnector3">
+            <a:avLst>
+              <a:gd fmla="val 49981" name="adj1"/>
+            </a:avLst>
+          </a:prstGeom>
+          <a:noFill/>
+          <a:ln cap="flat" cmpd="sng" w="8700">
+            <a:solidFill>
+              <a:srgbClr val="6AA84F"/>
+            </a:solidFill>
+            <a:prstDash val="solid"/>
+            <a:round/>
+            <a:headEnd len="med" w="med" type="none"/>
+            <a:tailEnd len="med" w="med" type="triangle"/>
+          </a:ln>
+        </p:spPr>
+      </p:cxnSp>
+      <p:sp>
+        <p:nvSpPr>
+          <p:cNvPr id="166" name="Google Shape;166;g3c89c144ce9_0_11"/>
+          <p:cNvSpPr/>
+          <p:nvPr/>
+        </p:nvSpPr>
+        <p:spPr>
+          <a:xfrm>
+            <a:off x="4115656" y="3393713"/>
+            <a:ext cx="174900" cy="266700"/>
+          </a:xfrm>
+          <a:prstGeom prst="rect">
+            <a:avLst/>
+          </a:prstGeom>
+          <a:noFill/>
+          <a:ln cap="flat" cmpd="sng" w="17375">
+            <a:solidFill>
+              <a:srgbClr val="6AA84F"/>
+            </a:solidFill>
+            <a:prstDash val="solid"/>
+            <a:round/>
+            <a:headEnd len="sm" w="sm" type="none"/>
+            <a:tailEnd len="sm" w="sm" type="none"/>
+          </a:ln>
+        </p:spPr>
+        <p:txBody>
+          <a:bodyPr anchorCtr="0" anchor="ctr" bIns="83450" lIns="83450" spcFirstLastPara="1" rIns="83450" wrap="square" tIns="83450">
+            <a:noAutofit/>
+          </a:bodyPr>
+          <a:lstStyle/>
+          <a:p>
+            <a:pPr indent="0" lvl="0" marL="0" rtl="0" algn="ctr">
+              <a:spcBef>
+                <a:spcPts val="0"/>
+              </a:spcBef>
+              <a:spcAft>
+                <a:spcPts val="0"/>
+              </a:spcAft>
+              <a:buNone/>
+            </a:pPr>
+            <a:r>
+              <a:t/>
+            </a:r>
+            <a:endParaRPr sz="1277"/>
+          </a:p>
+        </p:txBody>
+      </p:sp>
+      <p:sp>
+        <p:nvSpPr>
+          <p:cNvPr id="167" name="Google Shape;167;g3c89c144ce9_0_11"/>
+          <p:cNvSpPr/>
+          <p:nvPr/>
+        </p:nvSpPr>
+        <p:spPr>
+          <a:xfrm>
+            <a:off x="3930351" y="4237575"/>
+            <a:ext cx="303600" cy="266700"/>
+          </a:xfrm>
+          <a:prstGeom prst="rect">
+            <a:avLst/>
+          </a:prstGeom>
+          <a:noFill/>
+          <a:ln cap="flat" cmpd="sng" w="17375">
+            <a:solidFill>
+              <a:srgbClr val="F1C232"/>
+            </a:solidFill>
+            <a:prstDash val="solid"/>
+            <a:round/>
+            <a:headEnd len="sm" w="sm" type="none"/>
+            <a:tailEnd len="sm" w="sm" type="none"/>
+          </a:ln>
+        </p:spPr>
+        <p:txBody>
+          <a:bodyPr anchorCtr="0" anchor="ctr" bIns="83450" lIns="83450" spcFirstLastPara="1" rIns="83450" wrap="square" tIns="83450">
+            <a:noAutofit/>
+          </a:bodyPr>
+          <a:lstStyle/>
+          <a:p>
+            <a:pPr indent="0" lvl="0" marL="0" rtl="0" algn="ctr">
+              <a:spcBef>
+                <a:spcPts val="0"/>
+              </a:spcBef>
+              <a:spcAft>
+                <a:spcPts val="0"/>
+              </a:spcAft>
+              <a:buNone/>
+            </a:pPr>
+            <a:r>
+              <a:t/>
+            </a:r>
+            <a:endParaRPr sz="1277"/>
+          </a:p>
+        </p:txBody>
+      </p:sp>
+      <p:sp>
+        <p:nvSpPr>
+          <p:cNvPr id="168" name="Google Shape;168;g3c89c144ce9_0_11"/>
+          <p:cNvSpPr/>
+          <p:nvPr/>
+        </p:nvSpPr>
+        <p:spPr>
+          <a:xfrm>
+            <a:off x="4588400" y="3393725"/>
+            <a:ext cx="263400" cy="266700"/>
+          </a:xfrm>
+          <a:prstGeom prst="rect">
+            <a:avLst/>
+          </a:prstGeom>
+          <a:noFill/>
+          <a:ln cap="flat" cmpd="sng" w="17375">
+            <a:solidFill>
+              <a:srgbClr val="F1C232"/>
+            </a:solidFill>
+            <a:prstDash val="solid"/>
+            <a:round/>
+            <a:headEnd len="sm" w="sm" type="none"/>
+            <a:tailEnd len="sm" w="sm" type="none"/>
+          </a:ln>
+        </p:spPr>
+        <p:txBody>
+          <a:bodyPr anchorCtr="0" anchor="ctr" bIns="83450" lIns="83450" spcFirstLastPara="1" rIns="83450" wrap="square" tIns="83450">
+            <a:noAutofit/>
+          </a:bodyPr>
+          <a:lstStyle/>
+          <a:p>
+            <a:pPr indent="0" lvl="0" marL="0" rtl="0" algn="ctr">
+              <a:spcBef>
+                <a:spcPts val="0"/>
+              </a:spcBef>
+              <a:spcAft>
+                <a:spcPts val="0"/>
+              </a:spcAft>
+              <a:buNone/>
+            </a:pPr>
+            <a:r>
+              <a:t/>
+            </a:r>
+            <a:endParaRPr sz="1277"/>
+          </a:p>
+        </p:txBody>
+      </p:sp>
+      <p:cxnSp>
+        <p:nvCxnSpPr>
+          <p:cNvPr id="169" name="Google Shape;169;g3c89c144ce9_0_11"/>
+          <p:cNvCxnSpPr>
+            <a:endCxn id="168" idx="2"/>
+          </p:cNvCxnSpPr>
+          <p:nvPr/>
+        </p:nvCxnSpPr>
+        <p:spPr>
+          <a:xfrm flipH="1" rot="10800000">
+            <a:off x="4084700" y="3660425"/>
+            <a:ext cx="635400" cy="577200"/>
+          </a:xfrm>
+          <a:prstGeom prst="curvedConnector2">
+            <a:avLst/>
+          </a:prstGeom>
+          <a:noFill/>
+          <a:ln cap="flat" cmpd="sng" w="17375">
+            <a:solidFill>
+              <a:srgbClr val="F1C232"/>
+            </a:solidFill>
+            <a:prstDash val="solid"/>
+            <a:round/>
+            <a:headEnd len="med" w="med" type="none"/>
+            <a:tailEnd len="med" w="med" type="triangle"/>
+          </a:ln>
+        </p:spPr>
+      </p:cxnSp>
+      <p:cxnSp>
+        <p:nvCxnSpPr>
+          <p:cNvPr id="170" name="Google Shape;170;g3c89c144ce9_0_11"/>
+          <p:cNvCxnSpPr>
+            <a:stCxn id="149" idx="3"/>
+            <a:endCxn id="166" idx="2"/>
+          </p:cNvCxnSpPr>
+          <p:nvPr/>
+        </p:nvCxnSpPr>
+        <p:spPr>
+          <a:xfrm>
+            <a:off x="3001663" y="3516213"/>
+            <a:ext cx="1201500" cy="144300"/>
+          </a:xfrm>
+          <a:prstGeom prst="curvedConnector4">
+            <a:avLst>
+              <a:gd fmla="val 46358" name="adj1"/>
+              <a:gd fmla="val 264951" name="adj2"/>
+            </a:avLst>
+          </a:prstGeom>
+          <a:noFill/>
+          <a:ln cap="flat" cmpd="sng" w="17375">
+            <a:solidFill>
+              <a:srgbClr val="6AA84F"/>
+            </a:solidFill>
+            <a:prstDash val="solid"/>
+            <a:round/>
+            <a:headEnd len="med" w="med" type="none"/>
+            <a:tailEnd len="med" w="med" type="triangle"/>
+          </a:ln>
+        </p:spPr>
+      </p:cxnSp>
+      <p:sp>
+        <p:nvSpPr>
+          <p:cNvPr id="171" name="Google Shape;171;g3c89c144ce9_0_11"/>
+          <p:cNvSpPr/>
+          <p:nvPr/>
+        </p:nvSpPr>
+        <p:spPr>
+          <a:xfrm>
+            <a:off x="6585234" y="2775163"/>
+            <a:ext cx="2460000" cy="1093200"/>
+          </a:xfrm>
+          <a:prstGeom prst="roundRect">
+            <a:avLst>
+              <a:gd fmla="val 16667" name="adj"/>
+            </a:avLst>
+          </a:prstGeom>
+          <a:solidFill>
+            <a:srgbClr val="C3DAEC"/>
+          </a:solidFill>
+          <a:ln cap="flat" cmpd="sng" w="8700">
+            <a:solidFill>
+              <a:schemeClr val="dk2"/>
+            </a:solidFill>
+            <a:prstDash val="solid"/>
+            <a:round/>
+            <a:headEnd len="sm" w="sm" type="none"/>
+            <a:tailEnd len="sm" w="sm" type="none"/>
+          </a:ln>
+        </p:spPr>
+        <p:txBody>
+          <a:bodyPr anchorCtr="0" anchor="ctr" bIns="83450" lIns="83450" spcFirstLastPara="1" rIns="83450" wrap="square" tIns="83450">
+            <a:noAutofit/>
+          </a:bodyPr>
+          <a:lstStyle/>
+          <a:p>
+            <a:pPr indent="0" lvl="0" marL="0" rtl="0" algn="ctr">
+              <a:spcBef>
+                <a:spcPts val="0"/>
+              </a:spcBef>
+              <a:spcAft>
+                <a:spcPts val="0"/>
+              </a:spcAft>
+              <a:buNone/>
+            </a:pPr>
+            <a:r>
+              <a:rPr lang="en" sz="1277"/>
+              <a:t>y</a:t>
+            </a:r>
+            <a:r>
+              <a:rPr baseline="-25000" lang="en" sz="1277"/>
+              <a:t>t+1</a:t>
+            </a:r>
+            <a:r>
+              <a:rPr lang="en" sz="1277"/>
+              <a:t> = softmax(b</a:t>
+            </a:r>
+            <a:r>
+              <a:rPr baseline="-25000" lang="en" sz="1277"/>
+              <a:t>y</a:t>
+            </a:r>
+            <a:r>
+              <a:rPr lang="en" sz="1277"/>
+              <a:t> + h</a:t>
+            </a:r>
+            <a:r>
+              <a:rPr baseline="-25000" lang="en" sz="1277"/>
+              <a:t>t</a:t>
+            </a:r>
+            <a:r>
+              <a:rPr lang="en" sz="1277"/>
+              <a:t>w</a:t>
+            </a:r>
+            <a:r>
+              <a:rPr baseline="-25000" lang="en" sz="1277"/>
+              <a:t>y</a:t>
+            </a:r>
+            <a:r>
+              <a:rPr lang="en" sz="1277"/>
+              <a:t>)</a:t>
+            </a:r>
+            <a:endParaRPr sz="1277"/>
+          </a:p>
+          <a:p>
+            <a:pPr indent="0" lvl="0" marL="0" rtl="0" algn="ctr">
+              <a:spcBef>
+                <a:spcPts val="0"/>
+              </a:spcBef>
+              <a:spcAft>
+                <a:spcPts val="0"/>
+              </a:spcAft>
+              <a:buNone/>
+            </a:pPr>
+            <a:r>
+              <a:t/>
+            </a:r>
+            <a:endParaRPr sz="1277"/>
+          </a:p>
+          <a:p>
+            <a:pPr indent="0" lvl="0" marL="0" rtl="0" algn="ctr">
+              <a:spcBef>
+                <a:spcPts val="0"/>
+              </a:spcBef>
+              <a:spcAft>
+                <a:spcPts val="0"/>
+              </a:spcAft>
+              <a:buNone/>
+            </a:pPr>
+            <a:r>
+              <a:rPr lang="en" sz="1277"/>
+              <a:t>tanh(h</a:t>
+            </a:r>
+            <a:r>
+              <a:rPr baseline="-25000" lang="en" sz="1277"/>
+              <a:t>t-1</a:t>
+            </a:r>
+            <a:r>
+              <a:rPr lang="en" sz="1277"/>
+              <a:t>w</a:t>
+            </a:r>
+            <a:r>
+              <a:rPr baseline="-25000" lang="en" sz="1277"/>
+              <a:t>h</a:t>
+            </a:r>
+            <a:r>
+              <a:rPr lang="en" sz="1277"/>
+              <a:t>+ ex</a:t>
+            </a:r>
+            <a:r>
+              <a:rPr baseline="-25000" lang="en" sz="1277"/>
+              <a:t>t</a:t>
+            </a:r>
+            <a:r>
+              <a:rPr lang="en" sz="1277"/>
+              <a:t>w</a:t>
+            </a:r>
+            <a:r>
+              <a:rPr baseline="-25000" lang="en" sz="1277"/>
+              <a:t>x</a:t>
+            </a:r>
+            <a:r>
+              <a:rPr lang="en" sz="1277"/>
+              <a:t> + b</a:t>
+            </a:r>
+            <a:r>
+              <a:rPr baseline="-25000" lang="en" sz="1277"/>
+              <a:t>h</a:t>
+            </a:r>
+            <a:r>
+              <a:rPr lang="en" sz="1277"/>
+              <a:t>) = h</a:t>
+            </a:r>
+            <a:r>
+              <a:rPr baseline="-25000" lang="en" sz="1277"/>
+              <a:t>t</a:t>
+            </a:r>
+            <a:endParaRPr sz="1277"/>
+          </a:p>
+        </p:txBody>
+      </p:sp>
+      <p:sp>
+        <p:nvSpPr>
+          <p:cNvPr id="172" name="Google Shape;172;g3c89c144ce9_0_11"/>
+          <p:cNvSpPr/>
+          <p:nvPr/>
+        </p:nvSpPr>
+        <p:spPr>
+          <a:xfrm>
+            <a:off x="6731452" y="4115789"/>
+            <a:ext cx="2167500" cy="480300"/>
+          </a:xfrm>
+          <a:prstGeom prst="roundRect">
+            <a:avLst>
+              <a:gd fmla="val 16667" name="adj"/>
+            </a:avLst>
+          </a:prstGeom>
+          <a:solidFill>
+            <a:srgbClr val="FFE599"/>
+          </a:solidFill>
+          <a:ln cap="flat" cmpd="sng" w="8700">
+            <a:solidFill>
+              <a:schemeClr val="dk2"/>
+            </a:solidFill>
+            <a:prstDash val="solid"/>
+            <a:round/>
+            <a:headEnd len="sm" w="sm" type="none"/>
+            <a:tailEnd len="sm" w="sm" type="none"/>
+          </a:ln>
+        </p:spPr>
+        <p:txBody>
+          <a:bodyPr anchorCtr="0" anchor="ctr" bIns="83450" lIns="83450" spcFirstLastPara="1" rIns="83450" wrap="square" tIns="83450">
+            <a:noAutofit/>
+          </a:bodyPr>
+          <a:lstStyle/>
+          <a:p>
+            <a:pPr indent="0" lvl="0" marL="0" rtl="0" algn="ctr">
+              <a:spcBef>
+                <a:spcPts val="0"/>
+              </a:spcBef>
+              <a:spcAft>
+                <a:spcPts val="0"/>
+              </a:spcAft>
+              <a:buNone/>
+            </a:pPr>
+            <a:r>
+              <a:rPr lang="en" sz="1277"/>
+              <a:t>ex</a:t>
+            </a:r>
+            <a:r>
+              <a:rPr baseline="-25000" lang="en" sz="1277"/>
+              <a:t>t</a:t>
+            </a:r>
+            <a:r>
+              <a:rPr baseline="-25000" lang="en" sz="1277"/>
+              <a:t> </a:t>
+            </a:r>
+            <a:r>
+              <a:rPr lang="en" sz="1277"/>
+              <a:t>= embeddings[xt</a:t>
+            </a:r>
+            <a:r>
+              <a:rPr baseline="-25000" lang="en" sz="1277"/>
+              <a:t>t</a:t>
+            </a:r>
+            <a:r>
+              <a:rPr lang="en" sz="1277"/>
+              <a:t>] </a:t>
+            </a:r>
+            <a:endParaRPr sz="1277"/>
+          </a:p>
+        </p:txBody>
+      </p:sp>
+      <p:sp>
+        <p:nvSpPr>
+          <p:cNvPr id="173" name="Google Shape;173;g3c89c144ce9_0_11"/>
+          <p:cNvSpPr/>
+          <p:nvPr/>
+        </p:nvSpPr>
+        <p:spPr>
+          <a:xfrm>
+            <a:off x="6922174" y="3019950"/>
+            <a:ext cx="303600" cy="266700"/>
+          </a:xfrm>
+          <a:prstGeom prst="rect">
+            <a:avLst/>
+          </a:prstGeom>
+          <a:noFill/>
+          <a:ln cap="flat" cmpd="sng" w="17375">
+            <a:solidFill>
+              <a:srgbClr val="E06666"/>
+            </a:solidFill>
+            <a:prstDash val="solid"/>
+            <a:round/>
+            <a:headEnd len="sm" w="sm" type="none"/>
+            <a:tailEnd len="sm" w="sm" type="none"/>
+          </a:ln>
+        </p:spPr>
+        <p:txBody>
+          <a:bodyPr anchorCtr="0" anchor="ctr" bIns="83450" lIns="83450" spcFirstLastPara="1" rIns="83450" wrap="square" tIns="83450">
+            <a:noAutofit/>
+          </a:bodyPr>
+          <a:lstStyle/>
+          <a:p>
+            <a:pPr indent="0" lvl="0" marL="0" rtl="0" algn="ctr">
+              <a:spcBef>
+                <a:spcPts val="0"/>
+              </a:spcBef>
+              <a:spcAft>
+                <a:spcPts val="0"/>
+              </a:spcAft>
+              <a:buNone/>
+            </a:pPr>
+            <a:r>
+              <a:t/>
+            </a:r>
+            <a:endParaRPr sz="1277"/>
+          </a:p>
+        </p:txBody>
+      </p:sp>
+      <p:cxnSp>
+        <p:nvCxnSpPr>
+          <p:cNvPr id="174" name="Google Shape;174;g3c89c144ce9_0_11"/>
+          <p:cNvCxnSpPr>
+            <a:stCxn id="173" idx="0"/>
+            <a:endCxn id="175" idx="2"/>
+          </p:cNvCxnSpPr>
+          <p:nvPr/>
+        </p:nvCxnSpPr>
+        <p:spPr>
+          <a:xfrm rot="-5400000">
+            <a:off x="7190674" y="2395350"/>
+            <a:ext cx="507900" cy="741300"/>
+          </a:xfrm>
+          <a:prstGeom prst="curvedConnector3">
+            <a:avLst>
+              <a:gd fmla="val 50007" name="adj1"/>
+            </a:avLst>
+          </a:prstGeom>
+          <a:noFill/>
+          <a:ln cap="flat" cmpd="sng" w="17375">
+            <a:solidFill>
+              <a:srgbClr val="E06666"/>
+            </a:solidFill>
+            <a:prstDash val="solid"/>
+            <a:round/>
+            <a:headEnd len="med" w="med" type="none"/>
+            <a:tailEnd len="med" w="med" type="triangle"/>
+          </a:ln>
+        </p:spPr>
+      </p:cxnSp>
+      <p:sp>
+        <p:nvSpPr>
+          <p:cNvPr id="176" name="Google Shape;176;g3c89c144ce9_0_11"/>
+          <p:cNvSpPr/>
+          <p:nvPr/>
+        </p:nvSpPr>
+        <p:spPr>
+          <a:xfrm>
+            <a:off x="8643032" y="3393713"/>
+            <a:ext cx="189900" cy="266700"/>
+          </a:xfrm>
+          <a:prstGeom prst="rect">
+            <a:avLst/>
+          </a:prstGeom>
+          <a:noFill/>
+          <a:ln cap="flat" cmpd="sng" w="17375">
+            <a:solidFill>
+              <a:srgbClr val="6AA84F"/>
+            </a:solidFill>
+            <a:prstDash val="solid"/>
+            <a:round/>
+            <a:headEnd len="sm" w="sm" type="none"/>
+            <a:tailEnd len="sm" w="sm" type="none"/>
+          </a:ln>
+        </p:spPr>
+        <p:txBody>
+          <a:bodyPr anchorCtr="0" anchor="ctr" bIns="83450" lIns="83450" spcFirstLastPara="1" rIns="83450" wrap="square" tIns="83450">
+            <a:noAutofit/>
+          </a:bodyPr>
+          <a:lstStyle/>
+          <a:p>
+            <a:pPr indent="0" lvl="0" marL="0" rtl="0" algn="ctr">
+              <a:spcBef>
+                <a:spcPts val="0"/>
+              </a:spcBef>
+              <a:spcAft>
+                <a:spcPts val="0"/>
+              </a:spcAft>
+              <a:buNone/>
+            </a:pPr>
+            <a:r>
+              <a:t/>
+            </a:r>
+            <a:endParaRPr sz="1277"/>
+          </a:p>
+        </p:txBody>
+      </p:sp>
+      <p:sp>
+        <p:nvSpPr>
+          <p:cNvPr id="177" name="Google Shape;177;g3c89c144ce9_0_11"/>
+          <p:cNvSpPr/>
+          <p:nvPr/>
+        </p:nvSpPr>
+        <p:spPr>
+          <a:xfrm>
+            <a:off x="8292347" y="3019955"/>
+            <a:ext cx="174900" cy="266700"/>
+          </a:xfrm>
+          <a:prstGeom prst="rect">
+            <a:avLst/>
+          </a:prstGeom>
+          <a:noFill/>
+          <a:ln cap="flat" cmpd="sng" w="17375">
+            <a:solidFill>
+              <a:srgbClr val="6AA84F"/>
+            </a:solidFill>
+            <a:prstDash val="solid"/>
+            <a:round/>
+            <a:headEnd len="sm" w="sm" type="none"/>
+            <a:tailEnd len="sm" w="sm" type="none"/>
+          </a:ln>
+        </p:spPr>
+        <p:txBody>
+          <a:bodyPr anchorCtr="0" anchor="ctr" bIns="83450" lIns="83450" spcFirstLastPara="1" rIns="83450" wrap="square" tIns="83450">
+            <a:noAutofit/>
+          </a:bodyPr>
+          <a:lstStyle/>
+          <a:p>
+            <a:pPr indent="0" lvl="0" marL="0" rtl="0" algn="ctr">
+              <a:spcBef>
+                <a:spcPts val="0"/>
+              </a:spcBef>
+              <a:spcAft>
+                <a:spcPts val="0"/>
+              </a:spcAft>
+              <a:buNone/>
+            </a:pPr>
+            <a:r>
+              <a:t/>
+            </a:r>
+            <a:endParaRPr sz="1277"/>
+          </a:p>
+        </p:txBody>
+      </p:sp>
+      <p:cxnSp>
+        <p:nvCxnSpPr>
+          <p:cNvPr id="178" name="Google Shape;178;g3c89c144ce9_0_11"/>
+          <p:cNvCxnSpPr>
+            <a:stCxn id="176" idx="0"/>
+            <a:endCxn id="177" idx="2"/>
+          </p:cNvCxnSpPr>
+          <p:nvPr/>
+        </p:nvCxnSpPr>
+        <p:spPr>
+          <a:xfrm flipH="1" rot="5400000">
+            <a:off x="8505332" y="3161063"/>
+            <a:ext cx="107100" cy="358200"/>
+          </a:xfrm>
+          <a:prstGeom prst="curvedConnector3">
+            <a:avLst>
+              <a:gd fmla="val 49981" name="adj1"/>
+            </a:avLst>
+          </a:prstGeom>
+          <a:noFill/>
+          <a:ln cap="flat" cmpd="sng" w="8700">
+            <a:solidFill>
+              <a:srgbClr val="6AA84F"/>
+            </a:solidFill>
+            <a:prstDash val="solid"/>
+            <a:round/>
+            <a:headEnd len="med" w="med" type="none"/>
+            <a:tailEnd len="med" w="med" type="triangle"/>
+          </a:ln>
+        </p:spPr>
+      </p:cxnSp>
+      <p:sp>
+        <p:nvSpPr>
+          <p:cNvPr id="179" name="Google Shape;179;g3c89c144ce9_0_11"/>
+          <p:cNvSpPr/>
+          <p:nvPr/>
+        </p:nvSpPr>
+        <p:spPr>
+          <a:xfrm>
+            <a:off x="7182850" y="3393725"/>
+            <a:ext cx="263400" cy="266700"/>
+          </a:xfrm>
+          <a:prstGeom prst="rect">
+            <a:avLst/>
+          </a:prstGeom>
+          <a:noFill/>
+          <a:ln cap="flat" cmpd="sng" w="17375">
+            <a:solidFill>
+              <a:srgbClr val="6AA84F"/>
+            </a:solidFill>
+            <a:prstDash val="solid"/>
+            <a:round/>
+            <a:headEnd len="sm" w="sm" type="none"/>
+            <a:tailEnd len="sm" w="sm" type="none"/>
+          </a:ln>
+        </p:spPr>
+        <p:txBody>
+          <a:bodyPr anchorCtr="0" anchor="ctr" bIns="83450" lIns="83450" spcFirstLastPara="1" rIns="83450" wrap="square" tIns="83450">
+            <a:noAutofit/>
+          </a:bodyPr>
+          <a:lstStyle/>
+          <a:p>
+            <a:pPr indent="0" lvl="0" marL="0" rtl="0" algn="ctr">
+              <a:spcBef>
+                <a:spcPts val="0"/>
+              </a:spcBef>
+              <a:spcAft>
+                <a:spcPts val="0"/>
+              </a:spcAft>
+              <a:buNone/>
+            </a:pPr>
+            <a:r>
+              <a:t/>
+            </a:r>
+            <a:endParaRPr sz="1277"/>
+          </a:p>
+        </p:txBody>
+      </p:sp>
+      <p:sp>
+        <p:nvSpPr>
+          <p:cNvPr id="180" name="Google Shape;180;g3c89c144ce9_0_11"/>
+          <p:cNvSpPr/>
+          <p:nvPr/>
+        </p:nvSpPr>
+        <p:spPr>
+          <a:xfrm>
+            <a:off x="7016882" y="4237568"/>
+            <a:ext cx="325500" cy="266700"/>
+          </a:xfrm>
+          <a:prstGeom prst="rect">
+            <a:avLst/>
+          </a:prstGeom>
+          <a:noFill/>
+          <a:ln cap="flat" cmpd="sng" w="17375">
+            <a:solidFill>
+              <a:srgbClr val="F1C232"/>
+            </a:solidFill>
+            <a:prstDash val="solid"/>
+            <a:round/>
+            <a:headEnd len="sm" w="sm" type="none"/>
+            <a:tailEnd len="sm" w="sm" type="none"/>
+          </a:ln>
+        </p:spPr>
+        <p:txBody>
+          <a:bodyPr anchorCtr="0" anchor="ctr" bIns="83450" lIns="83450" spcFirstLastPara="1" rIns="83450" wrap="square" tIns="83450">
+            <a:noAutofit/>
+          </a:bodyPr>
+          <a:lstStyle/>
+          <a:p>
+            <a:pPr indent="0" lvl="0" marL="0" rtl="0" algn="ctr">
+              <a:spcBef>
+                <a:spcPts val="0"/>
+              </a:spcBef>
+              <a:spcAft>
+                <a:spcPts val="0"/>
+              </a:spcAft>
+              <a:buNone/>
+            </a:pPr>
+            <a:r>
+              <a:t/>
+            </a:r>
+            <a:endParaRPr sz="1277"/>
+          </a:p>
+        </p:txBody>
+      </p:sp>
+      <p:sp>
+        <p:nvSpPr>
+          <p:cNvPr id="181" name="Google Shape;181;g3c89c144ce9_0_11"/>
+          <p:cNvSpPr/>
+          <p:nvPr/>
+        </p:nvSpPr>
+        <p:spPr>
+          <a:xfrm>
+            <a:off x="7695125" y="3393725"/>
+            <a:ext cx="263400" cy="266700"/>
+          </a:xfrm>
+          <a:prstGeom prst="rect">
+            <a:avLst/>
+          </a:prstGeom>
+          <a:noFill/>
+          <a:ln cap="flat" cmpd="sng" w="17375">
+            <a:solidFill>
+              <a:srgbClr val="F1C232"/>
+            </a:solidFill>
+            <a:prstDash val="solid"/>
+            <a:round/>
+            <a:headEnd len="sm" w="sm" type="none"/>
+            <a:tailEnd len="sm" w="sm" type="none"/>
+          </a:ln>
+        </p:spPr>
+        <p:txBody>
+          <a:bodyPr anchorCtr="0" anchor="ctr" bIns="83450" lIns="83450" spcFirstLastPara="1" rIns="83450" wrap="square" tIns="83450">
+            <a:noAutofit/>
+          </a:bodyPr>
+          <a:lstStyle/>
+          <a:p>
+            <a:pPr indent="0" lvl="0" marL="0" rtl="0" algn="ctr">
+              <a:spcBef>
+                <a:spcPts val="0"/>
+              </a:spcBef>
+              <a:spcAft>
+                <a:spcPts val="0"/>
+              </a:spcAft>
+              <a:buNone/>
+            </a:pPr>
+            <a:r>
+              <a:t/>
+            </a:r>
+            <a:endParaRPr sz="1277"/>
+          </a:p>
+        </p:txBody>
+      </p:sp>
+      <p:cxnSp>
+        <p:nvCxnSpPr>
+          <p:cNvPr id="182" name="Google Shape;182;g3c89c144ce9_0_11"/>
+          <p:cNvCxnSpPr>
+            <a:endCxn id="181" idx="2"/>
+          </p:cNvCxnSpPr>
+          <p:nvPr/>
+        </p:nvCxnSpPr>
+        <p:spPr>
+          <a:xfrm flipH="1" rot="10800000">
+            <a:off x="7191425" y="3660425"/>
+            <a:ext cx="635400" cy="577200"/>
+          </a:xfrm>
+          <a:prstGeom prst="curvedConnector2">
+            <a:avLst/>
+          </a:prstGeom>
+          <a:noFill/>
+          <a:ln cap="flat" cmpd="sng" w="17375">
+            <a:solidFill>
+              <a:srgbClr val="F1C232"/>
+            </a:solidFill>
+            <a:prstDash val="solid"/>
+            <a:round/>
+            <a:headEnd len="med" w="med" type="none"/>
+            <a:tailEnd len="med" w="med" type="triangle"/>
+          </a:ln>
+        </p:spPr>
+      </p:cxnSp>
+      <p:cxnSp>
+        <p:nvCxnSpPr>
+          <p:cNvPr id="183" name="Google Shape;183;g3c89c144ce9_0_11"/>
+          <p:cNvCxnSpPr>
+            <a:stCxn id="163" idx="3"/>
+            <a:endCxn id="179" idx="2"/>
+          </p:cNvCxnSpPr>
+          <p:nvPr/>
+        </p:nvCxnSpPr>
+        <p:spPr>
+          <a:xfrm>
+            <a:off x="5737457" y="3527063"/>
+            <a:ext cx="1577100" cy="133500"/>
+          </a:xfrm>
+          <a:prstGeom prst="curvedConnector4">
+            <a:avLst>
+              <a:gd fmla="val 37776" name="adj1"/>
+              <a:gd fmla="val 171544" name="adj2"/>
+            </a:avLst>
+          </a:prstGeom>
+          <a:noFill/>
+          <a:ln cap="flat" cmpd="sng" w="17375">
+            <a:solidFill>
+              <a:srgbClr val="6AA84F"/>
+            </a:solidFill>
+            <a:prstDash val="dashDot"/>
+            <a:round/>
+            <a:headEnd len="med" w="med" type="none"/>
+            <a:tailEnd len="med" w="med" type="triangle"/>
+          </a:ln>
+        </p:spPr>
+      </p:cxnSp>
+      <p:sp>
+        <p:nvSpPr>
+          <p:cNvPr id="184" name="Google Shape;184;g3c89c144ce9_0_11"/>
+          <p:cNvSpPr/>
+          <p:nvPr/>
+        </p:nvSpPr>
+        <p:spPr>
+          <a:xfrm>
+            <a:off x="3466400" y="5051475"/>
+            <a:ext cx="2507400" cy="480300"/>
+          </a:xfrm>
+          <a:prstGeom prst="roundRect">
+            <a:avLst>
+              <a:gd fmla="val 16667" name="adj"/>
+            </a:avLst>
+          </a:prstGeom>
+          <a:solidFill>
+            <a:srgbClr val="D9D2E9"/>
+          </a:solidFill>
+          <a:ln cap="flat" cmpd="sng" w="8700">
+            <a:solidFill>
+              <a:schemeClr val="dk2"/>
+            </a:solidFill>
+            <a:prstDash val="solid"/>
+            <a:round/>
+            <a:headEnd len="sm" w="sm" type="none"/>
+            <a:tailEnd len="sm" w="sm" type="none"/>
+          </a:ln>
+        </p:spPr>
+        <p:txBody>
+          <a:bodyPr anchorCtr="0" anchor="ctr" bIns="83450" lIns="83450" spcFirstLastPara="1" rIns="83450" wrap="square" tIns="83450">
+            <a:noAutofit/>
+          </a:bodyPr>
+          <a:lstStyle/>
+          <a:p>
+            <a:pPr indent="0" lvl="0" marL="0" rtl="0" algn="ctr">
+              <a:spcBef>
+                <a:spcPts val="0"/>
+              </a:spcBef>
+              <a:spcAft>
+                <a:spcPts val="0"/>
+              </a:spcAft>
+              <a:buNone/>
+            </a:pPr>
+            <a:r>
+              <a:rPr lang="en" sz="1277"/>
+              <a:t>[xt</a:t>
+            </a:r>
+            <a:r>
+              <a:rPr baseline="-25000" lang="en" sz="1277"/>
+              <a:t>0</a:t>
+            </a:r>
+            <a:r>
+              <a:rPr lang="en" sz="1277"/>
+              <a:t>, xt</a:t>
+            </a:r>
+            <a:r>
+              <a:rPr baseline="-25000" lang="en" sz="1277"/>
+              <a:t>1</a:t>
+            </a:r>
+            <a:r>
+              <a:rPr lang="en" sz="1277"/>
+              <a:t>, …, xt</a:t>
+            </a:r>
+            <a:r>
+              <a:rPr baseline="-25000" lang="en" sz="1277"/>
+              <a:t>t</a:t>
+            </a:r>
+            <a:r>
+              <a:rPr lang="en" sz="1277"/>
+              <a:t>]</a:t>
+            </a:r>
+            <a:r>
+              <a:rPr baseline="-25000" lang="en" sz="1277"/>
+              <a:t> </a:t>
+            </a:r>
+            <a:r>
+              <a:rPr lang="en" sz="1277"/>
+              <a:t>= tokenizer(X) </a:t>
+            </a:r>
+            <a:endParaRPr sz="1277"/>
+          </a:p>
+        </p:txBody>
+      </p:sp>
+      <p:sp>
+        <p:nvSpPr>
+          <p:cNvPr id="185" name="Google Shape;185;g3c89c144ce9_0_11"/>
+          <p:cNvSpPr/>
+          <p:nvPr/>
+        </p:nvSpPr>
+        <p:spPr>
+          <a:xfrm>
+            <a:off x="3701150" y="5142075"/>
+            <a:ext cx="229200" cy="299100"/>
+          </a:xfrm>
+          <a:prstGeom prst="rect">
+            <a:avLst/>
+          </a:prstGeom>
+          <a:noFill/>
+          <a:ln cap="flat" cmpd="sng" w="19050">
+            <a:solidFill>
+              <a:srgbClr val="8E7CC3"/>
+            </a:solidFill>
+            <a:prstDash val="solid"/>
+            <a:round/>
+            <a:headEnd len="sm" w="sm" type="none"/>
+            <a:tailEnd len="sm" w="sm" type="none"/>
+          </a:ln>
+        </p:spPr>
+        <p:txBody>
+          <a:bodyPr anchorCtr="0" anchor="ctr" bIns="91425" lIns="91425" spcFirstLastPara="1" rIns="91425" wrap="square" tIns="91425">
+            <a:noAutofit/>
+          </a:bodyPr>
+          <a:lstStyle/>
+          <a:p>
+            <a:pPr indent="0" lvl="0" marL="0" rtl="0" algn="ctr">
+              <a:spcBef>
+                <a:spcPts val="0"/>
+              </a:spcBef>
+              <a:spcAft>
+                <a:spcPts val="0"/>
+              </a:spcAft>
+              <a:buNone/>
+            </a:pPr>
+            <a:r>
+              <a:t/>
+            </a:r>
+            <a:endParaRPr/>
+          </a:p>
+        </p:txBody>
+      </p:sp>
+      <p:sp>
+        <p:nvSpPr>
+          <p:cNvPr id="186" name="Google Shape;186;g3c89c144ce9_0_11"/>
+          <p:cNvSpPr/>
+          <p:nvPr/>
+        </p:nvSpPr>
+        <p:spPr>
+          <a:xfrm>
+            <a:off x="3967550" y="5142075"/>
+            <a:ext cx="229200" cy="299100"/>
+          </a:xfrm>
+          <a:prstGeom prst="rect">
+            <a:avLst/>
+          </a:prstGeom>
+          <a:noFill/>
+          <a:ln cap="flat" cmpd="sng" w="19050">
+            <a:solidFill>
+              <a:srgbClr val="8E7CC3"/>
+            </a:solidFill>
+            <a:prstDash val="solid"/>
+            <a:round/>
+            <a:headEnd len="sm" w="sm" type="none"/>
+            <a:tailEnd len="sm" w="sm" type="none"/>
+          </a:ln>
+        </p:spPr>
+        <p:txBody>
+          <a:bodyPr anchorCtr="0" anchor="ctr" bIns="91425" lIns="91425" spcFirstLastPara="1" rIns="91425" wrap="square" tIns="91425">
+            <a:noAutofit/>
+          </a:bodyPr>
+          <a:lstStyle/>
+          <a:p>
+            <a:pPr indent="0" lvl="0" marL="0" rtl="0" algn="ctr">
+              <a:spcBef>
+                <a:spcPts val="0"/>
+              </a:spcBef>
+              <a:spcAft>
+                <a:spcPts val="0"/>
+              </a:spcAft>
+              <a:buNone/>
+            </a:pPr>
+            <a:r>
+              <a:t/>
+            </a:r>
+            <a:endParaRPr/>
+          </a:p>
+        </p:txBody>
+      </p:sp>
+      <p:sp>
+        <p:nvSpPr>
+          <p:cNvPr id="187" name="Google Shape;187;g3c89c144ce9_0_11"/>
+          <p:cNvSpPr/>
+          <p:nvPr/>
+        </p:nvSpPr>
+        <p:spPr>
+          <a:xfrm>
+            <a:off x="4490900" y="5142075"/>
+            <a:ext cx="229200" cy="299100"/>
+          </a:xfrm>
+          <a:prstGeom prst="rect">
+            <a:avLst/>
+          </a:prstGeom>
+          <a:noFill/>
+          <a:ln cap="flat" cmpd="sng" w="19050">
+            <a:solidFill>
+              <a:srgbClr val="8E7CC3"/>
+            </a:solidFill>
+            <a:prstDash val="solid"/>
+            <a:round/>
+            <a:headEnd len="sm" w="sm" type="none"/>
+            <a:tailEnd len="sm" w="sm" type="none"/>
+          </a:ln>
+        </p:spPr>
+        <p:txBody>
+          <a:bodyPr anchorCtr="0" anchor="ctr" bIns="91425" lIns="91425" spcFirstLastPara="1" rIns="91425" wrap="square" tIns="91425">
+            <a:noAutofit/>
+          </a:bodyPr>
+          <a:lstStyle/>
+          <a:p>
+            <a:pPr indent="0" lvl="0" marL="0" rtl="0" algn="ctr">
+              <a:spcBef>
+                <a:spcPts val="0"/>
+              </a:spcBef>
+              <a:spcAft>
+                <a:spcPts val="0"/>
+              </a:spcAft>
+              <a:buNone/>
+            </a:pPr>
+            <a:r>
+              <a:t/>
+            </a:r>
+            <a:endParaRPr/>
+          </a:p>
+        </p:txBody>
+      </p:sp>
+      <p:sp>
+        <p:nvSpPr>
+          <p:cNvPr id="188" name="Google Shape;188;g3c89c144ce9_0_11"/>
+          <p:cNvSpPr/>
+          <p:nvPr/>
+        </p:nvSpPr>
+        <p:spPr>
+          <a:xfrm>
+            <a:off x="2540850" y="4221375"/>
+            <a:ext cx="229200" cy="299100"/>
+          </a:xfrm>
+          <a:prstGeom prst="rect">
+            <a:avLst/>
+          </a:prstGeom>
+          <a:noFill/>
+          <a:ln cap="flat" cmpd="sng" w="19050">
+            <a:solidFill>
+              <a:srgbClr val="8E7CC3"/>
+            </a:solidFill>
+            <a:prstDash val="solid"/>
+            <a:round/>
+            <a:headEnd len="sm" w="sm" type="none"/>
+            <a:tailEnd len="sm" w="sm" type="none"/>
+          </a:ln>
+        </p:spPr>
+        <p:txBody>
+          <a:bodyPr anchorCtr="0" anchor="ctr" bIns="91425" lIns="91425" spcFirstLastPara="1" rIns="91425" wrap="square" tIns="91425">
+            <a:noAutofit/>
+          </a:bodyPr>
+          <a:lstStyle/>
+          <a:p>
+            <a:pPr indent="0" lvl="0" marL="0" rtl="0" algn="ctr">
+              <a:spcBef>
+                <a:spcPts val="0"/>
+              </a:spcBef>
+              <a:spcAft>
+                <a:spcPts val="0"/>
+              </a:spcAft>
+              <a:buNone/>
+            </a:pPr>
+            <a:r>
+              <a:t/>
+            </a:r>
+            <a:endParaRPr/>
+          </a:p>
+        </p:txBody>
+      </p:sp>
+      <p:sp>
+        <p:nvSpPr>
+          <p:cNvPr id="189" name="Google Shape;189;g3c89c144ce9_0_11"/>
+          <p:cNvSpPr/>
+          <p:nvPr/>
+        </p:nvSpPr>
+        <p:spPr>
+          <a:xfrm>
+            <a:off x="5257750" y="4206400"/>
+            <a:ext cx="229200" cy="299100"/>
+          </a:xfrm>
+          <a:prstGeom prst="rect">
+            <a:avLst/>
+          </a:prstGeom>
+          <a:noFill/>
+          <a:ln cap="flat" cmpd="sng" w="19050">
+            <a:solidFill>
+              <a:srgbClr val="8E7CC3"/>
+            </a:solidFill>
+            <a:prstDash val="solid"/>
+            <a:round/>
+            <a:headEnd len="sm" w="sm" type="none"/>
+            <a:tailEnd len="sm" w="sm" type="none"/>
+          </a:ln>
+        </p:spPr>
+        <p:txBody>
+          <a:bodyPr anchorCtr="0" anchor="ctr" bIns="91425" lIns="91425" spcFirstLastPara="1" rIns="91425" wrap="square" tIns="91425">
+            <a:noAutofit/>
+          </a:bodyPr>
+          <a:lstStyle/>
+          <a:p>
+            <a:pPr indent="0" lvl="0" marL="0" rtl="0" algn="ctr">
+              <a:spcBef>
+                <a:spcPts val="0"/>
+              </a:spcBef>
+              <a:spcAft>
+                <a:spcPts val="0"/>
+              </a:spcAft>
+              <a:buNone/>
+            </a:pPr>
+            <a:r>
+              <a:t/>
+            </a:r>
+            <a:endParaRPr/>
+          </a:p>
+        </p:txBody>
+      </p:sp>
+      <p:sp>
+        <p:nvSpPr>
+          <p:cNvPr id="190" name="Google Shape;190;g3c89c144ce9_0_11"/>
+          <p:cNvSpPr/>
+          <p:nvPr/>
+        </p:nvSpPr>
+        <p:spPr>
+          <a:xfrm>
+            <a:off x="8321300" y="4206400"/>
+            <a:ext cx="229200" cy="299100"/>
+          </a:xfrm>
+          <a:prstGeom prst="rect">
+            <a:avLst/>
+          </a:prstGeom>
+          <a:noFill/>
+          <a:ln cap="flat" cmpd="sng" w="19050">
+            <a:solidFill>
+              <a:srgbClr val="8E7CC3"/>
+            </a:solidFill>
+            <a:prstDash val="solid"/>
+            <a:round/>
+            <a:headEnd len="sm" w="sm" type="none"/>
+            <a:tailEnd len="sm" w="sm" type="none"/>
+          </a:ln>
+        </p:spPr>
+        <p:txBody>
+          <a:bodyPr anchorCtr="0" anchor="ctr" bIns="91425" lIns="91425" spcFirstLastPara="1" rIns="91425" wrap="square" tIns="91425">
+            <a:noAutofit/>
+          </a:bodyPr>
+          <a:lstStyle/>
+          <a:p>
+            <a:pPr indent="0" lvl="0" marL="0" rtl="0" algn="ctr">
+              <a:spcBef>
+                <a:spcPts val="0"/>
+              </a:spcBef>
+              <a:spcAft>
+                <a:spcPts val="0"/>
+              </a:spcAft>
+              <a:buNone/>
+            </a:pPr>
+            <a:r>
+              <a:t/>
+            </a:r>
+            <a:endParaRPr/>
+          </a:p>
+        </p:txBody>
+      </p:sp>
+      <p:cxnSp>
+        <p:nvCxnSpPr>
+          <p:cNvPr id="191" name="Google Shape;191;g3c89c144ce9_0_11"/>
+          <p:cNvCxnSpPr>
+            <a:stCxn id="185" idx="0"/>
+            <a:endCxn id="188" idx="2"/>
+          </p:cNvCxnSpPr>
+          <p:nvPr/>
+        </p:nvCxnSpPr>
+        <p:spPr>
+          <a:xfrm flipH="1" rot="5400000">
+            <a:off x="2924750" y="4251075"/>
+            <a:ext cx="621600" cy="1160400"/>
+          </a:xfrm>
+          <a:prstGeom prst="curvedConnector3">
+            <a:avLst>
+              <a:gd fmla="val 50000" name="adj1"/>
+            </a:avLst>
+          </a:prstGeom>
+          <a:noFill/>
+          <a:ln cap="flat" cmpd="sng" w="19050">
+            <a:solidFill>
+              <a:srgbClr val="8E7CC3"/>
+            </a:solidFill>
+            <a:prstDash val="solid"/>
+            <a:round/>
+            <a:headEnd len="med" w="med" type="none"/>
+            <a:tailEnd len="med" w="med" type="triangle"/>
+          </a:ln>
+        </p:spPr>
+      </p:cxnSp>
+      <p:cxnSp>
+        <p:nvCxnSpPr>
+          <p:cNvPr id="192" name="Google Shape;192;g3c89c144ce9_0_11"/>
+          <p:cNvCxnSpPr>
+            <a:stCxn id="186" idx="0"/>
+            <a:endCxn id="189" idx="2"/>
+          </p:cNvCxnSpPr>
+          <p:nvPr/>
+        </p:nvCxnSpPr>
+        <p:spPr>
+          <a:xfrm rot="-5400000">
+            <a:off x="4409000" y="4178625"/>
+            <a:ext cx="636600" cy="1290300"/>
+          </a:xfrm>
+          <a:prstGeom prst="curvedConnector3">
+            <a:avLst>
+              <a:gd fmla="val 49998" name="adj1"/>
+            </a:avLst>
+          </a:prstGeom>
+          <a:noFill/>
+          <a:ln cap="flat" cmpd="sng" w="19050">
+            <a:solidFill>
+              <a:srgbClr val="8E7CC3"/>
+            </a:solidFill>
+            <a:prstDash val="solid"/>
+            <a:round/>
+            <a:headEnd len="med" w="med" type="none"/>
+            <a:tailEnd len="med" w="med" type="triangle"/>
+          </a:ln>
+        </p:spPr>
+      </p:cxnSp>
+      <p:cxnSp>
+        <p:nvCxnSpPr>
+          <p:cNvPr id="193" name="Google Shape;193;g3c89c144ce9_0_11"/>
+          <p:cNvCxnSpPr>
+            <a:stCxn id="187" idx="0"/>
+            <a:endCxn id="190" idx="2"/>
+          </p:cNvCxnSpPr>
+          <p:nvPr/>
+        </p:nvCxnSpPr>
+        <p:spPr>
+          <a:xfrm rot="-5400000">
+            <a:off x="6202400" y="2908575"/>
+            <a:ext cx="636600" cy="3830400"/>
+          </a:xfrm>
+          <a:prstGeom prst="curvedConnector3">
+            <a:avLst>
+              <a:gd fmla="val 49998" name="adj1"/>
+            </a:avLst>
+          </a:prstGeom>
+          <a:noFill/>
+          <a:ln cap="flat" cmpd="sng" w="19050">
+            <a:solidFill>
+              <a:srgbClr val="8E7CC3"/>
+            </a:solidFill>
+            <a:prstDash val="solid"/>
+            <a:round/>
+            <a:headEnd len="med" w="med" type="none"/>
+            <a:tailEnd len="med" w="med" type="triangle"/>
+          </a:ln>
+        </p:spPr>
+      </p:cxnSp>
+      <p:sp>
+        <p:nvSpPr>
+          <p:cNvPr id="194" name="Google Shape;194;g3c89c144ce9_0_11"/>
+          <p:cNvSpPr/>
+          <p:nvPr/>
+        </p:nvSpPr>
+        <p:spPr>
+          <a:xfrm>
+            <a:off x="3485675" y="5987150"/>
+            <a:ext cx="2507400" cy="480300"/>
+          </a:xfrm>
+          <a:prstGeom prst="roundRect">
+            <a:avLst>
+              <a:gd fmla="val 16667" name="adj"/>
+            </a:avLst>
+          </a:prstGeom>
+          <a:solidFill>
+            <a:srgbClr val="B6D7A8"/>
+          </a:solidFill>
+          <a:ln cap="flat" cmpd="sng" w="8700">
+            <a:solidFill>
+              <a:srgbClr val="6AA84F"/>
+            </a:solidFill>
+            <a:prstDash val="solid"/>
+            <a:round/>
+            <a:headEnd len="sm" w="sm" type="none"/>
+            <a:tailEnd len="sm" w="sm" type="none"/>
+          </a:ln>
+        </p:spPr>
+        <p:txBody>
+          <a:bodyPr anchorCtr="0" anchor="ctr" bIns="83450" lIns="83450" spcFirstLastPara="1" rIns="83450" wrap="square" tIns="83450">
+            <a:noAutofit/>
+          </a:bodyPr>
+          <a:lstStyle/>
+          <a:p>
+            <a:pPr indent="0" lvl="0" marL="0" rtl="0" algn="ctr">
+              <a:spcBef>
+                <a:spcPts val="0"/>
+              </a:spcBef>
+              <a:spcAft>
+                <a:spcPts val="0"/>
+              </a:spcAft>
+              <a:buNone/>
+            </a:pPr>
+            <a:r>
+              <a:rPr lang="en" sz="1277"/>
+              <a:t>X = “I like cute kittens and”</a:t>
+            </a:r>
+            <a:endParaRPr sz="1277"/>
+          </a:p>
+        </p:txBody>
+      </p:sp>
+      <p:sp>
+        <p:nvSpPr>
+          <p:cNvPr id="195" name="Google Shape;195;g3c89c144ce9_0_11"/>
+          <p:cNvSpPr/>
+          <p:nvPr/>
+        </p:nvSpPr>
+        <p:spPr>
+          <a:xfrm>
+            <a:off x="3714754" y="6093955"/>
+            <a:ext cx="229200" cy="266700"/>
+          </a:xfrm>
+          <a:prstGeom prst="rect">
+            <a:avLst/>
+          </a:prstGeom>
+          <a:noFill/>
+          <a:ln cap="flat" cmpd="sng" w="17375">
+            <a:solidFill>
+              <a:srgbClr val="CC4125"/>
+            </a:solidFill>
+            <a:prstDash val="solid"/>
+            <a:round/>
+            <a:headEnd len="sm" w="sm" type="none"/>
+            <a:tailEnd len="sm" w="sm" type="none"/>
+          </a:ln>
+        </p:spPr>
+        <p:txBody>
+          <a:bodyPr anchorCtr="0" anchor="ctr" bIns="83450" lIns="83450" spcFirstLastPara="1" rIns="83450" wrap="square" tIns="83450">
+            <a:noAutofit/>
+          </a:bodyPr>
+          <a:lstStyle/>
+          <a:p>
+            <a:pPr indent="0" lvl="0" marL="0" rtl="0" algn="ctr">
+              <a:spcBef>
+                <a:spcPts val="0"/>
+              </a:spcBef>
+              <a:spcAft>
+                <a:spcPts val="0"/>
+              </a:spcAft>
+              <a:buNone/>
+            </a:pPr>
+            <a:r>
+              <a:t/>
+            </a:r>
+            <a:endParaRPr sz="1277"/>
+          </a:p>
+        </p:txBody>
+      </p:sp>
+      <p:sp>
+        <p:nvSpPr>
+          <p:cNvPr id="196" name="Google Shape;196;g3c89c144ce9_0_11"/>
+          <p:cNvSpPr/>
+          <p:nvPr/>
+        </p:nvSpPr>
+        <p:spPr>
+          <a:xfrm>
+            <a:off x="5527900" y="5184825"/>
+            <a:ext cx="244800" cy="231000"/>
+          </a:xfrm>
+          <a:prstGeom prst="rect">
+            <a:avLst/>
+          </a:prstGeom>
+          <a:noFill/>
+          <a:ln cap="flat" cmpd="sng" w="17375">
+            <a:solidFill>
+              <a:srgbClr val="CC4125"/>
+            </a:solidFill>
+            <a:prstDash val="solid"/>
+            <a:round/>
+            <a:headEnd len="sm" w="sm" type="none"/>
+            <a:tailEnd len="sm" w="sm" type="none"/>
+          </a:ln>
+        </p:spPr>
+        <p:txBody>
+          <a:bodyPr anchorCtr="0" anchor="ctr" bIns="83450" lIns="83450" spcFirstLastPara="1" rIns="83450" wrap="square" tIns="83450">
+            <a:noAutofit/>
+          </a:bodyPr>
+          <a:lstStyle/>
+          <a:p>
+            <a:pPr indent="0" lvl="0" marL="0" rtl="0" algn="ctr">
+              <a:spcBef>
+                <a:spcPts val="0"/>
+              </a:spcBef>
+              <a:spcAft>
+                <a:spcPts val="0"/>
+              </a:spcAft>
+              <a:buNone/>
+            </a:pPr>
+            <a:r>
+              <a:t/>
+            </a:r>
+            <a:endParaRPr sz="1277"/>
+          </a:p>
+        </p:txBody>
+      </p:sp>
+      <p:cxnSp>
+        <p:nvCxnSpPr>
+          <p:cNvPr id="197" name="Google Shape;197;g3c89c144ce9_0_11"/>
+          <p:cNvCxnSpPr>
+            <a:stCxn id="195" idx="0"/>
+            <a:endCxn id="196" idx="2"/>
+          </p:cNvCxnSpPr>
+          <p:nvPr/>
+        </p:nvCxnSpPr>
+        <p:spPr>
+          <a:xfrm rot="-5400000">
+            <a:off x="4400854" y="4844455"/>
+            <a:ext cx="678000" cy="1821000"/>
+          </a:xfrm>
+          <a:prstGeom prst="curvedConnector3">
+            <a:avLst>
+              <a:gd fmla="val 50010" name="adj1"/>
+            </a:avLst>
+          </a:prstGeom>
+          <a:noFill/>
+          <a:ln cap="flat" cmpd="sng" w="19050">
+            <a:solidFill>
+              <a:srgbClr val="CC4125"/>
+            </a:solidFill>
+            <a:prstDash val="solid"/>
+            <a:round/>
+            <a:headEnd len="med" w="med" type="none"/>
+            <a:tailEnd len="med" w="med" type="triangle"/>
+          </a:ln>
+        </p:spPr>
+      </p:cxnSp>
+      <p:sp>
+        <p:nvSpPr>
+          <p:cNvPr id="162" name="Google Shape;162;g3c89c144ce9_0_11"/>
+          <p:cNvSpPr/>
+          <p:nvPr/>
+        </p:nvSpPr>
+        <p:spPr>
+          <a:xfrm>
+            <a:off x="3589100" y="2245275"/>
+            <a:ext cx="2262000" cy="266700"/>
+          </a:xfrm>
+          <a:prstGeom prst="roundRect">
+            <a:avLst>
+              <a:gd fmla="val 16667" name="adj"/>
+            </a:avLst>
+          </a:prstGeom>
+          <a:solidFill>
+            <a:srgbClr val="F9C9C5"/>
+          </a:solidFill>
+          <a:ln cap="flat" cmpd="sng" w="19050">
+            <a:solidFill>
+              <a:srgbClr val="E06666"/>
+            </a:solidFill>
+            <a:prstDash val="solid"/>
+            <a:round/>
+            <a:headEnd len="sm" w="sm" type="none"/>
+            <a:tailEnd len="sm" w="sm" type="none"/>
+          </a:ln>
+        </p:spPr>
+        <p:txBody>
+          <a:bodyPr anchorCtr="0" anchor="ctr" bIns="83450" lIns="83450" spcFirstLastPara="1" rIns="83450" wrap="square" tIns="83450">
+            <a:noAutofit/>
+          </a:bodyPr>
+          <a:lstStyle/>
+          <a:p>
+            <a:pPr indent="0" lvl="0" marL="0" rtl="0" algn="ctr">
+              <a:spcBef>
+                <a:spcPts val="1200"/>
+              </a:spcBef>
+              <a:spcAft>
+                <a:spcPts val="1200"/>
+              </a:spcAft>
+              <a:buNone/>
+            </a:pPr>
+            <a:r>
+              <a:rPr lang="en" sz="600"/>
+              <a:t>&lt;0.11, 0.16, 0.13, 0.21, 0.10, 0.08, 0.07, 0.06, 0.05, 0.03&gt;</a:t>
+            </a:r>
+            <a:endParaRPr sz="600"/>
+          </a:p>
+        </p:txBody>
+      </p:sp>
+      <p:sp>
+        <p:nvSpPr>
+          <p:cNvPr id="175" name="Google Shape;175;g3c89c144ce9_0_11"/>
+          <p:cNvSpPr/>
+          <p:nvPr/>
+        </p:nvSpPr>
+        <p:spPr>
+          <a:xfrm>
+            <a:off x="6684200" y="2245275"/>
+            <a:ext cx="2262000" cy="266700"/>
+          </a:xfrm>
+          <a:prstGeom prst="roundRect">
+            <a:avLst>
+              <a:gd fmla="val 16667" name="adj"/>
+            </a:avLst>
+          </a:prstGeom>
+          <a:solidFill>
+            <a:srgbClr val="F9C9C5"/>
+          </a:solidFill>
+          <a:ln cap="flat" cmpd="sng" w="19050">
+            <a:solidFill>
+              <a:srgbClr val="E06666"/>
+            </a:solidFill>
+            <a:prstDash val="solid"/>
+            <a:round/>
+            <a:headEnd len="sm" w="sm" type="none"/>
+            <a:tailEnd len="sm" w="sm" type="none"/>
+          </a:ln>
+        </p:spPr>
+        <p:txBody>
+          <a:bodyPr anchorCtr="0" anchor="ctr" bIns="83450" lIns="83450" spcFirstLastPara="1" rIns="83450" wrap="square" tIns="83450">
+            <a:noAutofit/>
+          </a:bodyPr>
+          <a:lstStyle/>
+          <a:p>
+            <a:pPr indent="0" lvl="0" marL="0" rtl="0" algn="ctr">
+              <a:spcBef>
+                <a:spcPts val="1200"/>
+              </a:spcBef>
+              <a:spcAft>
+                <a:spcPts val="1200"/>
+              </a:spcAft>
+              <a:buNone/>
+            </a:pPr>
+            <a:r>
+              <a:rPr lang="en" sz="600"/>
+              <a:t>&lt;0.07, 0.15, 0.14, 0.10, 0.09, 0.08, 0.25, 0.05, 0.04, 0.03&gt;</a:t>
+            </a:r>
+            <a:endParaRPr sz="600"/>
+          </a:p>
+        </p:txBody>
+      </p:sp>
+      <p:sp>
+        <p:nvSpPr>
+          <p:cNvPr id="198" name="Google Shape;198;g3c89c144ce9_0_11"/>
+          <p:cNvSpPr/>
+          <p:nvPr/>
+        </p:nvSpPr>
+        <p:spPr>
+          <a:xfrm>
+            <a:off x="1239200" y="2228650"/>
+            <a:ext cx="229200" cy="299100"/>
+          </a:xfrm>
+          <a:prstGeom prst="rect">
+            <a:avLst/>
+          </a:prstGeom>
+          <a:noFill/>
+          <a:ln cap="flat" cmpd="sng" w="19050">
+            <a:solidFill>
+              <a:srgbClr val="8E7CC3"/>
+            </a:solidFill>
+            <a:prstDash val="solid"/>
+            <a:round/>
+            <a:headEnd len="sm" w="sm" type="none"/>
+            <a:tailEnd len="sm" w="sm" type="none"/>
+          </a:ln>
+        </p:spPr>
+        <p:txBody>
+          <a:bodyPr anchorCtr="0" anchor="ctr" bIns="91425" lIns="91425" spcFirstLastPara="1" rIns="91425" wrap="square" tIns="91425">
+            <a:noAutofit/>
+          </a:bodyPr>
+          <a:lstStyle/>
+          <a:p>
+            <a:pPr indent="0" lvl="0" marL="0" rtl="0" algn="ctr">
+              <a:spcBef>
+                <a:spcPts val="0"/>
+              </a:spcBef>
+              <a:spcAft>
+                <a:spcPts val="0"/>
+              </a:spcAft>
+              <a:buNone/>
+            </a:pPr>
+            <a:r>
+              <a:t/>
+            </a:r>
+            <a:endParaRPr/>
+          </a:p>
+        </p:txBody>
+      </p:sp>
+      <p:sp>
+        <p:nvSpPr>
+          <p:cNvPr id="199" name="Google Shape;199;g3c89c144ce9_0_11"/>
+          <p:cNvSpPr/>
+          <p:nvPr/>
+        </p:nvSpPr>
+        <p:spPr>
+          <a:xfrm>
+            <a:off x="4319375" y="2228650"/>
+            <a:ext cx="229200" cy="299100"/>
+          </a:xfrm>
+          <a:prstGeom prst="rect">
+            <a:avLst/>
+          </a:prstGeom>
+          <a:noFill/>
+          <a:ln cap="flat" cmpd="sng" w="19050">
+            <a:solidFill>
+              <a:srgbClr val="8E7CC3"/>
+            </a:solidFill>
+            <a:prstDash val="solid"/>
+            <a:round/>
+            <a:headEnd len="sm" w="sm" type="none"/>
+            <a:tailEnd len="sm" w="sm" type="none"/>
+          </a:ln>
+        </p:spPr>
+        <p:txBody>
+          <a:bodyPr anchorCtr="0" anchor="ctr" bIns="91425" lIns="91425" spcFirstLastPara="1" rIns="91425" wrap="square" tIns="91425">
+            <a:noAutofit/>
+          </a:bodyPr>
+          <a:lstStyle/>
+          <a:p>
+            <a:pPr indent="0" lvl="0" marL="0" rtl="0" algn="ctr">
+              <a:spcBef>
+                <a:spcPts val="0"/>
+              </a:spcBef>
+              <a:spcAft>
+                <a:spcPts val="0"/>
+              </a:spcAft>
+              <a:buNone/>
+            </a:pPr>
+            <a:r>
+              <a:t/>
+            </a:r>
+            <a:endParaRPr/>
+          </a:p>
+        </p:txBody>
+      </p:sp>
+      <p:sp>
+        <p:nvSpPr>
+          <p:cNvPr id="200" name="Google Shape;200;g3c89c144ce9_0_11"/>
+          <p:cNvSpPr/>
+          <p:nvPr/>
+        </p:nvSpPr>
+        <p:spPr>
+          <a:xfrm>
+            <a:off x="7998375" y="2228650"/>
+            <a:ext cx="229200" cy="299100"/>
+          </a:xfrm>
+          <a:prstGeom prst="rect">
+            <a:avLst/>
+          </a:prstGeom>
+          <a:noFill/>
+          <a:ln cap="flat" cmpd="sng" w="19050">
+            <a:solidFill>
+              <a:srgbClr val="8E7CC3"/>
+            </a:solidFill>
+            <a:prstDash val="solid"/>
+            <a:round/>
+            <a:headEnd len="sm" w="sm" type="none"/>
+            <a:tailEnd len="sm" w="sm" type="none"/>
+          </a:ln>
+        </p:spPr>
+        <p:txBody>
+          <a:bodyPr anchorCtr="0" anchor="ctr" bIns="91425" lIns="91425" spcFirstLastPara="1" rIns="91425" wrap="square" tIns="91425">
+            <a:noAutofit/>
+          </a:bodyPr>
+          <a:lstStyle/>
+          <a:p>
+            <a:pPr indent="0" lvl="0" marL="0" rtl="0" algn="ctr">
+              <a:spcBef>
+                <a:spcPts val="0"/>
+              </a:spcBef>
+              <a:spcAft>
+                <a:spcPts val="0"/>
+              </a:spcAft>
+              <a:buNone/>
+            </a:pPr>
+            <a:r>
+              <a:t/>
+            </a:r>
+            <a:endParaRPr/>
+          </a:p>
+        </p:txBody>
+      </p:sp>
+      <p:cxnSp>
+        <p:nvCxnSpPr>
+          <p:cNvPr id="201" name="Google Shape;201;g3c89c144ce9_0_11"/>
+          <p:cNvCxnSpPr>
+            <a:stCxn id="199" idx="0"/>
+            <a:endCxn id="202" idx="1"/>
+          </p:cNvCxnSpPr>
+          <p:nvPr/>
+        </p:nvCxnSpPr>
+        <p:spPr>
+          <a:xfrm rot="-5400000">
+            <a:off x="4493975" y="2053150"/>
+            <a:ext cx="115500" cy="235500"/>
+          </a:xfrm>
+          <a:prstGeom prst="curvedConnector2">
+            <a:avLst/>
+          </a:prstGeom>
+          <a:noFill/>
+          <a:ln cap="flat" cmpd="sng" w="9525">
+            <a:solidFill>
+              <a:srgbClr val="8E7CC3"/>
+            </a:solidFill>
+            <a:prstDash val="solid"/>
+            <a:round/>
+            <a:headEnd len="med" w="med" type="none"/>
+            <a:tailEnd len="med" w="med" type="none"/>
+          </a:ln>
+        </p:spPr>
+      </p:cxnSp>
+      <p:cxnSp>
+        <p:nvCxnSpPr>
+          <p:cNvPr id="203" name="Google Shape;203;g3c89c144ce9_0_11"/>
+          <p:cNvCxnSpPr>
+            <a:stCxn id="204" idx="3"/>
+            <a:endCxn id="205" idx="2"/>
+          </p:cNvCxnSpPr>
+          <p:nvPr/>
+        </p:nvCxnSpPr>
+        <p:spPr>
+          <a:xfrm rot="10800000">
+            <a:off x="8528425" y="1972900"/>
+            <a:ext cx="61200" cy="136200"/>
+          </a:xfrm>
+          <a:prstGeom prst="curvedConnector4">
+            <a:avLst>
+              <a:gd fmla="val -149346" name="adj1"/>
+              <a:gd fmla="val 74000" name="adj2"/>
+            </a:avLst>
+          </a:prstGeom>
+          <a:noFill/>
+          <a:ln cap="flat" cmpd="sng" w="9525">
+            <a:solidFill>
+              <a:srgbClr val="8E7CC3"/>
+            </a:solidFill>
+            <a:prstDash val="solid"/>
+            <a:round/>
+            <a:headEnd len="med" w="med" type="none"/>
+            <a:tailEnd len="med" w="med" type="triangle"/>
+          </a:ln>
+        </p:spPr>
+      </p:cxnSp>
+      <p:sp>
+        <p:nvSpPr>
+          <p:cNvPr id="206" name="Google Shape;206;g3c89c144ce9_0_11"/>
+          <p:cNvSpPr txBox="1"/>
+          <p:nvPr>
+            <p:ph type="title"/>
+          </p:nvPr>
+        </p:nvSpPr>
+        <p:spPr>
+          <a:xfrm>
+            <a:off x="170650" y="161375"/>
+            <a:ext cx="2884500" cy="960600"/>
+          </a:xfrm>
+          <a:prstGeom prst="rect">
+            <a:avLst/>
+          </a:prstGeom>
+        </p:spPr>
+        <p:txBody>
+          <a:bodyPr anchorCtr="0" anchor="t" bIns="91425" lIns="91425" spcFirstLastPara="1" rIns="91425" wrap="square" tIns="91425">
+            <a:noAutofit/>
+          </a:bodyPr>
+          <a:lstStyle/>
+          <a:p>
+            <a:pPr indent="0" lvl="0" marL="0" rtl="0" algn="l">
+              <a:spcBef>
+                <a:spcPts val="0"/>
+              </a:spcBef>
+              <a:spcAft>
+                <a:spcPts val="0"/>
+              </a:spcAft>
+              <a:buNone/>
+            </a:pPr>
+            <a:r>
+              <a:rPr lang="en" sz="2400"/>
+              <a:t>Recurrent Neural </a:t>
+            </a:r>
+            <a:endParaRPr sz="2400"/>
+          </a:p>
+          <a:p>
+            <a:pPr indent="0" lvl="0" marL="0" rtl="0" algn="l">
+              <a:spcBef>
+                <a:spcPts val="0"/>
+              </a:spcBef>
+              <a:spcAft>
+                <a:spcPts val="0"/>
+              </a:spcAft>
+              <a:buNone/>
+            </a:pPr>
+            <a:r>
+              <a:rPr lang="en" sz="2400"/>
+              <a:t>Networks</a:t>
+            </a:r>
+            <a:endParaRPr sz="2400"/>
+          </a:p>
+        </p:txBody>
+      </p:sp>
+      <p:sp>
+        <p:nvSpPr>
+          <p:cNvPr id="207" name="Google Shape;207;g3c89c144ce9_0_11"/>
+          <p:cNvSpPr/>
+          <p:nvPr/>
+        </p:nvSpPr>
+        <p:spPr>
+          <a:xfrm>
+            <a:off x="6096850" y="2228650"/>
+            <a:ext cx="384600" cy="2367300"/>
+          </a:xfrm>
+          <a:prstGeom prst="roundRect">
+            <a:avLst>
+              <a:gd fmla="val 16667" name="adj"/>
+            </a:avLst>
+          </a:prstGeom>
+          <a:solidFill>
+            <a:srgbClr val="C3DAEC"/>
+          </a:solidFill>
+          <a:ln cap="flat" cmpd="sng" w="19050">
+            <a:solidFill>
+              <a:srgbClr val="3D85C6"/>
+            </a:solidFill>
+            <a:prstDash val="solid"/>
+            <a:round/>
+            <a:headEnd len="sm" w="sm" type="none"/>
+            <a:tailEnd len="sm" w="sm" type="none"/>
+          </a:ln>
+        </p:spPr>
+        <p:txBody>
+          <a:bodyPr anchorCtr="0" anchor="ctr" bIns="91425" lIns="91425" spcFirstLastPara="1" rIns="91425" wrap="square" tIns="91425">
+            <a:noAutofit/>
+          </a:bodyPr>
+          <a:lstStyle/>
+          <a:p>
+            <a:pPr indent="0" lvl="0" marL="0" rtl="0" algn="ctr">
+              <a:spcBef>
+                <a:spcPts val="0"/>
+              </a:spcBef>
+              <a:spcAft>
+                <a:spcPts val="0"/>
+              </a:spcAft>
+              <a:buNone/>
+            </a:pPr>
+            <a:r>
+              <a:rPr lang="en"/>
+              <a:t>…</a:t>
+            </a:r>
+            <a:endParaRPr/>
+          </a:p>
+        </p:txBody>
+      </p:sp>
+      <p:sp>
+        <p:nvSpPr>
+          <p:cNvPr id="208" name="Google Shape;208;g3c89c144ce9_0_11"/>
+          <p:cNvSpPr/>
+          <p:nvPr/>
+        </p:nvSpPr>
+        <p:spPr>
+          <a:xfrm>
+            <a:off x="4229225" y="5142075"/>
+            <a:ext cx="229200" cy="299100"/>
+          </a:xfrm>
+          <a:prstGeom prst="rect">
+            <a:avLst/>
+          </a:prstGeom>
+          <a:noFill/>
+          <a:ln cap="flat" cmpd="sng" w="19050">
+            <a:solidFill>
+              <a:srgbClr val="3D85C6"/>
+            </a:solidFill>
+            <a:prstDash val="solid"/>
+            <a:round/>
+            <a:headEnd len="sm" w="sm" type="none"/>
+            <a:tailEnd len="sm" w="sm" type="none"/>
+          </a:ln>
+        </p:spPr>
+        <p:txBody>
+          <a:bodyPr anchorCtr="0" anchor="ctr" bIns="91425" lIns="91425" spcFirstLastPara="1" rIns="91425" wrap="square" tIns="91425">
+            <a:noAutofit/>
+          </a:bodyPr>
+          <a:lstStyle/>
+          <a:p>
+            <a:pPr indent="0" lvl="0" marL="0" rtl="0" algn="ctr">
+              <a:spcBef>
+                <a:spcPts val="0"/>
+              </a:spcBef>
+              <a:spcAft>
+                <a:spcPts val="0"/>
+              </a:spcAft>
+              <a:buNone/>
+            </a:pPr>
+            <a:r>
+              <a:t/>
+            </a:r>
+            <a:endParaRPr/>
+          </a:p>
+        </p:txBody>
+      </p:sp>
+      <p:cxnSp>
+        <p:nvCxnSpPr>
+          <p:cNvPr id="209" name="Google Shape;209;g3c89c144ce9_0_11"/>
+          <p:cNvCxnSpPr>
+            <a:stCxn id="208" idx="0"/>
+            <a:endCxn id="207" idx="2"/>
+          </p:cNvCxnSpPr>
+          <p:nvPr/>
+        </p:nvCxnSpPr>
+        <p:spPr>
+          <a:xfrm rot="-5400000">
+            <a:off x="5043425" y="3896475"/>
+            <a:ext cx="546000" cy="1945200"/>
+          </a:xfrm>
+          <a:prstGeom prst="curvedConnector3">
+            <a:avLst>
+              <a:gd fmla="val 50011" name="adj1"/>
+            </a:avLst>
+          </a:prstGeom>
+          <a:noFill/>
+          <a:ln cap="flat" cmpd="sng" w="19050">
+            <a:solidFill>
+              <a:srgbClr val="3D85C6"/>
+            </a:solidFill>
+            <a:prstDash val="solid"/>
+            <a:round/>
+            <a:headEnd len="med" w="med" type="none"/>
+            <a:tailEnd len="med" w="med" type="triangle"/>
+          </a:ln>
+        </p:spPr>
+      </p:cxnSp>
+      <p:sp>
+        <p:nvSpPr>
+          <p:cNvPr id="210" name="Google Shape;210;g3c89c144ce9_0_11"/>
+          <p:cNvSpPr/>
+          <p:nvPr/>
+        </p:nvSpPr>
+        <p:spPr>
+          <a:xfrm>
+            <a:off x="1832900" y="2028600"/>
+            <a:ext cx="409200" cy="177600"/>
+          </a:xfrm>
+          <a:prstGeom prst="rect">
+            <a:avLst/>
+          </a:prstGeom>
+          <a:noFill/>
+          <a:ln cap="flat" cmpd="sng" w="9525">
+            <a:solidFill>
+              <a:srgbClr val="8E7CC3"/>
+            </a:solidFill>
+            <a:prstDash val="solid"/>
+            <a:round/>
+            <a:headEnd len="sm" w="sm" type="none"/>
+            <a:tailEnd len="sm" w="sm" type="none"/>
+          </a:ln>
+        </p:spPr>
+        <p:txBody>
+          <a:bodyPr anchorCtr="0" anchor="ctr" bIns="91425" lIns="91425" spcFirstLastPara="1" rIns="91425" wrap="square" tIns="91425">
+            <a:noAutofit/>
+          </a:bodyPr>
+          <a:lstStyle/>
+          <a:p>
+            <a:pPr indent="0" lvl="0" marL="0" rtl="0" algn="ctr">
+              <a:spcBef>
+                <a:spcPts val="0"/>
+              </a:spcBef>
+              <a:spcAft>
+                <a:spcPts val="0"/>
+              </a:spcAft>
+              <a:buNone/>
+            </a:pPr>
+            <a:r>
+              <a:rPr lang="en" sz="600"/>
+              <a:t>yt</a:t>
+            </a:r>
+            <a:r>
+              <a:rPr baseline="-25000" lang="en" sz="600"/>
+              <a:t>1</a:t>
+            </a:r>
+            <a:r>
+              <a:rPr lang="en" sz="600"/>
+              <a:t> = 0</a:t>
+            </a:r>
+            <a:endParaRPr sz="600"/>
+          </a:p>
+        </p:txBody>
+      </p:sp>
+      <p:sp>
+        <p:nvSpPr>
+          <p:cNvPr id="202" name="Google Shape;202;g3c89c144ce9_0_11"/>
+          <p:cNvSpPr/>
+          <p:nvPr/>
+        </p:nvSpPr>
+        <p:spPr>
+          <a:xfrm>
+            <a:off x="4669550" y="2047850"/>
+            <a:ext cx="409200" cy="130800"/>
+          </a:xfrm>
+          <a:prstGeom prst="rect">
+            <a:avLst/>
+          </a:prstGeom>
+          <a:noFill/>
+          <a:ln cap="flat" cmpd="sng" w="9525">
+            <a:solidFill>
+              <a:srgbClr val="8E7CC3"/>
+            </a:solidFill>
+            <a:prstDash val="solid"/>
+            <a:round/>
+            <a:headEnd len="sm" w="sm" type="none"/>
+            <a:tailEnd len="sm" w="sm" type="none"/>
+          </a:ln>
+        </p:spPr>
+        <p:txBody>
+          <a:bodyPr anchorCtr="0" anchor="ctr" bIns="91425" lIns="91425" spcFirstLastPara="1" rIns="91425" wrap="square" tIns="91425">
+            <a:noAutofit/>
+          </a:bodyPr>
+          <a:lstStyle/>
+          <a:p>
+            <a:pPr indent="0" lvl="0" marL="0" rtl="0" algn="ctr">
+              <a:spcBef>
+                <a:spcPts val="0"/>
+              </a:spcBef>
+              <a:spcAft>
+                <a:spcPts val="0"/>
+              </a:spcAft>
+              <a:buNone/>
+            </a:pPr>
+            <a:r>
+              <a:rPr lang="en" sz="600"/>
+              <a:t>yt</a:t>
+            </a:r>
+            <a:r>
+              <a:rPr baseline="-25000" lang="en" sz="600"/>
+              <a:t>2</a:t>
+            </a:r>
+            <a:r>
+              <a:rPr lang="en" sz="600"/>
+              <a:t> = 4</a:t>
+            </a:r>
+            <a:endParaRPr sz="600"/>
+          </a:p>
+        </p:txBody>
+      </p:sp>
+      <p:cxnSp>
+        <p:nvCxnSpPr>
+          <p:cNvPr id="211" name="Google Shape;211;g3c89c144ce9_0_11"/>
+          <p:cNvCxnSpPr>
+            <a:stCxn id="202" idx="3"/>
+            <a:endCxn id="212" idx="2"/>
+          </p:cNvCxnSpPr>
+          <p:nvPr/>
+        </p:nvCxnSpPr>
+        <p:spPr>
+          <a:xfrm flipH="1" rot="10800000">
+            <a:off x="5078750" y="1965950"/>
+            <a:ext cx="237600" cy="147300"/>
+          </a:xfrm>
+          <a:prstGeom prst="curvedConnector2">
+            <a:avLst/>
+          </a:prstGeom>
+          <a:noFill/>
+          <a:ln cap="flat" cmpd="sng" w="9525">
+            <a:solidFill>
+              <a:srgbClr val="8E7CC3"/>
+            </a:solidFill>
+            <a:prstDash val="solid"/>
+            <a:round/>
+            <a:headEnd len="med" w="med" type="none"/>
+            <a:tailEnd len="med" w="med" type="triangle"/>
+          </a:ln>
+        </p:spPr>
+      </p:cxnSp>
+      <p:cxnSp>
+        <p:nvCxnSpPr>
+          <p:cNvPr id="213" name="Google Shape;213;g3c89c144ce9_0_11"/>
+          <p:cNvCxnSpPr>
+            <a:stCxn id="198" idx="0"/>
+            <a:endCxn id="210" idx="1"/>
+          </p:cNvCxnSpPr>
+          <p:nvPr/>
+        </p:nvCxnSpPr>
+        <p:spPr>
+          <a:xfrm rot="-5400000">
+            <a:off x="1537700" y="1933450"/>
+            <a:ext cx="111300" cy="479100"/>
+          </a:xfrm>
+          <a:prstGeom prst="curvedConnector2">
+            <a:avLst/>
+          </a:prstGeom>
+          <a:noFill/>
+          <a:ln cap="flat" cmpd="sng" w="9525">
+            <a:solidFill>
+              <a:srgbClr val="8E7CC3"/>
+            </a:solidFill>
+            <a:prstDash val="solid"/>
+            <a:round/>
+            <a:headEnd len="med" w="med" type="none"/>
+            <a:tailEnd len="med" w="med" type="none"/>
+          </a:ln>
+        </p:spPr>
+      </p:cxnSp>
+      <p:cxnSp>
+        <p:nvCxnSpPr>
+          <p:cNvPr id="214" name="Google Shape;214;g3c89c144ce9_0_11"/>
+          <p:cNvCxnSpPr>
+            <a:stCxn id="210" idx="3"/>
+            <a:endCxn id="215" idx="2"/>
+          </p:cNvCxnSpPr>
+          <p:nvPr/>
+        </p:nvCxnSpPr>
+        <p:spPr>
+          <a:xfrm flipH="1" rot="10800000">
+            <a:off x="2242100" y="1974300"/>
+            <a:ext cx="489600" cy="143100"/>
+          </a:xfrm>
+          <a:prstGeom prst="curvedConnector2">
+            <a:avLst/>
+          </a:prstGeom>
+          <a:noFill/>
+          <a:ln cap="flat" cmpd="sng" w="9525">
+            <a:solidFill>
+              <a:srgbClr val="8E7CC3"/>
+            </a:solidFill>
+            <a:prstDash val="solid"/>
+            <a:round/>
+            <a:headEnd len="med" w="med" type="none"/>
+            <a:tailEnd len="med" w="med" type="triangle"/>
+          </a:ln>
+        </p:spPr>
+      </p:cxnSp>
+      <p:sp>
+        <p:nvSpPr>
+          <p:cNvPr id="204" name="Google Shape;204;g3c89c144ce9_0_11"/>
+          <p:cNvSpPr/>
+          <p:nvPr/>
+        </p:nvSpPr>
+        <p:spPr>
+          <a:xfrm>
+            <a:off x="8136925" y="2043700"/>
+            <a:ext cx="452700" cy="130800"/>
+          </a:xfrm>
+          <a:prstGeom prst="rect">
+            <a:avLst/>
+          </a:prstGeom>
+          <a:noFill/>
+          <a:ln cap="flat" cmpd="sng" w="9525">
+            <a:solidFill>
+              <a:srgbClr val="8E7CC3"/>
+            </a:solidFill>
+            <a:prstDash val="solid"/>
+            <a:round/>
+            <a:headEnd len="sm" w="sm" type="none"/>
+            <a:tailEnd len="sm" w="sm" type="none"/>
+          </a:ln>
+        </p:spPr>
+        <p:txBody>
+          <a:bodyPr anchorCtr="0" anchor="ctr" bIns="91425" lIns="91425" spcFirstLastPara="1" rIns="91425" wrap="square" tIns="91425">
+            <a:noAutofit/>
+          </a:bodyPr>
+          <a:lstStyle/>
+          <a:p>
+            <a:pPr indent="0" lvl="0" marL="0" rtl="0" algn="ctr">
+              <a:spcBef>
+                <a:spcPts val="0"/>
+              </a:spcBef>
+              <a:spcAft>
+                <a:spcPts val="0"/>
+              </a:spcAft>
+              <a:buNone/>
+            </a:pPr>
+            <a:r>
+              <a:rPr lang="en" sz="600"/>
+              <a:t>yt</a:t>
+            </a:r>
+            <a:r>
+              <a:rPr baseline="-25000" lang="en" sz="600"/>
+              <a:t>t+1</a:t>
+            </a:r>
+            <a:r>
+              <a:rPr lang="en" sz="600"/>
+              <a:t> = 6</a:t>
+            </a:r>
+            <a:endParaRPr sz="600"/>
+          </a:p>
+        </p:txBody>
+      </p:sp>
+      <p:cxnSp>
+        <p:nvCxnSpPr>
+          <p:cNvPr id="216" name="Google Shape;216;g3c89c144ce9_0_11"/>
+          <p:cNvCxnSpPr>
+            <a:stCxn id="200" idx="0"/>
+            <a:endCxn id="204" idx="1"/>
+          </p:cNvCxnSpPr>
+          <p:nvPr/>
+        </p:nvCxnSpPr>
+        <p:spPr>
+          <a:xfrm rot="-5400000">
+            <a:off x="8065125" y="2156800"/>
+            <a:ext cx="119700" cy="24000"/>
+          </a:xfrm>
+          <a:prstGeom prst="curvedConnector2">
+            <a:avLst/>
+          </a:prstGeom>
+          <a:noFill/>
+          <a:ln cap="flat" cmpd="sng" w="9525">
+            <a:solidFill>
+              <a:srgbClr val="8E7CC3"/>
+            </a:solidFill>
+            <a:prstDash val="solid"/>
+            <a:round/>
+            <a:headEnd len="med" w="med" type="none"/>
+            <a:tailEnd len="med" w="med" type="none"/>
+          </a:ln>
+        </p:spPr>
+      </p:cxnSp>
+      <p:sp>
+        <p:nvSpPr>
+          <p:cNvPr id="217" name="Google Shape;217;g3c89c144ce9_0_11"/>
+          <p:cNvSpPr/>
+          <p:nvPr/>
+        </p:nvSpPr>
+        <p:spPr>
+          <a:xfrm>
+            <a:off x="1062975" y="1659825"/>
+            <a:ext cx="1911600" cy="329700"/>
+          </a:xfrm>
+          <a:prstGeom prst="roundRect">
+            <a:avLst>
+              <a:gd fmla="val 16667" name="adj"/>
+            </a:avLst>
+          </a:prstGeom>
+          <a:solidFill>
+            <a:srgbClr val="D9D2E9"/>
+          </a:solidFill>
+          <a:ln cap="flat" cmpd="sng" w="8700">
+            <a:solidFill>
+              <a:schemeClr val="dk2"/>
+            </a:solidFill>
+            <a:prstDash val="solid"/>
+            <a:round/>
+            <a:headEnd len="sm" w="sm" type="none"/>
+            <a:tailEnd len="sm" w="sm" type="none"/>
+          </a:ln>
+        </p:spPr>
+        <p:txBody>
+          <a:bodyPr anchorCtr="0" anchor="ctr" bIns="83450" lIns="83450" spcFirstLastPara="1" rIns="83450" wrap="square" tIns="83450">
+            <a:noAutofit/>
+          </a:bodyPr>
+          <a:lstStyle/>
+          <a:p>
+            <a:pPr indent="0" lvl="0" marL="0" rtl="0" algn="ctr">
+              <a:spcBef>
+                <a:spcPts val="0"/>
+              </a:spcBef>
+              <a:spcAft>
+                <a:spcPts val="0"/>
+              </a:spcAft>
+              <a:buNone/>
+            </a:pPr>
+            <a:r>
+              <a:rPr lang="en" sz="1277">
+                <a:latin typeface="Consolas"/>
+                <a:ea typeface="Consolas"/>
+                <a:cs typeface="Consolas"/>
+                <a:sym typeface="Consolas"/>
+              </a:rPr>
+              <a:t>tokenizer.decode(0) </a:t>
+            </a:r>
+            <a:endParaRPr sz="1277">
+              <a:latin typeface="Consolas"/>
+              <a:ea typeface="Consolas"/>
+              <a:cs typeface="Consolas"/>
+              <a:sym typeface="Consolas"/>
+            </a:endParaRPr>
+          </a:p>
+        </p:txBody>
+      </p:sp>
+      <p:sp>
+        <p:nvSpPr>
+          <p:cNvPr id="215" name="Google Shape;215;g3c89c144ce9_0_11"/>
+          <p:cNvSpPr/>
+          <p:nvPr/>
+        </p:nvSpPr>
+        <p:spPr>
+          <a:xfrm>
+            <a:off x="2617000" y="1675125"/>
+            <a:ext cx="229200" cy="299100"/>
+          </a:xfrm>
+          <a:prstGeom prst="rect">
+            <a:avLst/>
+          </a:prstGeom>
+          <a:noFill/>
+          <a:ln cap="flat" cmpd="sng" w="19050">
+            <a:solidFill>
+              <a:srgbClr val="8E7CC3"/>
+            </a:solidFill>
+            <a:prstDash val="solid"/>
+            <a:round/>
+            <a:headEnd len="sm" w="sm" type="none"/>
+            <a:tailEnd len="sm" w="sm" type="none"/>
+          </a:ln>
+        </p:spPr>
+        <p:txBody>
+          <a:bodyPr anchorCtr="0" anchor="ctr" bIns="91425" lIns="91425" spcFirstLastPara="1" rIns="91425" wrap="square" tIns="91425">
+            <a:noAutofit/>
+          </a:bodyPr>
+          <a:lstStyle/>
+          <a:p>
+            <a:pPr indent="0" lvl="0" marL="0" rtl="0" algn="ctr">
+              <a:spcBef>
+                <a:spcPts val="0"/>
+              </a:spcBef>
+              <a:spcAft>
+                <a:spcPts val="0"/>
+              </a:spcAft>
+              <a:buNone/>
+            </a:pPr>
+            <a:r>
+              <a:t/>
+            </a:r>
+            <a:endParaRPr/>
+          </a:p>
+        </p:txBody>
+      </p:sp>
+      <p:sp>
+        <p:nvSpPr>
+          <p:cNvPr id="218" name="Google Shape;218;g3c89c144ce9_0_11"/>
+          <p:cNvSpPr/>
+          <p:nvPr/>
+        </p:nvSpPr>
+        <p:spPr>
+          <a:xfrm>
+            <a:off x="3423550" y="1074400"/>
+            <a:ext cx="754500" cy="329700"/>
+          </a:xfrm>
+          <a:prstGeom prst="roundRect">
+            <a:avLst>
+              <a:gd fmla="val 16667" name="adj"/>
+            </a:avLst>
+          </a:prstGeom>
+          <a:solidFill>
+            <a:srgbClr val="E6B8AF"/>
+          </a:solidFill>
+          <a:ln cap="flat" cmpd="sng" w="8700">
+            <a:solidFill>
+              <a:srgbClr val="CC0000"/>
+            </a:solidFill>
+            <a:prstDash val="solid"/>
+            <a:round/>
+            <a:headEnd len="sm" w="sm" type="none"/>
+            <a:tailEnd len="sm" w="sm" type="none"/>
+          </a:ln>
+        </p:spPr>
+        <p:txBody>
+          <a:bodyPr anchorCtr="0" anchor="ctr" bIns="83450" lIns="83450" spcFirstLastPara="1" rIns="83450" wrap="square" tIns="83450">
+            <a:noAutofit/>
+          </a:bodyPr>
+          <a:lstStyle/>
+          <a:p>
+            <a:pPr indent="0" lvl="0" marL="0" rtl="0" algn="ctr">
+              <a:spcBef>
+                <a:spcPts val="0"/>
+              </a:spcBef>
+              <a:spcAft>
+                <a:spcPts val="0"/>
+              </a:spcAft>
+              <a:buNone/>
+            </a:pPr>
+            <a:r>
+              <a:rPr lang="en" sz="1277"/>
+              <a:t>“like”</a:t>
+            </a:r>
+            <a:endParaRPr sz="1277"/>
+          </a:p>
+        </p:txBody>
+      </p:sp>
+      <p:sp>
+        <p:nvSpPr>
+          <p:cNvPr id="212" name="Google Shape;212;g3c89c144ce9_0_11"/>
+          <p:cNvSpPr/>
+          <p:nvPr/>
+        </p:nvSpPr>
+        <p:spPr>
+          <a:xfrm>
+            <a:off x="5201825" y="1666825"/>
+            <a:ext cx="229200" cy="299100"/>
+          </a:xfrm>
+          <a:prstGeom prst="rect">
+            <a:avLst/>
+          </a:prstGeom>
+          <a:noFill/>
+          <a:ln cap="flat" cmpd="sng" w="19050">
+            <a:solidFill>
+              <a:srgbClr val="8E7CC3"/>
+            </a:solidFill>
+            <a:prstDash val="solid"/>
+            <a:round/>
+            <a:headEnd len="sm" w="sm" type="none"/>
+            <a:tailEnd len="sm" w="sm" type="none"/>
+          </a:ln>
+        </p:spPr>
+        <p:txBody>
+          <a:bodyPr anchorCtr="0" anchor="ctr" bIns="91425" lIns="91425" spcFirstLastPara="1" rIns="91425" wrap="square" tIns="91425">
+            <a:noAutofit/>
+          </a:bodyPr>
+          <a:lstStyle/>
+          <a:p>
+            <a:pPr indent="0" lvl="0" marL="0" rtl="0" algn="ctr">
+              <a:spcBef>
+                <a:spcPts val="0"/>
+              </a:spcBef>
+              <a:spcAft>
+                <a:spcPts val="0"/>
+              </a:spcAft>
+              <a:buNone/>
+            </a:pPr>
+            <a:r>
+              <a:t/>
+            </a:r>
+            <a:endParaRPr/>
+          </a:p>
+        </p:txBody>
+      </p:sp>
+      <p:sp>
+        <p:nvSpPr>
+          <p:cNvPr id="205" name="Google Shape;205;g3c89c144ce9_0_11"/>
+          <p:cNvSpPr/>
+          <p:nvPr/>
+        </p:nvSpPr>
+        <p:spPr>
+          <a:xfrm>
+            <a:off x="8413825" y="1673825"/>
+            <a:ext cx="229200" cy="299100"/>
+          </a:xfrm>
+          <a:prstGeom prst="rect">
+            <a:avLst/>
+          </a:prstGeom>
+          <a:noFill/>
+          <a:ln cap="flat" cmpd="sng" w="19050">
+            <a:solidFill>
+              <a:srgbClr val="8E7CC3"/>
+            </a:solidFill>
+            <a:prstDash val="solid"/>
+            <a:round/>
+            <a:headEnd len="sm" w="sm" type="none"/>
+            <a:tailEnd len="sm" w="sm" type="none"/>
+          </a:ln>
+        </p:spPr>
+        <p:txBody>
+          <a:bodyPr anchorCtr="0" anchor="ctr" bIns="91425" lIns="91425" spcFirstLastPara="1" rIns="91425" wrap="square" tIns="91425">
+            <a:noAutofit/>
+          </a:bodyPr>
+          <a:lstStyle/>
+          <a:p>
+            <a:pPr indent="0" lvl="0" marL="0" rtl="0" algn="ctr">
+              <a:spcBef>
+                <a:spcPts val="0"/>
+              </a:spcBef>
+              <a:spcAft>
+                <a:spcPts val="0"/>
+              </a:spcAft>
+              <a:buNone/>
+            </a:pPr>
+            <a:r>
+              <a:t/>
+            </a:r>
+            <a:endParaRPr/>
+          </a:p>
+        </p:txBody>
+      </p:sp>
+      <p:sp>
+        <p:nvSpPr>
+          <p:cNvPr id="219" name="Google Shape;219;g3c89c144ce9_0_11"/>
+          <p:cNvSpPr/>
+          <p:nvPr/>
+        </p:nvSpPr>
+        <p:spPr>
+          <a:xfrm>
+            <a:off x="4228250" y="1074400"/>
+            <a:ext cx="754500" cy="329700"/>
+          </a:xfrm>
+          <a:prstGeom prst="roundRect">
+            <a:avLst>
+              <a:gd fmla="val 16667" name="adj"/>
+            </a:avLst>
+          </a:prstGeom>
+          <a:solidFill>
+            <a:srgbClr val="E6B8AF"/>
+          </a:solidFill>
+          <a:ln cap="flat" cmpd="sng" w="8700">
+            <a:solidFill>
+              <a:srgbClr val="CC0000"/>
+            </a:solidFill>
+            <a:prstDash val="solid"/>
+            <a:round/>
+            <a:headEnd len="sm" w="sm" type="none"/>
+            <a:tailEnd len="sm" w="sm" type="none"/>
+          </a:ln>
+        </p:spPr>
+        <p:txBody>
+          <a:bodyPr anchorCtr="0" anchor="ctr" bIns="83450" lIns="83450" spcFirstLastPara="1" rIns="83450" wrap="square" tIns="83450">
+            <a:noAutofit/>
+          </a:bodyPr>
+          <a:lstStyle/>
+          <a:p>
+            <a:pPr indent="0" lvl="0" marL="0" rtl="0" algn="ctr">
+              <a:spcBef>
+                <a:spcPts val="0"/>
+              </a:spcBef>
+              <a:spcAft>
+                <a:spcPts val="0"/>
+              </a:spcAft>
+              <a:buNone/>
+            </a:pPr>
+            <a:r>
+              <a:rPr lang="en" sz="1277"/>
+              <a:t>“cute”</a:t>
+            </a:r>
+            <a:endParaRPr sz="1277"/>
+          </a:p>
+        </p:txBody>
+      </p:sp>
+      <p:sp>
+        <p:nvSpPr>
+          <p:cNvPr id="220" name="Google Shape;220;g3c89c144ce9_0_11"/>
+          <p:cNvSpPr/>
+          <p:nvPr/>
+        </p:nvSpPr>
+        <p:spPr>
+          <a:xfrm>
+            <a:off x="5562250" y="1074400"/>
+            <a:ext cx="877800" cy="329700"/>
+          </a:xfrm>
+          <a:prstGeom prst="roundRect">
+            <a:avLst>
+              <a:gd fmla="val 16667" name="adj"/>
+            </a:avLst>
+          </a:prstGeom>
+          <a:solidFill>
+            <a:srgbClr val="E6B8AF"/>
+          </a:solidFill>
+          <a:ln cap="flat" cmpd="sng" w="8700">
+            <a:solidFill>
+              <a:srgbClr val="CC0000"/>
+            </a:solidFill>
+            <a:prstDash val="solid"/>
+            <a:round/>
+            <a:headEnd len="sm" w="sm" type="none"/>
+            <a:tailEnd len="sm" w="sm" type="none"/>
+          </a:ln>
+        </p:spPr>
+        <p:txBody>
+          <a:bodyPr anchorCtr="0" anchor="ctr" bIns="83450" lIns="83450" spcFirstLastPara="1" rIns="83450" wrap="square" tIns="83450">
+            <a:noAutofit/>
+          </a:bodyPr>
+          <a:lstStyle/>
+          <a:p>
+            <a:pPr indent="0" lvl="0" marL="0" rtl="0" algn="ctr">
+              <a:spcBef>
+                <a:spcPts val="0"/>
+              </a:spcBef>
+              <a:spcAft>
+                <a:spcPts val="0"/>
+              </a:spcAft>
+              <a:buNone/>
+            </a:pPr>
+            <a:r>
+              <a:rPr lang="en" sz="1277"/>
+              <a:t>“puppies”</a:t>
+            </a:r>
+            <a:endParaRPr sz="1277"/>
+          </a:p>
+        </p:txBody>
+      </p:sp>
+      <p:sp>
+        <p:nvSpPr>
+          <p:cNvPr id="221" name="Google Shape;221;g3c89c144ce9_0_11"/>
+          <p:cNvSpPr/>
+          <p:nvPr/>
+        </p:nvSpPr>
+        <p:spPr>
+          <a:xfrm>
+            <a:off x="6096850" y="1651525"/>
+            <a:ext cx="384600" cy="329700"/>
+          </a:xfrm>
+          <a:prstGeom prst="roundRect">
+            <a:avLst>
+              <a:gd fmla="val 16667" name="adj"/>
+            </a:avLst>
+          </a:prstGeom>
+          <a:solidFill>
+            <a:srgbClr val="D9D2E9"/>
+          </a:solidFill>
+          <a:ln cap="flat" cmpd="sng" w="8700">
+            <a:solidFill>
+              <a:schemeClr val="dk2"/>
+            </a:solidFill>
+            <a:prstDash val="solid"/>
+            <a:round/>
+            <a:headEnd len="sm" w="sm" type="none"/>
+            <a:tailEnd len="sm" w="sm" type="none"/>
+          </a:ln>
+        </p:spPr>
+        <p:txBody>
+          <a:bodyPr anchorCtr="0" anchor="ctr" bIns="83450" lIns="83450" spcFirstLastPara="1" rIns="83450" wrap="square" tIns="83450">
+            <a:noAutofit/>
+          </a:bodyPr>
+          <a:lstStyle/>
+          <a:p>
+            <a:pPr indent="0" lvl="0" marL="0" rtl="0" algn="ctr">
+              <a:spcBef>
+                <a:spcPts val="0"/>
+              </a:spcBef>
+              <a:spcAft>
+                <a:spcPts val="0"/>
+              </a:spcAft>
+              <a:buNone/>
+            </a:pPr>
+            <a:r>
+              <a:rPr lang="en" sz="1277">
+                <a:latin typeface="Consolas"/>
+                <a:ea typeface="Consolas"/>
+                <a:cs typeface="Consolas"/>
+                <a:sym typeface="Consolas"/>
+              </a:rPr>
+              <a:t>…</a:t>
+            </a:r>
+            <a:endParaRPr sz="1277">
+              <a:latin typeface="Consolas"/>
+              <a:ea typeface="Consolas"/>
+              <a:cs typeface="Consolas"/>
+              <a:sym typeface="Consolas"/>
+            </a:endParaRPr>
+          </a:p>
+        </p:txBody>
+      </p:sp>
+      <p:sp>
+        <p:nvSpPr>
+          <p:cNvPr id="222" name="Google Shape;222;g3c89c144ce9_0_11"/>
+          <p:cNvSpPr/>
+          <p:nvPr/>
+        </p:nvSpPr>
+        <p:spPr>
+          <a:xfrm>
+            <a:off x="5032950" y="1074400"/>
+            <a:ext cx="479100" cy="329700"/>
+          </a:xfrm>
+          <a:prstGeom prst="roundRect">
+            <a:avLst>
+              <a:gd fmla="val 16667" name="adj"/>
+            </a:avLst>
+          </a:prstGeom>
+          <a:solidFill>
+            <a:srgbClr val="E6B8AF"/>
+          </a:solidFill>
+          <a:ln cap="flat" cmpd="sng" w="8700">
+            <a:solidFill>
+              <a:srgbClr val="CC0000"/>
+            </a:solidFill>
+            <a:prstDash val="solid"/>
+            <a:round/>
+            <a:headEnd len="sm" w="sm" type="none"/>
+            <a:tailEnd len="sm" w="sm" type="none"/>
+          </a:ln>
+        </p:spPr>
+        <p:txBody>
+          <a:bodyPr anchorCtr="0" anchor="ctr" bIns="83450" lIns="83450" spcFirstLastPara="1" rIns="83450" wrap="square" tIns="83450">
+            <a:noAutofit/>
+          </a:bodyPr>
+          <a:lstStyle/>
+          <a:p>
+            <a:pPr indent="0" lvl="0" marL="0" rtl="0" algn="ctr">
+              <a:spcBef>
+                <a:spcPts val="0"/>
+              </a:spcBef>
+              <a:spcAft>
+                <a:spcPts val="0"/>
+              </a:spcAft>
+              <a:buNone/>
+            </a:pPr>
+            <a:r>
+              <a:rPr lang="en" sz="1277"/>
+              <a:t>“...”</a:t>
+            </a:r>
+            <a:endParaRPr sz="1277"/>
+          </a:p>
+        </p:txBody>
+      </p:sp>
+      <p:sp>
+        <p:nvSpPr>
+          <p:cNvPr id="223" name="Google Shape;223;g3c89c144ce9_0_11"/>
+          <p:cNvSpPr/>
+          <p:nvPr/>
+        </p:nvSpPr>
+        <p:spPr>
+          <a:xfrm>
+            <a:off x="6174550" y="1666825"/>
+            <a:ext cx="229200" cy="299100"/>
+          </a:xfrm>
+          <a:prstGeom prst="rect">
+            <a:avLst/>
+          </a:prstGeom>
+          <a:noFill/>
+          <a:ln cap="flat" cmpd="sng" w="19050">
+            <a:solidFill>
+              <a:srgbClr val="3D85C6"/>
+            </a:solidFill>
+            <a:prstDash val="solid"/>
+            <a:round/>
+            <a:headEnd len="sm" w="sm" type="none"/>
+            <a:tailEnd len="sm" w="sm" type="none"/>
+          </a:ln>
+        </p:spPr>
+        <p:txBody>
+          <a:bodyPr anchorCtr="0" anchor="ctr" bIns="91425" lIns="91425" spcFirstLastPara="1" rIns="91425" wrap="square" tIns="91425">
+            <a:noAutofit/>
+          </a:bodyPr>
+          <a:lstStyle/>
+          <a:p>
+            <a:pPr indent="0" lvl="0" marL="0" rtl="0" algn="ctr">
+              <a:spcBef>
+                <a:spcPts val="0"/>
+              </a:spcBef>
+              <a:spcAft>
+                <a:spcPts val="0"/>
+              </a:spcAft>
+              <a:buNone/>
+            </a:pPr>
+            <a:r>
+              <a:t/>
+            </a:r>
+            <a:endParaRPr/>
+          </a:p>
+        </p:txBody>
+      </p:sp>
+      <p:sp>
+        <p:nvSpPr>
+          <p:cNvPr id="224" name="Google Shape;224;g3c89c144ce9_0_11"/>
+          <p:cNvSpPr/>
+          <p:nvPr/>
+        </p:nvSpPr>
+        <p:spPr>
+          <a:xfrm>
+            <a:off x="5120700" y="1088375"/>
+            <a:ext cx="303600" cy="299100"/>
+          </a:xfrm>
+          <a:prstGeom prst="rect">
+            <a:avLst/>
+          </a:prstGeom>
+          <a:noFill/>
+          <a:ln cap="flat" cmpd="sng" w="19050">
+            <a:solidFill>
+              <a:srgbClr val="3D85C6"/>
+            </a:solidFill>
+            <a:prstDash val="solid"/>
+            <a:round/>
+            <a:headEnd len="sm" w="sm" type="none"/>
+            <a:tailEnd len="sm" w="sm" type="none"/>
+          </a:ln>
+        </p:spPr>
+        <p:txBody>
+          <a:bodyPr anchorCtr="0" anchor="ctr" bIns="91425" lIns="91425" spcFirstLastPara="1" rIns="91425" wrap="square" tIns="91425">
+            <a:noAutofit/>
+          </a:bodyPr>
+          <a:lstStyle/>
+          <a:p>
+            <a:pPr indent="0" lvl="0" marL="0" rtl="0" algn="ctr">
+              <a:spcBef>
+                <a:spcPts val="0"/>
+              </a:spcBef>
+              <a:spcAft>
+                <a:spcPts val="0"/>
+              </a:spcAft>
+              <a:buNone/>
+            </a:pPr>
+            <a:r>
+              <a:t/>
+            </a:r>
+            <a:endParaRPr/>
+          </a:p>
+        </p:txBody>
+      </p:sp>
+      <p:cxnSp>
+        <p:nvCxnSpPr>
+          <p:cNvPr id="225" name="Google Shape;225;g3c89c144ce9_0_11"/>
+          <p:cNvCxnSpPr>
+            <a:stCxn id="207" idx="0"/>
+            <a:endCxn id="223" idx="2"/>
+          </p:cNvCxnSpPr>
+          <p:nvPr/>
+        </p:nvCxnSpPr>
+        <p:spPr>
+          <a:xfrm rot="-5400000">
+            <a:off x="6158050" y="2096950"/>
+            <a:ext cx="262800" cy="600"/>
+          </a:xfrm>
+          <a:prstGeom prst="curvedConnector3">
+            <a:avLst>
+              <a:gd fmla="val 49986" name="adj1"/>
+            </a:avLst>
+          </a:prstGeom>
+          <a:noFill/>
+          <a:ln cap="flat" cmpd="sng" w="19050">
+            <a:solidFill>
+              <a:srgbClr val="3D85C6"/>
+            </a:solidFill>
+            <a:prstDash val="solid"/>
+            <a:round/>
+            <a:headEnd len="med" w="med" type="none"/>
+            <a:tailEnd len="med" w="med" type="triangle"/>
+          </a:ln>
+        </p:spPr>
+      </p:cxnSp>
+      <p:cxnSp>
+        <p:nvCxnSpPr>
+          <p:cNvPr id="226" name="Google Shape;226;g3c89c144ce9_0_11"/>
+          <p:cNvCxnSpPr>
+            <a:stCxn id="223" idx="0"/>
+            <a:endCxn id="224" idx="2"/>
+          </p:cNvCxnSpPr>
+          <p:nvPr/>
+        </p:nvCxnSpPr>
+        <p:spPr>
+          <a:xfrm flipH="1" rot="5400000">
+            <a:off x="5641150" y="1018825"/>
+            <a:ext cx="279300" cy="1016700"/>
+          </a:xfrm>
+          <a:prstGeom prst="curvedConnector3">
+            <a:avLst>
+              <a:gd fmla="val 50009" name="adj1"/>
+            </a:avLst>
+          </a:prstGeom>
+          <a:noFill/>
+          <a:ln cap="flat" cmpd="sng" w="19050">
+            <a:solidFill>
+              <a:srgbClr val="3D85C6"/>
+            </a:solidFill>
+            <a:prstDash val="solid"/>
+            <a:round/>
+            <a:headEnd len="med" w="med" type="none"/>
+            <a:tailEnd len="med" w="med" type="triangle"/>
+          </a:ln>
+        </p:spPr>
+      </p:cxnSp>
+      <p:cxnSp>
+        <p:nvCxnSpPr>
+          <p:cNvPr id="227" name="Google Shape;227;g3c89c144ce9_0_11"/>
+          <p:cNvCxnSpPr>
+            <a:stCxn id="217" idx="0"/>
+            <a:endCxn id="218" idx="2"/>
+          </p:cNvCxnSpPr>
+          <p:nvPr/>
+        </p:nvCxnSpPr>
+        <p:spPr>
+          <a:xfrm rot="-5400000">
+            <a:off x="2781975" y="641025"/>
+            <a:ext cx="255600" cy="1782000"/>
+          </a:xfrm>
+          <a:prstGeom prst="curvedConnector3">
+            <a:avLst>
+              <a:gd fmla="val 50024" name="adj1"/>
+            </a:avLst>
+          </a:prstGeom>
+          <a:noFill/>
+          <a:ln cap="flat" cmpd="sng" w="9525">
+            <a:solidFill>
+              <a:srgbClr val="CC0000"/>
+            </a:solidFill>
+            <a:prstDash val="solid"/>
+            <a:round/>
+            <a:headEnd len="med" w="med" type="none"/>
+            <a:tailEnd len="med" w="med" type="triangle"/>
+          </a:ln>
+        </p:spPr>
+      </p:cxnSp>
+      <p:cxnSp>
+        <p:nvCxnSpPr>
+          <p:cNvPr id="228" name="Google Shape;228;g3c89c144ce9_0_11"/>
+          <p:cNvCxnSpPr>
+            <a:stCxn id="143" idx="0"/>
+            <a:endCxn id="219" idx="2"/>
+          </p:cNvCxnSpPr>
+          <p:nvPr/>
+        </p:nvCxnSpPr>
+        <p:spPr>
+          <a:xfrm rot="-5400000">
+            <a:off x="4482050" y="1527475"/>
+            <a:ext cx="247500" cy="600"/>
+          </a:xfrm>
+          <a:prstGeom prst="curvedConnector3">
+            <a:avLst>
+              <a:gd fmla="val 49985" name="adj1"/>
+            </a:avLst>
+          </a:prstGeom>
+          <a:noFill/>
+          <a:ln cap="flat" cmpd="sng" w="9525">
+            <a:solidFill>
+              <a:srgbClr val="CC0000"/>
+            </a:solidFill>
+            <a:prstDash val="solid"/>
+            <a:round/>
+            <a:headEnd len="med" w="med" type="none"/>
+            <a:tailEnd len="med" w="med" type="triangle"/>
+          </a:ln>
+        </p:spPr>
+      </p:cxnSp>
+      <p:cxnSp>
+        <p:nvCxnSpPr>
+          <p:cNvPr id="229" name="Google Shape;229;g3c89c144ce9_0_11"/>
+          <p:cNvCxnSpPr>
+            <a:stCxn id="142" idx="0"/>
+            <a:endCxn id="220" idx="2"/>
+          </p:cNvCxnSpPr>
+          <p:nvPr/>
+        </p:nvCxnSpPr>
+        <p:spPr>
+          <a:xfrm flipH="1" rot="5400000">
+            <a:off x="6780375" y="624975"/>
+            <a:ext cx="255600" cy="1814100"/>
+          </a:xfrm>
+          <a:prstGeom prst="curvedConnector3">
+            <a:avLst>
+              <a:gd fmla="val 50024" name="adj1"/>
+            </a:avLst>
+          </a:prstGeom>
+          <a:noFill/>
+          <a:ln cap="flat" cmpd="sng" w="9525">
+            <a:solidFill>
+              <a:srgbClr val="CC0000"/>
+            </a:solidFill>
+            <a:prstDash val="solid"/>
+            <a:round/>
+            <a:headEnd len="med" w="med" type="none"/>
+            <a:tailEnd len="med" w="med" type="triangle"/>
+          </a:ln>
+        </p:spPr>
+      </p:cxnSp>
+      <p:pic>
+        <p:nvPicPr>
+          <p:cNvPr id="230" name="Google Shape;230;g3c89c144ce9_0_11"/>
+          <p:cNvPicPr preferRelativeResize="0"/>
+          <p:nvPr/>
+        </p:nvPicPr>
+        <p:blipFill rotWithShape="1">
+          <a:blip r:embed="rId3">
+            <a:alphaModFix/>
+          </a:blip>
+          <a:srcRect b="0" l="317" r="327" t="0"/>
+          <a:stretch/>
+        </p:blipFill>
+        <p:spPr>
+          <a:xfrm>
+            <a:off x="6720576" y="5143269"/>
+            <a:ext cx="1577100" cy="1515976"/>
+          </a:xfrm>
+          <a:prstGeom prst="rect">
+            <a:avLst/>
+          </a:prstGeom>
+          <a:noFill/>
+          <a:ln cap="flat" cmpd="sng" w="28575">
+            <a:solidFill>
+              <a:srgbClr val="3D85C6"/>
+            </a:solidFill>
+            <a:prstDash val="solid"/>
+            <a:round/>
+            <a:headEnd len="sm" w="sm" type="none"/>
+            <a:tailEnd len="sm" w="sm" type="none"/>
+          </a:ln>
+        </p:spPr>
+      </p:pic>
+      <p:cxnSp>
+        <p:nvCxnSpPr>
+          <p:cNvPr id="231" name="Google Shape;231;g3c89c144ce9_0_11"/>
+          <p:cNvCxnSpPr>
+            <a:stCxn id="230" idx="0"/>
+            <a:endCxn id="207" idx="2"/>
+          </p:cNvCxnSpPr>
+          <p:nvPr/>
+        </p:nvCxnSpPr>
+        <p:spPr>
+          <a:xfrm flipH="1" rot="5400000">
+            <a:off x="6625476" y="4259619"/>
+            <a:ext cx="547200" cy="1220100"/>
+          </a:xfrm>
+          <a:prstGeom prst="curvedConnector3">
+            <a:avLst>
+              <a:gd fmla="val 50011" name="adj1"/>
+            </a:avLst>
+          </a:prstGeom>
+          <a:noFill/>
+          <a:ln cap="flat" cmpd="sng" w="19050">
+            <a:solidFill>
+              <a:srgbClr val="3D85C6"/>
+            </a:solidFill>
+            <a:prstDash val="solid"/>
+            <a:round/>
+            <a:headEnd len="med" w="med" type="none"/>
+            <a:tailEnd len="med" w="med" type="triangle"/>
+          </a:ln>
+        </p:spPr>
+      </p:cxnSp>
     </p:spTree>
   </p:cSld>
   <p:clrMapOvr>
@@ -6872,187 +11369,7 @@
       </p:grpSpPr>
       <p:sp>
         <p:nvSpPr>
-          <p:cNvPr id="40" name="Google Shape;40;g3bdae2bb03d_0_50"/>
-          <p:cNvSpPr txBox="1"/>
-          <p:nvPr>
-            <p:ph type="title"/>
-          </p:nvPr>
-        </p:nvSpPr>
-        <p:spPr>
-          <a:xfrm>
-            <a:off x="457200" y="274638"/>
-            <a:ext cx="8229600" cy="1143000"/>
-          </a:xfrm>
-          <a:prstGeom prst="rect">
-            <a:avLst/>
-          </a:prstGeom>
-          <a:noFill/>
-          <a:ln>
-            <a:noFill/>
-          </a:ln>
-        </p:spPr>
-        <p:txBody>
-          <a:bodyPr anchorCtr="0" anchor="b" bIns="91425" lIns="91425" spcFirstLastPara="1" rIns="91425" wrap="square" tIns="91425">
-            <a:noAutofit/>
-          </a:bodyPr>
-          <a:lstStyle/>
-          <a:p>
-            <a:pPr indent="0" lvl="0" marL="0" rtl="0" algn="l">
-              <a:lnSpc>
-                <a:spcPct val="100000"/>
-              </a:lnSpc>
-              <a:spcBef>
-                <a:spcPts val="0"/>
-              </a:spcBef>
-              <a:spcAft>
-                <a:spcPts val="0"/>
-              </a:spcAft>
-              <a:buSzPts val="3600"/>
-              <a:buNone/>
-            </a:pPr>
-            <a:r>
-              <a:rPr lang="en">
-                <a:solidFill>
-                  <a:srgbClr val="465510"/>
-                </a:solidFill>
-              </a:rPr>
-              <a:t>Programming Practice 01 Solution</a:t>
-            </a:r>
-            <a:endParaRPr>
-              <a:solidFill>
-                <a:srgbClr val="465510"/>
-              </a:solidFill>
-            </a:endParaRPr>
-          </a:p>
-        </p:txBody>
-      </p:sp>
-      <p:pic>
-        <p:nvPicPr>
-          <p:cNvPr id="41" name="Google Shape;41;g3bdae2bb03d_0_50" title="Screenshot 2026-02-12 at 7.09.05 AM.png"/>
-          <p:cNvPicPr preferRelativeResize="0"/>
-          <p:nvPr/>
-        </p:nvPicPr>
-        <p:blipFill rotWithShape="1">
-          <a:blip r:embed="rId3">
-            <a:alphaModFix/>
-          </a:blip>
-          <a:srcRect b="0" l="0" r="0" t="0"/>
-          <a:stretch/>
-        </p:blipFill>
-        <p:spPr>
-          <a:xfrm>
-            <a:off x="1393900" y="4198947"/>
-            <a:ext cx="6356200" cy="2044575"/>
-          </a:xfrm>
-          <a:prstGeom prst="rect">
-            <a:avLst/>
-          </a:prstGeom>
-          <a:noFill/>
-          <a:ln cap="flat" cmpd="sng" w="38100">
-            <a:solidFill>
-              <a:srgbClr val="465510"/>
-            </a:solidFill>
-            <a:prstDash val="solid"/>
-            <a:round/>
-            <a:headEnd len="sm" w="sm" type="none"/>
-            <a:tailEnd len="sm" w="sm" type="none"/>
-          </a:ln>
-        </p:spPr>
-      </p:pic>
-      <p:pic>
-        <p:nvPicPr>
-          <p:cNvPr id="42" name="Google Shape;42;g3bdae2bb03d_0_50" title="Screenshot 2026-02-12 at 7.09.59 AM.png"/>
-          <p:cNvPicPr preferRelativeResize="0"/>
-          <p:nvPr/>
-        </p:nvPicPr>
-        <p:blipFill rotWithShape="1">
-          <a:blip r:embed="rId4">
-            <a:alphaModFix/>
-          </a:blip>
-          <a:srcRect b="0" l="0" r="0" t="0"/>
-          <a:stretch/>
-        </p:blipFill>
-        <p:spPr>
-          <a:xfrm>
-            <a:off x="152400" y="1570038"/>
-            <a:ext cx="5086350" cy="2476500"/>
-          </a:xfrm>
-          <a:prstGeom prst="rect">
-            <a:avLst/>
-          </a:prstGeom>
-          <a:noFill/>
-          <a:ln cap="flat" cmpd="sng" w="38100">
-            <a:solidFill>
-              <a:srgbClr val="465510"/>
-            </a:solidFill>
-            <a:prstDash val="solid"/>
-            <a:round/>
-            <a:headEnd len="sm" w="sm" type="none"/>
-            <a:tailEnd len="sm" w="sm" type="none"/>
-          </a:ln>
-        </p:spPr>
-      </p:pic>
-      <p:pic>
-        <p:nvPicPr>
-          <p:cNvPr id="43" name="Google Shape;43;g3bdae2bb03d_0_50" title="Screenshot 2026-02-12 at 7.11.05 AM.png"/>
-          <p:cNvPicPr preferRelativeResize="0"/>
-          <p:nvPr/>
-        </p:nvPicPr>
-        <p:blipFill rotWithShape="1">
-          <a:blip r:embed="rId5">
-            <a:alphaModFix/>
-          </a:blip>
-          <a:srcRect b="0" l="0" r="0" t="0"/>
-          <a:stretch/>
-        </p:blipFill>
-        <p:spPr>
-          <a:xfrm>
-            <a:off x="5391150" y="1653325"/>
-            <a:ext cx="3600450" cy="2309927"/>
-          </a:xfrm>
-          <a:prstGeom prst="rect">
-            <a:avLst/>
-          </a:prstGeom>
-          <a:noFill/>
-          <a:ln cap="flat" cmpd="sng" w="38100">
-            <a:solidFill>
-              <a:srgbClr val="465510"/>
-            </a:solidFill>
-            <a:prstDash val="solid"/>
-            <a:round/>
-            <a:headEnd len="sm" w="sm" type="none"/>
-            <a:tailEnd len="sm" w="sm" type="none"/>
-          </a:ln>
-        </p:spPr>
-      </p:pic>
-    </p:spTree>
-  </p:cSld>
-  <p:clrMapOvr>
-    <a:masterClrMapping/>
-  </p:clrMapOvr>
-</p:sld>
-</file>
-
-<file path=ppt/slides/slide3.xml><?xml version="1.0" encoding="utf-8"?>
-<p:sld xmlns:a="http://schemas.openxmlformats.org/drawingml/2006/main" xmlns:r="http://schemas.openxmlformats.org/officeDocument/2006/relationships" xmlns:mc="http://schemas.openxmlformats.org/markup-compatibility/2006" xmlns:mv="urn:schemas-microsoft-com:mac:vml" xmlns:p="http://schemas.openxmlformats.org/presentationml/2006/main" xmlns:c="http://schemas.openxmlformats.org/drawingml/2006/chart" xmlns:dgm="http://schemas.openxmlformats.org/drawingml/2006/diagram" xmlns:o="urn:schemas-microsoft-com:office:office" xmlns:v="urn:schemas-microsoft-com:vml" xmlns:pvml="urn:schemas-microsoft-com:office:powerpoint" xmlns:com="http://schemas.openxmlformats.org/drawingml/2006/compatibility" xmlns:p14="http://schemas.microsoft.com/office/powerpoint/2010/main" xmlns:p15="http://schemas.microsoft.com/office/powerpoint/2012/main" xmlns:ahyp="http://schemas.microsoft.com/office/drawing/2018/hyperlinkcolor">
-  <p:cSld>
-    <p:spTree>
-      <p:nvGrpSpPr>
-        <p:cNvPr id="47" name="Shape 47"/>
-        <p:cNvGrpSpPr/>
-        <p:nvPr/>
-      </p:nvGrpSpPr>
-      <p:grpSpPr>
-        <a:xfrm>
-          <a:off x="0" y="0"/>
-          <a:ext cx="0" cy="0"/>
-          <a:chOff x="0" y="0"/>
-          <a:chExt cx="0" cy="0"/>
-        </a:xfrm>
-      </p:grpSpPr>
-      <p:sp>
-        <p:nvSpPr>
-          <p:cNvPr id="48" name="Google Shape;48;g3bbeee67e43_0_26"/>
+          <p:cNvPr id="40" name="Google Shape;40;g3bbeee67e43_0_26"/>
           <p:cNvSpPr txBox="1"/>
           <p:nvPr>
             <p:ph type="ctrTitle"/>
@@ -7141,12 +11458,12 @@
 </p:sld>
 </file>
 
-<file path=ppt/slides/slide4.xml><?xml version="1.0" encoding="utf-8"?>
+<file path=ppt/slides/slide3.xml><?xml version="1.0" encoding="utf-8"?>
 <p:sld xmlns:a="http://schemas.openxmlformats.org/drawingml/2006/main" xmlns:r="http://schemas.openxmlformats.org/officeDocument/2006/relationships" xmlns:mc="http://schemas.openxmlformats.org/markup-compatibility/2006" xmlns:mv="urn:schemas-microsoft-com:mac:vml" xmlns:p="http://schemas.openxmlformats.org/presentationml/2006/main" xmlns:c="http://schemas.openxmlformats.org/drawingml/2006/chart" xmlns:dgm="http://schemas.openxmlformats.org/drawingml/2006/diagram" xmlns:o="urn:schemas-microsoft-com:office:office" xmlns:v="urn:schemas-microsoft-com:vml" xmlns:pvml="urn:schemas-microsoft-com:office:powerpoint" xmlns:com="http://schemas.openxmlformats.org/drawingml/2006/compatibility" xmlns:p14="http://schemas.microsoft.com/office/powerpoint/2010/main" xmlns:p15="http://schemas.microsoft.com/office/powerpoint/2012/main" xmlns:ahyp="http://schemas.microsoft.com/office/drawing/2018/hyperlinkcolor">
   <p:cSld>
     <p:spTree>
       <p:nvGrpSpPr>
-        <p:cNvPr id="52" name="Shape 52"/>
+        <p:cNvPr id="44" name="Shape 44"/>
         <p:cNvGrpSpPr/>
         <p:nvPr/>
       </p:nvGrpSpPr>
@@ -7160,7 +11477,7 @@
       </p:grpSpPr>
       <p:sp>
         <p:nvSpPr>
-          <p:cNvPr id="53" name="Google Shape;53;g3bd1f6d9d27_0_3"/>
+          <p:cNvPr id="45" name="Google Shape;45;g3bd1f6d9d27_0_3"/>
           <p:cNvSpPr/>
           <p:nvPr/>
         </p:nvSpPr>
@@ -7223,7 +11540,7 @@
       </p:sp>
       <p:sp>
         <p:nvSpPr>
-          <p:cNvPr id="54" name="Google Shape;54;g3bd1f6d9d27_0_3"/>
+          <p:cNvPr id="46" name="Google Shape;46;g3bd1f6d9d27_0_3"/>
           <p:cNvSpPr txBox="1"/>
           <p:nvPr>
             <p:ph type="title"/>
@@ -7271,7 +11588,7 @@
       </p:sp>
       <p:pic>
         <p:nvPicPr>
-          <p:cNvPr id="55" name="Google Shape;55;g3bd1f6d9d27_0_3"/>
+          <p:cNvPr id="47" name="Google Shape;47;g3bd1f6d9d27_0_3"/>
           <p:cNvPicPr preferRelativeResize="0"/>
           <p:nvPr/>
         </p:nvPicPr>
@@ -7298,7 +11615,7 @@
       </p:pic>
       <p:sp>
         <p:nvSpPr>
-          <p:cNvPr id="56" name="Google Shape;56;g3bd1f6d9d27_0_3"/>
+          <p:cNvPr id="48" name="Google Shape;48;g3bd1f6d9d27_0_3"/>
           <p:cNvSpPr/>
           <p:nvPr/>
         </p:nvSpPr>
@@ -7361,7 +11678,7 @@
       </p:sp>
       <p:sp>
         <p:nvSpPr>
-          <p:cNvPr id="57" name="Google Shape;57;g3bd1f6d9d27_0_3"/>
+          <p:cNvPr id="49" name="Google Shape;49;g3bd1f6d9d27_0_3"/>
           <p:cNvSpPr/>
           <p:nvPr/>
         </p:nvSpPr>
@@ -7424,7 +11741,7 @@
       </p:sp>
       <p:pic>
         <p:nvPicPr>
-          <p:cNvPr id="58" name="Google Shape;58;g3bd1f6d9d27_0_3" title="Screenshot 2026-02-11 at 7.24.00 AM.png"/>
+          <p:cNvPr id="50" name="Google Shape;50;g3bd1f6d9d27_0_3" title="Screenshot 2026-02-11 at 7.24.00 AM.png"/>
           <p:cNvPicPr preferRelativeResize="0"/>
           <p:nvPr/>
         </p:nvPicPr>
@@ -7451,7 +11768,7 @@
       </p:pic>
       <p:sp>
         <p:nvSpPr>
-          <p:cNvPr id="59" name="Google Shape;59;g3bd1f6d9d27_0_3"/>
+          <p:cNvPr id="51" name="Google Shape;51;g3bd1f6d9d27_0_3"/>
           <p:cNvSpPr/>
           <p:nvPr/>
         </p:nvSpPr>
@@ -7514,7 +11831,7 @@
       </p:sp>
       <p:pic>
         <p:nvPicPr>
-          <p:cNvPr id="60" name="Google Shape;60;g3bd1f6d9d27_0_3" title="Screenshot 2026-02-11 at 7.25.28 AM.png"/>
+          <p:cNvPr id="52" name="Google Shape;52;g3bd1f6d9d27_0_3" title="Screenshot 2026-02-11 at 7.25.28 AM.png"/>
           <p:cNvPicPr preferRelativeResize="0"/>
           <p:nvPr/>
         </p:nvPicPr>
@@ -7541,7 +11858,7 @@
       </p:pic>
       <p:pic>
         <p:nvPicPr>
-          <p:cNvPr id="61" name="Google Shape;61;g3bd1f6d9d27_0_3" title="Screenshot 2026-02-11 at 7.25.39 AM.png"/>
+          <p:cNvPr id="53" name="Google Shape;53;g3bd1f6d9d27_0_3" title="Screenshot 2026-02-11 at 7.25.39 AM.png"/>
           <p:cNvPicPr preferRelativeResize="0"/>
           <p:nvPr/>
         </p:nvPicPr>
@@ -7568,10 +11885,10 @@
       </p:pic>
       <p:cxnSp>
         <p:nvCxnSpPr>
-          <p:cNvPr id="62" name="Google Shape;62;g3bd1f6d9d27_0_3"/>
+          <p:cNvPr id="54" name="Google Shape;54;g3bd1f6d9d27_0_3"/>
           <p:cNvCxnSpPr>
-            <a:stCxn id="56" idx="1"/>
-            <a:endCxn id="58" idx="0"/>
+            <a:stCxn id="48" idx="1"/>
+            <a:endCxn id="50" idx="0"/>
           </p:cNvCxnSpPr>
           <p:nvPr/>
         </p:nvCxnSpPr>
@@ -7600,10 +11917,10 @@
       </p:cxnSp>
       <p:cxnSp>
         <p:nvCxnSpPr>
-          <p:cNvPr id="63" name="Google Shape;63;g3bd1f6d9d27_0_3"/>
+          <p:cNvPr id="55" name="Google Shape;55;g3bd1f6d9d27_0_3"/>
           <p:cNvCxnSpPr>
-            <a:stCxn id="59" idx="3"/>
-            <a:endCxn id="60" idx="0"/>
+            <a:stCxn id="51" idx="3"/>
+            <a:endCxn id="52" idx="0"/>
           </p:cNvCxnSpPr>
           <p:nvPr/>
         </p:nvCxnSpPr>
@@ -7632,10 +11949,10 @@
       </p:cxnSp>
       <p:cxnSp>
         <p:nvCxnSpPr>
-          <p:cNvPr id="64" name="Google Shape;64;g3bd1f6d9d27_0_3"/>
+          <p:cNvPr id="56" name="Google Shape;56;g3bd1f6d9d27_0_3"/>
           <p:cNvCxnSpPr>
-            <a:stCxn id="57" idx="3"/>
-            <a:endCxn id="61" idx="0"/>
+            <a:stCxn id="49" idx="3"/>
+            <a:endCxn id="53" idx="0"/>
           </p:cNvCxnSpPr>
           <p:nvPr/>
         </p:nvCxnSpPr>
@@ -7661,7 +11978,7 @@
       </p:cxnSp>
       <p:sp>
         <p:nvSpPr>
-          <p:cNvPr id="65" name="Google Shape;65;g3bd1f6d9d27_0_3"/>
+          <p:cNvPr id="57" name="Google Shape;57;g3bd1f6d9d27_0_3"/>
           <p:cNvSpPr txBox="1"/>
           <p:nvPr/>
         </p:nvSpPr>
@@ -7727,7 +12044,7 @@
       </p:sp>
       <p:sp>
         <p:nvSpPr>
-          <p:cNvPr id="66" name="Google Shape;66;g3bd1f6d9d27_0_3"/>
+          <p:cNvPr id="58" name="Google Shape;58;g3bd1f6d9d27_0_3"/>
           <p:cNvSpPr txBox="1"/>
           <p:nvPr/>
         </p:nvSpPr>
@@ -7793,7 +12110,7 @@
       </p:sp>
       <p:sp>
         <p:nvSpPr>
-          <p:cNvPr id="67" name="Google Shape;67;g3bd1f6d9d27_0_3"/>
+          <p:cNvPr id="59" name="Google Shape;59;g3bd1f6d9d27_0_3"/>
           <p:cNvSpPr txBox="1"/>
           <p:nvPr/>
         </p:nvSpPr>
@@ -7859,7 +12176,7 @@
       </p:sp>
       <p:sp>
         <p:nvSpPr>
-          <p:cNvPr id="68" name="Google Shape;68;g3bd1f6d9d27_0_3"/>
+          <p:cNvPr id="60" name="Google Shape;60;g3bd1f6d9d27_0_3"/>
           <p:cNvSpPr txBox="1"/>
           <p:nvPr/>
         </p:nvSpPr>
@@ -7925,7 +12242,7 @@
       </p:sp>
       <p:sp>
         <p:nvSpPr>
-          <p:cNvPr id="69" name="Google Shape;69;g3bd1f6d9d27_0_3"/>
+          <p:cNvPr id="61" name="Google Shape;61;g3bd1f6d9d27_0_3"/>
           <p:cNvSpPr txBox="1"/>
           <p:nvPr/>
         </p:nvSpPr>
@@ -7991,7 +12308,7 @@
       </p:sp>
       <p:sp>
         <p:nvSpPr>
-          <p:cNvPr id="70" name="Google Shape;70;g3bd1f6d9d27_0_3"/>
+          <p:cNvPr id="62" name="Google Shape;62;g3bd1f6d9d27_0_3"/>
           <p:cNvSpPr txBox="1"/>
           <p:nvPr/>
         </p:nvSpPr>
@@ -8081,7 +12398,7 @@
       </p:sp>
       <p:pic>
         <p:nvPicPr>
-          <p:cNvPr id="71" name="Google Shape;71;g3bd1f6d9d27_0_3"/>
+          <p:cNvPr id="63" name="Google Shape;63;g3bd1f6d9d27_0_3"/>
           <p:cNvPicPr preferRelativeResize="0"/>
           <p:nvPr/>
         </p:nvPicPr>
@@ -8108,7 +12425,7 @@
       </p:pic>
       <p:sp>
         <p:nvSpPr>
-          <p:cNvPr id="72" name="Google Shape;72;g3bd1f6d9d27_0_3"/>
+          <p:cNvPr id="64" name="Google Shape;64;g3bd1f6d9d27_0_3"/>
           <p:cNvSpPr/>
           <p:nvPr/>
         </p:nvSpPr>
@@ -8171,7 +12488,7 @@
       </p:sp>
       <p:sp>
         <p:nvSpPr>
-          <p:cNvPr id="73" name="Google Shape;73;g3bd1f6d9d27_0_3"/>
+          <p:cNvPr id="65" name="Google Shape;65;g3bd1f6d9d27_0_3"/>
           <p:cNvSpPr/>
           <p:nvPr/>
         </p:nvSpPr>
@@ -8234,10 +12551,10 @@
       </p:sp>
       <p:cxnSp>
         <p:nvCxnSpPr>
-          <p:cNvPr id="74" name="Google Shape;74;g3bd1f6d9d27_0_3"/>
+          <p:cNvPr id="66" name="Google Shape;66;g3bd1f6d9d27_0_3"/>
           <p:cNvCxnSpPr>
-            <a:stCxn id="72" idx="2"/>
-            <a:endCxn id="73" idx="0"/>
+            <a:stCxn id="64" idx="2"/>
+            <a:endCxn id="65" idx="0"/>
           </p:cNvCxnSpPr>
           <p:nvPr/>
         </p:nvCxnSpPr>
@@ -8265,14 +12582,448 @@
       </p:cxnSp>
       <p:sp>
         <p:nvSpPr>
+          <p:cNvPr id="67" name="Google Shape;67;g3bd1f6d9d27_0_3"/>
+          <p:cNvSpPr/>
+          <p:nvPr/>
+        </p:nvSpPr>
+        <p:spPr>
+          <a:xfrm>
+            <a:off x="1675125" y="3575375"/>
+            <a:ext cx="323100" cy="506700"/>
+          </a:xfrm>
+          <a:prstGeom prst="rect">
+            <a:avLst/>
+          </a:prstGeom>
+          <a:noFill/>
+          <a:ln cap="flat" cmpd="sng" w="28575">
+            <a:solidFill>
+              <a:srgbClr val="5AABBC"/>
+            </a:solidFill>
+            <a:prstDash val="solid"/>
+            <a:round/>
+            <a:headEnd len="sm" w="sm" type="none"/>
+            <a:tailEnd len="sm" w="sm" type="none"/>
+          </a:ln>
+        </p:spPr>
+        <p:txBody>
+          <a:bodyPr anchorCtr="0" anchor="ctr" bIns="91425" lIns="91425" spcFirstLastPara="1" rIns="91425" wrap="square" tIns="91425">
+            <a:noAutofit/>
+          </a:bodyPr>
+          <a:lstStyle/>
+          <a:p>
+            <a:pPr indent="0" lvl="0" marL="0" marR="0" rtl="0" algn="ctr">
+              <a:lnSpc>
+                <a:spcPct val="100000"/>
+              </a:lnSpc>
+              <a:spcBef>
+                <a:spcPts val="0"/>
+              </a:spcBef>
+              <a:spcAft>
+                <a:spcPts val="0"/>
+              </a:spcAft>
+              <a:buClr>
+                <a:srgbClr val="000000"/>
+              </a:buClr>
+              <a:buSzPts val="1400"/>
+              <a:buFont typeface="Arial"/>
+              <a:buNone/>
+            </a:pPr>
+            <a:r>
+              <a:t/>
+            </a:r>
+            <a:endParaRPr b="0" i="0" sz="1400" u="none" cap="none" strike="noStrike">
+              <a:solidFill>
+                <a:srgbClr val="000000"/>
+              </a:solidFill>
+              <a:latin typeface="Arial"/>
+              <a:ea typeface="Arial"/>
+              <a:cs typeface="Arial"/>
+              <a:sym typeface="Arial"/>
+            </a:endParaRPr>
+          </a:p>
+        </p:txBody>
+      </p:sp>
+      <p:sp>
+        <p:nvSpPr>
+          <p:cNvPr id="68" name="Google Shape;68;g3bd1f6d9d27_0_3"/>
+          <p:cNvSpPr/>
+          <p:nvPr/>
+        </p:nvSpPr>
+        <p:spPr>
+          <a:xfrm>
+            <a:off x="3756775" y="4604288"/>
+            <a:ext cx="252000" cy="385800"/>
+          </a:xfrm>
+          <a:prstGeom prst="rect">
+            <a:avLst/>
+          </a:prstGeom>
+          <a:noFill/>
+          <a:ln cap="flat" cmpd="sng" w="28575">
+            <a:solidFill>
+              <a:srgbClr val="5AABBC"/>
+            </a:solidFill>
+            <a:prstDash val="solid"/>
+            <a:round/>
+            <a:headEnd len="sm" w="sm" type="none"/>
+            <a:tailEnd len="sm" w="sm" type="none"/>
+          </a:ln>
+        </p:spPr>
+        <p:txBody>
+          <a:bodyPr anchorCtr="0" anchor="ctr" bIns="91425" lIns="91425" spcFirstLastPara="1" rIns="91425" wrap="square" tIns="91425">
+            <a:noAutofit/>
+          </a:bodyPr>
+          <a:lstStyle/>
+          <a:p>
+            <a:pPr indent="0" lvl="0" marL="0" marR="0" rtl="0" algn="ctr">
+              <a:lnSpc>
+                <a:spcPct val="100000"/>
+              </a:lnSpc>
+              <a:spcBef>
+                <a:spcPts val="0"/>
+              </a:spcBef>
+              <a:spcAft>
+                <a:spcPts val="0"/>
+              </a:spcAft>
+              <a:buClr>
+                <a:srgbClr val="000000"/>
+              </a:buClr>
+              <a:buSzPts val="1400"/>
+              <a:buFont typeface="Arial"/>
+              <a:buNone/>
+            </a:pPr>
+            <a:r>
+              <a:t/>
+            </a:r>
+            <a:endParaRPr b="0" i="0" sz="1400" u="none" cap="none" strike="noStrike">
+              <a:solidFill>
+                <a:srgbClr val="000000"/>
+              </a:solidFill>
+              <a:latin typeface="Arial"/>
+              <a:ea typeface="Arial"/>
+              <a:cs typeface="Arial"/>
+              <a:sym typeface="Arial"/>
+            </a:endParaRPr>
+          </a:p>
+        </p:txBody>
+      </p:sp>
+      <p:cxnSp>
+        <p:nvCxnSpPr>
+          <p:cNvPr id="69" name="Google Shape;69;g3bd1f6d9d27_0_3"/>
+          <p:cNvCxnSpPr>
+            <a:stCxn id="67" idx="2"/>
+            <a:endCxn id="68" idx="0"/>
+          </p:cNvCxnSpPr>
+          <p:nvPr/>
+        </p:nvCxnSpPr>
+        <p:spPr>
+          <a:xfrm flipH="1" rot="-5400000">
+            <a:off x="2598525" y="3320225"/>
+            <a:ext cx="522300" cy="2046000"/>
+          </a:xfrm>
+          <a:prstGeom prst="curvedConnector3">
+            <a:avLst>
+              <a:gd fmla="val 49992" name="adj1"/>
+            </a:avLst>
+          </a:prstGeom>
+          <a:noFill/>
+          <a:ln cap="flat" cmpd="sng" w="19050">
+            <a:solidFill>
+              <a:srgbClr val="5AABBC"/>
+            </a:solidFill>
+            <a:prstDash val="solid"/>
+            <a:round/>
+            <a:headEnd len="sm" w="sm" type="none"/>
+            <a:tailEnd len="med" w="med" type="triangle"/>
+          </a:ln>
+        </p:spPr>
+      </p:cxnSp>
+      <p:sp>
+        <p:nvSpPr>
+          <p:cNvPr id="70" name="Google Shape;70;g3bd1f6d9d27_0_3"/>
+          <p:cNvSpPr/>
+          <p:nvPr/>
+        </p:nvSpPr>
+        <p:spPr>
+          <a:xfrm>
+            <a:off x="2441575" y="2805275"/>
+            <a:ext cx="1447200" cy="360600"/>
+          </a:xfrm>
+          <a:prstGeom prst="rect">
+            <a:avLst/>
+          </a:prstGeom>
+          <a:noFill/>
+          <a:ln cap="flat" cmpd="sng" w="28575">
+            <a:solidFill>
+              <a:srgbClr val="9BA4FF"/>
+            </a:solidFill>
+            <a:prstDash val="solid"/>
+            <a:round/>
+            <a:headEnd len="sm" w="sm" type="none"/>
+            <a:tailEnd len="sm" w="sm" type="none"/>
+          </a:ln>
+        </p:spPr>
+        <p:txBody>
+          <a:bodyPr anchorCtr="0" anchor="ctr" bIns="91425" lIns="91425" spcFirstLastPara="1" rIns="91425" wrap="square" tIns="91425">
+            <a:noAutofit/>
+          </a:bodyPr>
+          <a:lstStyle/>
+          <a:p>
+            <a:pPr indent="0" lvl="0" marL="0" marR="0" rtl="0" algn="ctr">
+              <a:lnSpc>
+                <a:spcPct val="100000"/>
+              </a:lnSpc>
+              <a:spcBef>
+                <a:spcPts val="0"/>
+              </a:spcBef>
+              <a:spcAft>
+                <a:spcPts val="0"/>
+              </a:spcAft>
+              <a:buClr>
+                <a:srgbClr val="000000"/>
+              </a:buClr>
+              <a:buSzPts val="1400"/>
+              <a:buFont typeface="Arial"/>
+              <a:buNone/>
+            </a:pPr>
+            <a:r>
+              <a:t/>
+            </a:r>
+            <a:endParaRPr b="0" i="0" sz="1400" u="none" cap="none" strike="noStrike">
+              <a:solidFill>
+                <a:srgbClr val="000000"/>
+              </a:solidFill>
+              <a:latin typeface="Arial"/>
+              <a:ea typeface="Arial"/>
+              <a:cs typeface="Arial"/>
+              <a:sym typeface="Arial"/>
+            </a:endParaRPr>
+          </a:p>
+        </p:txBody>
+      </p:sp>
+      <p:cxnSp>
+        <p:nvCxnSpPr>
+          <p:cNvPr id="71" name="Google Shape;71;g3bd1f6d9d27_0_3"/>
+          <p:cNvCxnSpPr>
+            <a:stCxn id="45" idx="3"/>
+            <a:endCxn id="70" idx="0"/>
+          </p:cNvCxnSpPr>
+          <p:nvPr/>
+        </p:nvCxnSpPr>
+        <p:spPr>
+          <a:xfrm flipH="1" rot="-5400000">
+            <a:off x="2784950" y="2424925"/>
+            <a:ext cx="405300" cy="355200"/>
+          </a:xfrm>
+          <a:prstGeom prst="curvedConnector3">
+            <a:avLst>
+              <a:gd fmla="val 50012" name="adj1"/>
+            </a:avLst>
+          </a:prstGeom>
+          <a:noFill/>
+          <a:ln cap="flat" cmpd="sng" w="9525">
+            <a:solidFill>
+              <a:srgbClr val="9BA4FF"/>
+            </a:solidFill>
+            <a:prstDash val="solid"/>
+            <a:round/>
+            <a:headEnd len="sm" w="sm" type="none"/>
+            <a:tailEnd len="med" w="med" type="triangle"/>
+          </a:ln>
+        </p:spPr>
+      </p:cxnSp>
+      <p:pic>
+        <p:nvPicPr>
+          <p:cNvPr id="72" name="Google Shape;72;g3bd1f6d9d27_0_3"/>
+          <p:cNvPicPr preferRelativeResize="0"/>
+          <p:nvPr/>
+        </p:nvPicPr>
+        <p:blipFill rotWithShape="1">
+          <a:blip r:embed="rId7">
+            <a:alphaModFix/>
+          </a:blip>
+          <a:srcRect b="0" l="0" r="12140" t="0"/>
+          <a:stretch/>
+        </p:blipFill>
+        <p:spPr>
+          <a:xfrm>
+            <a:off x="5134073" y="2625688"/>
+            <a:ext cx="2203574" cy="719775"/>
+          </a:xfrm>
+          <a:prstGeom prst="rect">
+            <a:avLst/>
+          </a:prstGeom>
+          <a:noFill/>
+          <a:ln>
+            <a:noFill/>
+          </a:ln>
+        </p:spPr>
+      </p:pic>
+      <p:sp>
+        <p:nvSpPr>
+          <p:cNvPr id="73" name="Google Shape;73;g3bd1f6d9d27_0_3"/>
+          <p:cNvSpPr txBox="1"/>
+          <p:nvPr/>
+        </p:nvSpPr>
+        <p:spPr>
+          <a:xfrm>
+            <a:off x="7252775" y="2770838"/>
+            <a:ext cx="1527000" cy="360600"/>
+          </a:xfrm>
+          <a:prstGeom prst="rect">
+            <a:avLst/>
+          </a:prstGeom>
+          <a:noFill/>
+          <a:ln>
+            <a:noFill/>
+          </a:ln>
+        </p:spPr>
+        <p:txBody>
+          <a:bodyPr anchorCtr="0" anchor="ctr" bIns="91425" lIns="91425" spcFirstLastPara="1" rIns="91425" wrap="square" tIns="91425">
+            <a:noAutofit/>
+          </a:bodyPr>
+          <a:lstStyle/>
+          <a:p>
+            <a:pPr indent="0" lvl="0" marL="0" marR="0" rtl="0" algn="ctr">
+              <a:lnSpc>
+                <a:spcPct val="100000"/>
+              </a:lnSpc>
+              <a:spcBef>
+                <a:spcPts val="0"/>
+              </a:spcBef>
+              <a:spcAft>
+                <a:spcPts val="0"/>
+              </a:spcAft>
+              <a:buClr>
+                <a:srgbClr val="000000"/>
+              </a:buClr>
+              <a:buSzPts val="2400"/>
+              <a:buFont typeface="Arial"/>
+              <a:buNone/>
+            </a:pPr>
+            <a:r>
+              <a:rPr b="0" i="0" lang="en" sz="2400" u="none" cap="none" strike="noStrike">
+                <a:solidFill>
+                  <a:schemeClr val="dk1"/>
+                </a:solidFill>
+                <a:latin typeface="Consolas"/>
+                <a:ea typeface="Consolas"/>
+                <a:cs typeface="Consolas"/>
+                <a:sym typeface="Consolas"/>
+              </a:rPr>
+              <a:t>X⍵</a:t>
+            </a:r>
+            <a:r>
+              <a:rPr b="0" baseline="30000" i="0" lang="en" sz="2400" u="none" cap="none" strike="noStrike">
+                <a:solidFill>
+                  <a:schemeClr val="dk1"/>
+                </a:solidFill>
+                <a:latin typeface="Consolas"/>
+                <a:ea typeface="Consolas"/>
+                <a:cs typeface="Consolas"/>
+                <a:sym typeface="Consolas"/>
+              </a:rPr>
+              <a:t>T</a:t>
+            </a:r>
+            <a:r>
+              <a:rPr b="0" i="0" lang="en" sz="2400" u="none" cap="none" strike="noStrike">
+                <a:solidFill>
+                  <a:schemeClr val="dk1"/>
+                </a:solidFill>
+                <a:latin typeface="Consolas"/>
+                <a:ea typeface="Consolas"/>
+                <a:cs typeface="Consolas"/>
+                <a:sym typeface="Consolas"/>
+              </a:rPr>
+              <a:t> + b)</a:t>
+            </a:r>
+            <a:endParaRPr b="0" i="0" sz="2400" u="none" cap="none" strike="noStrike">
+              <a:solidFill>
+                <a:schemeClr val="dk1"/>
+              </a:solidFill>
+              <a:latin typeface="Consolas"/>
+              <a:ea typeface="Consolas"/>
+              <a:cs typeface="Consolas"/>
+              <a:sym typeface="Consolas"/>
+            </a:endParaRPr>
+          </a:p>
+        </p:txBody>
+      </p:sp>
+      <p:sp>
+        <p:nvSpPr>
+          <p:cNvPr id="74" name="Google Shape;74;g3bd1f6d9d27_0_3"/>
+          <p:cNvSpPr txBox="1"/>
+          <p:nvPr/>
+        </p:nvSpPr>
+        <p:spPr>
+          <a:xfrm>
+            <a:off x="1475365" y="5362838"/>
+            <a:ext cx="2694300" cy="360600"/>
+          </a:xfrm>
+          <a:prstGeom prst="rect">
+            <a:avLst/>
+          </a:prstGeom>
+          <a:noFill/>
+          <a:ln>
+            <a:noFill/>
+          </a:ln>
+        </p:spPr>
+        <p:txBody>
+          <a:bodyPr anchorCtr="0" anchor="ctr" bIns="91425" lIns="91425" spcFirstLastPara="1" rIns="91425" wrap="square" tIns="91425">
+            <a:noAutofit/>
+          </a:bodyPr>
+          <a:lstStyle/>
+          <a:p>
+            <a:pPr indent="0" lvl="0" marL="0" marR="0" rtl="0" algn="ctr">
+              <a:lnSpc>
+                <a:spcPct val="100000"/>
+              </a:lnSpc>
+              <a:spcBef>
+                <a:spcPts val="0"/>
+              </a:spcBef>
+              <a:spcAft>
+                <a:spcPts val="0"/>
+              </a:spcAft>
+              <a:buClr>
+                <a:srgbClr val="000000"/>
+              </a:buClr>
+              <a:buSzPts val="2400"/>
+              <a:buFont typeface="Arial"/>
+              <a:buNone/>
+            </a:pPr>
+            <a:r>
+              <a:rPr b="0" i="0" lang="en" sz="2400" u="none" cap="none" strike="noStrike">
+                <a:solidFill>
+                  <a:schemeClr val="dk1"/>
+                </a:solidFill>
+                <a:latin typeface="Consolas"/>
+                <a:ea typeface="Consolas"/>
+                <a:cs typeface="Consolas"/>
+                <a:sym typeface="Consolas"/>
+              </a:rPr>
+              <a:t>y = &lt;1, 10&gt;</a:t>
+            </a:r>
+            <a:endParaRPr b="0" i="0" sz="2400" u="none" cap="none" strike="noStrike">
+              <a:solidFill>
+                <a:schemeClr val="dk1"/>
+              </a:solidFill>
+              <a:latin typeface="Consolas"/>
+              <a:ea typeface="Consolas"/>
+              <a:cs typeface="Consolas"/>
+              <a:sym typeface="Consolas"/>
+            </a:endParaRPr>
+          </a:p>
+        </p:txBody>
+      </p:sp>
+      <p:sp>
+        <p:nvSpPr>
           <p:cNvPr id="75" name="Google Shape;75;g3bd1f6d9d27_0_3"/>
           <p:cNvSpPr/>
           <p:nvPr/>
         </p:nvSpPr>
         <p:spPr>
           <a:xfrm>
-            <a:off x="1675125" y="3575375"/>
-            <a:ext cx="323100" cy="506700"/>
+            <a:off x="1851675" y="5415150"/>
+            <a:ext cx="252000" cy="385800"/>
           </a:xfrm>
           <a:prstGeom prst="rect">
             <a:avLst/>
@@ -8280,7 +13031,7 @@
           <a:noFill/>
           <a:ln cap="flat" cmpd="sng" w="28575">
             <a:solidFill>
-              <a:srgbClr val="5AABBC"/>
+              <a:srgbClr val="A31515"/>
             </a:solidFill>
             <a:prstDash val="solid"/>
             <a:round/>
@@ -8334,7 +13085,7 @@
         </p:nvSpPr>
         <p:spPr>
           <a:xfrm>
-            <a:off x="3756775" y="4604288"/>
+            <a:off x="2942625" y="4603500"/>
             <a:ext cx="252000" cy="385800"/>
           </a:xfrm>
           <a:prstGeom prst="rect">
@@ -8343,7 +13094,7 @@
           <a:noFill/>
           <a:ln cap="flat" cmpd="sng" w="28575">
             <a:solidFill>
-              <a:srgbClr val="5AABBC"/>
+              <a:srgbClr val="A31515"/>
             </a:solidFill>
             <a:prstDash val="solid"/>
             <a:round/>
@@ -8393,25 +13144,25 @@
         <p:nvCxnSpPr>
           <p:cNvPr id="77" name="Google Shape;77;g3bd1f6d9d27_0_3"/>
           <p:cNvCxnSpPr>
-            <a:stCxn id="75" idx="2"/>
-            <a:endCxn id="76" idx="0"/>
+            <a:stCxn id="75" idx="0"/>
+            <a:endCxn id="76" idx="2"/>
           </p:cNvCxnSpPr>
           <p:nvPr/>
         </p:nvCxnSpPr>
         <p:spPr>
-          <a:xfrm flipH="1" rot="-5400000">
-            <a:off x="2598525" y="3320225"/>
-            <a:ext cx="522300" cy="2046000"/>
+          <a:xfrm rot="-5400000">
+            <a:off x="2310225" y="4656600"/>
+            <a:ext cx="426000" cy="1091100"/>
           </a:xfrm>
           <a:prstGeom prst="curvedConnector3">
             <a:avLst>
-              <a:gd fmla="val 49992" name="adj1"/>
+              <a:gd fmla="val 30129" name="adj1"/>
             </a:avLst>
           </a:prstGeom>
           <a:noFill/>
           <a:ln cap="flat" cmpd="sng" w="19050">
             <a:solidFill>
-              <a:srgbClr val="5AABBC"/>
+              <a:srgbClr val="A31415"/>
             </a:solidFill>
             <a:prstDash val="solid"/>
             <a:round/>
@@ -8423,12 +13174,141 @@
       <p:sp>
         <p:nvSpPr>
           <p:cNvPr id="78" name="Google Shape;78;g3bd1f6d9d27_0_3"/>
+          <p:cNvSpPr txBox="1"/>
+          <p:nvPr/>
+        </p:nvSpPr>
+        <p:spPr>
+          <a:xfrm>
+            <a:off x="1242352" y="5929225"/>
+            <a:ext cx="3135300" cy="360600"/>
+          </a:xfrm>
+          <a:prstGeom prst="rect">
+            <a:avLst/>
+          </a:prstGeom>
+          <a:noFill/>
+          <a:ln>
+            <a:noFill/>
+          </a:ln>
+        </p:spPr>
+        <p:txBody>
+          <a:bodyPr anchorCtr="0" anchor="ctr" bIns="91425" lIns="91425" spcFirstLastPara="1" rIns="91425" wrap="square" tIns="91425">
+            <a:noAutofit/>
+          </a:bodyPr>
+          <a:lstStyle/>
+          <a:p>
+            <a:pPr indent="0" lvl="0" marL="0" marR="0" rtl="0" algn="ctr">
+              <a:lnSpc>
+                <a:spcPct val="100000"/>
+              </a:lnSpc>
+              <a:spcBef>
+                <a:spcPts val="0"/>
+              </a:spcBef>
+              <a:spcAft>
+                <a:spcPts val="0"/>
+              </a:spcAft>
+              <a:buClr>
+                <a:srgbClr val="000000"/>
+              </a:buClr>
+              <a:buSzPts val="1200"/>
+              <a:buFont typeface="Arial"/>
+              <a:buNone/>
+            </a:pPr>
+            <a:r>
+              <a:rPr b="0" i="0" lang="en" sz="1200" u="none" cap="none" strike="noStrike">
+                <a:solidFill>
+                  <a:schemeClr val="dk1"/>
+                </a:solidFill>
+                <a:latin typeface="Consolas"/>
+                <a:ea typeface="Consolas"/>
+                <a:cs typeface="Consolas"/>
+                <a:sym typeface="Consolas"/>
+              </a:rPr>
+              <a:t>&lt;0, 0, 0, 0, 0, 1, 0, 0, 0, 0&gt;</a:t>
+            </a:r>
+            <a:endParaRPr b="0" i="0" sz="1200" u="none" cap="none" strike="noStrike">
+              <a:solidFill>
+                <a:schemeClr val="dk1"/>
+              </a:solidFill>
+              <a:latin typeface="Consolas"/>
+              <a:ea typeface="Consolas"/>
+              <a:cs typeface="Consolas"/>
+              <a:sym typeface="Consolas"/>
+            </a:endParaRPr>
+          </a:p>
+        </p:txBody>
+      </p:sp>
+      <p:sp>
+        <p:nvSpPr>
+          <p:cNvPr id="79" name="Google Shape;79;g3bd1f6d9d27_0_3"/>
           <p:cNvSpPr/>
           <p:nvPr/>
         </p:nvSpPr>
         <p:spPr>
-          <a:xfrm>
-            <a:off x="2441575" y="2805275"/>
+          <a:xfrm rot="5400000">
+            <a:off x="2693150" y="4817950"/>
+            <a:ext cx="233700" cy="2612400"/>
+          </a:xfrm>
+          <a:prstGeom prst="bracePair">
+            <a:avLst/>
+          </a:prstGeom>
+          <a:noFill/>
+          <a:ln cap="flat" cmpd="sng" w="9525">
+            <a:solidFill>
+              <a:srgbClr val="9BA4FF"/>
+            </a:solidFill>
+            <a:prstDash val="solid"/>
+            <a:round/>
+            <a:headEnd len="sm" w="sm" type="none"/>
+            <a:tailEnd len="sm" w="sm" type="none"/>
+          </a:ln>
+        </p:spPr>
+        <p:txBody>
+          <a:bodyPr anchorCtr="0" anchor="ctr" bIns="91425" lIns="91425" spcFirstLastPara="1" rIns="91425" wrap="square" tIns="91425">
+            <a:noAutofit/>
+          </a:bodyPr>
+          <a:lstStyle/>
+          <a:p>
+            <a:pPr indent="0" lvl="0" marL="0" marR="0" rtl="0" algn="ctr">
+              <a:lnSpc>
+                <a:spcPct val="100000"/>
+              </a:lnSpc>
+              <a:spcBef>
+                <a:spcPts val="0"/>
+              </a:spcBef>
+              <a:spcAft>
+                <a:spcPts val="0"/>
+              </a:spcAft>
+              <a:buClr>
+                <a:srgbClr val="000000"/>
+              </a:buClr>
+              <a:buSzPts val="1400"/>
+              <a:buFont typeface="Arial"/>
+              <a:buNone/>
+            </a:pPr>
+            <a:r>
+              <a:t/>
+            </a:r>
+            <a:endParaRPr b="0" i="0" sz="1400" u="none" cap="none" strike="noStrike">
+              <a:solidFill>
+                <a:srgbClr val="000000"/>
+              </a:solidFill>
+              <a:latin typeface="Arial"/>
+              <a:ea typeface="Arial"/>
+              <a:cs typeface="Arial"/>
+              <a:sym typeface="Arial"/>
+            </a:endParaRPr>
+          </a:p>
+        </p:txBody>
+      </p:sp>
+      <p:sp>
+        <p:nvSpPr>
+          <p:cNvPr id="80" name="Google Shape;80;g3bd1f6d9d27_0_3"/>
+          <p:cNvSpPr/>
+          <p:nvPr/>
+        </p:nvSpPr>
+        <p:spPr>
+          <a:xfrm>
+            <a:off x="2453475" y="5384950"/>
             <a:ext cx="1447200" cy="360600"/>
           </a:xfrm>
           <a:prstGeom prst="rect">
@@ -8485,21 +13365,21 @@
       </p:sp>
       <p:cxnSp>
         <p:nvCxnSpPr>
-          <p:cNvPr id="79" name="Google Shape;79;g3bd1f6d9d27_0_3"/>
+          <p:cNvPr id="81" name="Google Shape;81;g3bd1f6d9d27_0_3"/>
           <p:cNvCxnSpPr>
-            <a:stCxn id="53" idx="3"/>
-            <a:endCxn id="78" idx="0"/>
+            <a:stCxn id="79" idx="1"/>
+            <a:endCxn id="80" idx="2"/>
           </p:cNvCxnSpPr>
           <p:nvPr/>
         </p:nvCxnSpPr>
         <p:spPr>
-          <a:xfrm flipH="1" rot="-5400000">
-            <a:off x="2784950" y="2424925"/>
-            <a:ext cx="405300" cy="355200"/>
+          <a:xfrm rot="-5400000">
+            <a:off x="2862650" y="5692750"/>
+            <a:ext cx="261900" cy="367200"/>
           </a:xfrm>
           <a:prstGeom prst="curvedConnector3">
             <a:avLst>
-              <a:gd fmla="val 50012" name="adj1"/>
+              <a:gd fmla="val 49971" name="adj1"/>
             </a:avLst>
           </a:prstGeom>
           <a:noFill/>
@@ -8514,23 +13394,89 @@
           </a:ln>
         </p:spPr>
       </p:cxnSp>
+      <p:sp>
+        <p:nvSpPr>
+          <p:cNvPr id="82" name="Google Shape;82;g3bd1f6d9d27_0_3"/>
+          <p:cNvSpPr txBox="1"/>
+          <p:nvPr/>
+        </p:nvSpPr>
+        <p:spPr>
+          <a:xfrm>
+            <a:off x="1611799" y="3848375"/>
+            <a:ext cx="2430300" cy="233700"/>
+          </a:xfrm>
+          <a:prstGeom prst="rect">
+            <a:avLst/>
+          </a:prstGeom>
+          <a:noFill/>
+          <a:ln>
+            <a:noFill/>
+          </a:ln>
+        </p:spPr>
+        <p:txBody>
+          <a:bodyPr anchorCtr="0" anchor="t" bIns="91425" lIns="91425" spcFirstLastPara="1" rIns="91425" wrap="square" tIns="91425">
+            <a:noAutofit/>
+          </a:bodyPr>
+          <a:lstStyle/>
+          <a:p>
+            <a:pPr indent="0" lvl="0" marL="0" marR="0" rtl="0" algn="l">
+              <a:lnSpc>
+                <a:spcPct val="100000"/>
+              </a:lnSpc>
+              <a:spcBef>
+                <a:spcPts val="0"/>
+              </a:spcBef>
+              <a:spcAft>
+                <a:spcPts val="0"/>
+              </a:spcAft>
+              <a:buClr>
+                <a:srgbClr val="000000"/>
+              </a:buClr>
+              <a:buSzPts val="600"/>
+              <a:buFont typeface="Arial"/>
+              <a:buNone/>
+            </a:pPr>
+            <a:r>
+              <a:rPr b="0" i="0" lang="en" sz="600" u="none" cap="none" strike="noStrike">
+                <a:solidFill>
+                  <a:schemeClr val="dk1"/>
+                </a:solidFill>
+                <a:latin typeface="Arial"/>
+                <a:ea typeface="Arial"/>
+                <a:cs typeface="Arial"/>
+                <a:sym typeface="Arial"/>
+              </a:rPr>
+              <a:t>&lt;1, 10&gt;         =       &lt;1, 784&gt;     ᐧ    &lt;784, 10&gt;            +        &lt;1, 10&gt;</a:t>
+            </a:r>
+            <a:endParaRPr b="0" i="0" sz="600" u="none" cap="none" strike="noStrike">
+              <a:solidFill>
+                <a:schemeClr val="dk1"/>
+              </a:solidFill>
+              <a:latin typeface="Arial"/>
+              <a:ea typeface="Arial"/>
+              <a:cs typeface="Arial"/>
+              <a:sym typeface="Arial"/>
+            </a:endParaRPr>
+          </a:p>
+        </p:txBody>
+      </p:sp>
       <p:pic>
         <p:nvPicPr>
-          <p:cNvPr id="80" name="Google Shape;80;g3bd1f6d9d27_0_3"/>
+          <p:cNvPr id="83" name="Google Shape;83;g3bd1f6d9d27_0_3"/>
           <p:cNvPicPr preferRelativeResize="0"/>
           <p:nvPr/>
         </p:nvPicPr>
         <p:blipFill rotWithShape="1">
-          <a:blip r:embed="rId7">
+          <a:blip r:embed="rId3">
             <a:alphaModFix/>
           </a:blip>
-          <a:srcRect b="0" l="0" r="12140" t="0"/>
+          <a:srcRect b="0" l="0" r="0" t="0"/>
           <a:stretch/>
         </p:blipFill>
         <p:spPr>
           <a:xfrm>
-            <a:off x="5134073" y="2625688"/>
-            <a:ext cx="2203574" cy="719775"/>
+            <a:off x="324408" y="6386450"/>
+            <a:ext cx="406973" cy="405301"/>
           </a:xfrm>
           <a:prstGeom prst="rect">
             <a:avLst/>
@@ -8543,14 +13489,14 @@
       </p:pic>
       <p:sp>
         <p:nvSpPr>
-          <p:cNvPr id="81" name="Google Shape;81;g3bd1f6d9d27_0_3"/>
+          <p:cNvPr id="84" name="Google Shape;84;g3bd1f6d9d27_0_3"/>
           <p:cNvSpPr txBox="1"/>
           <p:nvPr/>
         </p:nvSpPr>
         <p:spPr>
           <a:xfrm>
-            <a:off x="7252775" y="2770838"/>
-            <a:ext cx="1527000" cy="360600"/>
+            <a:off x="703275" y="6263350"/>
+            <a:ext cx="1133400" cy="506700"/>
           </a:xfrm>
           <a:prstGeom prst="rect">
             <a:avLst/>
@@ -8561,12 +13507,12 @@
           </a:ln>
         </p:spPr>
         <p:txBody>
-          <a:bodyPr anchorCtr="0" anchor="ctr" bIns="91425" lIns="91425" spcFirstLastPara="1" rIns="91425" wrap="square" tIns="91425">
+          <a:bodyPr anchorCtr="0" anchor="t" bIns="91425" lIns="91425" spcFirstLastPara="1" rIns="91425" wrap="square" tIns="91425">
             <a:noAutofit/>
           </a:bodyPr>
           <a:lstStyle/>
           <a:p>
-            <a:pPr indent="0" lvl="0" marL="0" marR="0" rtl="0" algn="ctr">
+            <a:pPr indent="0" lvl="0" marL="0" marR="0" rtl="0" algn="l">
               <a:lnSpc>
                 <a:spcPct val="100000"/>
               </a:lnSpc>
@@ -8579,134 +13525,44 @@
               <a:buClr>
                 <a:srgbClr val="000000"/>
               </a:buClr>
-              <a:buSzPts val="2400"/>
+              <a:buSzPts val="3000"/>
               <a:buFont typeface="Arial"/>
               <a:buNone/>
             </a:pPr>
             <a:r>
-              <a:rPr b="0" i="0" lang="en" sz="2400" u="none" cap="none" strike="noStrike">
+              <a:rPr b="0" i="0" lang="en" sz="3000" u="none" cap="none" strike="noStrike">
                 <a:solidFill>
                   <a:schemeClr val="dk1"/>
                 </a:solidFill>
-                <a:latin typeface="Consolas"/>
-                <a:ea typeface="Consolas"/>
-                <a:cs typeface="Consolas"/>
-                <a:sym typeface="Consolas"/>
+                <a:latin typeface="Arial"/>
+                <a:ea typeface="Arial"/>
+                <a:cs typeface="Arial"/>
+                <a:sym typeface="Arial"/>
               </a:rPr>
-              <a:t>X⍵</a:t>
-            </a:r>
-            <a:r>
-              <a:rPr b="0" baseline="30000" i="0" lang="en" sz="2400" u="none" cap="none" strike="noStrike">
-                <a:solidFill>
-                  <a:schemeClr val="dk1"/>
-                </a:solidFill>
-                <a:latin typeface="Consolas"/>
-                <a:ea typeface="Consolas"/>
-                <a:cs typeface="Consolas"/>
-                <a:sym typeface="Consolas"/>
-              </a:rPr>
-              <a:t>T</a:t>
-            </a:r>
-            <a:r>
-              <a:rPr b="0" i="0" lang="en" sz="2400" u="none" cap="none" strike="noStrike">
-                <a:solidFill>
-                  <a:schemeClr val="dk1"/>
-                </a:solidFill>
-                <a:latin typeface="Consolas"/>
-                <a:ea typeface="Consolas"/>
-                <a:cs typeface="Consolas"/>
-                <a:sym typeface="Consolas"/>
-              </a:rPr>
-              <a:t> + b)</a:t>
-            </a:r>
-            <a:endParaRPr b="0" i="0" sz="2400" u="none" cap="none" strike="noStrike">
+              <a:t>= 5</a:t>
+            </a:r>
+            <a:endParaRPr b="0" i="0" sz="3000" u="none" cap="none" strike="noStrike">
               <a:solidFill>
                 <a:schemeClr val="dk1"/>
               </a:solidFill>
-              <a:latin typeface="Consolas"/>
-              <a:ea typeface="Consolas"/>
-              <a:cs typeface="Consolas"/>
-              <a:sym typeface="Consolas"/>
+              <a:latin typeface="Arial"/>
+              <a:ea typeface="Arial"/>
+              <a:cs typeface="Arial"/>
+              <a:sym typeface="Arial"/>
             </a:endParaRPr>
           </a:p>
         </p:txBody>
       </p:sp>
       <p:sp>
         <p:nvSpPr>
-          <p:cNvPr id="82" name="Google Shape;82;g3bd1f6d9d27_0_3"/>
-          <p:cNvSpPr txBox="1"/>
-          <p:nvPr/>
-        </p:nvSpPr>
-        <p:spPr>
-          <a:xfrm>
-            <a:off x="1475365" y="5362838"/>
-            <a:ext cx="2694300" cy="360600"/>
-          </a:xfrm>
-          <a:prstGeom prst="rect">
-            <a:avLst/>
-          </a:prstGeom>
-          <a:noFill/>
-          <a:ln>
-            <a:noFill/>
-          </a:ln>
-        </p:spPr>
-        <p:txBody>
-          <a:bodyPr anchorCtr="0" anchor="ctr" bIns="91425" lIns="91425" spcFirstLastPara="1" rIns="91425" wrap="square" tIns="91425">
-            <a:noAutofit/>
-          </a:bodyPr>
-          <a:lstStyle/>
-          <a:p>
-            <a:pPr indent="0" lvl="0" marL="0" marR="0" rtl="0" algn="ctr">
-              <a:lnSpc>
-                <a:spcPct val="100000"/>
-              </a:lnSpc>
-              <a:spcBef>
-                <a:spcPts val="0"/>
-              </a:spcBef>
-              <a:spcAft>
-                <a:spcPts val="0"/>
-              </a:spcAft>
-              <a:buClr>
-                <a:srgbClr val="000000"/>
-              </a:buClr>
-              <a:buSzPts val="2400"/>
-              <a:buFont typeface="Arial"/>
-              <a:buNone/>
-            </a:pPr>
-            <a:r>
-              <a:rPr b="0" i="0" lang="en" sz="2400" u="none" cap="none" strike="noStrike">
-                <a:solidFill>
-                  <a:schemeClr val="dk1"/>
-                </a:solidFill>
-                <a:latin typeface="Consolas"/>
-                <a:ea typeface="Consolas"/>
-                <a:cs typeface="Consolas"/>
-                <a:sym typeface="Consolas"/>
-              </a:rPr>
-              <a:t>y = &lt;1, 10&gt;</a:t>
-            </a:r>
-            <a:endParaRPr b="0" i="0" sz="2400" u="none" cap="none" strike="noStrike">
-              <a:solidFill>
-                <a:schemeClr val="dk1"/>
-              </a:solidFill>
-              <a:latin typeface="Consolas"/>
-              <a:ea typeface="Consolas"/>
-              <a:cs typeface="Consolas"/>
-              <a:sym typeface="Consolas"/>
-            </a:endParaRPr>
-          </a:p>
-        </p:txBody>
-      </p:sp>
-      <p:sp>
-        <p:nvSpPr>
-          <p:cNvPr id="83" name="Google Shape;83;g3bd1f6d9d27_0_3"/>
+          <p:cNvPr id="85" name="Google Shape;85;g3bd1f6d9d27_0_3"/>
           <p:cNvSpPr/>
           <p:nvPr/>
         </p:nvSpPr>
         <p:spPr>
           <a:xfrm>
-            <a:off x="1851675" y="5415150"/>
-            <a:ext cx="252000" cy="385800"/>
+            <a:off x="299300" y="6323800"/>
+            <a:ext cx="1059000" cy="506700"/>
           </a:xfrm>
           <a:prstGeom prst="rect">
             <a:avLst/>
@@ -8762,27 +13618,21 @@
       </p:sp>
       <p:sp>
         <p:nvSpPr>
-          <p:cNvPr id="84" name="Google Shape;84;g3bd1f6d9d27_0_3"/>
-          <p:cNvSpPr/>
+          <p:cNvPr id="86" name="Google Shape;86;g3bd1f6d9d27_0_3"/>
+          <p:cNvSpPr txBox="1"/>
           <p:nvPr/>
         </p:nvSpPr>
         <p:spPr>
           <a:xfrm>
-            <a:off x="2942625" y="4603500"/>
-            <a:ext cx="252000" cy="385800"/>
+            <a:off x="1500977" y="6109600"/>
+            <a:ext cx="3135300" cy="360600"/>
           </a:xfrm>
           <a:prstGeom prst="rect">
             <a:avLst/>
           </a:prstGeom>
           <a:noFill/>
-          <a:ln cap="flat" cmpd="sng" w="28575">
-            <a:solidFill>
-              <a:srgbClr val="A31515"/>
-            </a:solidFill>
-            <a:prstDash val="solid"/>
-            <a:round/>
-            <a:headEnd len="sm" w="sm" type="none"/>
-            <a:tailEnd len="sm" w="sm" type="none"/>
+          <a:ln>
+            <a:noFill/>
           </a:ln>
         </p:spPr>
         <p:txBody>
@@ -8791,7 +13641,7 @@
           </a:bodyPr>
           <a:lstStyle/>
           <a:p>
-            <a:pPr indent="0" lvl="0" marL="0" marR="0" rtl="0" algn="ctr">
+            <a:pPr indent="0" lvl="0" marL="0" marR="0" rtl="0" algn="l">
               <a:lnSpc>
                 <a:spcPct val="100000"/>
               </a:lnSpc>
@@ -8804,100 +13654,12 @@
               <a:buClr>
                 <a:srgbClr val="000000"/>
               </a:buClr>
-              <a:buSzPts val="1400"/>
+              <a:buSzPts val="800"/>
               <a:buFont typeface="Arial"/>
               <a:buNone/>
             </a:pPr>
             <a:r>
-              <a:t/>
-            </a:r>
-            <a:endParaRPr b="0" i="0" sz="1400" u="none" cap="none" strike="noStrike">
-              <a:solidFill>
-                <a:srgbClr val="000000"/>
-              </a:solidFill>
-              <a:latin typeface="Arial"/>
-              <a:ea typeface="Arial"/>
-              <a:cs typeface="Arial"/>
-              <a:sym typeface="Arial"/>
-            </a:endParaRPr>
-          </a:p>
-        </p:txBody>
-      </p:sp>
-      <p:cxnSp>
-        <p:nvCxnSpPr>
-          <p:cNvPr id="85" name="Google Shape;85;g3bd1f6d9d27_0_3"/>
-          <p:cNvCxnSpPr>
-            <a:stCxn id="83" idx="0"/>
-            <a:endCxn id="84" idx="2"/>
-          </p:cNvCxnSpPr>
-          <p:nvPr/>
-        </p:nvCxnSpPr>
-        <p:spPr>
-          <a:xfrm rot="-5400000">
-            <a:off x="2310225" y="4656600"/>
-            <a:ext cx="426000" cy="1091100"/>
-          </a:xfrm>
-          <a:prstGeom prst="curvedConnector3">
-            <a:avLst>
-              <a:gd fmla="val 30129" name="adj1"/>
-            </a:avLst>
-          </a:prstGeom>
-          <a:noFill/>
-          <a:ln cap="flat" cmpd="sng" w="19050">
-            <a:solidFill>
-              <a:srgbClr val="A31415"/>
-            </a:solidFill>
-            <a:prstDash val="solid"/>
-            <a:round/>
-            <a:headEnd len="sm" w="sm" type="none"/>
-            <a:tailEnd len="med" w="med" type="triangle"/>
-          </a:ln>
-        </p:spPr>
-      </p:cxnSp>
-      <p:sp>
-        <p:nvSpPr>
-          <p:cNvPr id="86" name="Google Shape;86;g3bd1f6d9d27_0_3"/>
-          <p:cNvSpPr txBox="1"/>
-          <p:nvPr/>
-        </p:nvSpPr>
-        <p:spPr>
-          <a:xfrm>
-            <a:off x="1242352" y="5929225"/>
-            <a:ext cx="3135300" cy="360600"/>
-          </a:xfrm>
-          <a:prstGeom prst="rect">
-            <a:avLst/>
-          </a:prstGeom>
-          <a:noFill/>
-          <a:ln>
-            <a:noFill/>
-          </a:ln>
-        </p:spPr>
-        <p:txBody>
-          <a:bodyPr anchorCtr="0" anchor="ctr" bIns="91425" lIns="91425" spcFirstLastPara="1" rIns="91425" wrap="square" tIns="91425">
-            <a:noAutofit/>
-          </a:bodyPr>
-          <a:lstStyle/>
-          <a:p>
-            <a:pPr indent="0" lvl="0" marL="0" marR="0" rtl="0" algn="ctr">
-              <a:lnSpc>
-                <a:spcPct val="100000"/>
-              </a:lnSpc>
-              <a:spcBef>
-                <a:spcPts val="0"/>
-              </a:spcBef>
-              <a:spcAft>
-                <a:spcPts val="0"/>
-              </a:spcAft>
-              <a:buClr>
-                <a:srgbClr val="000000"/>
-              </a:buClr>
-              <a:buSzPts val="1200"/>
-              <a:buFont typeface="Arial"/>
-              <a:buNone/>
-            </a:pPr>
-            <a:r>
-              <a:rPr b="0" i="0" lang="en" sz="1200" u="none" cap="none" strike="noStrike">
+              <a:rPr b="0" i="0" lang="en" sz="800" u="none" cap="none" strike="noStrike">
                 <a:solidFill>
                   <a:schemeClr val="dk1"/>
                 </a:solidFill>
@@ -8906,9 +13668,9 @@
                 <a:cs typeface="Consolas"/>
                 <a:sym typeface="Consolas"/>
               </a:rPr>
-              <a:t>&lt;0, 0, 0, 0, 0, 1, 0, 0, 0, 0&gt;</a:t>
-            </a:r>
-            <a:endParaRPr b="0" i="0" sz="1200" u="none" cap="none" strike="noStrike">
+              <a:t>0,  1,   2,   3,   4,   5,   6,   7,   8,   9</a:t>
+            </a:r>
+            <a:endParaRPr b="0" i="0" sz="800" u="none" cap="none" strike="noStrike">
               <a:solidFill>
                 <a:schemeClr val="dk1"/>
               </a:solidFill>
@@ -8927,72 +13689,9 @@
           <p:nvPr/>
         </p:nvSpPr>
         <p:spPr>
-          <a:xfrm rot="5400000">
-            <a:off x="2693150" y="4817950"/>
-            <a:ext cx="233700" cy="2612400"/>
-          </a:xfrm>
-          <a:prstGeom prst="bracePair">
-            <a:avLst/>
-          </a:prstGeom>
-          <a:noFill/>
-          <a:ln cap="flat" cmpd="sng" w="9525">
-            <a:solidFill>
-              <a:srgbClr val="9BA4FF"/>
-            </a:solidFill>
-            <a:prstDash val="solid"/>
-            <a:round/>
-            <a:headEnd len="sm" w="sm" type="none"/>
-            <a:tailEnd len="sm" w="sm" type="none"/>
-          </a:ln>
-        </p:spPr>
-        <p:txBody>
-          <a:bodyPr anchorCtr="0" anchor="ctr" bIns="91425" lIns="91425" spcFirstLastPara="1" rIns="91425" wrap="square" tIns="91425">
-            <a:noAutofit/>
-          </a:bodyPr>
-          <a:lstStyle/>
-          <a:p>
-            <a:pPr indent="0" lvl="0" marL="0" marR="0" rtl="0" algn="ctr">
-              <a:lnSpc>
-                <a:spcPct val="100000"/>
-              </a:lnSpc>
-              <a:spcBef>
-                <a:spcPts val="0"/>
-              </a:spcBef>
-              <a:spcAft>
-                <a:spcPts val="0"/>
-              </a:spcAft>
-              <a:buClr>
-                <a:srgbClr val="000000"/>
-              </a:buClr>
-              <a:buSzPts val="1400"/>
-              <a:buFont typeface="Arial"/>
-              <a:buNone/>
-            </a:pPr>
-            <a:r>
-              <a:t/>
-            </a:r>
-            <a:endParaRPr b="0" i="0" sz="1400" u="none" cap="none" strike="noStrike">
-              <a:solidFill>
-                <a:srgbClr val="000000"/>
-              </a:solidFill>
-              <a:latin typeface="Arial"/>
-              <a:ea typeface="Arial"/>
-              <a:cs typeface="Arial"/>
-              <a:sym typeface="Arial"/>
-            </a:endParaRPr>
-          </a:p>
-        </p:txBody>
-      </p:sp>
-      <p:sp>
-        <p:nvSpPr>
-          <p:cNvPr id="88" name="Google Shape;88;g3bd1f6d9d27_0_3"/>
-          <p:cNvSpPr/>
-          <p:nvPr/>
-        </p:nvSpPr>
-        <p:spPr>
-          <a:xfrm>
-            <a:off x="2453475" y="5384950"/>
-            <a:ext cx="1447200" cy="360600"/>
+          <a:xfrm>
+            <a:off x="2841675" y="5983750"/>
+            <a:ext cx="227100" cy="405300"/>
           </a:xfrm>
           <a:prstGeom prst="rect">
             <a:avLst/>
@@ -9000,7 +13699,7 @@
           <a:noFill/>
           <a:ln cap="flat" cmpd="sng" w="28575">
             <a:solidFill>
-              <a:srgbClr val="9BA4FF"/>
+              <a:srgbClr val="A31515"/>
             </a:solidFill>
             <a:prstDash val="solid"/>
             <a:round/>
@@ -9048,27 +13747,25 @@
       </p:sp>
       <p:cxnSp>
         <p:nvCxnSpPr>
-          <p:cNvPr id="89" name="Google Shape;89;g3bd1f6d9d27_0_3"/>
+          <p:cNvPr id="88" name="Google Shape;88;g3bd1f6d9d27_0_3"/>
           <p:cNvCxnSpPr>
-            <a:stCxn id="87" idx="1"/>
-            <a:endCxn id="88" idx="2"/>
+            <a:stCxn id="85" idx="3"/>
+            <a:endCxn id="87" idx="2"/>
           </p:cNvCxnSpPr>
           <p:nvPr/>
         </p:nvCxnSpPr>
         <p:spPr>
-          <a:xfrm rot="-5400000">
-            <a:off x="2862650" y="5692750"/>
-            <a:ext cx="261900" cy="367200"/>
-          </a:xfrm>
-          <a:prstGeom prst="curvedConnector3">
-            <a:avLst>
-              <a:gd fmla="val 49971" name="adj1"/>
-            </a:avLst>
-          </a:prstGeom>
-          <a:noFill/>
-          <a:ln cap="flat" cmpd="sng" w="9525">
+          <a:xfrm flipH="1" rot="10800000">
+            <a:off x="1358300" y="6389050"/>
+            <a:ext cx="1596900" cy="188100"/>
+          </a:xfrm>
+          <a:prstGeom prst="curvedConnector2">
+            <a:avLst/>
+          </a:prstGeom>
+          <a:noFill/>
+          <a:ln cap="flat" cmpd="sng" w="19050">
             <a:solidFill>
-              <a:srgbClr val="9BA4FF"/>
+              <a:srgbClr val="A31415"/>
             </a:solidFill>
             <a:prstDash val="solid"/>
             <a:round/>
@@ -9077,16 +13774,91 @@
           </a:ln>
         </p:spPr>
       </p:cxnSp>
+    </p:spTree>
+  </p:cSld>
+  <p:clrMapOvr>
+    <a:masterClrMapping/>
+  </p:clrMapOvr>
+</p:sld>
+</file>
+
+<file path=ppt/slides/slide4.xml><?xml version="1.0" encoding="utf-8"?>
+<p:sld xmlns:a="http://schemas.openxmlformats.org/drawingml/2006/main" xmlns:r="http://schemas.openxmlformats.org/officeDocument/2006/relationships" xmlns:mc="http://schemas.openxmlformats.org/markup-compatibility/2006" xmlns:mv="urn:schemas-microsoft-com:mac:vml" xmlns:p="http://schemas.openxmlformats.org/presentationml/2006/main" xmlns:c="http://schemas.openxmlformats.org/drawingml/2006/chart" xmlns:dgm="http://schemas.openxmlformats.org/drawingml/2006/diagram" xmlns:o="urn:schemas-microsoft-com:office:office" xmlns:v="urn:schemas-microsoft-com:vml" xmlns:pvml="urn:schemas-microsoft-com:office:powerpoint" xmlns:com="http://schemas.openxmlformats.org/drawingml/2006/compatibility" xmlns:p14="http://schemas.microsoft.com/office/powerpoint/2010/main" xmlns:p15="http://schemas.microsoft.com/office/powerpoint/2012/main" xmlns:ahyp="http://schemas.microsoft.com/office/drawing/2018/hyperlinkcolor">
+  <p:cSld>
+    <p:spTree>
+      <p:nvGrpSpPr>
+        <p:cNvPr id="92" name="Shape 92"/>
+        <p:cNvGrpSpPr/>
+        <p:nvPr/>
+      </p:nvGrpSpPr>
+      <p:grpSpPr>
+        <a:xfrm>
+          <a:off x="0" y="0"/>
+          <a:ext cx="0" cy="0"/>
+          <a:chOff x="0" y="0"/>
+          <a:chExt cx="0" cy="0"/>
+        </a:xfrm>
+      </p:grpSpPr>
       <p:sp>
         <p:nvSpPr>
-          <p:cNvPr id="90" name="Google Shape;90;g3bd1f6d9d27_0_3"/>
+          <p:cNvPr id="93" name="Google Shape;93;g3c70c3f9d8e_0_10"/>
           <p:cNvSpPr txBox="1"/>
-          <p:nvPr/>
+          <p:nvPr>
+            <p:ph type="title"/>
+          </p:nvPr>
         </p:nvSpPr>
         <p:spPr>
           <a:xfrm>
-            <a:off x="1611799" y="3848375"/>
-            <a:ext cx="2430300" cy="233700"/>
+            <a:off x="457200" y="274638"/>
+            <a:ext cx="8229600" cy="1143000"/>
+          </a:xfrm>
+          <a:prstGeom prst="rect">
+            <a:avLst/>
+          </a:prstGeom>
+          <a:noFill/>
+          <a:ln>
+            <a:noFill/>
+          </a:ln>
+        </p:spPr>
+        <p:txBody>
+          <a:bodyPr anchorCtr="0" anchor="b" bIns="91425" lIns="91425" spcFirstLastPara="1" rIns="91425" wrap="square" tIns="91425">
+            <a:noAutofit/>
+          </a:bodyPr>
+          <a:lstStyle/>
+          <a:p>
+            <a:pPr indent="0" lvl="0" marL="0" rtl="0" algn="l">
+              <a:lnSpc>
+                <a:spcPct val="100000"/>
+              </a:lnSpc>
+              <a:spcBef>
+                <a:spcPts val="0"/>
+              </a:spcBef>
+              <a:spcAft>
+                <a:spcPts val="0"/>
+              </a:spcAft>
+              <a:buSzPts val="3600"/>
+              <a:buNone/>
+            </a:pPr>
+            <a:r>
+              <a:rPr lang="en"/>
+              <a:t>Non-linearity</a:t>
+            </a:r>
+            <a:endParaRPr/>
+          </a:p>
+        </p:txBody>
+      </p:sp>
+      <p:sp>
+        <p:nvSpPr>
+          <p:cNvPr id="94" name="Google Shape;94;g3c70c3f9d8e_0_10"/>
+          <p:cNvSpPr txBox="1"/>
+          <p:nvPr>
+            <p:ph idx="1" type="body"/>
+          </p:nvPr>
+        </p:nvSpPr>
+        <p:spPr>
+          <a:xfrm>
+            <a:off x="457200" y="5663275"/>
+            <a:ext cx="8229600" cy="904500"/>
           </a:xfrm>
           <a:prstGeom prst="rect">
             <a:avLst/>
@@ -9102,50 +13874,30 @@
           </a:bodyPr>
           <a:lstStyle/>
           <a:p>
-            <a:pPr indent="0" lvl="0" marL="0" marR="0" rtl="0" algn="l">
-              <a:lnSpc>
-                <a:spcPct val="100000"/>
-              </a:lnSpc>
-              <a:spcBef>
-                <a:spcPts val="0"/>
-              </a:spcBef>
-              <a:spcAft>
-                <a:spcPts val="0"/>
-              </a:spcAft>
-              <a:buClr>
-                <a:srgbClr val="000000"/>
-              </a:buClr>
-              <a:buSzPts val="600"/>
-              <a:buFont typeface="Arial"/>
+            <a:pPr indent="0" lvl="0" marL="0" rtl="0" algn="l">
+              <a:lnSpc>
+                <a:spcPct val="100000"/>
+              </a:lnSpc>
+              <a:spcBef>
+                <a:spcPts val="600"/>
+              </a:spcBef>
+              <a:spcAft>
+                <a:spcPts val="0"/>
+              </a:spcAft>
+              <a:buSzPts val="3000"/>
               <a:buNone/>
             </a:pPr>
             <a:r>
-              <a:rPr b="0" i="0" lang="en" sz="600" u="none" cap="none" strike="noStrike">
-                <a:solidFill>
-                  <a:schemeClr val="dk1"/>
-                </a:solidFill>
-                <a:latin typeface="Arial"/>
-                <a:ea typeface="Arial"/>
-                <a:cs typeface="Arial"/>
-                <a:sym typeface="Arial"/>
-              </a:rPr>
-              <a:t>&lt;1, 10&gt;         =       &lt;1, 784&gt;     ᐧ    &lt;784, 10&gt;            +        &lt;1, 10&gt;</a:t>
-            </a:r>
-            <a:endParaRPr b="0" i="0" sz="600" u="none" cap="none" strike="noStrike">
-              <a:solidFill>
-                <a:schemeClr val="dk1"/>
-              </a:solidFill>
-              <a:latin typeface="Arial"/>
-              <a:ea typeface="Arial"/>
-              <a:cs typeface="Arial"/>
-              <a:sym typeface="Arial"/>
-            </a:endParaRPr>
+              <a:rPr lang="en" sz="2800"/>
+              <a:t>Not all data can be separated with a straight line!</a:t>
+            </a:r>
+            <a:endParaRPr sz="2800"/>
           </a:p>
         </p:txBody>
       </p:sp>
       <p:pic>
         <p:nvPicPr>
-          <p:cNvPr id="91" name="Google Shape;91;g3bd1f6d9d27_0_3"/>
+          <p:cNvPr id="95" name="Google Shape;95;g3c70c3f9d8e_0_10"/>
           <p:cNvPicPr preferRelativeResize="0"/>
           <p:nvPr/>
         </p:nvPicPr>
@@ -9158,8 +13910,8 @@
         </p:blipFill>
         <p:spPr>
           <a:xfrm>
-            <a:off x="324408" y="6386450"/>
-            <a:ext cx="406973" cy="405301"/>
+            <a:off x="457203" y="1600203"/>
+            <a:ext cx="8229600" cy="3880527"/>
           </a:xfrm>
           <a:prstGeom prst="rect">
             <a:avLst/>
@@ -9170,293 +13922,6 @@
           </a:ln>
         </p:spPr>
       </p:pic>
-      <p:sp>
-        <p:nvSpPr>
-          <p:cNvPr id="92" name="Google Shape;92;g3bd1f6d9d27_0_3"/>
-          <p:cNvSpPr txBox="1"/>
-          <p:nvPr/>
-        </p:nvSpPr>
-        <p:spPr>
-          <a:xfrm>
-            <a:off x="703275" y="6263350"/>
-            <a:ext cx="1133400" cy="506700"/>
-          </a:xfrm>
-          <a:prstGeom prst="rect">
-            <a:avLst/>
-          </a:prstGeom>
-          <a:noFill/>
-          <a:ln>
-            <a:noFill/>
-          </a:ln>
-        </p:spPr>
-        <p:txBody>
-          <a:bodyPr anchorCtr="0" anchor="t" bIns="91425" lIns="91425" spcFirstLastPara="1" rIns="91425" wrap="square" tIns="91425">
-            <a:noAutofit/>
-          </a:bodyPr>
-          <a:lstStyle/>
-          <a:p>
-            <a:pPr indent="0" lvl="0" marL="0" marR="0" rtl="0" algn="l">
-              <a:lnSpc>
-                <a:spcPct val="100000"/>
-              </a:lnSpc>
-              <a:spcBef>
-                <a:spcPts val="0"/>
-              </a:spcBef>
-              <a:spcAft>
-                <a:spcPts val="0"/>
-              </a:spcAft>
-              <a:buClr>
-                <a:srgbClr val="000000"/>
-              </a:buClr>
-              <a:buSzPts val="3000"/>
-              <a:buFont typeface="Arial"/>
-              <a:buNone/>
-            </a:pPr>
-            <a:r>
-              <a:rPr b="0" i="0" lang="en" sz="3000" u="none" cap="none" strike="noStrike">
-                <a:solidFill>
-                  <a:schemeClr val="dk1"/>
-                </a:solidFill>
-                <a:latin typeface="Arial"/>
-                <a:ea typeface="Arial"/>
-                <a:cs typeface="Arial"/>
-                <a:sym typeface="Arial"/>
-              </a:rPr>
-              <a:t>= 5</a:t>
-            </a:r>
-            <a:endParaRPr b="0" i="0" sz="3000" u="none" cap="none" strike="noStrike">
-              <a:solidFill>
-                <a:schemeClr val="dk1"/>
-              </a:solidFill>
-              <a:latin typeface="Arial"/>
-              <a:ea typeface="Arial"/>
-              <a:cs typeface="Arial"/>
-              <a:sym typeface="Arial"/>
-            </a:endParaRPr>
-          </a:p>
-        </p:txBody>
-      </p:sp>
-      <p:sp>
-        <p:nvSpPr>
-          <p:cNvPr id="93" name="Google Shape;93;g3bd1f6d9d27_0_3"/>
-          <p:cNvSpPr/>
-          <p:nvPr/>
-        </p:nvSpPr>
-        <p:spPr>
-          <a:xfrm>
-            <a:off x="299300" y="6323800"/>
-            <a:ext cx="1059000" cy="506700"/>
-          </a:xfrm>
-          <a:prstGeom prst="rect">
-            <a:avLst/>
-          </a:prstGeom>
-          <a:noFill/>
-          <a:ln cap="flat" cmpd="sng" w="28575">
-            <a:solidFill>
-              <a:srgbClr val="A31515"/>
-            </a:solidFill>
-            <a:prstDash val="solid"/>
-            <a:round/>
-            <a:headEnd len="sm" w="sm" type="none"/>
-            <a:tailEnd len="sm" w="sm" type="none"/>
-          </a:ln>
-        </p:spPr>
-        <p:txBody>
-          <a:bodyPr anchorCtr="0" anchor="ctr" bIns="91425" lIns="91425" spcFirstLastPara="1" rIns="91425" wrap="square" tIns="91425">
-            <a:noAutofit/>
-          </a:bodyPr>
-          <a:lstStyle/>
-          <a:p>
-            <a:pPr indent="0" lvl="0" marL="0" marR="0" rtl="0" algn="ctr">
-              <a:lnSpc>
-                <a:spcPct val="100000"/>
-              </a:lnSpc>
-              <a:spcBef>
-                <a:spcPts val="0"/>
-              </a:spcBef>
-              <a:spcAft>
-                <a:spcPts val="0"/>
-              </a:spcAft>
-              <a:buClr>
-                <a:srgbClr val="000000"/>
-              </a:buClr>
-              <a:buSzPts val="1400"/>
-              <a:buFont typeface="Arial"/>
-              <a:buNone/>
-            </a:pPr>
-            <a:r>
-              <a:t/>
-            </a:r>
-            <a:endParaRPr b="0" i="0" sz="1400" u="none" cap="none" strike="noStrike">
-              <a:solidFill>
-                <a:srgbClr val="000000"/>
-              </a:solidFill>
-              <a:latin typeface="Arial"/>
-              <a:ea typeface="Arial"/>
-              <a:cs typeface="Arial"/>
-              <a:sym typeface="Arial"/>
-            </a:endParaRPr>
-          </a:p>
-        </p:txBody>
-      </p:sp>
-      <p:sp>
-        <p:nvSpPr>
-          <p:cNvPr id="94" name="Google Shape;94;g3bd1f6d9d27_0_3"/>
-          <p:cNvSpPr txBox="1"/>
-          <p:nvPr/>
-        </p:nvSpPr>
-        <p:spPr>
-          <a:xfrm>
-            <a:off x="1500977" y="6109600"/>
-            <a:ext cx="3135300" cy="360600"/>
-          </a:xfrm>
-          <a:prstGeom prst="rect">
-            <a:avLst/>
-          </a:prstGeom>
-          <a:noFill/>
-          <a:ln>
-            <a:noFill/>
-          </a:ln>
-        </p:spPr>
-        <p:txBody>
-          <a:bodyPr anchorCtr="0" anchor="ctr" bIns="91425" lIns="91425" spcFirstLastPara="1" rIns="91425" wrap="square" tIns="91425">
-            <a:noAutofit/>
-          </a:bodyPr>
-          <a:lstStyle/>
-          <a:p>
-            <a:pPr indent="0" lvl="0" marL="0" marR="0" rtl="0" algn="l">
-              <a:lnSpc>
-                <a:spcPct val="100000"/>
-              </a:lnSpc>
-              <a:spcBef>
-                <a:spcPts val="0"/>
-              </a:spcBef>
-              <a:spcAft>
-                <a:spcPts val="0"/>
-              </a:spcAft>
-              <a:buClr>
-                <a:srgbClr val="000000"/>
-              </a:buClr>
-              <a:buSzPts val="800"/>
-              <a:buFont typeface="Arial"/>
-              <a:buNone/>
-            </a:pPr>
-            <a:r>
-              <a:rPr b="0" i="0" lang="en" sz="800" u="none" cap="none" strike="noStrike">
-                <a:solidFill>
-                  <a:schemeClr val="dk1"/>
-                </a:solidFill>
-                <a:latin typeface="Consolas"/>
-                <a:ea typeface="Consolas"/>
-                <a:cs typeface="Consolas"/>
-                <a:sym typeface="Consolas"/>
-              </a:rPr>
-              <a:t>0,  1,   2,   3,   4,   5,   6,   7,   8,   9</a:t>
-            </a:r>
-            <a:endParaRPr b="0" i="0" sz="800" u="none" cap="none" strike="noStrike">
-              <a:solidFill>
-                <a:schemeClr val="dk1"/>
-              </a:solidFill>
-              <a:latin typeface="Consolas"/>
-              <a:ea typeface="Consolas"/>
-              <a:cs typeface="Consolas"/>
-              <a:sym typeface="Consolas"/>
-            </a:endParaRPr>
-          </a:p>
-        </p:txBody>
-      </p:sp>
-      <p:sp>
-        <p:nvSpPr>
-          <p:cNvPr id="95" name="Google Shape;95;g3bd1f6d9d27_0_3"/>
-          <p:cNvSpPr/>
-          <p:nvPr/>
-        </p:nvSpPr>
-        <p:spPr>
-          <a:xfrm>
-            <a:off x="2841675" y="5983750"/>
-            <a:ext cx="227100" cy="405300"/>
-          </a:xfrm>
-          <a:prstGeom prst="rect">
-            <a:avLst/>
-          </a:prstGeom>
-          <a:noFill/>
-          <a:ln cap="flat" cmpd="sng" w="28575">
-            <a:solidFill>
-              <a:srgbClr val="A31515"/>
-            </a:solidFill>
-            <a:prstDash val="solid"/>
-            <a:round/>
-            <a:headEnd len="sm" w="sm" type="none"/>
-            <a:tailEnd len="sm" w="sm" type="none"/>
-          </a:ln>
-        </p:spPr>
-        <p:txBody>
-          <a:bodyPr anchorCtr="0" anchor="ctr" bIns="91425" lIns="91425" spcFirstLastPara="1" rIns="91425" wrap="square" tIns="91425">
-            <a:noAutofit/>
-          </a:bodyPr>
-          <a:lstStyle/>
-          <a:p>
-            <a:pPr indent="0" lvl="0" marL="0" marR="0" rtl="0" algn="ctr">
-              <a:lnSpc>
-                <a:spcPct val="100000"/>
-              </a:lnSpc>
-              <a:spcBef>
-                <a:spcPts val="0"/>
-              </a:spcBef>
-              <a:spcAft>
-                <a:spcPts val="0"/>
-              </a:spcAft>
-              <a:buClr>
-                <a:srgbClr val="000000"/>
-              </a:buClr>
-              <a:buSzPts val="1400"/>
-              <a:buFont typeface="Arial"/>
-              <a:buNone/>
-            </a:pPr>
-            <a:r>
-              <a:t/>
-            </a:r>
-            <a:endParaRPr b="0" i="0" sz="1400" u="none" cap="none" strike="noStrike">
-              <a:solidFill>
-                <a:srgbClr val="000000"/>
-              </a:solidFill>
-              <a:latin typeface="Arial"/>
-              <a:ea typeface="Arial"/>
-              <a:cs typeface="Arial"/>
-              <a:sym typeface="Arial"/>
-            </a:endParaRPr>
-          </a:p>
-        </p:txBody>
-      </p:sp>
-      <p:cxnSp>
-        <p:nvCxnSpPr>
-          <p:cNvPr id="96" name="Google Shape;96;g3bd1f6d9d27_0_3"/>
-          <p:cNvCxnSpPr>
-            <a:stCxn id="93" idx="3"/>
-            <a:endCxn id="95" idx="2"/>
-          </p:cNvCxnSpPr>
-          <p:nvPr/>
-        </p:nvCxnSpPr>
-        <p:spPr>
-          <a:xfrm flipH="1" rot="10800000">
-            <a:off x="1358300" y="6389050"/>
-            <a:ext cx="1596900" cy="188100"/>
-          </a:xfrm>
-          <a:prstGeom prst="curvedConnector2">
-            <a:avLst/>
-          </a:prstGeom>
-          <a:noFill/>
-          <a:ln cap="flat" cmpd="sng" w="19050">
-            <a:solidFill>
-              <a:srgbClr val="A31415"/>
-            </a:solidFill>
-            <a:prstDash val="solid"/>
-            <a:round/>
-            <a:headEnd len="sm" w="sm" type="none"/>
-            <a:tailEnd len="med" w="med" type="triangle"/>
-          </a:ln>
-        </p:spPr>
-      </p:cxnSp>
     </p:spTree>
   </p:cSld>
   <p:clrMapOvr>
@@ -9470,7 +13935,7 @@
   <p:cSld>
     <p:spTree>
       <p:nvGrpSpPr>
-        <p:cNvPr id="100" name="Shape 100"/>
+        <p:cNvPr id="99" name="Shape 99"/>
         <p:cNvGrpSpPr/>
         <p:nvPr/>
       </p:nvGrpSpPr>
@@ -9484,7 +13949,7 @@
       </p:grpSpPr>
       <p:sp>
         <p:nvSpPr>
-          <p:cNvPr id="101" name="Google Shape;101;g3c70c3f9d8e_0_10"/>
+          <p:cNvPr id="100" name="Google Shape;100;g3c70c3f9d8e_0_15"/>
           <p:cNvSpPr txBox="1"/>
           <p:nvPr>
             <p:ph type="title"/>
@@ -9524,7 +13989,7 @@
             </a:pPr>
             <a:r>
               <a:rPr lang="en"/>
-              <a:t>Non-linearity</a:t>
+              <a:t>Activation Functions</a:t>
             </a:r>
             <a:endParaRPr/>
           </a:p>
@@ -9532,7 +13997,7 @@
       </p:sp>
       <p:sp>
         <p:nvSpPr>
-          <p:cNvPr id="102" name="Google Shape;102;g3c70c3f9d8e_0_10"/>
+          <p:cNvPr id="101" name="Google Shape;101;g3c70c3f9d8e_0_15"/>
           <p:cNvSpPr txBox="1"/>
           <p:nvPr>
             <p:ph idx="1" type="body"/>
@@ -9540,8 +14005,8 @@
         </p:nvSpPr>
         <p:spPr>
           <a:xfrm>
-            <a:off x="457200" y="5663275"/>
-            <a:ext cx="8229600" cy="904500"/>
+            <a:off x="457200" y="1600200"/>
+            <a:ext cx="8229600" cy="4967700"/>
           </a:xfrm>
           <a:prstGeom prst="rect">
             <a:avLst/>
@@ -9571,16 +14036,16 @@
               <a:buNone/>
             </a:pPr>
             <a:r>
-              <a:rPr lang="en" sz="2800"/>
-              <a:t>Not all data can be separated with a straight line!</a:t>
-            </a:r>
-            <a:endParaRPr sz="2800"/>
+              <a:rPr lang="en"/>
+              <a:t>We can add non-linearity to our network by wrapping our linear transformations in nonlinear functions called activation functions</a:t>
+            </a:r>
+            <a:endParaRPr/>
           </a:p>
         </p:txBody>
       </p:sp>
       <p:pic>
         <p:nvPicPr>
-          <p:cNvPr id="103" name="Google Shape;103;g3c70c3f9d8e_0_10"/>
+          <p:cNvPr id="102" name="Google Shape;102;g3c70c3f9d8e_0_15"/>
           <p:cNvPicPr preferRelativeResize="0"/>
           <p:nvPr/>
         </p:nvPicPr>
@@ -9588,13 +14053,13 @@
           <a:blip r:embed="rId3">
             <a:alphaModFix/>
           </a:blip>
-          <a:srcRect b="0" l="0" r="0" t="0"/>
+          <a:srcRect b="0" l="0" r="0" t="14696"/>
           <a:stretch/>
         </p:blipFill>
         <p:spPr>
           <a:xfrm>
-            <a:off x="457203" y="1600203"/>
-            <a:ext cx="8229600" cy="3880527"/>
+            <a:off x="598950" y="3251650"/>
+            <a:ext cx="7946100" cy="3406100"/>
           </a:xfrm>
           <a:prstGeom prst="rect">
             <a:avLst/>
@@ -9618,7 +14083,7 @@
   <p:cSld>
     <p:spTree>
       <p:nvGrpSpPr>
-        <p:cNvPr id="107" name="Shape 107"/>
+        <p:cNvPr id="106" name="Shape 106"/>
         <p:cNvGrpSpPr/>
         <p:nvPr/>
       </p:nvGrpSpPr>
@@ -9632,7 +14097,7 @@
       </p:grpSpPr>
       <p:sp>
         <p:nvSpPr>
-          <p:cNvPr id="108" name="Google Shape;108;g3c70c3f9d8e_0_15"/>
+          <p:cNvPr id="107" name="Google Shape;107;g3c70c3f9d8e_0_74"/>
           <p:cNvSpPr txBox="1"/>
           <p:nvPr>
             <p:ph type="title"/>
@@ -9672,55 +14137,7 @@
             </a:pPr>
             <a:r>
               <a:rPr lang="en"/>
-              <a:t>Activation Functions</a:t>
-            </a:r>
-            <a:endParaRPr/>
-          </a:p>
-        </p:txBody>
-      </p:sp>
-      <p:sp>
-        <p:nvSpPr>
-          <p:cNvPr id="109" name="Google Shape;109;g3c70c3f9d8e_0_15"/>
-          <p:cNvSpPr txBox="1"/>
-          <p:nvPr>
-            <p:ph idx="1" type="body"/>
-          </p:nvPr>
-        </p:nvSpPr>
-        <p:spPr>
-          <a:xfrm>
-            <a:off x="457200" y="1600200"/>
-            <a:ext cx="8229600" cy="4967700"/>
-          </a:xfrm>
-          <a:prstGeom prst="rect">
-            <a:avLst/>
-          </a:prstGeom>
-          <a:noFill/>
-          <a:ln>
-            <a:noFill/>
-          </a:ln>
-        </p:spPr>
-        <p:txBody>
-          <a:bodyPr anchorCtr="0" anchor="t" bIns="91425" lIns="91425" spcFirstLastPara="1" rIns="91425" wrap="square" tIns="91425">
-            <a:noAutofit/>
-          </a:bodyPr>
-          <a:lstStyle/>
-          <a:p>
-            <a:pPr indent="0" lvl="0" marL="0" rtl="0" algn="l">
-              <a:lnSpc>
-                <a:spcPct val="100000"/>
-              </a:lnSpc>
-              <a:spcBef>
-                <a:spcPts val="600"/>
-              </a:spcBef>
-              <a:spcAft>
-                <a:spcPts val="0"/>
-              </a:spcAft>
-              <a:buSzPts val="3000"/>
-              <a:buNone/>
-            </a:pPr>
-            <a:r>
-              <a:rPr lang="en"/>
-              <a:t>We can add non-linearity to our network by wrapping our linear transformations in nonlinear functions called activation functions</a:t>
+              <a:t>nanochat - MLP</a:t>
             </a:r>
             <a:endParaRPr/>
           </a:p>
@@ -9728,7 +14145,7 @@
       </p:sp>
       <p:pic>
         <p:nvPicPr>
-          <p:cNvPr id="110" name="Google Shape;110;g3c70c3f9d8e_0_15"/>
+          <p:cNvPr id="108" name="Google Shape;108;g3c70c3f9d8e_0_74" title="Screenshot 2026-02-11 at 9.35.26 AM.png"/>
           <p:cNvPicPr preferRelativeResize="0"/>
           <p:nvPr/>
         </p:nvPicPr>
@@ -9736,13 +14153,13 @@
           <a:blip r:embed="rId3">
             <a:alphaModFix/>
           </a:blip>
-          <a:srcRect b="0" l="0" r="0" t="14696"/>
+          <a:srcRect b="0" l="0" r="0" t="0"/>
           <a:stretch/>
         </p:blipFill>
         <p:spPr>
           <a:xfrm>
-            <a:off x="598950" y="3251650"/>
-            <a:ext cx="7946100" cy="3406100"/>
+            <a:off x="734075" y="1822724"/>
+            <a:ext cx="7675839" cy="4522650"/>
           </a:xfrm>
           <a:prstGeom prst="rect">
             <a:avLst/>
@@ -9766,7 +14183,7 @@
   <p:cSld>
     <p:spTree>
       <p:nvGrpSpPr>
-        <p:cNvPr id="114" name="Shape 114"/>
+        <p:cNvPr id="112" name="Shape 112"/>
         <p:cNvGrpSpPr/>
         <p:nvPr/>
       </p:nvGrpSpPr>
@@ -9780,7 +14197,7 @@
       </p:grpSpPr>
       <p:sp>
         <p:nvSpPr>
-          <p:cNvPr id="115" name="Google Shape;115;g3c70c3f9d8e_0_74"/>
+          <p:cNvPr id="113" name="Google Shape;113;g3c70c3f9d8e_0_20"/>
           <p:cNvSpPr txBox="1"/>
           <p:nvPr>
             <p:ph type="title"/>
@@ -9820,7 +14237,7 @@
             </a:pPr>
             <a:r>
               <a:rPr lang="en"/>
-              <a:t>nanochat - MLP</a:t>
+              <a:t>Convolutional Neural Networks</a:t>
             </a:r>
             <a:endParaRPr/>
           </a:p>
@@ -9828,21 +14245,22 @@
       </p:sp>
       <p:pic>
         <p:nvPicPr>
-          <p:cNvPr id="116" name="Google Shape;116;g3c70c3f9d8e_0_74" title="Screenshot 2026-02-11 at 9.35.26 AM.png"/>
+          <p:cNvPr id="114" name="Google Shape;114;g3c70c3f9d8e_0_20"/>
           <p:cNvPicPr preferRelativeResize="0"/>
           <p:nvPr/>
         </p:nvPicPr>
-        <p:blipFill rotWithShape="1">
+        <p:blipFill>
           <a:blip r:embed="rId3">
             <a:alphaModFix/>
           </a:blip>
-          <a:srcRect b="0" l="0" r="0" t="0"/>
-          <a:stretch/>
+          <a:stretch>
+            <a:fillRect/>
+          </a:stretch>
         </p:blipFill>
         <p:spPr>
           <a:xfrm>
-            <a:off x="734075" y="1822724"/>
-            <a:ext cx="7675839" cy="4522650"/>
+            <a:off x="152400" y="1417638"/>
+            <a:ext cx="8839197" cy="4154423"/>
           </a:xfrm>
           <a:prstGeom prst="rect">
             <a:avLst/>
@@ -9866,7 +14284,7 @@
   <p:cSld>
     <p:spTree>
       <p:nvGrpSpPr>
-        <p:cNvPr id="120" name="Shape 120"/>
+        <p:cNvPr id="118" name="Shape 118"/>
         <p:cNvGrpSpPr/>
         <p:nvPr/>
       </p:nvGrpSpPr>
@@ -9880,7 +14298,7 @@
       </p:grpSpPr>
       <p:sp>
         <p:nvSpPr>
-          <p:cNvPr id="121" name="Google Shape;121;g3c70c3f9d8e_0_20"/>
+          <p:cNvPr id="119" name="Google Shape;119;g3c89c144ce9_0_148"/>
           <p:cNvSpPr txBox="1"/>
           <p:nvPr>
             <p:ph type="title"/>
@@ -9894,10 +14312,6 @@
           <a:prstGeom prst="rect">
             <a:avLst/>
           </a:prstGeom>
-          <a:noFill/>
-          <a:ln>
-            <a:noFill/>
-          </a:ln>
         </p:spPr>
         <p:txBody>
           <a:bodyPr anchorCtr="0" anchor="b" bIns="91425" lIns="91425" spcFirstLastPara="1" rIns="91425" wrap="square" tIns="91425">
@@ -9906,29 +14320,161 @@
           <a:lstStyle/>
           <a:p>
             <a:pPr indent="0" lvl="0" marL="0" rtl="0" algn="l">
-              <a:lnSpc>
-                <a:spcPct val="100000"/>
-              </a:lnSpc>
-              <a:spcBef>
-                <a:spcPts val="0"/>
-              </a:spcBef>
-              <a:spcAft>
-                <a:spcPts val="0"/>
-              </a:spcAft>
-              <a:buSzPts val="3600"/>
+              <a:spcBef>
+                <a:spcPts val="0"/>
+              </a:spcBef>
+              <a:spcAft>
+                <a:spcPts val="0"/>
+              </a:spcAft>
               <a:buNone/>
             </a:pPr>
             <a:r>
               <a:rPr lang="en"/>
-              <a:t>Convolutional Neural Networks</a:t>
+              <a:t>FFN vs. FFN + Dropout vs. CNN</a:t>
             </a:r>
             <a:endParaRPr/>
+          </a:p>
+        </p:txBody>
+      </p:sp>
+    </p:spTree>
+  </p:cSld>
+  <p:clrMapOvr>
+    <a:masterClrMapping/>
+  </p:clrMapOvr>
+</p:sld>
+</file>
+
+<file path=ppt/slides/slide9.xml><?xml version="1.0" encoding="utf-8"?>
+<p:sld xmlns:a="http://schemas.openxmlformats.org/drawingml/2006/main" xmlns:r="http://schemas.openxmlformats.org/officeDocument/2006/relationships" xmlns:mc="http://schemas.openxmlformats.org/markup-compatibility/2006" xmlns:mv="urn:schemas-microsoft-com:mac:vml" xmlns:p="http://schemas.openxmlformats.org/presentationml/2006/main" xmlns:c="http://schemas.openxmlformats.org/drawingml/2006/chart" xmlns:dgm="http://schemas.openxmlformats.org/drawingml/2006/diagram" xmlns:o="urn:schemas-microsoft-com:office:office" xmlns:v="urn:schemas-microsoft-com:vml" xmlns:pvml="urn:schemas-microsoft-com:office:powerpoint" xmlns:com="http://schemas.openxmlformats.org/drawingml/2006/compatibility" xmlns:p14="http://schemas.microsoft.com/office/powerpoint/2010/main" xmlns:p15="http://schemas.microsoft.com/office/powerpoint/2012/main" xmlns:ahyp="http://schemas.microsoft.com/office/drawing/2018/hyperlinkcolor">
+  <p:cSld>
+    <p:spTree>
+      <p:nvGrpSpPr>
+        <p:cNvPr id="123" name="Shape 123"/>
+        <p:cNvGrpSpPr/>
+        <p:nvPr/>
+      </p:nvGrpSpPr>
+      <p:grpSpPr>
+        <a:xfrm>
+          <a:off x="0" y="0"/>
+          <a:ext cx="0" cy="0"/>
+          <a:chOff x="0" y="0"/>
+          <a:chExt cx="0" cy="0"/>
+        </a:xfrm>
+      </p:grpSpPr>
+      <p:sp>
+        <p:nvSpPr>
+          <p:cNvPr id="124" name="Google Shape;124;g3c89c144ce9_0_1"/>
+          <p:cNvSpPr txBox="1"/>
+          <p:nvPr>
+            <p:ph type="title"/>
+          </p:nvPr>
+        </p:nvSpPr>
+        <p:spPr>
+          <a:xfrm>
+            <a:off x="457200" y="274638"/>
+            <a:ext cx="8229600" cy="1143000"/>
+          </a:xfrm>
+          <a:prstGeom prst="rect">
+            <a:avLst/>
+          </a:prstGeom>
+        </p:spPr>
+        <p:txBody>
+          <a:bodyPr anchorCtr="0" anchor="b" bIns="91425" lIns="91425" spcFirstLastPara="1" rIns="91425" wrap="square" tIns="91425">
+            <a:noAutofit/>
+          </a:bodyPr>
+          <a:lstStyle/>
+          <a:p>
+            <a:pPr indent="0" lvl="0" marL="0" rtl="0" algn="l">
+              <a:spcBef>
+                <a:spcPts val="0"/>
+              </a:spcBef>
+              <a:spcAft>
+                <a:spcPts val="0"/>
+              </a:spcAft>
+              <a:buNone/>
+            </a:pPr>
+            <a:r>
+              <a:rPr lang="en"/>
+              <a:t>Image vs. Text Data</a:t>
+            </a:r>
+            <a:endParaRPr/>
+          </a:p>
+        </p:txBody>
+      </p:sp>
+      <p:sp>
+        <p:nvSpPr>
+          <p:cNvPr id="125" name="Google Shape;125;g3c89c144ce9_0_1"/>
+          <p:cNvSpPr txBox="1"/>
+          <p:nvPr>
+            <p:ph idx="1" type="body"/>
+          </p:nvPr>
+        </p:nvSpPr>
+        <p:spPr>
+          <a:xfrm>
+            <a:off x="457200" y="3210750"/>
+            <a:ext cx="8229600" cy="2276100"/>
+          </a:xfrm>
+          <a:prstGeom prst="rect">
+            <a:avLst/>
+          </a:prstGeom>
+        </p:spPr>
+        <p:txBody>
+          <a:bodyPr anchorCtr="0" anchor="t" bIns="91425" lIns="91425" spcFirstLastPara="1" rIns="91425" wrap="square" tIns="91425">
+            <a:noAutofit/>
+          </a:bodyPr>
+          <a:lstStyle/>
+          <a:p>
+            <a:pPr indent="0" lvl="0" marL="0" rtl="0" algn="l">
+              <a:spcBef>
+                <a:spcPts val="600"/>
+              </a:spcBef>
+              <a:spcAft>
+                <a:spcPts val="0"/>
+              </a:spcAft>
+              <a:buNone/>
+            </a:pPr>
+            <a:r>
+              <a:rPr lang="en" sz="2800"/>
+              <a:t>Whether an image of a 5 came before the 0 has no impact on how we predict the 0.</a:t>
+            </a:r>
+            <a:endParaRPr sz="2800"/>
+          </a:p>
+          <a:p>
+            <a:pPr indent="0" lvl="0" marL="0" rtl="0" algn="l">
+              <a:spcBef>
+                <a:spcPts val="600"/>
+              </a:spcBef>
+              <a:spcAft>
+                <a:spcPts val="0"/>
+              </a:spcAft>
+              <a:buNone/>
+            </a:pPr>
+            <a:r>
+              <a:t/>
+            </a:r>
+            <a:endParaRPr sz="2800"/>
+          </a:p>
+          <a:p>
+            <a:pPr indent="0" lvl="0" marL="0" rtl="0" algn="l">
+              <a:spcBef>
+                <a:spcPts val="600"/>
+              </a:spcBef>
+              <a:spcAft>
+                <a:spcPts val="0"/>
+              </a:spcAft>
+              <a:buNone/>
+            </a:pPr>
+            <a:r>
+              <a:rPr lang="en" sz="2800"/>
+              <a:t>However, for text, what came previously matters a LOT</a:t>
+            </a:r>
+            <a:endParaRPr sz="2800"/>
           </a:p>
         </p:txBody>
       </p:sp>
       <p:pic>
         <p:nvPicPr>
-          <p:cNvPr id="122" name="Google Shape;122;g3c70c3f9d8e_0_20"/>
+          <p:cNvPr id="126" name="Google Shape;126;g3c89c144ce9_0_1"/>
           <p:cNvPicPr preferRelativeResize="0"/>
           <p:nvPr/>
         </p:nvPicPr>
@@ -9942,8 +14488,8 @@
         </p:blipFill>
         <p:spPr>
           <a:xfrm>
-            <a:off x="152400" y="1417638"/>
-            <a:ext cx="8839197" cy="4154423"/>
+            <a:off x="1324075" y="1417650"/>
+            <a:ext cx="6495851" cy="1793100"/>
           </a:xfrm>
           <a:prstGeom prst="rect">
             <a:avLst/>
@@ -9954,6 +14500,266 @@
           </a:ln>
         </p:spPr>
       </p:pic>
+      <p:sp>
+        <p:nvSpPr>
+          <p:cNvPr id="127" name="Google Shape;127;g3c89c144ce9_0_1"/>
+          <p:cNvSpPr/>
+          <p:nvPr/>
+        </p:nvSpPr>
+        <p:spPr>
+          <a:xfrm>
+            <a:off x="1298700" y="5724900"/>
+            <a:ext cx="945600" cy="873000"/>
+          </a:xfrm>
+          <a:prstGeom prst="roundRect">
+            <a:avLst>
+              <a:gd fmla="val 16667" name="adj"/>
+            </a:avLst>
+          </a:prstGeom>
+          <a:solidFill>
+            <a:srgbClr val="B6D7A8"/>
+          </a:solidFill>
+          <a:ln cap="flat" cmpd="sng" w="8700">
+            <a:solidFill>
+              <a:srgbClr val="6AA84F"/>
+            </a:solidFill>
+            <a:prstDash val="solid"/>
+            <a:round/>
+            <a:headEnd len="sm" w="sm" type="none"/>
+            <a:tailEnd len="sm" w="sm" type="none"/>
+          </a:ln>
+        </p:spPr>
+        <p:txBody>
+          <a:bodyPr anchorCtr="0" anchor="ctr" bIns="83450" lIns="83450" spcFirstLastPara="1" rIns="83450" wrap="square" tIns="83450">
+            <a:noAutofit/>
+          </a:bodyPr>
+          <a:lstStyle/>
+          <a:p>
+            <a:pPr indent="0" lvl="0" marL="0" rtl="0" algn="ctr">
+              <a:spcBef>
+                <a:spcPts val="0"/>
+              </a:spcBef>
+              <a:spcAft>
+                <a:spcPts val="0"/>
+              </a:spcAft>
+              <a:buNone/>
+            </a:pPr>
+            <a:r>
+              <a:rPr lang="en" sz="2400"/>
+              <a:t>I</a:t>
+            </a:r>
+            <a:endParaRPr sz="2400"/>
+          </a:p>
+        </p:txBody>
+      </p:sp>
+      <p:sp>
+        <p:nvSpPr>
+          <p:cNvPr id="128" name="Google Shape;128;g3c89c144ce9_0_1"/>
+          <p:cNvSpPr/>
+          <p:nvPr/>
+        </p:nvSpPr>
+        <p:spPr>
+          <a:xfrm>
+            <a:off x="2473050" y="5724900"/>
+            <a:ext cx="945600" cy="873000"/>
+          </a:xfrm>
+          <a:prstGeom prst="roundRect">
+            <a:avLst>
+              <a:gd fmla="val 16667" name="adj"/>
+            </a:avLst>
+          </a:prstGeom>
+          <a:solidFill>
+            <a:srgbClr val="B6D7A8"/>
+          </a:solidFill>
+          <a:ln cap="flat" cmpd="sng" w="8700">
+            <a:solidFill>
+              <a:srgbClr val="6AA84F"/>
+            </a:solidFill>
+            <a:prstDash val="solid"/>
+            <a:round/>
+            <a:headEnd len="sm" w="sm" type="none"/>
+            <a:tailEnd len="sm" w="sm" type="none"/>
+          </a:ln>
+        </p:spPr>
+        <p:txBody>
+          <a:bodyPr anchorCtr="0" anchor="ctr" bIns="83450" lIns="83450" spcFirstLastPara="1" rIns="83450" wrap="square" tIns="83450">
+            <a:noAutofit/>
+          </a:bodyPr>
+          <a:lstStyle/>
+          <a:p>
+            <a:pPr indent="0" lvl="0" marL="0" rtl="0" algn="ctr">
+              <a:spcBef>
+                <a:spcPts val="0"/>
+              </a:spcBef>
+              <a:spcAft>
+                <a:spcPts val="0"/>
+              </a:spcAft>
+              <a:buNone/>
+            </a:pPr>
+            <a:r>
+              <a:rPr lang="en" sz="2400"/>
+              <a:t>like</a:t>
+            </a:r>
+            <a:endParaRPr sz="2400"/>
+          </a:p>
+        </p:txBody>
+      </p:sp>
+      <p:sp>
+        <p:nvSpPr>
+          <p:cNvPr id="129" name="Google Shape;129;g3c89c144ce9_0_1"/>
+          <p:cNvSpPr/>
+          <p:nvPr/>
+        </p:nvSpPr>
+        <p:spPr>
+          <a:xfrm>
+            <a:off x="3647400" y="5724900"/>
+            <a:ext cx="945600" cy="873000"/>
+          </a:xfrm>
+          <a:prstGeom prst="roundRect">
+            <a:avLst>
+              <a:gd fmla="val 16667" name="adj"/>
+            </a:avLst>
+          </a:prstGeom>
+          <a:solidFill>
+            <a:srgbClr val="B6D7A8"/>
+          </a:solidFill>
+          <a:ln cap="flat" cmpd="sng" w="8700">
+            <a:solidFill>
+              <a:srgbClr val="6AA84F"/>
+            </a:solidFill>
+            <a:prstDash val="solid"/>
+            <a:round/>
+            <a:headEnd len="sm" w="sm" type="none"/>
+            <a:tailEnd len="sm" w="sm" type="none"/>
+          </a:ln>
+        </p:spPr>
+        <p:txBody>
+          <a:bodyPr anchorCtr="0" anchor="ctr" bIns="83450" lIns="83450" spcFirstLastPara="1" rIns="83450" wrap="square" tIns="83450">
+            <a:noAutofit/>
+          </a:bodyPr>
+          <a:lstStyle/>
+          <a:p>
+            <a:pPr indent="0" lvl="0" marL="0" rtl="0" algn="ctr">
+              <a:spcBef>
+                <a:spcPts val="0"/>
+              </a:spcBef>
+              <a:spcAft>
+                <a:spcPts val="0"/>
+              </a:spcAft>
+              <a:buNone/>
+            </a:pPr>
+            <a:r>
+              <a:rPr lang="en" sz="2400"/>
+              <a:t>cute</a:t>
+            </a:r>
+            <a:endParaRPr sz="2400"/>
+          </a:p>
+        </p:txBody>
+      </p:sp>
+      <p:sp>
+        <p:nvSpPr>
+          <p:cNvPr id="130" name="Google Shape;130;g3c89c144ce9_0_1"/>
+          <p:cNvSpPr/>
+          <p:nvPr/>
+        </p:nvSpPr>
+        <p:spPr>
+          <a:xfrm>
+            <a:off x="4821750" y="5724900"/>
+            <a:ext cx="1397400" cy="873000"/>
+          </a:xfrm>
+          <a:prstGeom prst="roundRect">
+            <a:avLst>
+              <a:gd fmla="val 16667" name="adj"/>
+            </a:avLst>
+          </a:prstGeom>
+          <a:solidFill>
+            <a:srgbClr val="B6D7A8"/>
+          </a:solidFill>
+          <a:ln cap="flat" cmpd="sng" w="8700">
+            <a:solidFill>
+              <a:srgbClr val="6AA84F"/>
+            </a:solidFill>
+            <a:prstDash val="solid"/>
+            <a:round/>
+            <a:headEnd len="sm" w="sm" type="none"/>
+            <a:tailEnd len="sm" w="sm" type="none"/>
+          </a:ln>
+        </p:spPr>
+        <p:txBody>
+          <a:bodyPr anchorCtr="0" anchor="ctr" bIns="83450" lIns="83450" spcFirstLastPara="1" rIns="83450" wrap="square" tIns="83450">
+            <a:noAutofit/>
+          </a:bodyPr>
+          <a:lstStyle/>
+          <a:p>
+            <a:pPr indent="0" lvl="0" marL="0" rtl="0" algn="ctr">
+              <a:spcBef>
+                <a:spcPts val="0"/>
+              </a:spcBef>
+              <a:spcAft>
+                <a:spcPts val="0"/>
+              </a:spcAft>
+              <a:buNone/>
+            </a:pPr>
+            <a:r>
+              <a:rPr lang="en" sz="2400"/>
+              <a:t>kittens</a:t>
+            </a:r>
+            <a:endParaRPr sz="2400"/>
+          </a:p>
+        </p:txBody>
+      </p:sp>
+      <p:sp>
+        <p:nvSpPr>
+          <p:cNvPr id="131" name="Google Shape;131;g3c89c144ce9_0_1"/>
+          <p:cNvSpPr/>
+          <p:nvPr/>
+        </p:nvSpPr>
+        <p:spPr>
+          <a:xfrm>
+            <a:off x="6447900" y="5724900"/>
+            <a:ext cx="1397400" cy="873000"/>
+          </a:xfrm>
+          <a:prstGeom prst="roundRect">
+            <a:avLst>
+              <a:gd fmla="val 16667" name="adj"/>
+            </a:avLst>
+          </a:prstGeom>
+          <a:solidFill>
+            <a:srgbClr val="B6D7A8"/>
+          </a:solidFill>
+          <a:ln cap="flat" cmpd="sng" w="8700">
+            <a:solidFill>
+              <a:srgbClr val="6AA84F"/>
+            </a:solidFill>
+            <a:prstDash val="solid"/>
+            <a:round/>
+            <a:headEnd len="sm" w="sm" type="none"/>
+            <a:tailEnd len="sm" w="sm" type="none"/>
+          </a:ln>
+        </p:spPr>
+        <p:txBody>
+          <a:bodyPr anchorCtr="0" anchor="ctr" bIns="83450" lIns="83450" spcFirstLastPara="1" rIns="83450" wrap="square" tIns="83450">
+            <a:noAutofit/>
+          </a:bodyPr>
+          <a:lstStyle/>
+          <a:p>
+            <a:pPr indent="0" lvl="0" marL="0" rtl="0" algn="ctr">
+              <a:spcBef>
+                <a:spcPts val="0"/>
+              </a:spcBef>
+              <a:spcAft>
+                <a:spcPts val="0"/>
+              </a:spcAft>
+              <a:buNone/>
+            </a:pPr>
+            <a:r>
+              <a:rPr lang="en" sz="2400"/>
+              <a:t>and</a:t>
+            </a:r>
+            <a:endParaRPr sz="2400"/>
+          </a:p>
+        </p:txBody>
+      </p:sp>
     </p:spTree>
   </p:cSld>
   <p:clrMapOvr>

--- a/Slides/Lecture_11_ Recurrent_Neural_Networks.pptx
+++ b/Slides/Lecture_11_ Recurrent_Neural_Networks.pptx
@@ -253,7 +253,7 @@
   </p:defaultTextStyle>
   <p:extLst>
     <p:ext uri="GoogleSlidesCustomDataVersion2">
-      <go:slidesCustomData xmlns:go="http://customooxmlschemas.google.com/" r:id="rId16" roundtripDataSignature="AMtx7mjpBgUwCm0byysC7PfJtfnXOY0Xcg=="/>
+      <go:slidesCustomData xmlns:go="http://customooxmlschemas.google.com/" r:id="rId16" roundtripDataSignature="AMtx7mgTPNWZ6yInoKoJcB+3m8GNoP6rAg=="/>
     </p:ext>
   </p:extLst>
 </p:presentation>
@@ -942,7 +942,7 @@
   <p:cSld>
     <p:spTree>
       <p:nvGrpSpPr>
-        <p:cNvPr id="132" name="Shape 132"/>
+        <p:cNvPr id="127" name="Shape 127"/>
         <p:cNvGrpSpPr/>
         <p:nvPr/>
       </p:nvGrpSpPr>
@@ -956,7 +956,7 @@
       </p:grpSpPr>
       <p:sp>
         <p:nvSpPr>
-          <p:cNvPr id="133" name="Google Shape;133;g3c89c144ce9_0_143:notes"/>
+          <p:cNvPr id="128" name="Google Shape;128;g3c89c144ce9_0_1:notes"/>
           <p:cNvSpPr/>
           <p:nvPr>
             <p:ph idx="2" type="sldImg"/>
@@ -991,7 +991,7 @@
       </p:sp>
       <p:sp>
         <p:nvSpPr>
-          <p:cNvPr id="134" name="Google Shape;134;g3c89c144ce9_0_143:notes"/>
+          <p:cNvPr id="129" name="Google Shape;129;g3c89c144ce9_0_1:notes"/>
           <p:cNvSpPr txBox="1"/>
           <p:nvPr>
             <p:ph idx="1" type="body"/>
@@ -1041,7 +1041,7 @@
   <p:cSld>
     <p:spTree>
       <p:nvGrpSpPr>
-        <p:cNvPr id="138" name="Shape 138"/>
+        <p:cNvPr id="139" name="Shape 139"/>
         <p:cNvGrpSpPr/>
         <p:nvPr/>
       </p:nvGrpSpPr>
@@ -1055,7 +1055,7 @@
       </p:grpSpPr>
       <p:sp>
         <p:nvSpPr>
-          <p:cNvPr id="139" name="Google Shape;139;g3c89c144ce9_0_11:notes"/>
+          <p:cNvPr id="140" name="Google Shape;140;g3c89c144ce9_0_11:notes"/>
           <p:cNvSpPr/>
           <p:nvPr>
             <p:ph idx="2" type="sldImg"/>
@@ -1090,7 +1090,7 @@
       </p:sp>
       <p:sp>
         <p:nvSpPr>
-          <p:cNvPr id="140" name="Google Shape;140;g3c89c144ce9_0_11:notes"/>
+          <p:cNvPr id="141" name="Google Shape;141;g3c89c144ce9_0_11:notes"/>
           <p:cNvSpPr txBox="1"/>
           <p:nvPr>
             <p:ph idx="1" type="body"/>
@@ -1154,7 +1154,7 @@
       </p:grpSpPr>
       <p:sp>
         <p:nvSpPr>
-          <p:cNvPr id="37" name="Google Shape;37;g3bbeee67e43_0_26:notes"/>
+          <p:cNvPr id="37" name="Google Shape;37;g20bc932418a57f1d_0:notes"/>
           <p:cNvSpPr/>
           <p:nvPr>
             <p:ph idx="2" type="sldImg"/>
@@ -1185,21 +1185,11 @@
               </a:path>
             </a:pathLst>
           </a:custGeom>
-          <a:noFill/>
-          <a:ln cap="flat" cmpd="sng" w="9525">
-            <a:solidFill>
-              <a:srgbClr val="000000"/>
-            </a:solidFill>
-            <a:prstDash val="solid"/>
-            <a:round/>
-            <a:headEnd len="sm" w="sm" type="none"/>
-            <a:tailEnd len="sm" w="sm" type="none"/>
-          </a:ln>
         </p:spPr>
       </p:sp>
       <p:sp>
         <p:nvSpPr>
-          <p:cNvPr id="38" name="Google Shape;38;g3bbeee67e43_0_26:notes"/>
+          <p:cNvPr id="38" name="Google Shape;38;g20bc932418a57f1d_0:notes"/>
           <p:cNvSpPr txBox="1"/>
           <p:nvPr>
             <p:ph idx="1" type="body"/>
@@ -1213,10 +1203,6 @@
           <a:prstGeom prst="rect">
             <a:avLst/>
           </a:prstGeom>
-          <a:noFill/>
-          <a:ln>
-            <a:noFill/>
-          </a:ln>
         </p:spPr>
         <p:txBody>
           <a:bodyPr anchorCtr="0" anchor="t" bIns="91425" lIns="91425" spcFirstLastPara="1" rIns="91425" wrap="square" tIns="91425">
@@ -1225,16 +1211,12 @@
           <a:lstStyle/>
           <a:p>
             <a:pPr indent="0" lvl="0" marL="0" rtl="0" algn="l">
-              <a:lnSpc>
-                <a:spcPct val="100000"/>
-              </a:lnSpc>
-              <a:spcBef>
-                <a:spcPts val="0"/>
-              </a:spcBef>
-              <a:spcAft>
-                <a:spcPts val="0"/>
-              </a:spcAft>
-              <a:buSzPts val="1400"/>
+              <a:spcBef>
+                <a:spcPts val="0"/>
+              </a:spcBef>
+              <a:spcAft>
+                <a:spcPts val="0"/>
+              </a:spcAft>
               <a:buNone/>
             </a:pPr>
             <a:r>
@@ -1257,7 +1239,7 @@
   <p:cSld>
     <p:spTree>
       <p:nvGrpSpPr>
-        <p:cNvPr id="41" name="Shape 41"/>
+        <p:cNvPr id="42" name="Shape 42"/>
         <p:cNvGrpSpPr/>
         <p:nvPr/>
       </p:nvGrpSpPr>
@@ -1271,7 +1253,7 @@
       </p:grpSpPr>
       <p:sp>
         <p:nvSpPr>
-          <p:cNvPr id="42" name="Google Shape;42;g3bd1f6d9d27_0_3:notes"/>
+          <p:cNvPr id="43" name="Google Shape;43;g3bbeee67e43_0_26:notes"/>
           <p:cNvSpPr/>
           <p:nvPr>
             <p:ph idx="2" type="sldImg"/>
@@ -1316,7 +1298,7 @@
       </p:sp>
       <p:sp>
         <p:nvSpPr>
-          <p:cNvPr id="43" name="Google Shape;43;g3bd1f6d9d27_0_3:notes"/>
+          <p:cNvPr id="44" name="Google Shape;44;g3bbeee67e43_0_26:notes"/>
           <p:cNvSpPr txBox="1"/>
           <p:nvPr>
             <p:ph idx="1" type="body"/>
@@ -1374,7 +1356,7 @@
   <p:cSld>
     <p:spTree>
       <p:nvGrpSpPr>
-        <p:cNvPr id="89" name="Shape 89"/>
+        <p:cNvPr id="47" name="Shape 47"/>
         <p:cNvGrpSpPr/>
         <p:nvPr/>
       </p:nvGrpSpPr>
@@ -1388,7 +1370,7 @@
       </p:grpSpPr>
       <p:sp>
         <p:nvSpPr>
-          <p:cNvPr id="90" name="Google Shape;90;g3c70c3f9d8e_0_10:notes"/>
+          <p:cNvPr id="48" name="Google Shape;48;g3bd1f6d9d27_0_3:notes"/>
           <p:cNvSpPr/>
           <p:nvPr>
             <p:ph idx="2" type="sldImg"/>
@@ -1433,7 +1415,7 @@
       </p:sp>
       <p:sp>
         <p:nvSpPr>
-          <p:cNvPr id="91" name="Google Shape;91;g3c70c3f9d8e_0_10:notes"/>
+          <p:cNvPr id="49" name="Google Shape;49;g3bd1f6d9d27_0_3:notes"/>
           <p:cNvSpPr txBox="1"/>
           <p:nvPr>
             <p:ph idx="1" type="body"/>
@@ -1491,7 +1473,7 @@
   <p:cSld>
     <p:spTree>
       <p:nvGrpSpPr>
-        <p:cNvPr id="96" name="Shape 96"/>
+        <p:cNvPr id="95" name="Shape 95"/>
         <p:cNvGrpSpPr/>
         <p:nvPr/>
       </p:nvGrpSpPr>
@@ -1505,7 +1487,7 @@
       </p:grpSpPr>
       <p:sp>
         <p:nvSpPr>
-          <p:cNvPr id="97" name="Google Shape;97;g3c70c3f9d8e_0_15:notes"/>
+          <p:cNvPr id="96" name="Google Shape;96;g3c70c3f9d8e_0_10:notes"/>
           <p:cNvSpPr/>
           <p:nvPr>
             <p:ph idx="2" type="sldImg"/>
@@ -1550,7 +1532,7 @@
       </p:sp>
       <p:sp>
         <p:nvSpPr>
-          <p:cNvPr id="98" name="Google Shape;98;g3c70c3f9d8e_0_15:notes"/>
+          <p:cNvPr id="97" name="Google Shape;97;g3c70c3f9d8e_0_10:notes"/>
           <p:cNvSpPr txBox="1"/>
           <p:nvPr>
             <p:ph idx="1" type="body"/>
@@ -1608,7 +1590,7 @@
   <p:cSld>
     <p:spTree>
       <p:nvGrpSpPr>
-        <p:cNvPr id="103" name="Shape 103"/>
+        <p:cNvPr id="102" name="Shape 102"/>
         <p:cNvGrpSpPr/>
         <p:nvPr/>
       </p:nvGrpSpPr>
@@ -1622,7 +1604,7 @@
       </p:grpSpPr>
       <p:sp>
         <p:nvSpPr>
-          <p:cNvPr id="104" name="Google Shape;104;g3c70c3f9d8e_0_74:notes"/>
+          <p:cNvPr id="103" name="Google Shape;103;g3c70c3f9d8e_0_15:notes"/>
           <p:cNvSpPr/>
           <p:nvPr>
             <p:ph idx="2" type="sldImg"/>
@@ -1667,7 +1649,7 @@
       </p:sp>
       <p:sp>
         <p:nvSpPr>
-          <p:cNvPr id="105" name="Google Shape;105;g3c70c3f9d8e_0_74:notes"/>
+          <p:cNvPr id="104" name="Google Shape;104;g3c70c3f9d8e_0_15:notes"/>
           <p:cNvSpPr txBox="1"/>
           <p:nvPr>
             <p:ph idx="1" type="body"/>
@@ -1739,7 +1721,7 @@
       </p:grpSpPr>
       <p:sp>
         <p:nvSpPr>
-          <p:cNvPr id="110" name="Google Shape;110;g3c70c3f9d8e_0_20:notes"/>
+          <p:cNvPr id="110" name="Google Shape;110;g3c70c3f9d8e_0_74:notes"/>
           <p:cNvSpPr/>
           <p:nvPr>
             <p:ph idx="2" type="sldImg"/>
@@ -1784,7 +1766,7 @@
       </p:sp>
       <p:sp>
         <p:nvSpPr>
-          <p:cNvPr id="111" name="Google Shape;111;g3c70c3f9d8e_0_20:notes"/>
+          <p:cNvPr id="111" name="Google Shape;111;g3c70c3f9d8e_0_74:notes"/>
           <p:cNvSpPr txBox="1"/>
           <p:nvPr>
             <p:ph idx="1" type="body"/>
@@ -1856,7 +1838,7 @@
       </p:grpSpPr>
       <p:sp>
         <p:nvSpPr>
-          <p:cNvPr id="116" name="Google Shape;116;g3c89c144ce9_0_148:notes"/>
+          <p:cNvPr id="116" name="Google Shape;116;g3c70c3f9d8e_0_20:notes"/>
           <p:cNvSpPr/>
           <p:nvPr>
             <p:ph idx="2" type="sldImg"/>
@@ -1887,11 +1869,21 @@
               </a:path>
             </a:pathLst>
           </a:custGeom>
+          <a:noFill/>
+          <a:ln cap="flat" cmpd="sng" w="9525">
+            <a:solidFill>
+              <a:srgbClr val="000000"/>
+            </a:solidFill>
+            <a:prstDash val="solid"/>
+            <a:round/>
+            <a:headEnd len="sm" w="sm" type="none"/>
+            <a:tailEnd len="sm" w="sm" type="none"/>
+          </a:ln>
         </p:spPr>
       </p:sp>
       <p:sp>
         <p:nvSpPr>
-          <p:cNvPr id="117" name="Google Shape;117;g3c89c144ce9_0_148:notes"/>
+          <p:cNvPr id="117" name="Google Shape;117;g3c70c3f9d8e_0_20:notes"/>
           <p:cNvSpPr txBox="1"/>
           <p:nvPr>
             <p:ph idx="1" type="body"/>
@@ -1905,6 +1897,10 @@
           <a:prstGeom prst="rect">
             <a:avLst/>
           </a:prstGeom>
+          <a:noFill/>
+          <a:ln>
+            <a:noFill/>
+          </a:ln>
         </p:spPr>
         <p:txBody>
           <a:bodyPr anchorCtr="0" anchor="t" bIns="91425" lIns="91425" spcFirstLastPara="1" rIns="91425" wrap="square" tIns="91425">
@@ -1913,12 +1909,16 @@
           <a:lstStyle/>
           <a:p>
             <a:pPr indent="0" lvl="0" marL="0" rtl="0" algn="l">
-              <a:spcBef>
-                <a:spcPts val="0"/>
-              </a:spcBef>
-              <a:spcAft>
-                <a:spcPts val="0"/>
-              </a:spcAft>
+              <a:lnSpc>
+                <a:spcPct val="100000"/>
+              </a:lnSpc>
+              <a:spcBef>
+                <a:spcPts val="0"/>
+              </a:spcBef>
+              <a:spcAft>
+                <a:spcPts val="0"/>
+              </a:spcAft>
+              <a:buSzPts val="1400"/>
               <a:buNone/>
             </a:pPr>
             <a:r>
@@ -1941,7 +1941,7 @@
   <p:cSld>
     <p:spTree>
       <p:nvGrpSpPr>
-        <p:cNvPr id="120" name="Shape 120"/>
+        <p:cNvPr id="121" name="Shape 121"/>
         <p:cNvGrpSpPr/>
         <p:nvPr/>
       </p:nvGrpSpPr>
@@ -1955,7 +1955,7 @@
       </p:grpSpPr>
       <p:sp>
         <p:nvSpPr>
-          <p:cNvPr id="121" name="Google Shape;121;g3c89c144ce9_0_1:notes"/>
+          <p:cNvPr id="122" name="Google Shape;122;g3c89c144ce9_0_148:notes"/>
           <p:cNvSpPr/>
           <p:nvPr>
             <p:ph idx="2" type="sldImg"/>
@@ -1990,7 +1990,7 @@
       </p:sp>
       <p:sp>
         <p:nvSpPr>
-          <p:cNvPr id="122" name="Google Shape;122;g3c89c144ce9_0_1:notes"/>
+          <p:cNvPr id="123" name="Google Shape;123;g3c89c144ce9_0_148:notes"/>
           <p:cNvSpPr txBox="1"/>
           <p:nvPr>
             <p:ph idx="1" type="body"/>
@@ -6883,7 +6883,7 @@
   <p:cSld>
     <p:spTree>
       <p:nvGrpSpPr>
-        <p:cNvPr id="135" name="Shape 135"/>
+        <p:cNvPr id="130" name="Shape 130"/>
         <p:cNvGrpSpPr/>
         <p:nvPr/>
       </p:nvGrpSpPr>
@@ -6897,7 +6897,7 @@
       </p:grpSpPr>
       <p:sp>
         <p:nvSpPr>
-          <p:cNvPr id="136" name="Google Shape;136;g3c89c144ce9_0_143"/>
+          <p:cNvPr id="131" name="Google Shape;131;g3c89c144ce9_0_1"/>
           <p:cNvSpPr txBox="1"/>
           <p:nvPr>
             <p:ph type="title"/>
@@ -6929,7 +6929,7 @@
             </a:pPr>
             <a:r>
               <a:rPr lang="en"/>
-              <a:t>Feed-Forward Neural Network</a:t>
+              <a:t>Image vs. Text Data</a:t>
             </a:r>
             <a:endParaRPr/>
           </a:p>
@@ -6937,7 +6937,7 @@
       </p:sp>
       <p:sp>
         <p:nvSpPr>
-          <p:cNvPr id="137" name="Google Shape;137;g3c89c144ce9_0_143"/>
+          <p:cNvPr id="132" name="Google Shape;132;g3c89c144ce9_0_1"/>
           <p:cNvSpPr txBox="1"/>
           <p:nvPr>
             <p:ph idx="1" type="body"/>
@@ -6945,8 +6945,8 @@
         </p:nvSpPr>
         <p:spPr>
           <a:xfrm>
-            <a:off x="457200" y="1600200"/>
-            <a:ext cx="8229600" cy="4967700"/>
+            <a:off x="457200" y="3210750"/>
+            <a:ext cx="8229600" cy="2276100"/>
           </a:xfrm>
           <a:prstGeom prst="rect">
             <a:avLst/>
@@ -6968,9 +6968,329 @@
               <a:buNone/>
             </a:pPr>
             <a:r>
+              <a:rPr lang="en" sz="2800"/>
+              <a:t>Whether an image of a 5 came before the 0 has no impact on how we predict the 0.</a:t>
+            </a:r>
+            <a:endParaRPr sz="2800"/>
+          </a:p>
+          <a:p>
+            <a:pPr indent="0" lvl="0" marL="0" rtl="0" algn="l">
+              <a:spcBef>
+                <a:spcPts val="600"/>
+              </a:spcBef>
+              <a:spcAft>
+                <a:spcPts val="0"/>
+              </a:spcAft>
+              <a:buNone/>
+            </a:pPr>
+            <a:r>
               <a:t/>
             </a:r>
-            <a:endParaRPr/>
+            <a:endParaRPr sz="2800"/>
+          </a:p>
+          <a:p>
+            <a:pPr indent="0" lvl="0" marL="0" rtl="0" algn="l">
+              <a:spcBef>
+                <a:spcPts val="600"/>
+              </a:spcBef>
+              <a:spcAft>
+                <a:spcPts val="0"/>
+              </a:spcAft>
+              <a:buNone/>
+            </a:pPr>
+            <a:r>
+              <a:rPr lang="en" sz="2800"/>
+              <a:t>However, for text, what came previously matters a LOT</a:t>
+            </a:r>
+            <a:endParaRPr sz="2800"/>
+          </a:p>
+        </p:txBody>
+      </p:sp>
+      <p:pic>
+        <p:nvPicPr>
+          <p:cNvPr id="133" name="Google Shape;133;g3c89c144ce9_0_1"/>
+          <p:cNvPicPr preferRelativeResize="0"/>
+          <p:nvPr/>
+        </p:nvPicPr>
+        <p:blipFill>
+          <a:blip r:embed="rId3">
+            <a:alphaModFix/>
+          </a:blip>
+          <a:stretch>
+            <a:fillRect/>
+          </a:stretch>
+        </p:blipFill>
+        <p:spPr>
+          <a:xfrm>
+            <a:off x="1324075" y="1417650"/>
+            <a:ext cx="6495851" cy="1793100"/>
+          </a:xfrm>
+          <a:prstGeom prst="rect">
+            <a:avLst/>
+          </a:prstGeom>
+          <a:noFill/>
+          <a:ln>
+            <a:noFill/>
+          </a:ln>
+        </p:spPr>
+      </p:pic>
+      <p:sp>
+        <p:nvSpPr>
+          <p:cNvPr id="134" name="Google Shape;134;g3c89c144ce9_0_1"/>
+          <p:cNvSpPr/>
+          <p:nvPr/>
+        </p:nvSpPr>
+        <p:spPr>
+          <a:xfrm>
+            <a:off x="1298700" y="5724900"/>
+            <a:ext cx="945600" cy="873000"/>
+          </a:xfrm>
+          <a:prstGeom prst="roundRect">
+            <a:avLst>
+              <a:gd fmla="val 16667" name="adj"/>
+            </a:avLst>
+          </a:prstGeom>
+          <a:solidFill>
+            <a:srgbClr val="B6D7A8"/>
+          </a:solidFill>
+          <a:ln cap="flat" cmpd="sng" w="8700">
+            <a:solidFill>
+              <a:srgbClr val="6AA84F"/>
+            </a:solidFill>
+            <a:prstDash val="solid"/>
+            <a:round/>
+            <a:headEnd len="sm" w="sm" type="none"/>
+            <a:tailEnd len="sm" w="sm" type="none"/>
+          </a:ln>
+        </p:spPr>
+        <p:txBody>
+          <a:bodyPr anchorCtr="0" anchor="ctr" bIns="83450" lIns="83450" spcFirstLastPara="1" rIns="83450" wrap="square" tIns="83450">
+            <a:noAutofit/>
+          </a:bodyPr>
+          <a:lstStyle/>
+          <a:p>
+            <a:pPr indent="0" lvl="0" marL="0" rtl="0" algn="ctr">
+              <a:spcBef>
+                <a:spcPts val="0"/>
+              </a:spcBef>
+              <a:spcAft>
+                <a:spcPts val="0"/>
+              </a:spcAft>
+              <a:buNone/>
+            </a:pPr>
+            <a:r>
+              <a:rPr lang="en" sz="2400"/>
+              <a:t>I</a:t>
+            </a:r>
+            <a:endParaRPr sz="2400"/>
+          </a:p>
+        </p:txBody>
+      </p:sp>
+      <p:sp>
+        <p:nvSpPr>
+          <p:cNvPr id="135" name="Google Shape;135;g3c89c144ce9_0_1"/>
+          <p:cNvSpPr/>
+          <p:nvPr/>
+        </p:nvSpPr>
+        <p:spPr>
+          <a:xfrm>
+            <a:off x="2473050" y="5724900"/>
+            <a:ext cx="945600" cy="873000"/>
+          </a:xfrm>
+          <a:prstGeom prst="roundRect">
+            <a:avLst>
+              <a:gd fmla="val 16667" name="adj"/>
+            </a:avLst>
+          </a:prstGeom>
+          <a:solidFill>
+            <a:srgbClr val="B6D7A8"/>
+          </a:solidFill>
+          <a:ln cap="flat" cmpd="sng" w="8700">
+            <a:solidFill>
+              <a:srgbClr val="6AA84F"/>
+            </a:solidFill>
+            <a:prstDash val="solid"/>
+            <a:round/>
+            <a:headEnd len="sm" w="sm" type="none"/>
+            <a:tailEnd len="sm" w="sm" type="none"/>
+          </a:ln>
+        </p:spPr>
+        <p:txBody>
+          <a:bodyPr anchorCtr="0" anchor="ctr" bIns="83450" lIns="83450" spcFirstLastPara="1" rIns="83450" wrap="square" tIns="83450">
+            <a:noAutofit/>
+          </a:bodyPr>
+          <a:lstStyle/>
+          <a:p>
+            <a:pPr indent="0" lvl="0" marL="0" rtl="0" algn="ctr">
+              <a:spcBef>
+                <a:spcPts val="0"/>
+              </a:spcBef>
+              <a:spcAft>
+                <a:spcPts val="0"/>
+              </a:spcAft>
+              <a:buNone/>
+            </a:pPr>
+            <a:r>
+              <a:rPr lang="en" sz="2400"/>
+              <a:t>like</a:t>
+            </a:r>
+            <a:endParaRPr sz="2400"/>
+          </a:p>
+        </p:txBody>
+      </p:sp>
+      <p:sp>
+        <p:nvSpPr>
+          <p:cNvPr id="136" name="Google Shape;136;g3c89c144ce9_0_1"/>
+          <p:cNvSpPr/>
+          <p:nvPr/>
+        </p:nvSpPr>
+        <p:spPr>
+          <a:xfrm>
+            <a:off x="3647400" y="5724900"/>
+            <a:ext cx="945600" cy="873000"/>
+          </a:xfrm>
+          <a:prstGeom prst="roundRect">
+            <a:avLst>
+              <a:gd fmla="val 16667" name="adj"/>
+            </a:avLst>
+          </a:prstGeom>
+          <a:solidFill>
+            <a:srgbClr val="B6D7A8"/>
+          </a:solidFill>
+          <a:ln cap="flat" cmpd="sng" w="8700">
+            <a:solidFill>
+              <a:srgbClr val="6AA84F"/>
+            </a:solidFill>
+            <a:prstDash val="solid"/>
+            <a:round/>
+            <a:headEnd len="sm" w="sm" type="none"/>
+            <a:tailEnd len="sm" w="sm" type="none"/>
+          </a:ln>
+        </p:spPr>
+        <p:txBody>
+          <a:bodyPr anchorCtr="0" anchor="ctr" bIns="83450" lIns="83450" spcFirstLastPara="1" rIns="83450" wrap="square" tIns="83450">
+            <a:noAutofit/>
+          </a:bodyPr>
+          <a:lstStyle/>
+          <a:p>
+            <a:pPr indent="0" lvl="0" marL="0" rtl="0" algn="ctr">
+              <a:spcBef>
+                <a:spcPts val="0"/>
+              </a:spcBef>
+              <a:spcAft>
+                <a:spcPts val="0"/>
+              </a:spcAft>
+              <a:buNone/>
+            </a:pPr>
+            <a:r>
+              <a:rPr lang="en" sz="2400"/>
+              <a:t>cute</a:t>
+            </a:r>
+            <a:endParaRPr sz="2400"/>
+          </a:p>
+        </p:txBody>
+      </p:sp>
+      <p:sp>
+        <p:nvSpPr>
+          <p:cNvPr id="137" name="Google Shape;137;g3c89c144ce9_0_1"/>
+          <p:cNvSpPr/>
+          <p:nvPr/>
+        </p:nvSpPr>
+        <p:spPr>
+          <a:xfrm>
+            <a:off x="4821750" y="5724900"/>
+            <a:ext cx="1397400" cy="873000"/>
+          </a:xfrm>
+          <a:prstGeom prst="roundRect">
+            <a:avLst>
+              <a:gd fmla="val 16667" name="adj"/>
+            </a:avLst>
+          </a:prstGeom>
+          <a:solidFill>
+            <a:srgbClr val="B6D7A8"/>
+          </a:solidFill>
+          <a:ln cap="flat" cmpd="sng" w="8700">
+            <a:solidFill>
+              <a:srgbClr val="6AA84F"/>
+            </a:solidFill>
+            <a:prstDash val="solid"/>
+            <a:round/>
+            <a:headEnd len="sm" w="sm" type="none"/>
+            <a:tailEnd len="sm" w="sm" type="none"/>
+          </a:ln>
+        </p:spPr>
+        <p:txBody>
+          <a:bodyPr anchorCtr="0" anchor="ctr" bIns="83450" lIns="83450" spcFirstLastPara="1" rIns="83450" wrap="square" tIns="83450">
+            <a:noAutofit/>
+          </a:bodyPr>
+          <a:lstStyle/>
+          <a:p>
+            <a:pPr indent="0" lvl="0" marL="0" rtl="0" algn="ctr">
+              <a:spcBef>
+                <a:spcPts val="0"/>
+              </a:spcBef>
+              <a:spcAft>
+                <a:spcPts val="0"/>
+              </a:spcAft>
+              <a:buNone/>
+            </a:pPr>
+            <a:r>
+              <a:rPr lang="en" sz="2400"/>
+              <a:t>kittens</a:t>
+            </a:r>
+            <a:endParaRPr sz="2400"/>
+          </a:p>
+        </p:txBody>
+      </p:sp>
+      <p:sp>
+        <p:nvSpPr>
+          <p:cNvPr id="138" name="Google Shape;138;g3c89c144ce9_0_1"/>
+          <p:cNvSpPr/>
+          <p:nvPr/>
+        </p:nvSpPr>
+        <p:spPr>
+          <a:xfrm>
+            <a:off x="6447900" y="5724900"/>
+            <a:ext cx="1397400" cy="873000"/>
+          </a:xfrm>
+          <a:prstGeom prst="roundRect">
+            <a:avLst>
+              <a:gd fmla="val 16667" name="adj"/>
+            </a:avLst>
+          </a:prstGeom>
+          <a:solidFill>
+            <a:srgbClr val="B6D7A8"/>
+          </a:solidFill>
+          <a:ln cap="flat" cmpd="sng" w="8700">
+            <a:solidFill>
+              <a:srgbClr val="6AA84F"/>
+            </a:solidFill>
+            <a:prstDash val="solid"/>
+            <a:round/>
+            <a:headEnd len="sm" w="sm" type="none"/>
+            <a:tailEnd len="sm" w="sm" type="none"/>
+          </a:ln>
+        </p:spPr>
+        <p:txBody>
+          <a:bodyPr anchorCtr="0" anchor="ctr" bIns="83450" lIns="83450" spcFirstLastPara="1" rIns="83450" wrap="square" tIns="83450">
+            <a:noAutofit/>
+          </a:bodyPr>
+          <a:lstStyle/>
+          <a:p>
+            <a:pPr indent="0" lvl="0" marL="0" rtl="0" algn="ctr">
+              <a:spcBef>
+                <a:spcPts val="0"/>
+              </a:spcBef>
+              <a:spcAft>
+                <a:spcPts val="0"/>
+              </a:spcAft>
+              <a:buNone/>
+            </a:pPr>
+            <a:r>
+              <a:rPr lang="en" sz="2400"/>
+              <a:t>and</a:t>
+            </a:r>
+            <a:endParaRPr sz="2400"/>
           </a:p>
         </p:txBody>
       </p:sp>
@@ -6987,7 +7307,7 @@
   <p:cSld>
     <p:spTree>
       <p:nvGrpSpPr>
-        <p:cNvPr id="141" name="Shape 141"/>
+        <p:cNvPr id="142" name="Shape 142"/>
         <p:cNvGrpSpPr/>
         <p:nvPr/>
       </p:nvGrpSpPr>
@@ -7001,7 +7321,7 @@
       </p:grpSpPr>
       <p:sp>
         <p:nvSpPr>
-          <p:cNvPr id="142" name="Google Shape;142;g3c89c144ce9_0_11"/>
+          <p:cNvPr id="143" name="Google Shape;143;g3c89c144ce9_0_11"/>
           <p:cNvSpPr/>
           <p:nvPr/>
         </p:nvSpPr>
@@ -7051,68 +7371,6 @@
                 <a:sym typeface="Consolas"/>
               </a:rPr>
               <a:t>tokenizer.decode(6) </a:t>
-            </a:r>
-            <a:endParaRPr sz="1277">
-              <a:latin typeface="Consolas"/>
-              <a:ea typeface="Consolas"/>
-              <a:cs typeface="Consolas"/>
-              <a:sym typeface="Consolas"/>
-            </a:endParaRPr>
-          </a:p>
-        </p:txBody>
-      </p:sp>
-      <p:sp>
-        <p:nvSpPr>
-          <p:cNvPr id="143" name="Google Shape;143;g3c89c144ce9_0_11"/>
-          <p:cNvSpPr/>
-          <p:nvPr/>
-        </p:nvSpPr>
-        <p:spPr>
-          <a:xfrm>
-            <a:off x="3649700" y="1651525"/>
-            <a:ext cx="1911600" cy="329700"/>
-          </a:xfrm>
-          <a:prstGeom prst="roundRect">
-            <a:avLst>
-              <a:gd fmla="val 16667" name="adj"/>
-            </a:avLst>
-          </a:prstGeom>
-          <a:solidFill>
-            <a:srgbClr val="D9D2E9"/>
-          </a:solidFill>
-          <a:ln cap="flat" cmpd="sng" w="8700">
-            <a:solidFill>
-              <a:schemeClr val="dk2"/>
-            </a:solidFill>
-            <a:prstDash val="solid"/>
-            <a:round/>
-            <a:headEnd len="sm" w="sm" type="none"/>
-            <a:tailEnd len="sm" w="sm" type="none"/>
-          </a:ln>
-        </p:spPr>
-        <p:txBody>
-          <a:bodyPr anchorCtr="0" anchor="ctr" bIns="83450" lIns="83450" spcFirstLastPara="1" rIns="83450" wrap="square" tIns="83450">
-            <a:noAutofit/>
-          </a:bodyPr>
-          <a:lstStyle/>
-          <a:p>
-            <a:pPr indent="0" lvl="0" marL="0" rtl="0" algn="ctr">
-              <a:spcBef>
-                <a:spcPts val="0"/>
-              </a:spcBef>
-              <a:spcAft>
-                <a:spcPts val="0"/>
-              </a:spcAft>
-              <a:buNone/>
-            </a:pPr>
-            <a:r>
-              <a:rPr lang="en" sz="1277">
-                <a:latin typeface="Consolas"/>
-                <a:ea typeface="Consolas"/>
-                <a:cs typeface="Consolas"/>
-                <a:sym typeface="Consolas"/>
-              </a:rPr>
-              <a:t>tokenizer.decode(4) </a:t>
             </a:r>
             <a:endParaRPr sz="1277">
               <a:latin typeface="Consolas"/>
@@ -7131,6 +7389,68 @@
         </p:nvSpPr>
         <p:spPr>
           <a:xfrm>
+            <a:off x="3649700" y="1651525"/>
+            <a:ext cx="1911600" cy="329700"/>
+          </a:xfrm>
+          <a:prstGeom prst="roundRect">
+            <a:avLst>
+              <a:gd fmla="val 16667" name="adj"/>
+            </a:avLst>
+          </a:prstGeom>
+          <a:solidFill>
+            <a:srgbClr val="D9D2E9"/>
+          </a:solidFill>
+          <a:ln cap="flat" cmpd="sng" w="8700">
+            <a:solidFill>
+              <a:schemeClr val="dk2"/>
+            </a:solidFill>
+            <a:prstDash val="solid"/>
+            <a:round/>
+            <a:headEnd len="sm" w="sm" type="none"/>
+            <a:tailEnd len="sm" w="sm" type="none"/>
+          </a:ln>
+        </p:spPr>
+        <p:txBody>
+          <a:bodyPr anchorCtr="0" anchor="ctr" bIns="83450" lIns="83450" spcFirstLastPara="1" rIns="83450" wrap="square" tIns="83450">
+            <a:noAutofit/>
+          </a:bodyPr>
+          <a:lstStyle/>
+          <a:p>
+            <a:pPr indent="0" lvl="0" marL="0" rtl="0" algn="ctr">
+              <a:spcBef>
+                <a:spcPts val="0"/>
+              </a:spcBef>
+              <a:spcAft>
+                <a:spcPts val="0"/>
+              </a:spcAft>
+              <a:buNone/>
+            </a:pPr>
+            <a:r>
+              <a:rPr lang="en" sz="1277">
+                <a:latin typeface="Consolas"/>
+                <a:ea typeface="Consolas"/>
+                <a:cs typeface="Consolas"/>
+                <a:sym typeface="Consolas"/>
+              </a:rPr>
+              <a:t>tokenizer.decode(4) </a:t>
+            </a:r>
+            <a:endParaRPr sz="1277">
+              <a:latin typeface="Consolas"/>
+              <a:ea typeface="Consolas"/>
+              <a:cs typeface="Consolas"/>
+              <a:sym typeface="Consolas"/>
+            </a:endParaRPr>
+          </a:p>
+        </p:txBody>
+      </p:sp>
+      <p:sp>
+        <p:nvSpPr>
+          <p:cNvPr id="145" name="Google Shape;145;g3c89c144ce9_0_11"/>
+          <p:cNvSpPr/>
+          <p:nvPr/>
+        </p:nvSpPr>
+        <p:spPr>
+          <a:xfrm>
             <a:off x="788815" y="2775163"/>
             <a:ext cx="2460000" cy="1093200"/>
           </a:xfrm>
@@ -7288,7 +7608,7 @@
       </p:sp>
       <p:sp>
         <p:nvSpPr>
-          <p:cNvPr id="145" name="Google Shape;145;g3c89c144ce9_0_11"/>
+          <p:cNvPr id="146" name="Google Shape;146;g3c89c144ce9_0_11"/>
           <p:cNvSpPr/>
           <p:nvPr/>
         </p:nvSpPr>
@@ -7344,7 +7664,7 @@
       </p:sp>
       <p:sp>
         <p:nvSpPr>
-          <p:cNvPr id="146" name="Google Shape;146;g3c89c144ce9_0_11"/>
+          <p:cNvPr id="147" name="Google Shape;147;g3c89c144ce9_0_11"/>
           <p:cNvSpPr/>
           <p:nvPr/>
         </p:nvSpPr>
@@ -7416,7 +7736,7 @@
       </p:sp>
       <p:sp>
         <p:nvSpPr>
-          <p:cNvPr id="147" name="Google Shape;147;g3c89c144ce9_0_11"/>
+          <p:cNvPr id="148" name="Google Shape;148;g3c89c144ce9_0_11"/>
           <p:cNvSpPr/>
           <p:nvPr/>
         </p:nvSpPr>
@@ -7463,10 +7783,10 @@
       </p:sp>
       <p:cxnSp>
         <p:nvCxnSpPr>
-          <p:cNvPr id="148" name="Google Shape;148;g3c89c144ce9_0_11"/>
+          <p:cNvPr id="149" name="Google Shape;149;g3c89c144ce9_0_11"/>
           <p:cNvCxnSpPr>
-            <a:stCxn id="147" idx="0"/>
-            <a:endCxn id="145" idx="2"/>
+            <a:stCxn id="148" idx="0"/>
+            <a:endCxn id="146" idx="2"/>
           </p:cNvCxnSpPr>
           <p:nvPr/>
         </p:nvCxnSpPr>
@@ -7494,7 +7814,7 @@
       </p:cxnSp>
       <p:sp>
         <p:nvSpPr>
-          <p:cNvPr id="149" name="Google Shape;149;g3c89c144ce9_0_11"/>
+          <p:cNvPr id="150" name="Google Shape;150;g3c89c144ce9_0_11"/>
           <p:cNvSpPr/>
           <p:nvPr/>
         </p:nvSpPr>
@@ -7541,7 +7861,7 @@
       </p:sp>
       <p:sp>
         <p:nvSpPr>
-          <p:cNvPr id="150" name="Google Shape;150;g3c89c144ce9_0_11"/>
+          <p:cNvPr id="151" name="Google Shape;151;g3c89c144ce9_0_11"/>
           <p:cNvSpPr/>
           <p:nvPr/>
         </p:nvSpPr>
@@ -7588,10 +7908,10 @@
       </p:sp>
       <p:cxnSp>
         <p:nvCxnSpPr>
-          <p:cNvPr id="151" name="Google Shape;151;g3c89c144ce9_0_11"/>
+          <p:cNvPr id="152" name="Google Shape;152;g3c89c144ce9_0_11"/>
           <p:cNvCxnSpPr>
-            <a:stCxn id="149" idx="0"/>
-            <a:endCxn id="150" idx="2"/>
+            <a:stCxn id="150" idx="0"/>
+            <a:endCxn id="151" idx="2"/>
           </p:cNvCxnSpPr>
           <p:nvPr/>
         </p:nvCxnSpPr>
@@ -7619,7 +7939,7 @@
       </p:cxnSp>
       <p:sp>
         <p:nvSpPr>
-          <p:cNvPr id="152" name="Google Shape;152;g3c89c144ce9_0_11"/>
+          <p:cNvPr id="153" name="Google Shape;153;g3c89c144ce9_0_11"/>
           <p:cNvSpPr/>
           <p:nvPr/>
         </p:nvSpPr>
@@ -7675,7 +7995,7 @@
       </p:sp>
       <p:sp>
         <p:nvSpPr>
-          <p:cNvPr id="153" name="Google Shape;153;g3c89c144ce9_0_11"/>
+          <p:cNvPr id="154" name="Google Shape;154;g3c89c144ce9_0_11"/>
           <p:cNvSpPr/>
           <p:nvPr/>
         </p:nvSpPr>
@@ -7722,10 +8042,10 @@
       </p:sp>
       <p:cxnSp>
         <p:nvCxnSpPr>
-          <p:cNvPr id="154" name="Google Shape;154;g3c89c144ce9_0_11"/>
+          <p:cNvPr id="155" name="Google Shape;155;g3c89c144ce9_0_11"/>
           <p:cNvCxnSpPr>
-            <a:stCxn id="152" idx="3"/>
-            <a:endCxn id="153" idx="2"/>
+            <a:stCxn id="153" idx="3"/>
+            <a:endCxn id="154" idx="2"/>
           </p:cNvCxnSpPr>
           <p:nvPr/>
         </p:nvCxnSpPr>
@@ -7754,7 +8074,7 @@
       </p:cxnSp>
       <p:sp>
         <p:nvSpPr>
-          <p:cNvPr id="155" name="Google Shape;155;g3c89c144ce9_0_11"/>
+          <p:cNvPr id="156" name="Google Shape;156;g3c89c144ce9_0_11"/>
           <p:cNvSpPr/>
           <p:nvPr/>
         </p:nvSpPr>
@@ -7801,7 +8121,7 @@
       </p:sp>
       <p:sp>
         <p:nvSpPr>
-          <p:cNvPr id="156" name="Google Shape;156;g3c89c144ce9_0_11"/>
+          <p:cNvPr id="157" name="Google Shape;157;g3c89c144ce9_0_11"/>
           <p:cNvSpPr/>
           <p:nvPr/>
         </p:nvSpPr>
@@ -7848,9 +8168,9 @@
       </p:sp>
       <p:cxnSp>
         <p:nvCxnSpPr>
-          <p:cNvPr id="157" name="Google Shape;157;g3c89c144ce9_0_11"/>
+          <p:cNvPr id="158" name="Google Shape;158;g3c89c144ce9_0_11"/>
           <p:cNvCxnSpPr>
-            <a:endCxn id="156" idx="2"/>
+            <a:endCxn id="157" idx="2"/>
           </p:cNvCxnSpPr>
           <p:nvPr/>
         </p:nvCxnSpPr>
@@ -7876,7 +8196,7 @@
       </p:cxnSp>
       <p:sp>
         <p:nvSpPr>
-          <p:cNvPr id="158" name="Google Shape;158;g3c89c144ce9_0_11"/>
+          <p:cNvPr id="159" name="Google Shape;159;g3c89c144ce9_0_11"/>
           <p:cNvSpPr/>
           <p:nvPr/>
         </p:nvSpPr>
@@ -8035,7 +8355,7 @@
       </p:sp>
       <p:sp>
         <p:nvSpPr>
-          <p:cNvPr id="159" name="Google Shape;159;g3c89c144ce9_0_11"/>
+          <p:cNvPr id="160" name="Google Shape;160;g3c89c144ce9_0_11"/>
           <p:cNvSpPr/>
           <p:nvPr/>
         </p:nvSpPr>
@@ -8107,7 +8427,7 @@
       </p:sp>
       <p:sp>
         <p:nvSpPr>
-          <p:cNvPr id="160" name="Google Shape;160;g3c89c144ce9_0_11"/>
+          <p:cNvPr id="161" name="Google Shape;161;g3c89c144ce9_0_11"/>
           <p:cNvSpPr/>
           <p:nvPr/>
         </p:nvSpPr>
@@ -8154,10 +8474,10 @@
       </p:sp>
       <p:cxnSp>
         <p:nvCxnSpPr>
-          <p:cNvPr id="161" name="Google Shape;161;g3c89c144ce9_0_11"/>
+          <p:cNvPr id="162" name="Google Shape;162;g3c89c144ce9_0_11"/>
           <p:cNvCxnSpPr>
-            <a:stCxn id="160" idx="0"/>
-            <a:endCxn id="162" idx="2"/>
+            <a:stCxn id="161" idx="0"/>
+            <a:endCxn id="163" idx="2"/>
           </p:cNvCxnSpPr>
           <p:nvPr/>
         </p:nvCxnSpPr>
@@ -8185,7 +8505,7 @@
       </p:cxnSp>
       <p:sp>
         <p:nvSpPr>
-          <p:cNvPr id="163" name="Google Shape;163;g3c89c144ce9_0_11"/>
+          <p:cNvPr id="164" name="Google Shape;164;g3c89c144ce9_0_11"/>
           <p:cNvSpPr/>
           <p:nvPr/>
         </p:nvSpPr>
@@ -8232,7 +8552,7 @@
       </p:sp>
       <p:sp>
         <p:nvSpPr>
-          <p:cNvPr id="164" name="Google Shape;164;g3c89c144ce9_0_11"/>
+          <p:cNvPr id="165" name="Google Shape;165;g3c89c144ce9_0_11"/>
           <p:cNvSpPr/>
           <p:nvPr/>
         </p:nvSpPr>
@@ -8279,10 +8599,10 @@
       </p:sp>
       <p:cxnSp>
         <p:nvCxnSpPr>
-          <p:cNvPr id="165" name="Google Shape;165;g3c89c144ce9_0_11"/>
+          <p:cNvPr id="166" name="Google Shape;166;g3c89c144ce9_0_11"/>
           <p:cNvCxnSpPr>
-            <a:stCxn id="163" idx="0"/>
-            <a:endCxn id="164" idx="2"/>
+            <a:stCxn id="164" idx="0"/>
+            <a:endCxn id="165" idx="2"/>
           </p:cNvCxnSpPr>
           <p:nvPr/>
         </p:nvCxnSpPr>
@@ -8310,61 +8630,14 @@
       </p:cxnSp>
       <p:sp>
         <p:nvSpPr>
-          <p:cNvPr id="166" name="Google Shape;166;g3c89c144ce9_0_11"/>
-          <p:cNvSpPr/>
-          <p:nvPr/>
-        </p:nvSpPr>
-        <p:spPr>
-          <a:xfrm>
-            <a:off x="4115656" y="3393713"/>
-            <a:ext cx="174900" cy="266700"/>
-          </a:xfrm>
-          <a:prstGeom prst="rect">
-            <a:avLst/>
-          </a:prstGeom>
-          <a:noFill/>
-          <a:ln cap="flat" cmpd="sng" w="17375">
-            <a:solidFill>
-              <a:srgbClr val="6AA84F"/>
-            </a:solidFill>
-            <a:prstDash val="solid"/>
-            <a:round/>
-            <a:headEnd len="sm" w="sm" type="none"/>
-            <a:tailEnd len="sm" w="sm" type="none"/>
-          </a:ln>
-        </p:spPr>
-        <p:txBody>
-          <a:bodyPr anchorCtr="0" anchor="ctr" bIns="83450" lIns="83450" spcFirstLastPara="1" rIns="83450" wrap="square" tIns="83450">
-            <a:noAutofit/>
-          </a:bodyPr>
-          <a:lstStyle/>
-          <a:p>
-            <a:pPr indent="0" lvl="0" marL="0" rtl="0" algn="ctr">
-              <a:spcBef>
-                <a:spcPts val="0"/>
-              </a:spcBef>
-              <a:spcAft>
-                <a:spcPts val="0"/>
-              </a:spcAft>
-              <a:buNone/>
-            </a:pPr>
-            <a:r>
-              <a:t/>
-            </a:r>
-            <a:endParaRPr sz="1277"/>
-          </a:p>
-        </p:txBody>
-      </p:sp>
-      <p:sp>
-        <p:nvSpPr>
           <p:cNvPr id="167" name="Google Shape;167;g3c89c144ce9_0_11"/>
           <p:cNvSpPr/>
           <p:nvPr/>
         </p:nvSpPr>
         <p:spPr>
           <a:xfrm>
-            <a:off x="3930351" y="4237575"/>
-            <a:ext cx="303600" cy="266700"/>
+            <a:off x="4115656" y="3393713"/>
+            <a:ext cx="174900" cy="266700"/>
           </a:xfrm>
           <a:prstGeom prst="rect">
             <a:avLst/>
@@ -8372,7 +8645,7 @@
           <a:noFill/>
           <a:ln cap="flat" cmpd="sng" w="17375">
             <a:solidFill>
-              <a:srgbClr val="F1C232"/>
+              <a:srgbClr val="6AA84F"/>
             </a:solidFill>
             <a:prstDash val="solid"/>
             <a:round/>
@@ -8410,8 +8683,8 @@
         </p:nvSpPr>
         <p:spPr>
           <a:xfrm>
-            <a:off x="4588400" y="3393725"/>
-            <a:ext cx="263400" cy="266700"/>
+            <a:off x="3930351" y="4237575"/>
+            <a:ext cx="303600" cy="266700"/>
           </a:xfrm>
           <a:prstGeom prst="rect">
             <a:avLst/>
@@ -8449,11 +8722,58 @@
           </a:p>
         </p:txBody>
       </p:sp>
+      <p:sp>
+        <p:nvSpPr>
+          <p:cNvPr id="169" name="Google Shape;169;g3c89c144ce9_0_11"/>
+          <p:cNvSpPr/>
+          <p:nvPr/>
+        </p:nvSpPr>
+        <p:spPr>
+          <a:xfrm>
+            <a:off x="4588400" y="3393725"/>
+            <a:ext cx="263400" cy="266700"/>
+          </a:xfrm>
+          <a:prstGeom prst="rect">
+            <a:avLst/>
+          </a:prstGeom>
+          <a:noFill/>
+          <a:ln cap="flat" cmpd="sng" w="17375">
+            <a:solidFill>
+              <a:srgbClr val="F1C232"/>
+            </a:solidFill>
+            <a:prstDash val="solid"/>
+            <a:round/>
+            <a:headEnd len="sm" w="sm" type="none"/>
+            <a:tailEnd len="sm" w="sm" type="none"/>
+          </a:ln>
+        </p:spPr>
+        <p:txBody>
+          <a:bodyPr anchorCtr="0" anchor="ctr" bIns="83450" lIns="83450" spcFirstLastPara="1" rIns="83450" wrap="square" tIns="83450">
+            <a:noAutofit/>
+          </a:bodyPr>
+          <a:lstStyle/>
+          <a:p>
+            <a:pPr indent="0" lvl="0" marL="0" rtl="0" algn="ctr">
+              <a:spcBef>
+                <a:spcPts val="0"/>
+              </a:spcBef>
+              <a:spcAft>
+                <a:spcPts val="0"/>
+              </a:spcAft>
+              <a:buNone/>
+            </a:pPr>
+            <a:r>
+              <a:t/>
+            </a:r>
+            <a:endParaRPr sz="1277"/>
+          </a:p>
+        </p:txBody>
+      </p:sp>
       <p:cxnSp>
         <p:nvCxnSpPr>
-          <p:cNvPr id="169" name="Google Shape;169;g3c89c144ce9_0_11"/>
+          <p:cNvPr id="170" name="Google Shape;170;g3c89c144ce9_0_11"/>
           <p:cNvCxnSpPr>
-            <a:endCxn id="168" idx="2"/>
+            <a:endCxn id="169" idx="2"/>
           </p:cNvCxnSpPr>
           <p:nvPr/>
         </p:nvCxnSpPr>
@@ -8479,10 +8799,10 @@
       </p:cxnSp>
       <p:cxnSp>
         <p:nvCxnSpPr>
-          <p:cNvPr id="170" name="Google Shape;170;g3c89c144ce9_0_11"/>
+          <p:cNvPr id="171" name="Google Shape;171;g3c89c144ce9_0_11"/>
           <p:cNvCxnSpPr>
-            <a:stCxn id="149" idx="3"/>
-            <a:endCxn id="166" idx="2"/>
+            <a:stCxn id="150" idx="3"/>
+            <a:endCxn id="167" idx="2"/>
           </p:cNvCxnSpPr>
           <p:nvPr/>
         </p:nvCxnSpPr>
@@ -8511,7 +8831,7 @@
       </p:cxnSp>
       <p:sp>
         <p:nvSpPr>
-          <p:cNvPr id="171" name="Google Shape;171;g3c89c144ce9_0_11"/>
+          <p:cNvPr id="172" name="Google Shape;172;g3c89c144ce9_0_11"/>
           <p:cNvSpPr/>
           <p:nvPr/>
         </p:nvSpPr>
@@ -8670,7 +8990,7 @@
       </p:sp>
       <p:sp>
         <p:nvSpPr>
-          <p:cNvPr id="172" name="Google Shape;172;g3c89c144ce9_0_11"/>
+          <p:cNvPr id="173" name="Google Shape;173;g3c89c144ce9_0_11"/>
           <p:cNvSpPr/>
           <p:nvPr/>
         </p:nvSpPr>
@@ -8742,7 +9062,7 @@
       </p:sp>
       <p:sp>
         <p:nvSpPr>
-          <p:cNvPr id="173" name="Google Shape;173;g3c89c144ce9_0_11"/>
+          <p:cNvPr id="174" name="Google Shape;174;g3c89c144ce9_0_11"/>
           <p:cNvSpPr/>
           <p:nvPr/>
         </p:nvSpPr>
@@ -8789,10 +9109,10 @@
       </p:sp>
       <p:cxnSp>
         <p:nvCxnSpPr>
-          <p:cNvPr id="174" name="Google Shape;174;g3c89c144ce9_0_11"/>
+          <p:cNvPr id="175" name="Google Shape;175;g3c89c144ce9_0_11"/>
           <p:cNvCxnSpPr>
-            <a:stCxn id="173" idx="0"/>
-            <a:endCxn id="175" idx="2"/>
+            <a:stCxn id="174" idx="0"/>
+            <a:endCxn id="176" idx="2"/>
           </p:cNvCxnSpPr>
           <p:nvPr/>
         </p:nvCxnSpPr>
@@ -8820,7 +9140,7 @@
       </p:cxnSp>
       <p:sp>
         <p:nvSpPr>
-          <p:cNvPr id="176" name="Google Shape;176;g3c89c144ce9_0_11"/>
+          <p:cNvPr id="177" name="Google Shape;177;g3c89c144ce9_0_11"/>
           <p:cNvSpPr/>
           <p:nvPr/>
         </p:nvSpPr>
@@ -8867,7 +9187,7 @@
       </p:sp>
       <p:sp>
         <p:nvSpPr>
-          <p:cNvPr id="177" name="Google Shape;177;g3c89c144ce9_0_11"/>
+          <p:cNvPr id="178" name="Google Shape;178;g3c89c144ce9_0_11"/>
           <p:cNvSpPr/>
           <p:nvPr/>
         </p:nvSpPr>
@@ -8914,10 +9234,10 @@
       </p:sp>
       <p:cxnSp>
         <p:nvCxnSpPr>
-          <p:cNvPr id="178" name="Google Shape;178;g3c89c144ce9_0_11"/>
+          <p:cNvPr id="179" name="Google Shape;179;g3c89c144ce9_0_11"/>
           <p:cNvCxnSpPr>
-            <a:stCxn id="176" idx="0"/>
-            <a:endCxn id="177" idx="2"/>
+            <a:stCxn id="177" idx="0"/>
+            <a:endCxn id="178" idx="2"/>
           </p:cNvCxnSpPr>
           <p:nvPr/>
         </p:nvCxnSpPr>
@@ -8945,61 +9265,14 @@
       </p:cxnSp>
       <p:sp>
         <p:nvSpPr>
-          <p:cNvPr id="179" name="Google Shape;179;g3c89c144ce9_0_11"/>
-          <p:cNvSpPr/>
-          <p:nvPr/>
-        </p:nvSpPr>
-        <p:spPr>
-          <a:xfrm>
-            <a:off x="7182850" y="3393725"/>
-            <a:ext cx="263400" cy="266700"/>
-          </a:xfrm>
-          <a:prstGeom prst="rect">
-            <a:avLst/>
-          </a:prstGeom>
-          <a:noFill/>
-          <a:ln cap="flat" cmpd="sng" w="17375">
-            <a:solidFill>
-              <a:srgbClr val="6AA84F"/>
-            </a:solidFill>
-            <a:prstDash val="solid"/>
-            <a:round/>
-            <a:headEnd len="sm" w="sm" type="none"/>
-            <a:tailEnd len="sm" w="sm" type="none"/>
-          </a:ln>
-        </p:spPr>
-        <p:txBody>
-          <a:bodyPr anchorCtr="0" anchor="ctr" bIns="83450" lIns="83450" spcFirstLastPara="1" rIns="83450" wrap="square" tIns="83450">
-            <a:noAutofit/>
-          </a:bodyPr>
-          <a:lstStyle/>
-          <a:p>
-            <a:pPr indent="0" lvl="0" marL="0" rtl="0" algn="ctr">
-              <a:spcBef>
-                <a:spcPts val="0"/>
-              </a:spcBef>
-              <a:spcAft>
-                <a:spcPts val="0"/>
-              </a:spcAft>
-              <a:buNone/>
-            </a:pPr>
-            <a:r>
-              <a:t/>
-            </a:r>
-            <a:endParaRPr sz="1277"/>
-          </a:p>
-        </p:txBody>
-      </p:sp>
-      <p:sp>
-        <p:nvSpPr>
           <p:cNvPr id="180" name="Google Shape;180;g3c89c144ce9_0_11"/>
           <p:cNvSpPr/>
           <p:nvPr/>
         </p:nvSpPr>
         <p:spPr>
           <a:xfrm>
-            <a:off x="7016882" y="4237568"/>
-            <a:ext cx="325500" cy="266700"/>
+            <a:off x="7182850" y="3393725"/>
+            <a:ext cx="263400" cy="266700"/>
           </a:xfrm>
           <a:prstGeom prst="rect">
             <a:avLst/>
@@ -9007,7 +9280,7 @@
           <a:noFill/>
           <a:ln cap="flat" cmpd="sng" w="17375">
             <a:solidFill>
-              <a:srgbClr val="F1C232"/>
+              <a:srgbClr val="6AA84F"/>
             </a:solidFill>
             <a:prstDash val="solid"/>
             <a:round/>
@@ -9045,8 +9318,8 @@
         </p:nvSpPr>
         <p:spPr>
           <a:xfrm>
-            <a:off x="7695125" y="3393725"/>
-            <a:ext cx="263400" cy="266700"/>
+            <a:off x="7016882" y="4237568"/>
+            <a:ext cx="325500" cy="266700"/>
           </a:xfrm>
           <a:prstGeom prst="rect">
             <a:avLst/>
@@ -9084,11 +9357,58 @@
           </a:p>
         </p:txBody>
       </p:sp>
+      <p:sp>
+        <p:nvSpPr>
+          <p:cNvPr id="182" name="Google Shape;182;g3c89c144ce9_0_11"/>
+          <p:cNvSpPr/>
+          <p:nvPr/>
+        </p:nvSpPr>
+        <p:spPr>
+          <a:xfrm>
+            <a:off x="7695125" y="3393725"/>
+            <a:ext cx="263400" cy="266700"/>
+          </a:xfrm>
+          <a:prstGeom prst="rect">
+            <a:avLst/>
+          </a:prstGeom>
+          <a:noFill/>
+          <a:ln cap="flat" cmpd="sng" w="17375">
+            <a:solidFill>
+              <a:srgbClr val="F1C232"/>
+            </a:solidFill>
+            <a:prstDash val="solid"/>
+            <a:round/>
+            <a:headEnd len="sm" w="sm" type="none"/>
+            <a:tailEnd len="sm" w="sm" type="none"/>
+          </a:ln>
+        </p:spPr>
+        <p:txBody>
+          <a:bodyPr anchorCtr="0" anchor="ctr" bIns="83450" lIns="83450" spcFirstLastPara="1" rIns="83450" wrap="square" tIns="83450">
+            <a:noAutofit/>
+          </a:bodyPr>
+          <a:lstStyle/>
+          <a:p>
+            <a:pPr indent="0" lvl="0" marL="0" rtl="0" algn="ctr">
+              <a:spcBef>
+                <a:spcPts val="0"/>
+              </a:spcBef>
+              <a:spcAft>
+                <a:spcPts val="0"/>
+              </a:spcAft>
+              <a:buNone/>
+            </a:pPr>
+            <a:r>
+              <a:t/>
+            </a:r>
+            <a:endParaRPr sz="1277"/>
+          </a:p>
+        </p:txBody>
+      </p:sp>
       <p:cxnSp>
         <p:nvCxnSpPr>
-          <p:cNvPr id="182" name="Google Shape;182;g3c89c144ce9_0_11"/>
+          <p:cNvPr id="183" name="Google Shape;183;g3c89c144ce9_0_11"/>
           <p:cNvCxnSpPr>
-            <a:endCxn id="181" idx="2"/>
+            <a:endCxn id="182" idx="2"/>
           </p:cNvCxnSpPr>
           <p:nvPr/>
         </p:nvCxnSpPr>
@@ -9114,10 +9434,10 @@
       </p:cxnSp>
       <p:cxnSp>
         <p:nvCxnSpPr>
-          <p:cNvPr id="183" name="Google Shape;183;g3c89c144ce9_0_11"/>
+          <p:cNvPr id="184" name="Google Shape;184;g3c89c144ce9_0_11"/>
           <p:cNvCxnSpPr>
-            <a:stCxn id="163" idx="3"/>
-            <a:endCxn id="179" idx="2"/>
+            <a:stCxn id="164" idx="3"/>
+            <a:endCxn id="180" idx="2"/>
           </p:cNvCxnSpPr>
           <p:nvPr/>
         </p:nvCxnSpPr>
@@ -9146,7 +9466,7 @@
       </p:cxnSp>
       <p:sp>
         <p:nvSpPr>
-          <p:cNvPr id="184" name="Google Shape;184;g3c89c144ce9_0_11"/>
+          <p:cNvPr id="185" name="Google Shape;185;g3c89c144ce9_0_11"/>
           <p:cNvSpPr/>
           <p:nvPr/>
         </p:nvSpPr>
@@ -9230,60 +9550,13 @@
       </p:sp>
       <p:sp>
         <p:nvSpPr>
-          <p:cNvPr id="185" name="Google Shape;185;g3c89c144ce9_0_11"/>
-          <p:cNvSpPr/>
-          <p:nvPr/>
-        </p:nvSpPr>
-        <p:spPr>
-          <a:xfrm>
-            <a:off x="3701150" y="5142075"/>
-            <a:ext cx="229200" cy="299100"/>
-          </a:xfrm>
-          <a:prstGeom prst="rect">
-            <a:avLst/>
-          </a:prstGeom>
-          <a:noFill/>
-          <a:ln cap="flat" cmpd="sng" w="19050">
-            <a:solidFill>
-              <a:srgbClr val="8E7CC3"/>
-            </a:solidFill>
-            <a:prstDash val="solid"/>
-            <a:round/>
-            <a:headEnd len="sm" w="sm" type="none"/>
-            <a:tailEnd len="sm" w="sm" type="none"/>
-          </a:ln>
-        </p:spPr>
-        <p:txBody>
-          <a:bodyPr anchorCtr="0" anchor="ctr" bIns="91425" lIns="91425" spcFirstLastPara="1" rIns="91425" wrap="square" tIns="91425">
-            <a:noAutofit/>
-          </a:bodyPr>
-          <a:lstStyle/>
-          <a:p>
-            <a:pPr indent="0" lvl="0" marL="0" rtl="0" algn="ctr">
-              <a:spcBef>
-                <a:spcPts val="0"/>
-              </a:spcBef>
-              <a:spcAft>
-                <a:spcPts val="0"/>
-              </a:spcAft>
-              <a:buNone/>
-            </a:pPr>
-            <a:r>
-              <a:t/>
-            </a:r>
-            <a:endParaRPr/>
-          </a:p>
-        </p:txBody>
-      </p:sp>
-      <p:sp>
-        <p:nvSpPr>
           <p:cNvPr id="186" name="Google Shape;186;g3c89c144ce9_0_11"/>
           <p:cNvSpPr/>
           <p:nvPr/>
         </p:nvSpPr>
         <p:spPr>
           <a:xfrm>
-            <a:off x="3967550" y="5142075"/>
+            <a:off x="3701150" y="5142075"/>
             <a:ext cx="229200" cy="299100"/>
           </a:xfrm>
           <a:prstGeom prst="rect">
@@ -9330,7 +9603,7 @@
         </p:nvSpPr>
         <p:spPr>
           <a:xfrm>
-            <a:off x="4490900" y="5142075"/>
+            <a:off x="3967550" y="5142075"/>
             <a:ext cx="229200" cy="299100"/>
           </a:xfrm>
           <a:prstGeom prst="rect">
@@ -9377,7 +9650,7 @@
         </p:nvSpPr>
         <p:spPr>
           <a:xfrm>
-            <a:off x="2540850" y="4221375"/>
+            <a:off x="4490900" y="5142075"/>
             <a:ext cx="229200" cy="299100"/>
           </a:xfrm>
           <a:prstGeom prst="rect">
@@ -9424,7 +9697,7 @@
         </p:nvSpPr>
         <p:spPr>
           <a:xfrm>
-            <a:off x="5257750" y="4206400"/>
+            <a:off x="2540850" y="4221375"/>
             <a:ext cx="229200" cy="299100"/>
           </a:xfrm>
           <a:prstGeom prst="rect">
@@ -9471,7 +9744,7 @@
         </p:nvSpPr>
         <p:spPr>
           <a:xfrm>
-            <a:off x="8321300" y="4206400"/>
+            <a:off x="5257750" y="4206400"/>
             <a:ext cx="229200" cy="299100"/>
           </a:xfrm>
           <a:prstGeom prst="rect">
@@ -9510,24 +9783,19 @@
           </a:p>
         </p:txBody>
       </p:sp>
-      <p:cxnSp>
-        <p:nvCxnSpPr>
+      <p:sp>
+        <p:nvSpPr>
           <p:cNvPr id="191" name="Google Shape;191;g3c89c144ce9_0_11"/>
-          <p:cNvCxnSpPr>
-            <a:stCxn id="185" idx="0"/>
-            <a:endCxn id="188" idx="2"/>
-          </p:cNvCxnSpPr>
+          <p:cNvSpPr/>
           <p:nvPr/>
-        </p:nvCxnSpPr>
-        <p:spPr>
-          <a:xfrm flipH="1" rot="5400000">
-            <a:off x="2924750" y="4251075"/>
-            <a:ext cx="621600" cy="1160400"/>
-          </a:xfrm>
-          <a:prstGeom prst="curvedConnector3">
-            <a:avLst>
-              <a:gd fmla="val 50000" name="adj1"/>
-            </a:avLst>
+        </p:nvSpPr>
+        <p:spPr>
+          <a:xfrm>
+            <a:off x="8321300" y="4206400"/>
+            <a:ext cx="229200" cy="299100"/>
+          </a:xfrm>
+          <a:prstGeom prst="rect">
+            <a:avLst/>
           </a:prstGeom>
           <a:noFill/>
           <a:ln cap="flat" cmpd="sng" w="19050">
@@ -9536,11 +9804,32 @@
             </a:solidFill>
             <a:prstDash val="solid"/>
             <a:round/>
-            <a:headEnd len="med" w="med" type="none"/>
-            <a:tailEnd len="med" w="med" type="triangle"/>
-          </a:ln>
-        </p:spPr>
-      </p:cxnSp>
+            <a:headEnd len="sm" w="sm" type="none"/>
+            <a:tailEnd len="sm" w="sm" type="none"/>
+          </a:ln>
+        </p:spPr>
+        <p:txBody>
+          <a:bodyPr anchorCtr="0" anchor="ctr" bIns="91425" lIns="91425" spcFirstLastPara="1" rIns="91425" wrap="square" tIns="91425">
+            <a:noAutofit/>
+          </a:bodyPr>
+          <a:lstStyle/>
+          <a:p>
+            <a:pPr indent="0" lvl="0" marL="0" rtl="0" algn="ctr">
+              <a:spcBef>
+                <a:spcPts val="0"/>
+              </a:spcBef>
+              <a:spcAft>
+                <a:spcPts val="0"/>
+              </a:spcAft>
+              <a:buNone/>
+            </a:pPr>
+            <a:r>
+              <a:t/>
+            </a:r>
+            <a:endParaRPr/>
+          </a:p>
+        </p:txBody>
+      </p:sp>
       <p:cxnSp>
         <p:nvCxnSpPr>
           <p:cNvPr id="192" name="Google Shape;192;g3c89c144ce9_0_11"/>
@@ -9551,13 +9840,13 @@
           <p:nvPr/>
         </p:nvCxnSpPr>
         <p:spPr>
-          <a:xfrm rot="-5400000">
-            <a:off x="4409000" y="4178625"/>
-            <a:ext cx="636600" cy="1290300"/>
+          <a:xfrm flipH="1" rot="5400000">
+            <a:off x="2924750" y="4251075"/>
+            <a:ext cx="621600" cy="1160400"/>
           </a:xfrm>
           <a:prstGeom prst="curvedConnector3">
             <a:avLst>
-              <a:gd fmla="val 49998" name="adj1"/>
+              <a:gd fmla="val 50000" name="adj1"/>
             </a:avLst>
           </a:prstGeom>
           <a:noFill/>
@@ -9583,8 +9872,8 @@
         </p:nvCxnSpPr>
         <p:spPr>
           <a:xfrm rot="-5400000">
-            <a:off x="6202400" y="2908575"/>
-            <a:ext cx="636600" cy="3830400"/>
+            <a:off x="4409000" y="4178625"/>
+            <a:ext cx="636600" cy="1290300"/>
           </a:xfrm>
           <a:prstGeom prst="curvedConnector3">
             <a:avLst>
@@ -9603,9 +9892,40 @@
           </a:ln>
         </p:spPr>
       </p:cxnSp>
+      <p:cxnSp>
+        <p:nvCxnSpPr>
+          <p:cNvPr id="194" name="Google Shape;194;g3c89c144ce9_0_11"/>
+          <p:cNvCxnSpPr>
+            <a:stCxn id="188" idx="0"/>
+            <a:endCxn id="191" idx="2"/>
+          </p:cNvCxnSpPr>
+          <p:nvPr/>
+        </p:nvCxnSpPr>
+        <p:spPr>
+          <a:xfrm rot="-5400000">
+            <a:off x="6202400" y="2908575"/>
+            <a:ext cx="636600" cy="3830400"/>
+          </a:xfrm>
+          <a:prstGeom prst="curvedConnector3">
+            <a:avLst>
+              <a:gd fmla="val 49998" name="adj1"/>
+            </a:avLst>
+          </a:prstGeom>
+          <a:noFill/>
+          <a:ln cap="flat" cmpd="sng" w="19050">
+            <a:solidFill>
+              <a:srgbClr val="8E7CC3"/>
+            </a:solidFill>
+            <a:prstDash val="solid"/>
+            <a:round/>
+            <a:headEnd len="med" w="med" type="none"/>
+            <a:tailEnd len="med" w="med" type="triangle"/>
+          </a:ln>
+        </p:spPr>
+      </p:cxnSp>
       <p:sp>
         <p:nvSpPr>
-          <p:cNvPr id="194" name="Google Shape;194;g3c89c144ce9_0_11"/>
+          <p:cNvPr id="195" name="Google Shape;195;g3c89c144ce9_0_11"/>
           <p:cNvSpPr/>
           <p:nvPr/>
         </p:nvSpPr>
@@ -9657,7 +9977,7 @@
       </p:sp>
       <p:sp>
         <p:nvSpPr>
-          <p:cNvPr id="195" name="Google Shape;195;g3c89c144ce9_0_11"/>
+          <p:cNvPr id="196" name="Google Shape;196;g3c89c144ce9_0_11"/>
           <p:cNvSpPr/>
           <p:nvPr/>
         </p:nvSpPr>
@@ -9704,7 +10024,7 @@
       </p:sp>
       <p:sp>
         <p:nvSpPr>
-          <p:cNvPr id="196" name="Google Shape;196;g3c89c144ce9_0_11"/>
+          <p:cNvPr id="197" name="Google Shape;197;g3c89c144ce9_0_11"/>
           <p:cNvSpPr/>
           <p:nvPr/>
         </p:nvSpPr>
@@ -9751,10 +10071,10 @@
       </p:sp>
       <p:cxnSp>
         <p:nvCxnSpPr>
-          <p:cNvPr id="197" name="Google Shape;197;g3c89c144ce9_0_11"/>
+          <p:cNvPr id="198" name="Google Shape;198;g3c89c144ce9_0_11"/>
           <p:cNvCxnSpPr>
-            <a:stCxn id="195" idx="0"/>
-            <a:endCxn id="196" idx="2"/>
+            <a:stCxn id="196" idx="0"/>
+            <a:endCxn id="197" idx="2"/>
           </p:cNvCxnSpPr>
           <p:nvPr/>
         </p:nvCxnSpPr>
@@ -9782,7 +10102,7 @@
       </p:cxnSp>
       <p:sp>
         <p:nvSpPr>
-          <p:cNvPr id="162" name="Google Shape;162;g3c89c144ce9_0_11"/>
+          <p:cNvPr id="163" name="Google Shape;163;g3c89c144ce9_0_11"/>
           <p:cNvSpPr/>
           <p:nvPr/>
         </p:nvSpPr>
@@ -9834,7 +10154,7 @@
       </p:sp>
       <p:sp>
         <p:nvSpPr>
-          <p:cNvPr id="175" name="Google Shape;175;g3c89c144ce9_0_11"/>
+          <p:cNvPr id="176" name="Google Shape;176;g3c89c144ce9_0_11"/>
           <p:cNvSpPr/>
           <p:nvPr/>
         </p:nvSpPr>
@@ -9886,60 +10206,13 @@
       </p:sp>
       <p:sp>
         <p:nvSpPr>
-          <p:cNvPr id="198" name="Google Shape;198;g3c89c144ce9_0_11"/>
-          <p:cNvSpPr/>
-          <p:nvPr/>
-        </p:nvSpPr>
-        <p:spPr>
-          <a:xfrm>
-            <a:off x="1239200" y="2228650"/>
-            <a:ext cx="229200" cy="299100"/>
-          </a:xfrm>
-          <a:prstGeom prst="rect">
-            <a:avLst/>
-          </a:prstGeom>
-          <a:noFill/>
-          <a:ln cap="flat" cmpd="sng" w="19050">
-            <a:solidFill>
-              <a:srgbClr val="8E7CC3"/>
-            </a:solidFill>
-            <a:prstDash val="solid"/>
-            <a:round/>
-            <a:headEnd len="sm" w="sm" type="none"/>
-            <a:tailEnd len="sm" w="sm" type="none"/>
-          </a:ln>
-        </p:spPr>
-        <p:txBody>
-          <a:bodyPr anchorCtr="0" anchor="ctr" bIns="91425" lIns="91425" spcFirstLastPara="1" rIns="91425" wrap="square" tIns="91425">
-            <a:noAutofit/>
-          </a:bodyPr>
-          <a:lstStyle/>
-          <a:p>
-            <a:pPr indent="0" lvl="0" marL="0" rtl="0" algn="ctr">
-              <a:spcBef>
-                <a:spcPts val="0"/>
-              </a:spcBef>
-              <a:spcAft>
-                <a:spcPts val="0"/>
-              </a:spcAft>
-              <a:buNone/>
-            </a:pPr>
-            <a:r>
-              <a:t/>
-            </a:r>
-            <a:endParaRPr/>
-          </a:p>
-        </p:txBody>
-      </p:sp>
-      <p:sp>
-        <p:nvSpPr>
           <p:cNvPr id="199" name="Google Shape;199;g3c89c144ce9_0_11"/>
           <p:cNvSpPr/>
           <p:nvPr/>
         </p:nvSpPr>
         <p:spPr>
           <a:xfrm>
-            <a:off x="4319375" y="2228650"/>
+            <a:off x="1239200" y="2228650"/>
             <a:ext cx="229200" cy="299100"/>
           </a:xfrm>
           <a:prstGeom prst="rect">
@@ -9986,7 +10259,7 @@
         </p:nvSpPr>
         <p:spPr>
           <a:xfrm>
-            <a:off x="7998375" y="2228650"/>
+            <a:off x="4319375" y="2228650"/>
             <a:ext cx="229200" cy="299100"/>
           </a:xfrm>
           <a:prstGeom prst="rect">
@@ -10025,12 +10298,59 @@
           </a:p>
         </p:txBody>
       </p:sp>
+      <p:sp>
+        <p:nvSpPr>
+          <p:cNvPr id="201" name="Google Shape;201;g3c89c144ce9_0_11"/>
+          <p:cNvSpPr/>
+          <p:nvPr/>
+        </p:nvSpPr>
+        <p:spPr>
+          <a:xfrm>
+            <a:off x="7998375" y="2228650"/>
+            <a:ext cx="229200" cy="299100"/>
+          </a:xfrm>
+          <a:prstGeom prst="rect">
+            <a:avLst/>
+          </a:prstGeom>
+          <a:noFill/>
+          <a:ln cap="flat" cmpd="sng" w="19050">
+            <a:solidFill>
+              <a:srgbClr val="8E7CC3"/>
+            </a:solidFill>
+            <a:prstDash val="solid"/>
+            <a:round/>
+            <a:headEnd len="sm" w="sm" type="none"/>
+            <a:tailEnd len="sm" w="sm" type="none"/>
+          </a:ln>
+        </p:spPr>
+        <p:txBody>
+          <a:bodyPr anchorCtr="0" anchor="ctr" bIns="91425" lIns="91425" spcFirstLastPara="1" rIns="91425" wrap="square" tIns="91425">
+            <a:noAutofit/>
+          </a:bodyPr>
+          <a:lstStyle/>
+          <a:p>
+            <a:pPr indent="0" lvl="0" marL="0" rtl="0" algn="ctr">
+              <a:spcBef>
+                <a:spcPts val="0"/>
+              </a:spcBef>
+              <a:spcAft>
+                <a:spcPts val="0"/>
+              </a:spcAft>
+              <a:buNone/>
+            </a:pPr>
+            <a:r>
+              <a:t/>
+            </a:r>
+            <a:endParaRPr/>
+          </a:p>
+        </p:txBody>
+      </p:sp>
       <p:cxnSp>
         <p:nvCxnSpPr>
-          <p:cNvPr id="201" name="Google Shape;201;g3c89c144ce9_0_11"/>
+          <p:cNvPr id="202" name="Google Shape;202;g3c89c144ce9_0_11"/>
           <p:cNvCxnSpPr>
-            <a:stCxn id="199" idx="0"/>
-            <a:endCxn id="202" idx="1"/>
+            <a:stCxn id="200" idx="0"/>
+            <a:endCxn id="203" idx="1"/>
           </p:cNvCxnSpPr>
           <p:nvPr/>
         </p:nvCxnSpPr>
@@ -10056,10 +10376,10 @@
       </p:cxnSp>
       <p:cxnSp>
         <p:nvCxnSpPr>
-          <p:cNvPr id="203" name="Google Shape;203;g3c89c144ce9_0_11"/>
+          <p:cNvPr id="204" name="Google Shape;204;g3c89c144ce9_0_11"/>
           <p:cNvCxnSpPr>
-            <a:stCxn id="204" idx="3"/>
-            <a:endCxn id="205" idx="2"/>
+            <a:stCxn id="205" idx="3"/>
+            <a:endCxn id="206" idx="2"/>
           </p:cNvCxnSpPr>
           <p:nvPr/>
         </p:nvCxnSpPr>
@@ -10088,7 +10408,7 @@
       </p:cxnSp>
       <p:sp>
         <p:nvSpPr>
-          <p:cNvPr id="206" name="Google Shape;206;g3c89c144ce9_0_11"/>
+          <p:cNvPr id="207" name="Google Shape;207;g3c89c144ce9_0_11"/>
           <p:cNvSpPr txBox="1"/>
           <p:nvPr>
             <p:ph type="title"/>
@@ -10144,7 +10464,7 @@
       </p:sp>
       <p:sp>
         <p:nvSpPr>
-          <p:cNvPr id="207" name="Google Shape;207;g3c89c144ce9_0_11"/>
+          <p:cNvPr id="208" name="Google Shape;208;g3c89c144ce9_0_11"/>
           <p:cNvSpPr/>
           <p:nvPr/>
         </p:nvSpPr>
@@ -10196,7 +10516,7 @@
       </p:sp>
       <p:sp>
         <p:nvSpPr>
-          <p:cNvPr id="208" name="Google Shape;208;g3c89c144ce9_0_11"/>
+          <p:cNvPr id="209" name="Google Shape;209;g3c89c144ce9_0_11"/>
           <p:cNvSpPr/>
           <p:nvPr/>
         </p:nvSpPr>
@@ -10243,10 +10563,10 @@
       </p:sp>
       <p:cxnSp>
         <p:nvCxnSpPr>
-          <p:cNvPr id="209" name="Google Shape;209;g3c89c144ce9_0_11"/>
+          <p:cNvPr id="210" name="Google Shape;210;g3c89c144ce9_0_11"/>
           <p:cNvCxnSpPr>
-            <a:stCxn id="208" idx="0"/>
-            <a:endCxn id="207" idx="2"/>
+            <a:stCxn id="209" idx="0"/>
+            <a:endCxn id="208" idx="2"/>
           </p:cNvCxnSpPr>
           <p:nvPr/>
         </p:nvCxnSpPr>
@@ -10274,7 +10594,7 @@
       </p:cxnSp>
       <p:sp>
         <p:nvSpPr>
-          <p:cNvPr id="210" name="Google Shape;210;g3c89c144ce9_0_11"/>
+          <p:cNvPr id="211" name="Google Shape;211;g3c89c144ce9_0_11"/>
           <p:cNvSpPr/>
           <p:nvPr/>
         </p:nvSpPr>
@@ -10330,7 +10650,7 @@
       </p:sp>
       <p:sp>
         <p:nvSpPr>
-          <p:cNvPr id="202" name="Google Shape;202;g3c89c144ce9_0_11"/>
+          <p:cNvPr id="203" name="Google Shape;203;g3c89c144ce9_0_11"/>
           <p:cNvSpPr/>
           <p:nvPr/>
         </p:nvSpPr>
@@ -10386,10 +10706,10 @@
       </p:sp>
       <p:cxnSp>
         <p:nvCxnSpPr>
-          <p:cNvPr id="211" name="Google Shape;211;g3c89c144ce9_0_11"/>
+          <p:cNvPr id="212" name="Google Shape;212;g3c89c144ce9_0_11"/>
           <p:cNvCxnSpPr>
-            <a:stCxn id="202" idx="3"/>
-            <a:endCxn id="212" idx="2"/>
+            <a:stCxn id="203" idx="3"/>
+            <a:endCxn id="213" idx="2"/>
           </p:cNvCxnSpPr>
           <p:nvPr/>
         </p:nvCxnSpPr>
@@ -10415,10 +10735,10 @@
       </p:cxnSp>
       <p:cxnSp>
         <p:nvCxnSpPr>
-          <p:cNvPr id="213" name="Google Shape;213;g3c89c144ce9_0_11"/>
+          <p:cNvPr id="214" name="Google Shape;214;g3c89c144ce9_0_11"/>
           <p:cNvCxnSpPr>
-            <a:stCxn id="198" idx="0"/>
-            <a:endCxn id="210" idx="1"/>
+            <a:stCxn id="199" idx="0"/>
+            <a:endCxn id="211" idx="1"/>
           </p:cNvCxnSpPr>
           <p:nvPr/>
         </p:nvCxnSpPr>
@@ -10444,10 +10764,10 @@
       </p:cxnSp>
       <p:cxnSp>
         <p:nvCxnSpPr>
-          <p:cNvPr id="214" name="Google Shape;214;g3c89c144ce9_0_11"/>
+          <p:cNvPr id="215" name="Google Shape;215;g3c89c144ce9_0_11"/>
           <p:cNvCxnSpPr>
-            <a:stCxn id="210" idx="3"/>
-            <a:endCxn id="215" idx="2"/>
+            <a:stCxn id="211" idx="3"/>
+            <a:endCxn id="216" idx="2"/>
           </p:cNvCxnSpPr>
           <p:nvPr/>
         </p:nvCxnSpPr>
@@ -10473,7 +10793,7 @@
       </p:cxnSp>
       <p:sp>
         <p:nvSpPr>
-          <p:cNvPr id="204" name="Google Shape;204;g3c89c144ce9_0_11"/>
+          <p:cNvPr id="205" name="Google Shape;205;g3c89c144ce9_0_11"/>
           <p:cNvSpPr/>
           <p:nvPr/>
         </p:nvSpPr>
@@ -10529,10 +10849,10 @@
       </p:sp>
       <p:cxnSp>
         <p:nvCxnSpPr>
-          <p:cNvPr id="216" name="Google Shape;216;g3c89c144ce9_0_11"/>
+          <p:cNvPr id="217" name="Google Shape;217;g3c89c144ce9_0_11"/>
           <p:cNvCxnSpPr>
-            <a:stCxn id="200" idx="0"/>
-            <a:endCxn id="204" idx="1"/>
+            <a:stCxn id="201" idx="0"/>
+            <a:endCxn id="205" idx="1"/>
           </p:cNvCxnSpPr>
           <p:nvPr/>
         </p:nvCxnSpPr>
@@ -10558,7 +10878,7 @@
       </p:cxnSp>
       <p:sp>
         <p:nvSpPr>
-          <p:cNvPr id="217" name="Google Shape;217;g3c89c144ce9_0_11"/>
+          <p:cNvPr id="218" name="Google Shape;218;g3c89c144ce9_0_11"/>
           <p:cNvSpPr/>
           <p:nvPr/>
         </p:nvSpPr>
@@ -10620,7 +10940,7 @@
       </p:sp>
       <p:sp>
         <p:nvSpPr>
-          <p:cNvPr id="215" name="Google Shape;215;g3c89c144ce9_0_11"/>
+          <p:cNvPr id="216" name="Google Shape;216;g3c89c144ce9_0_11"/>
           <p:cNvSpPr/>
           <p:nvPr/>
         </p:nvSpPr>
@@ -10667,7 +10987,7 @@
       </p:sp>
       <p:sp>
         <p:nvSpPr>
-          <p:cNvPr id="218" name="Google Shape;218;g3c89c144ce9_0_11"/>
+          <p:cNvPr id="219" name="Google Shape;219;g3c89c144ce9_0_11"/>
           <p:cNvSpPr/>
           <p:nvPr/>
         </p:nvSpPr>
@@ -10719,7 +11039,7 @@
       </p:sp>
       <p:sp>
         <p:nvSpPr>
-          <p:cNvPr id="212" name="Google Shape;212;g3c89c144ce9_0_11"/>
+          <p:cNvPr id="213" name="Google Shape;213;g3c89c144ce9_0_11"/>
           <p:cNvSpPr/>
           <p:nvPr/>
         </p:nvSpPr>
@@ -10766,7 +11086,7 @@
       </p:sp>
       <p:sp>
         <p:nvSpPr>
-          <p:cNvPr id="205" name="Google Shape;205;g3c89c144ce9_0_11"/>
+          <p:cNvPr id="206" name="Google Shape;206;g3c89c144ce9_0_11"/>
           <p:cNvSpPr/>
           <p:nvPr/>
         </p:nvSpPr>
@@ -10813,7 +11133,7 @@
       </p:sp>
       <p:sp>
         <p:nvSpPr>
-          <p:cNvPr id="219" name="Google Shape;219;g3c89c144ce9_0_11"/>
+          <p:cNvPr id="220" name="Google Shape;220;g3c89c144ce9_0_11"/>
           <p:cNvSpPr/>
           <p:nvPr/>
         </p:nvSpPr>
@@ -10865,7 +11185,7 @@
       </p:sp>
       <p:sp>
         <p:nvSpPr>
-          <p:cNvPr id="220" name="Google Shape;220;g3c89c144ce9_0_11"/>
+          <p:cNvPr id="221" name="Google Shape;221;g3c89c144ce9_0_11"/>
           <p:cNvSpPr/>
           <p:nvPr/>
         </p:nvSpPr>
@@ -10917,7 +11237,7 @@
       </p:sp>
       <p:sp>
         <p:nvSpPr>
-          <p:cNvPr id="221" name="Google Shape;221;g3c89c144ce9_0_11"/>
+          <p:cNvPr id="222" name="Google Shape;222;g3c89c144ce9_0_11"/>
           <p:cNvSpPr/>
           <p:nvPr/>
         </p:nvSpPr>
@@ -10979,7 +11299,7 @@
       </p:sp>
       <p:sp>
         <p:nvSpPr>
-          <p:cNvPr id="222" name="Google Shape;222;g3c89c144ce9_0_11"/>
+          <p:cNvPr id="223" name="Google Shape;223;g3c89c144ce9_0_11"/>
           <p:cNvSpPr/>
           <p:nvPr/>
         </p:nvSpPr>
@@ -11031,7 +11351,7 @@
       </p:sp>
       <p:sp>
         <p:nvSpPr>
-          <p:cNvPr id="223" name="Google Shape;223;g3c89c144ce9_0_11"/>
+          <p:cNvPr id="224" name="Google Shape;224;g3c89c144ce9_0_11"/>
           <p:cNvSpPr/>
           <p:nvPr/>
         </p:nvSpPr>
@@ -11078,7 +11398,7 @@
       </p:sp>
       <p:sp>
         <p:nvSpPr>
-          <p:cNvPr id="224" name="Google Shape;224;g3c89c144ce9_0_11"/>
+          <p:cNvPr id="225" name="Google Shape;225;g3c89c144ce9_0_11"/>
           <p:cNvSpPr/>
           <p:nvPr/>
         </p:nvSpPr>
@@ -11125,10 +11445,10 @@
       </p:sp>
       <p:cxnSp>
         <p:nvCxnSpPr>
-          <p:cNvPr id="225" name="Google Shape;225;g3c89c144ce9_0_11"/>
+          <p:cNvPr id="226" name="Google Shape;226;g3c89c144ce9_0_11"/>
           <p:cNvCxnSpPr>
-            <a:stCxn id="207" idx="0"/>
-            <a:endCxn id="223" idx="2"/>
+            <a:stCxn id="208" idx="0"/>
+            <a:endCxn id="224" idx="2"/>
           </p:cNvCxnSpPr>
           <p:nvPr/>
         </p:nvCxnSpPr>
@@ -11156,10 +11476,10 @@
       </p:cxnSp>
       <p:cxnSp>
         <p:nvCxnSpPr>
-          <p:cNvPr id="226" name="Google Shape;226;g3c89c144ce9_0_11"/>
+          <p:cNvPr id="227" name="Google Shape;227;g3c89c144ce9_0_11"/>
           <p:cNvCxnSpPr>
-            <a:stCxn id="223" idx="0"/>
-            <a:endCxn id="224" idx="2"/>
+            <a:stCxn id="224" idx="0"/>
+            <a:endCxn id="225" idx="2"/>
           </p:cNvCxnSpPr>
           <p:nvPr/>
         </p:nvCxnSpPr>
@@ -11187,10 +11507,10 @@
       </p:cxnSp>
       <p:cxnSp>
         <p:nvCxnSpPr>
-          <p:cNvPr id="227" name="Google Shape;227;g3c89c144ce9_0_11"/>
+          <p:cNvPr id="228" name="Google Shape;228;g3c89c144ce9_0_11"/>
           <p:cNvCxnSpPr>
-            <a:stCxn id="217" idx="0"/>
-            <a:endCxn id="218" idx="2"/>
+            <a:stCxn id="218" idx="0"/>
+            <a:endCxn id="219" idx="2"/>
           </p:cNvCxnSpPr>
           <p:nvPr/>
         </p:nvCxnSpPr>
@@ -11218,10 +11538,10 @@
       </p:cxnSp>
       <p:cxnSp>
         <p:nvCxnSpPr>
-          <p:cNvPr id="228" name="Google Shape;228;g3c89c144ce9_0_11"/>
+          <p:cNvPr id="229" name="Google Shape;229;g3c89c144ce9_0_11"/>
           <p:cNvCxnSpPr>
-            <a:stCxn id="143" idx="0"/>
-            <a:endCxn id="219" idx="2"/>
+            <a:stCxn id="144" idx="0"/>
+            <a:endCxn id="220" idx="2"/>
           </p:cNvCxnSpPr>
           <p:nvPr/>
         </p:nvCxnSpPr>
@@ -11249,10 +11569,10 @@
       </p:cxnSp>
       <p:cxnSp>
         <p:nvCxnSpPr>
-          <p:cNvPr id="229" name="Google Shape;229;g3c89c144ce9_0_11"/>
+          <p:cNvPr id="230" name="Google Shape;230;g3c89c144ce9_0_11"/>
           <p:cNvCxnSpPr>
-            <a:stCxn id="142" idx="0"/>
-            <a:endCxn id="220" idx="2"/>
+            <a:stCxn id="143" idx="0"/>
+            <a:endCxn id="221" idx="2"/>
           </p:cNvCxnSpPr>
           <p:nvPr/>
         </p:nvCxnSpPr>
@@ -11280,7 +11600,7 @@
       </p:cxnSp>
       <p:pic>
         <p:nvPicPr>
-          <p:cNvPr id="230" name="Google Shape;230;g3c89c144ce9_0_11"/>
+          <p:cNvPr id="231" name="Google Shape;231;g3c89c144ce9_0_11"/>
           <p:cNvPicPr preferRelativeResize="0"/>
           <p:nvPr/>
         </p:nvPicPr>
@@ -11313,10 +11633,10 @@
       </p:pic>
       <p:cxnSp>
         <p:nvCxnSpPr>
-          <p:cNvPr id="231" name="Google Shape;231;g3c89c144ce9_0_11"/>
+          <p:cNvPr id="232" name="Google Shape;232;g3c89c144ce9_0_11"/>
           <p:cNvCxnSpPr>
-            <a:stCxn id="230" idx="0"/>
-            <a:endCxn id="207" idx="2"/>
+            <a:stCxn id="231" idx="0"/>
+            <a:endCxn id="208" idx="2"/>
           </p:cNvCxnSpPr>
           <p:nvPr/>
         </p:nvCxnSpPr>
@@ -11369,82 +11689,208 @@
       </p:grpSpPr>
       <p:sp>
         <p:nvSpPr>
-          <p:cNvPr id="40" name="Google Shape;40;g3bbeee67e43_0_26"/>
+          <p:cNvPr id="40" name="Google Shape;40;g20bc932418a57f1d_0"/>
           <p:cNvSpPr txBox="1"/>
           <p:nvPr>
-            <p:ph type="ctrTitle"/>
+            <p:ph type="title"/>
           </p:nvPr>
         </p:nvSpPr>
         <p:spPr>
           <a:xfrm>
-            <a:off x="685800" y="2655750"/>
-            <a:ext cx="7772400" cy="1546500"/>
+            <a:off x="457200" y="274638"/>
+            <a:ext cx="8229600" cy="1143000"/>
           </a:xfrm>
           <a:prstGeom prst="rect">
             <a:avLst/>
           </a:prstGeom>
-          <a:noFill/>
-          <a:ln>
-            <a:noFill/>
-          </a:ln>
         </p:spPr>
         <p:txBody>
-          <a:bodyPr anchorCtr="0" anchor="ctr" bIns="91425" lIns="91425" spcFirstLastPara="1" rIns="91425" wrap="square" tIns="91425">
+          <a:bodyPr anchorCtr="0" anchor="b" bIns="91425" lIns="91425" spcFirstLastPara="1" rIns="91425" wrap="square" tIns="91425">
             <a:noAutofit/>
           </a:bodyPr>
           <a:lstStyle/>
           <a:p>
-            <a:pPr indent="0" lvl="0" marL="0" rtl="0" algn="ctr">
-              <a:lnSpc>
-                <a:spcPct val="100000"/>
-              </a:lnSpc>
-              <a:spcBef>
-                <a:spcPts val="0"/>
-              </a:spcBef>
-              <a:spcAft>
-                <a:spcPts val="0"/>
-              </a:spcAft>
-              <a:buSzPts val="4800"/>
+            <a:pPr indent="0" lvl="0" marL="0" rtl="0" algn="l">
+              <a:spcBef>
+                <a:spcPts val="0"/>
+              </a:spcBef>
+              <a:spcAft>
+                <a:spcPts val="0"/>
+              </a:spcAft>
               <a:buNone/>
             </a:pPr>
             <a:r>
-              <a:rPr lang="en">
+              <a:rPr lang="en"/>
+              <a:t>Lab 01 was “due”</a:t>
+            </a:r>
+            <a:endParaRPr/>
+          </a:p>
+        </p:txBody>
+      </p:sp>
+      <p:sp>
+        <p:nvSpPr>
+          <p:cNvPr id="41" name="Google Shape;41;g20bc932418a57f1d_0"/>
+          <p:cNvSpPr txBox="1"/>
+          <p:nvPr>
+            <p:ph idx="1" type="body"/>
+          </p:nvPr>
+        </p:nvSpPr>
+        <p:spPr>
+          <a:xfrm>
+            <a:off x="457200" y="1600200"/>
+            <a:ext cx="8229600" cy="4967700"/>
+          </a:xfrm>
+          <a:prstGeom prst="rect">
+            <a:avLst/>
+          </a:prstGeom>
+        </p:spPr>
+        <p:txBody>
+          <a:bodyPr anchorCtr="0" anchor="t" bIns="91425" lIns="91425" spcFirstLastPara="1" rIns="91425" wrap="square" tIns="91425">
+            <a:noAutofit/>
+          </a:bodyPr>
+          <a:lstStyle/>
+          <a:p>
+            <a:pPr indent="0" lvl="0" marL="0" rtl="0" algn="l">
+              <a:spcBef>
+                <a:spcPts val="600"/>
+              </a:spcBef>
+              <a:spcAft>
+                <a:spcPts val="0"/>
+              </a:spcAft>
+              <a:buNone/>
+            </a:pPr>
+            <a:r>
+              <a:rPr lang="en"/>
+              <a:t>How </a:t>
+            </a:r>
+            <a:r>
+              <a:rPr lang="en"/>
+              <a:t>was it??</a:t>
+            </a:r>
+            <a:endParaRPr/>
+          </a:p>
+          <a:p>
+            <a:pPr indent="0" lvl="0" marL="0" rtl="0" algn="l">
+              <a:spcBef>
+                <a:spcPts val="600"/>
+              </a:spcBef>
+              <a:spcAft>
+                <a:spcPts val="0"/>
+              </a:spcAft>
+              <a:buNone/>
+            </a:pPr>
+            <a:r>
+              <a:t/>
+            </a:r>
+            <a:endParaRPr/>
+          </a:p>
+          <a:p>
+            <a:pPr indent="0" lvl="0" marL="0" rtl="0" algn="l">
+              <a:spcBef>
+                <a:spcPts val="600"/>
+              </a:spcBef>
+              <a:spcAft>
+                <a:spcPts val="0"/>
+              </a:spcAft>
+              <a:buNone/>
+            </a:pPr>
+            <a:r>
+              <a:rPr lang="en"/>
+              <a:t>I think a </a:t>
+            </a:r>
+            <a:r>
+              <a:rPr b="1" lang="en">
                 <a:solidFill>
-                  <a:srgbClr val="002B5B"/>
+                  <a:schemeClr val="accent2"/>
                 </a:solidFill>
               </a:rPr>
-              <a:t>CSE </a:t>
+              <a:t>Lab 00</a:t>
             </a:r>
             <a:r>
               <a:rPr lang="en"/>
-              <a:t>1</a:t>
-            </a:r>
-            <a:r>
-              <a:rPr lang="en">
+              <a:t> with “workflow” tips could have been useful</a:t>
+            </a:r>
+            <a:endParaRPr/>
+          </a:p>
+          <a:p>
+            <a:pPr indent="0" lvl="0" marL="0" rtl="0" algn="l">
+              <a:spcBef>
+                <a:spcPts val="600"/>
+              </a:spcBef>
+              <a:spcAft>
+                <a:spcPts val="0"/>
+              </a:spcAft>
+              <a:buNone/>
+            </a:pPr>
+            <a:r>
+              <a:t/>
+            </a:r>
+            <a:endParaRPr/>
+          </a:p>
+          <a:p>
+            <a:pPr indent="0" lvl="0" marL="0" rtl="0" algn="l">
+              <a:spcBef>
+                <a:spcPts val="600"/>
+              </a:spcBef>
+              <a:spcAft>
+                <a:spcPts val="0"/>
+              </a:spcAft>
+              <a:buNone/>
+            </a:pPr>
+            <a:r>
+              <a:rPr b="1" lang="en">
                 <a:solidFill>
-                  <a:srgbClr val="002B5B"/>
+                  <a:schemeClr val="accent2"/>
                 </a:solidFill>
               </a:rPr>
-              <a:t>0124</a:t>
-            </a:r>
-            <a:br>
-              <a:rPr lang="en">
+              <a:t>Lab 02 </a:t>
+            </a:r>
+            <a:r>
+              <a:rPr lang="en"/>
+              <a:t>is available but based on feedback I can/will change things</a:t>
+            </a:r>
+            <a:endParaRPr/>
+          </a:p>
+          <a:p>
+            <a:pPr indent="0" lvl="0" marL="0" rtl="0" algn="l">
+              <a:spcBef>
+                <a:spcPts val="600"/>
+              </a:spcBef>
+              <a:spcAft>
+                <a:spcPts val="0"/>
+              </a:spcAft>
+              <a:buNone/>
+            </a:pPr>
+            <a:r>
+              <a:t/>
+            </a:r>
+            <a:endParaRPr/>
+          </a:p>
+          <a:p>
+            <a:pPr indent="0" lvl="0" marL="0" rtl="0" algn="l">
+              <a:spcBef>
+                <a:spcPts val="600"/>
+              </a:spcBef>
+              <a:spcAft>
+                <a:spcPts val="0"/>
+              </a:spcAft>
+              <a:buNone/>
+            </a:pPr>
+            <a:r>
+              <a:rPr lang="en"/>
+              <a:t>Goal is </a:t>
+            </a:r>
+            <a:r>
+              <a:rPr b="1" lang="en">
                 <a:solidFill>
-                  <a:srgbClr val="002B5B"/>
+                  <a:schemeClr val="accent3"/>
                 </a:solidFill>
               </a:rPr>
-            </a:br>
-            <a:r>
-              <a:rPr lang="en">
-                <a:solidFill>
-                  <a:srgbClr val="DCB439"/>
-                </a:solidFill>
-              </a:rPr>
-              <a:t>Recurrent Neural Networks</a:t>
-            </a:r>
-            <a:endParaRPr>
+              <a:t>low floor/high ceiling</a:t>
+            </a:r>
+            <a:endParaRPr b="1">
               <a:solidFill>
-                <a:srgbClr val="DCB439"/>
+                <a:schemeClr val="accent3"/>
               </a:solidFill>
             </a:endParaRPr>
           </a:p>
@@ -11463,7 +11909,7 @@
   <p:cSld>
     <p:spTree>
       <p:nvGrpSpPr>
-        <p:cNvPr id="44" name="Shape 44"/>
+        <p:cNvPr id="45" name="Shape 45"/>
         <p:cNvGrpSpPr/>
         <p:nvPr/>
       </p:nvGrpSpPr>
@@ -11477,7 +11923,115 @@
       </p:grpSpPr>
       <p:sp>
         <p:nvSpPr>
-          <p:cNvPr id="45" name="Google Shape;45;g3bd1f6d9d27_0_3"/>
+          <p:cNvPr id="46" name="Google Shape;46;g3bbeee67e43_0_26"/>
+          <p:cNvSpPr txBox="1"/>
+          <p:nvPr>
+            <p:ph type="ctrTitle"/>
+          </p:nvPr>
+        </p:nvSpPr>
+        <p:spPr>
+          <a:xfrm>
+            <a:off x="685800" y="2655750"/>
+            <a:ext cx="7772400" cy="1546500"/>
+          </a:xfrm>
+          <a:prstGeom prst="rect">
+            <a:avLst/>
+          </a:prstGeom>
+          <a:noFill/>
+          <a:ln>
+            <a:noFill/>
+          </a:ln>
+        </p:spPr>
+        <p:txBody>
+          <a:bodyPr anchorCtr="0" anchor="ctr" bIns="91425" lIns="91425" spcFirstLastPara="1" rIns="91425" wrap="square" tIns="91425">
+            <a:noAutofit/>
+          </a:bodyPr>
+          <a:lstStyle/>
+          <a:p>
+            <a:pPr indent="0" lvl="0" marL="0" rtl="0" algn="ctr">
+              <a:lnSpc>
+                <a:spcPct val="100000"/>
+              </a:lnSpc>
+              <a:spcBef>
+                <a:spcPts val="0"/>
+              </a:spcBef>
+              <a:spcAft>
+                <a:spcPts val="0"/>
+              </a:spcAft>
+              <a:buSzPts val="4800"/>
+              <a:buNone/>
+            </a:pPr>
+            <a:r>
+              <a:rPr lang="en">
+                <a:solidFill>
+                  <a:srgbClr val="002B5B"/>
+                </a:solidFill>
+              </a:rPr>
+              <a:t>CSE </a:t>
+            </a:r>
+            <a:r>
+              <a:rPr lang="en"/>
+              <a:t>1</a:t>
+            </a:r>
+            <a:r>
+              <a:rPr lang="en">
+                <a:solidFill>
+                  <a:srgbClr val="002B5B"/>
+                </a:solidFill>
+              </a:rPr>
+              <a:t>0124</a:t>
+            </a:r>
+            <a:br>
+              <a:rPr lang="en">
+                <a:solidFill>
+                  <a:srgbClr val="002B5B"/>
+                </a:solidFill>
+              </a:rPr>
+            </a:br>
+            <a:r>
+              <a:rPr lang="en">
+                <a:solidFill>
+                  <a:srgbClr val="DCB439"/>
+                </a:solidFill>
+              </a:rPr>
+              <a:t>Recurrent Neural Networks</a:t>
+            </a:r>
+            <a:endParaRPr>
+              <a:solidFill>
+                <a:srgbClr val="DCB439"/>
+              </a:solidFill>
+            </a:endParaRPr>
+          </a:p>
+        </p:txBody>
+      </p:sp>
+    </p:spTree>
+  </p:cSld>
+  <p:clrMapOvr>
+    <a:masterClrMapping/>
+  </p:clrMapOvr>
+</p:sld>
+</file>
+
+<file path=ppt/slides/slide4.xml><?xml version="1.0" encoding="utf-8"?>
+<p:sld xmlns:a="http://schemas.openxmlformats.org/drawingml/2006/main" xmlns:r="http://schemas.openxmlformats.org/officeDocument/2006/relationships" xmlns:mc="http://schemas.openxmlformats.org/markup-compatibility/2006" xmlns:mv="urn:schemas-microsoft-com:mac:vml" xmlns:p="http://schemas.openxmlformats.org/presentationml/2006/main" xmlns:c="http://schemas.openxmlformats.org/drawingml/2006/chart" xmlns:dgm="http://schemas.openxmlformats.org/drawingml/2006/diagram" xmlns:o="urn:schemas-microsoft-com:office:office" xmlns:v="urn:schemas-microsoft-com:vml" xmlns:pvml="urn:schemas-microsoft-com:office:powerpoint" xmlns:com="http://schemas.openxmlformats.org/drawingml/2006/compatibility" xmlns:p14="http://schemas.microsoft.com/office/powerpoint/2010/main" xmlns:p15="http://schemas.microsoft.com/office/powerpoint/2012/main" xmlns:ahyp="http://schemas.microsoft.com/office/drawing/2018/hyperlinkcolor">
+  <p:cSld>
+    <p:spTree>
+      <p:nvGrpSpPr>
+        <p:cNvPr id="50" name="Shape 50"/>
+        <p:cNvGrpSpPr/>
+        <p:nvPr/>
+      </p:nvGrpSpPr>
+      <p:grpSpPr>
+        <a:xfrm>
+          <a:off x="0" y="0"/>
+          <a:ext cx="0" cy="0"/>
+          <a:chOff x="0" y="0"/>
+          <a:chExt cx="0" cy="0"/>
+        </a:xfrm>
+      </p:grpSpPr>
+      <p:sp>
+        <p:nvSpPr>
+          <p:cNvPr id="51" name="Google Shape;51;g3bd1f6d9d27_0_3"/>
           <p:cNvSpPr/>
           <p:nvPr/>
         </p:nvSpPr>
@@ -11540,7 +12094,7 @@
       </p:sp>
       <p:sp>
         <p:nvSpPr>
-          <p:cNvPr id="46" name="Google Shape;46;g3bd1f6d9d27_0_3"/>
+          <p:cNvPr id="52" name="Google Shape;52;g3bd1f6d9d27_0_3"/>
           <p:cNvSpPr txBox="1"/>
           <p:nvPr>
             <p:ph type="title"/>
@@ -11588,7 +12142,7 @@
       </p:sp>
       <p:pic>
         <p:nvPicPr>
-          <p:cNvPr id="47" name="Google Shape;47;g3bd1f6d9d27_0_3"/>
+          <p:cNvPr id="53" name="Google Shape;53;g3bd1f6d9d27_0_3"/>
           <p:cNvPicPr preferRelativeResize="0"/>
           <p:nvPr/>
         </p:nvPicPr>
@@ -11615,7 +12169,7 @@
       </p:pic>
       <p:sp>
         <p:nvSpPr>
-          <p:cNvPr id="48" name="Google Shape;48;g3bd1f6d9d27_0_3"/>
+          <p:cNvPr id="54" name="Google Shape;54;g3bd1f6d9d27_0_3"/>
           <p:cNvSpPr/>
           <p:nvPr/>
         </p:nvSpPr>
@@ -11678,7 +12232,7 @@
       </p:sp>
       <p:sp>
         <p:nvSpPr>
-          <p:cNvPr id="49" name="Google Shape;49;g3bd1f6d9d27_0_3"/>
+          <p:cNvPr id="55" name="Google Shape;55;g3bd1f6d9d27_0_3"/>
           <p:cNvSpPr/>
           <p:nvPr/>
         </p:nvSpPr>
@@ -11741,7 +12295,7 @@
       </p:sp>
       <p:pic>
         <p:nvPicPr>
-          <p:cNvPr id="50" name="Google Shape;50;g3bd1f6d9d27_0_3" title="Screenshot 2026-02-11 at 7.24.00 AM.png"/>
+          <p:cNvPr id="56" name="Google Shape;56;g3bd1f6d9d27_0_3" title="Screenshot 2026-02-11 at 7.24.00 AM.png"/>
           <p:cNvPicPr preferRelativeResize="0"/>
           <p:nvPr/>
         </p:nvPicPr>
@@ -11768,7 +12322,7 @@
       </p:pic>
       <p:sp>
         <p:nvSpPr>
-          <p:cNvPr id="51" name="Google Shape;51;g3bd1f6d9d27_0_3"/>
+          <p:cNvPr id="57" name="Google Shape;57;g3bd1f6d9d27_0_3"/>
           <p:cNvSpPr/>
           <p:nvPr/>
         </p:nvSpPr>
@@ -11831,7 +12385,7 @@
       </p:sp>
       <p:pic>
         <p:nvPicPr>
-          <p:cNvPr id="52" name="Google Shape;52;g3bd1f6d9d27_0_3" title="Screenshot 2026-02-11 at 7.25.28 AM.png"/>
+          <p:cNvPr id="58" name="Google Shape;58;g3bd1f6d9d27_0_3" title="Screenshot 2026-02-11 at 7.25.28 AM.png"/>
           <p:cNvPicPr preferRelativeResize="0"/>
           <p:nvPr/>
         </p:nvPicPr>
@@ -11858,7 +12412,7 @@
       </p:pic>
       <p:pic>
         <p:nvPicPr>
-          <p:cNvPr id="53" name="Google Shape;53;g3bd1f6d9d27_0_3" title="Screenshot 2026-02-11 at 7.25.39 AM.png"/>
+          <p:cNvPr id="59" name="Google Shape;59;g3bd1f6d9d27_0_3" title="Screenshot 2026-02-11 at 7.25.39 AM.png"/>
           <p:cNvPicPr preferRelativeResize="0"/>
           <p:nvPr/>
         </p:nvPicPr>
@@ -11885,10 +12439,10 @@
       </p:pic>
       <p:cxnSp>
         <p:nvCxnSpPr>
-          <p:cNvPr id="54" name="Google Shape;54;g3bd1f6d9d27_0_3"/>
+          <p:cNvPr id="60" name="Google Shape;60;g3bd1f6d9d27_0_3"/>
           <p:cNvCxnSpPr>
-            <a:stCxn id="48" idx="1"/>
-            <a:endCxn id="50" idx="0"/>
+            <a:stCxn id="54" idx="1"/>
+            <a:endCxn id="56" idx="0"/>
           </p:cNvCxnSpPr>
           <p:nvPr/>
         </p:nvCxnSpPr>
@@ -11917,10 +12471,10 @@
       </p:cxnSp>
       <p:cxnSp>
         <p:nvCxnSpPr>
-          <p:cNvPr id="55" name="Google Shape;55;g3bd1f6d9d27_0_3"/>
+          <p:cNvPr id="61" name="Google Shape;61;g3bd1f6d9d27_0_3"/>
           <p:cNvCxnSpPr>
-            <a:stCxn id="51" idx="3"/>
-            <a:endCxn id="52" idx="0"/>
+            <a:stCxn id="57" idx="3"/>
+            <a:endCxn id="58" idx="0"/>
           </p:cNvCxnSpPr>
           <p:nvPr/>
         </p:nvCxnSpPr>
@@ -11949,10 +12503,10 @@
       </p:cxnSp>
       <p:cxnSp>
         <p:nvCxnSpPr>
-          <p:cNvPr id="56" name="Google Shape;56;g3bd1f6d9d27_0_3"/>
+          <p:cNvPr id="62" name="Google Shape;62;g3bd1f6d9d27_0_3"/>
           <p:cNvCxnSpPr>
-            <a:stCxn id="49" idx="3"/>
-            <a:endCxn id="53" idx="0"/>
+            <a:stCxn id="55" idx="3"/>
+            <a:endCxn id="59" idx="0"/>
           </p:cNvCxnSpPr>
           <p:nvPr/>
         </p:nvCxnSpPr>
@@ -11978,7 +12532,7 @@
       </p:cxnSp>
       <p:sp>
         <p:nvSpPr>
-          <p:cNvPr id="57" name="Google Shape;57;g3bd1f6d9d27_0_3"/>
+          <p:cNvPr id="63" name="Google Shape;63;g3bd1f6d9d27_0_3"/>
           <p:cNvSpPr txBox="1"/>
           <p:nvPr/>
         </p:nvSpPr>
@@ -12044,7 +12598,7 @@
       </p:sp>
       <p:sp>
         <p:nvSpPr>
-          <p:cNvPr id="58" name="Google Shape;58;g3bd1f6d9d27_0_3"/>
+          <p:cNvPr id="64" name="Google Shape;64;g3bd1f6d9d27_0_3"/>
           <p:cNvSpPr txBox="1"/>
           <p:nvPr/>
         </p:nvSpPr>
@@ -12110,7 +12664,7 @@
       </p:sp>
       <p:sp>
         <p:nvSpPr>
-          <p:cNvPr id="59" name="Google Shape;59;g3bd1f6d9d27_0_3"/>
+          <p:cNvPr id="65" name="Google Shape;65;g3bd1f6d9d27_0_3"/>
           <p:cNvSpPr txBox="1"/>
           <p:nvPr/>
         </p:nvSpPr>
@@ -12176,7 +12730,7 @@
       </p:sp>
       <p:sp>
         <p:nvSpPr>
-          <p:cNvPr id="60" name="Google Shape;60;g3bd1f6d9d27_0_3"/>
+          <p:cNvPr id="66" name="Google Shape;66;g3bd1f6d9d27_0_3"/>
           <p:cNvSpPr txBox="1"/>
           <p:nvPr/>
         </p:nvSpPr>
@@ -12242,7 +12796,7 @@
       </p:sp>
       <p:sp>
         <p:nvSpPr>
-          <p:cNvPr id="61" name="Google Shape;61;g3bd1f6d9d27_0_3"/>
+          <p:cNvPr id="67" name="Google Shape;67;g3bd1f6d9d27_0_3"/>
           <p:cNvSpPr txBox="1"/>
           <p:nvPr/>
         </p:nvSpPr>
@@ -12308,7 +12862,7 @@
       </p:sp>
       <p:sp>
         <p:nvSpPr>
-          <p:cNvPr id="62" name="Google Shape;62;g3bd1f6d9d27_0_3"/>
+          <p:cNvPr id="68" name="Google Shape;68;g3bd1f6d9d27_0_3"/>
           <p:cNvSpPr txBox="1"/>
           <p:nvPr/>
         </p:nvSpPr>
@@ -12398,7 +12952,7 @@
       </p:sp>
       <p:pic>
         <p:nvPicPr>
-          <p:cNvPr id="63" name="Google Shape;63;g3bd1f6d9d27_0_3"/>
+          <p:cNvPr id="69" name="Google Shape;69;g3bd1f6d9d27_0_3"/>
           <p:cNvPicPr preferRelativeResize="0"/>
           <p:nvPr/>
         </p:nvPicPr>
@@ -12425,7 +12979,7 @@
       </p:pic>
       <p:sp>
         <p:nvSpPr>
-          <p:cNvPr id="64" name="Google Shape;64;g3bd1f6d9d27_0_3"/>
+          <p:cNvPr id="70" name="Google Shape;70;g3bd1f6d9d27_0_3"/>
           <p:cNvSpPr/>
           <p:nvPr/>
         </p:nvSpPr>
@@ -12488,7 +13042,7 @@
       </p:sp>
       <p:sp>
         <p:nvSpPr>
-          <p:cNvPr id="65" name="Google Shape;65;g3bd1f6d9d27_0_3"/>
+          <p:cNvPr id="71" name="Google Shape;71;g3bd1f6d9d27_0_3"/>
           <p:cNvSpPr/>
           <p:nvPr/>
         </p:nvSpPr>
@@ -12551,10 +13105,10 @@
       </p:sp>
       <p:cxnSp>
         <p:nvCxnSpPr>
-          <p:cNvPr id="66" name="Google Shape;66;g3bd1f6d9d27_0_3"/>
+          <p:cNvPr id="72" name="Google Shape;72;g3bd1f6d9d27_0_3"/>
           <p:cNvCxnSpPr>
-            <a:stCxn id="64" idx="2"/>
-            <a:endCxn id="65" idx="0"/>
+            <a:stCxn id="70" idx="2"/>
+            <a:endCxn id="71" idx="0"/>
           </p:cNvCxnSpPr>
           <p:nvPr/>
         </p:nvCxnSpPr>
@@ -12582,7 +13136,7 @@
       </p:cxnSp>
       <p:sp>
         <p:nvSpPr>
-          <p:cNvPr id="67" name="Google Shape;67;g3bd1f6d9d27_0_3"/>
+          <p:cNvPr id="73" name="Google Shape;73;g3bd1f6d9d27_0_3"/>
           <p:cNvSpPr/>
           <p:nvPr/>
         </p:nvSpPr>
@@ -12645,7 +13199,7 @@
       </p:sp>
       <p:sp>
         <p:nvSpPr>
-          <p:cNvPr id="68" name="Google Shape;68;g3bd1f6d9d27_0_3"/>
+          <p:cNvPr id="74" name="Google Shape;74;g3bd1f6d9d27_0_3"/>
           <p:cNvSpPr/>
           <p:nvPr/>
         </p:nvSpPr>
@@ -12708,10 +13262,10 @@
       </p:sp>
       <p:cxnSp>
         <p:nvCxnSpPr>
-          <p:cNvPr id="69" name="Google Shape;69;g3bd1f6d9d27_0_3"/>
+          <p:cNvPr id="75" name="Google Shape;75;g3bd1f6d9d27_0_3"/>
           <p:cNvCxnSpPr>
-            <a:stCxn id="67" idx="2"/>
-            <a:endCxn id="68" idx="0"/>
+            <a:stCxn id="73" idx="2"/>
+            <a:endCxn id="74" idx="0"/>
           </p:cNvCxnSpPr>
           <p:nvPr/>
         </p:nvCxnSpPr>
@@ -12739,354 +13293,14 @@
       </p:cxnSp>
       <p:sp>
         <p:nvSpPr>
-          <p:cNvPr id="70" name="Google Shape;70;g3bd1f6d9d27_0_3"/>
-          <p:cNvSpPr/>
-          <p:nvPr/>
-        </p:nvSpPr>
-        <p:spPr>
-          <a:xfrm>
-            <a:off x="2441575" y="2805275"/>
-            <a:ext cx="1447200" cy="360600"/>
-          </a:xfrm>
-          <a:prstGeom prst="rect">
-            <a:avLst/>
-          </a:prstGeom>
-          <a:noFill/>
-          <a:ln cap="flat" cmpd="sng" w="28575">
-            <a:solidFill>
-              <a:srgbClr val="9BA4FF"/>
-            </a:solidFill>
-            <a:prstDash val="solid"/>
-            <a:round/>
-            <a:headEnd len="sm" w="sm" type="none"/>
-            <a:tailEnd len="sm" w="sm" type="none"/>
-          </a:ln>
-        </p:spPr>
-        <p:txBody>
-          <a:bodyPr anchorCtr="0" anchor="ctr" bIns="91425" lIns="91425" spcFirstLastPara="1" rIns="91425" wrap="square" tIns="91425">
-            <a:noAutofit/>
-          </a:bodyPr>
-          <a:lstStyle/>
-          <a:p>
-            <a:pPr indent="0" lvl="0" marL="0" marR="0" rtl="0" algn="ctr">
-              <a:lnSpc>
-                <a:spcPct val="100000"/>
-              </a:lnSpc>
-              <a:spcBef>
-                <a:spcPts val="0"/>
-              </a:spcBef>
-              <a:spcAft>
-                <a:spcPts val="0"/>
-              </a:spcAft>
-              <a:buClr>
-                <a:srgbClr val="000000"/>
-              </a:buClr>
-              <a:buSzPts val="1400"/>
-              <a:buFont typeface="Arial"/>
-              <a:buNone/>
-            </a:pPr>
-            <a:r>
-              <a:t/>
-            </a:r>
-            <a:endParaRPr b="0" i="0" sz="1400" u="none" cap="none" strike="noStrike">
-              <a:solidFill>
-                <a:srgbClr val="000000"/>
-              </a:solidFill>
-              <a:latin typeface="Arial"/>
-              <a:ea typeface="Arial"/>
-              <a:cs typeface="Arial"/>
-              <a:sym typeface="Arial"/>
-            </a:endParaRPr>
-          </a:p>
-        </p:txBody>
-      </p:sp>
-      <p:cxnSp>
-        <p:nvCxnSpPr>
-          <p:cNvPr id="71" name="Google Shape;71;g3bd1f6d9d27_0_3"/>
-          <p:cNvCxnSpPr>
-            <a:stCxn id="45" idx="3"/>
-            <a:endCxn id="70" idx="0"/>
-          </p:cNvCxnSpPr>
-          <p:nvPr/>
-        </p:nvCxnSpPr>
-        <p:spPr>
-          <a:xfrm flipH="1" rot="-5400000">
-            <a:off x="2784950" y="2424925"/>
-            <a:ext cx="405300" cy="355200"/>
-          </a:xfrm>
-          <a:prstGeom prst="curvedConnector3">
-            <a:avLst>
-              <a:gd fmla="val 50012" name="adj1"/>
-            </a:avLst>
-          </a:prstGeom>
-          <a:noFill/>
-          <a:ln cap="flat" cmpd="sng" w="9525">
-            <a:solidFill>
-              <a:srgbClr val="9BA4FF"/>
-            </a:solidFill>
-            <a:prstDash val="solid"/>
-            <a:round/>
-            <a:headEnd len="sm" w="sm" type="none"/>
-            <a:tailEnd len="med" w="med" type="triangle"/>
-          </a:ln>
-        </p:spPr>
-      </p:cxnSp>
-      <p:pic>
-        <p:nvPicPr>
-          <p:cNvPr id="72" name="Google Shape;72;g3bd1f6d9d27_0_3"/>
-          <p:cNvPicPr preferRelativeResize="0"/>
-          <p:nvPr/>
-        </p:nvPicPr>
-        <p:blipFill rotWithShape="1">
-          <a:blip r:embed="rId7">
-            <a:alphaModFix/>
-          </a:blip>
-          <a:srcRect b="0" l="0" r="12140" t="0"/>
-          <a:stretch/>
-        </p:blipFill>
-        <p:spPr>
-          <a:xfrm>
-            <a:off x="5134073" y="2625688"/>
-            <a:ext cx="2203574" cy="719775"/>
-          </a:xfrm>
-          <a:prstGeom prst="rect">
-            <a:avLst/>
-          </a:prstGeom>
-          <a:noFill/>
-          <a:ln>
-            <a:noFill/>
-          </a:ln>
-        </p:spPr>
-      </p:pic>
-      <p:sp>
-        <p:nvSpPr>
-          <p:cNvPr id="73" name="Google Shape;73;g3bd1f6d9d27_0_3"/>
-          <p:cNvSpPr txBox="1"/>
-          <p:nvPr/>
-        </p:nvSpPr>
-        <p:spPr>
-          <a:xfrm>
-            <a:off x="7252775" y="2770838"/>
-            <a:ext cx="1527000" cy="360600"/>
-          </a:xfrm>
-          <a:prstGeom prst="rect">
-            <a:avLst/>
-          </a:prstGeom>
-          <a:noFill/>
-          <a:ln>
-            <a:noFill/>
-          </a:ln>
-        </p:spPr>
-        <p:txBody>
-          <a:bodyPr anchorCtr="0" anchor="ctr" bIns="91425" lIns="91425" spcFirstLastPara="1" rIns="91425" wrap="square" tIns="91425">
-            <a:noAutofit/>
-          </a:bodyPr>
-          <a:lstStyle/>
-          <a:p>
-            <a:pPr indent="0" lvl="0" marL="0" marR="0" rtl="0" algn="ctr">
-              <a:lnSpc>
-                <a:spcPct val="100000"/>
-              </a:lnSpc>
-              <a:spcBef>
-                <a:spcPts val="0"/>
-              </a:spcBef>
-              <a:spcAft>
-                <a:spcPts val="0"/>
-              </a:spcAft>
-              <a:buClr>
-                <a:srgbClr val="000000"/>
-              </a:buClr>
-              <a:buSzPts val="2400"/>
-              <a:buFont typeface="Arial"/>
-              <a:buNone/>
-            </a:pPr>
-            <a:r>
-              <a:rPr b="0" i="0" lang="en" sz="2400" u="none" cap="none" strike="noStrike">
-                <a:solidFill>
-                  <a:schemeClr val="dk1"/>
-                </a:solidFill>
-                <a:latin typeface="Consolas"/>
-                <a:ea typeface="Consolas"/>
-                <a:cs typeface="Consolas"/>
-                <a:sym typeface="Consolas"/>
-              </a:rPr>
-              <a:t>X⍵</a:t>
-            </a:r>
-            <a:r>
-              <a:rPr b="0" baseline="30000" i="0" lang="en" sz="2400" u="none" cap="none" strike="noStrike">
-                <a:solidFill>
-                  <a:schemeClr val="dk1"/>
-                </a:solidFill>
-                <a:latin typeface="Consolas"/>
-                <a:ea typeface="Consolas"/>
-                <a:cs typeface="Consolas"/>
-                <a:sym typeface="Consolas"/>
-              </a:rPr>
-              <a:t>T</a:t>
-            </a:r>
-            <a:r>
-              <a:rPr b="0" i="0" lang="en" sz="2400" u="none" cap="none" strike="noStrike">
-                <a:solidFill>
-                  <a:schemeClr val="dk1"/>
-                </a:solidFill>
-                <a:latin typeface="Consolas"/>
-                <a:ea typeface="Consolas"/>
-                <a:cs typeface="Consolas"/>
-                <a:sym typeface="Consolas"/>
-              </a:rPr>
-              <a:t> + b)</a:t>
-            </a:r>
-            <a:endParaRPr b="0" i="0" sz="2400" u="none" cap="none" strike="noStrike">
-              <a:solidFill>
-                <a:schemeClr val="dk1"/>
-              </a:solidFill>
-              <a:latin typeface="Consolas"/>
-              <a:ea typeface="Consolas"/>
-              <a:cs typeface="Consolas"/>
-              <a:sym typeface="Consolas"/>
-            </a:endParaRPr>
-          </a:p>
-        </p:txBody>
-      </p:sp>
-      <p:sp>
-        <p:nvSpPr>
-          <p:cNvPr id="74" name="Google Shape;74;g3bd1f6d9d27_0_3"/>
-          <p:cNvSpPr txBox="1"/>
-          <p:nvPr/>
-        </p:nvSpPr>
-        <p:spPr>
-          <a:xfrm>
-            <a:off x="1475365" y="5362838"/>
-            <a:ext cx="2694300" cy="360600"/>
-          </a:xfrm>
-          <a:prstGeom prst="rect">
-            <a:avLst/>
-          </a:prstGeom>
-          <a:noFill/>
-          <a:ln>
-            <a:noFill/>
-          </a:ln>
-        </p:spPr>
-        <p:txBody>
-          <a:bodyPr anchorCtr="0" anchor="ctr" bIns="91425" lIns="91425" spcFirstLastPara="1" rIns="91425" wrap="square" tIns="91425">
-            <a:noAutofit/>
-          </a:bodyPr>
-          <a:lstStyle/>
-          <a:p>
-            <a:pPr indent="0" lvl="0" marL="0" marR="0" rtl="0" algn="ctr">
-              <a:lnSpc>
-                <a:spcPct val="100000"/>
-              </a:lnSpc>
-              <a:spcBef>
-                <a:spcPts val="0"/>
-              </a:spcBef>
-              <a:spcAft>
-                <a:spcPts val="0"/>
-              </a:spcAft>
-              <a:buClr>
-                <a:srgbClr val="000000"/>
-              </a:buClr>
-              <a:buSzPts val="2400"/>
-              <a:buFont typeface="Arial"/>
-              <a:buNone/>
-            </a:pPr>
-            <a:r>
-              <a:rPr b="0" i="0" lang="en" sz="2400" u="none" cap="none" strike="noStrike">
-                <a:solidFill>
-                  <a:schemeClr val="dk1"/>
-                </a:solidFill>
-                <a:latin typeface="Consolas"/>
-                <a:ea typeface="Consolas"/>
-                <a:cs typeface="Consolas"/>
-                <a:sym typeface="Consolas"/>
-              </a:rPr>
-              <a:t>y = &lt;1, 10&gt;</a:t>
-            </a:r>
-            <a:endParaRPr b="0" i="0" sz="2400" u="none" cap="none" strike="noStrike">
-              <a:solidFill>
-                <a:schemeClr val="dk1"/>
-              </a:solidFill>
-              <a:latin typeface="Consolas"/>
-              <a:ea typeface="Consolas"/>
-              <a:cs typeface="Consolas"/>
-              <a:sym typeface="Consolas"/>
-            </a:endParaRPr>
-          </a:p>
-        </p:txBody>
-      </p:sp>
-      <p:sp>
-        <p:nvSpPr>
-          <p:cNvPr id="75" name="Google Shape;75;g3bd1f6d9d27_0_3"/>
-          <p:cNvSpPr/>
-          <p:nvPr/>
-        </p:nvSpPr>
-        <p:spPr>
-          <a:xfrm>
-            <a:off x="1851675" y="5415150"/>
-            <a:ext cx="252000" cy="385800"/>
-          </a:xfrm>
-          <a:prstGeom prst="rect">
-            <a:avLst/>
-          </a:prstGeom>
-          <a:noFill/>
-          <a:ln cap="flat" cmpd="sng" w="28575">
-            <a:solidFill>
-              <a:srgbClr val="A31515"/>
-            </a:solidFill>
-            <a:prstDash val="solid"/>
-            <a:round/>
-            <a:headEnd len="sm" w="sm" type="none"/>
-            <a:tailEnd len="sm" w="sm" type="none"/>
-          </a:ln>
-        </p:spPr>
-        <p:txBody>
-          <a:bodyPr anchorCtr="0" anchor="ctr" bIns="91425" lIns="91425" spcFirstLastPara="1" rIns="91425" wrap="square" tIns="91425">
-            <a:noAutofit/>
-          </a:bodyPr>
-          <a:lstStyle/>
-          <a:p>
-            <a:pPr indent="0" lvl="0" marL="0" marR="0" rtl="0" algn="ctr">
-              <a:lnSpc>
-                <a:spcPct val="100000"/>
-              </a:lnSpc>
-              <a:spcBef>
-                <a:spcPts val="0"/>
-              </a:spcBef>
-              <a:spcAft>
-                <a:spcPts val="0"/>
-              </a:spcAft>
-              <a:buClr>
-                <a:srgbClr val="000000"/>
-              </a:buClr>
-              <a:buSzPts val="1400"/>
-              <a:buFont typeface="Arial"/>
-              <a:buNone/>
-            </a:pPr>
-            <a:r>
-              <a:t/>
-            </a:r>
-            <a:endParaRPr b="0" i="0" sz="1400" u="none" cap="none" strike="noStrike">
-              <a:solidFill>
-                <a:srgbClr val="000000"/>
-              </a:solidFill>
-              <a:latin typeface="Arial"/>
-              <a:ea typeface="Arial"/>
-              <a:cs typeface="Arial"/>
-              <a:sym typeface="Arial"/>
-            </a:endParaRPr>
-          </a:p>
-        </p:txBody>
-      </p:sp>
-      <p:sp>
-        <p:nvSpPr>
           <p:cNvPr id="76" name="Google Shape;76;g3bd1f6d9d27_0_3"/>
           <p:cNvSpPr/>
           <p:nvPr/>
         </p:nvSpPr>
         <p:spPr>
           <a:xfrm>
-            <a:off x="2942625" y="4603500"/>
-            <a:ext cx="252000" cy="385800"/>
+            <a:off x="2441575" y="2805275"/>
+            <a:ext cx="1447200" cy="360600"/>
           </a:xfrm>
           <a:prstGeom prst="rect">
             <a:avLst/>
@@ -13094,7 +13308,7 @@
           <a:noFill/>
           <a:ln cap="flat" cmpd="sng" w="28575">
             <a:solidFill>
-              <a:srgbClr val="A31515"/>
+              <a:srgbClr val="9BA4FF"/>
             </a:solidFill>
             <a:prstDash val="solid"/>
             <a:round/>
@@ -13144,8 +13358,348 @@
         <p:nvCxnSpPr>
           <p:cNvPr id="77" name="Google Shape;77;g3bd1f6d9d27_0_3"/>
           <p:cNvCxnSpPr>
-            <a:stCxn id="75" idx="0"/>
-            <a:endCxn id="76" idx="2"/>
+            <a:stCxn id="51" idx="3"/>
+            <a:endCxn id="76" idx="0"/>
+          </p:cNvCxnSpPr>
+          <p:nvPr/>
+        </p:nvCxnSpPr>
+        <p:spPr>
+          <a:xfrm flipH="1" rot="-5400000">
+            <a:off x="2784950" y="2424925"/>
+            <a:ext cx="405300" cy="355200"/>
+          </a:xfrm>
+          <a:prstGeom prst="curvedConnector3">
+            <a:avLst>
+              <a:gd fmla="val 50012" name="adj1"/>
+            </a:avLst>
+          </a:prstGeom>
+          <a:noFill/>
+          <a:ln cap="flat" cmpd="sng" w="9525">
+            <a:solidFill>
+              <a:srgbClr val="9BA4FF"/>
+            </a:solidFill>
+            <a:prstDash val="solid"/>
+            <a:round/>
+            <a:headEnd len="sm" w="sm" type="none"/>
+            <a:tailEnd len="med" w="med" type="triangle"/>
+          </a:ln>
+        </p:spPr>
+      </p:cxnSp>
+      <p:pic>
+        <p:nvPicPr>
+          <p:cNvPr id="78" name="Google Shape;78;g3bd1f6d9d27_0_3"/>
+          <p:cNvPicPr preferRelativeResize="0"/>
+          <p:nvPr/>
+        </p:nvPicPr>
+        <p:blipFill rotWithShape="1">
+          <a:blip r:embed="rId7">
+            <a:alphaModFix/>
+          </a:blip>
+          <a:srcRect b="0" l="0" r="12140" t="0"/>
+          <a:stretch/>
+        </p:blipFill>
+        <p:spPr>
+          <a:xfrm>
+            <a:off x="5134073" y="2625688"/>
+            <a:ext cx="2203574" cy="719775"/>
+          </a:xfrm>
+          <a:prstGeom prst="rect">
+            <a:avLst/>
+          </a:prstGeom>
+          <a:noFill/>
+          <a:ln>
+            <a:noFill/>
+          </a:ln>
+        </p:spPr>
+      </p:pic>
+      <p:sp>
+        <p:nvSpPr>
+          <p:cNvPr id="79" name="Google Shape;79;g3bd1f6d9d27_0_3"/>
+          <p:cNvSpPr txBox="1"/>
+          <p:nvPr/>
+        </p:nvSpPr>
+        <p:spPr>
+          <a:xfrm>
+            <a:off x="7252775" y="2770838"/>
+            <a:ext cx="1527000" cy="360600"/>
+          </a:xfrm>
+          <a:prstGeom prst="rect">
+            <a:avLst/>
+          </a:prstGeom>
+          <a:noFill/>
+          <a:ln>
+            <a:noFill/>
+          </a:ln>
+        </p:spPr>
+        <p:txBody>
+          <a:bodyPr anchorCtr="0" anchor="ctr" bIns="91425" lIns="91425" spcFirstLastPara="1" rIns="91425" wrap="square" tIns="91425">
+            <a:noAutofit/>
+          </a:bodyPr>
+          <a:lstStyle/>
+          <a:p>
+            <a:pPr indent="0" lvl="0" marL="0" marR="0" rtl="0" algn="ctr">
+              <a:lnSpc>
+                <a:spcPct val="100000"/>
+              </a:lnSpc>
+              <a:spcBef>
+                <a:spcPts val="0"/>
+              </a:spcBef>
+              <a:spcAft>
+                <a:spcPts val="0"/>
+              </a:spcAft>
+              <a:buClr>
+                <a:srgbClr val="000000"/>
+              </a:buClr>
+              <a:buSzPts val="2400"/>
+              <a:buFont typeface="Arial"/>
+              <a:buNone/>
+            </a:pPr>
+            <a:r>
+              <a:rPr b="0" i="0" lang="en" sz="2400" u="none" cap="none" strike="noStrike">
+                <a:solidFill>
+                  <a:schemeClr val="dk1"/>
+                </a:solidFill>
+                <a:latin typeface="Consolas"/>
+                <a:ea typeface="Consolas"/>
+                <a:cs typeface="Consolas"/>
+                <a:sym typeface="Consolas"/>
+              </a:rPr>
+              <a:t>X⍵</a:t>
+            </a:r>
+            <a:r>
+              <a:rPr b="0" baseline="30000" i="0" lang="en" sz="2400" u="none" cap="none" strike="noStrike">
+                <a:solidFill>
+                  <a:schemeClr val="dk1"/>
+                </a:solidFill>
+                <a:latin typeface="Consolas"/>
+                <a:ea typeface="Consolas"/>
+                <a:cs typeface="Consolas"/>
+                <a:sym typeface="Consolas"/>
+              </a:rPr>
+              <a:t>T</a:t>
+            </a:r>
+            <a:r>
+              <a:rPr b="0" i="0" lang="en" sz="2400" u="none" cap="none" strike="noStrike">
+                <a:solidFill>
+                  <a:schemeClr val="dk1"/>
+                </a:solidFill>
+                <a:latin typeface="Consolas"/>
+                <a:ea typeface="Consolas"/>
+                <a:cs typeface="Consolas"/>
+                <a:sym typeface="Consolas"/>
+              </a:rPr>
+              <a:t> + b)</a:t>
+            </a:r>
+            <a:endParaRPr b="0" i="0" sz="2400" u="none" cap="none" strike="noStrike">
+              <a:solidFill>
+                <a:schemeClr val="dk1"/>
+              </a:solidFill>
+              <a:latin typeface="Consolas"/>
+              <a:ea typeface="Consolas"/>
+              <a:cs typeface="Consolas"/>
+              <a:sym typeface="Consolas"/>
+            </a:endParaRPr>
+          </a:p>
+        </p:txBody>
+      </p:sp>
+      <p:sp>
+        <p:nvSpPr>
+          <p:cNvPr id="80" name="Google Shape;80;g3bd1f6d9d27_0_3"/>
+          <p:cNvSpPr txBox="1"/>
+          <p:nvPr/>
+        </p:nvSpPr>
+        <p:spPr>
+          <a:xfrm>
+            <a:off x="1475365" y="5362838"/>
+            <a:ext cx="2694300" cy="360600"/>
+          </a:xfrm>
+          <a:prstGeom prst="rect">
+            <a:avLst/>
+          </a:prstGeom>
+          <a:noFill/>
+          <a:ln>
+            <a:noFill/>
+          </a:ln>
+        </p:spPr>
+        <p:txBody>
+          <a:bodyPr anchorCtr="0" anchor="ctr" bIns="91425" lIns="91425" spcFirstLastPara="1" rIns="91425" wrap="square" tIns="91425">
+            <a:noAutofit/>
+          </a:bodyPr>
+          <a:lstStyle/>
+          <a:p>
+            <a:pPr indent="0" lvl="0" marL="0" marR="0" rtl="0" algn="ctr">
+              <a:lnSpc>
+                <a:spcPct val="100000"/>
+              </a:lnSpc>
+              <a:spcBef>
+                <a:spcPts val="0"/>
+              </a:spcBef>
+              <a:spcAft>
+                <a:spcPts val="0"/>
+              </a:spcAft>
+              <a:buClr>
+                <a:srgbClr val="000000"/>
+              </a:buClr>
+              <a:buSzPts val="2400"/>
+              <a:buFont typeface="Arial"/>
+              <a:buNone/>
+            </a:pPr>
+            <a:r>
+              <a:rPr b="0" i="0" lang="en" sz="2400" u="none" cap="none" strike="noStrike">
+                <a:solidFill>
+                  <a:schemeClr val="dk1"/>
+                </a:solidFill>
+                <a:latin typeface="Consolas"/>
+                <a:ea typeface="Consolas"/>
+                <a:cs typeface="Consolas"/>
+                <a:sym typeface="Consolas"/>
+              </a:rPr>
+              <a:t>y = &lt;1, 10&gt;</a:t>
+            </a:r>
+            <a:endParaRPr b="0" i="0" sz="2400" u="none" cap="none" strike="noStrike">
+              <a:solidFill>
+                <a:schemeClr val="dk1"/>
+              </a:solidFill>
+              <a:latin typeface="Consolas"/>
+              <a:ea typeface="Consolas"/>
+              <a:cs typeface="Consolas"/>
+              <a:sym typeface="Consolas"/>
+            </a:endParaRPr>
+          </a:p>
+        </p:txBody>
+      </p:sp>
+      <p:sp>
+        <p:nvSpPr>
+          <p:cNvPr id="81" name="Google Shape;81;g3bd1f6d9d27_0_3"/>
+          <p:cNvSpPr/>
+          <p:nvPr/>
+        </p:nvSpPr>
+        <p:spPr>
+          <a:xfrm>
+            <a:off x="1851675" y="5415150"/>
+            <a:ext cx="252000" cy="385800"/>
+          </a:xfrm>
+          <a:prstGeom prst="rect">
+            <a:avLst/>
+          </a:prstGeom>
+          <a:noFill/>
+          <a:ln cap="flat" cmpd="sng" w="28575">
+            <a:solidFill>
+              <a:srgbClr val="A31515"/>
+            </a:solidFill>
+            <a:prstDash val="solid"/>
+            <a:round/>
+            <a:headEnd len="sm" w="sm" type="none"/>
+            <a:tailEnd len="sm" w="sm" type="none"/>
+          </a:ln>
+        </p:spPr>
+        <p:txBody>
+          <a:bodyPr anchorCtr="0" anchor="ctr" bIns="91425" lIns="91425" spcFirstLastPara="1" rIns="91425" wrap="square" tIns="91425">
+            <a:noAutofit/>
+          </a:bodyPr>
+          <a:lstStyle/>
+          <a:p>
+            <a:pPr indent="0" lvl="0" marL="0" marR="0" rtl="0" algn="ctr">
+              <a:lnSpc>
+                <a:spcPct val="100000"/>
+              </a:lnSpc>
+              <a:spcBef>
+                <a:spcPts val="0"/>
+              </a:spcBef>
+              <a:spcAft>
+                <a:spcPts val="0"/>
+              </a:spcAft>
+              <a:buClr>
+                <a:srgbClr val="000000"/>
+              </a:buClr>
+              <a:buSzPts val="1400"/>
+              <a:buFont typeface="Arial"/>
+              <a:buNone/>
+            </a:pPr>
+            <a:r>
+              <a:t/>
+            </a:r>
+            <a:endParaRPr b="0" i="0" sz="1400" u="none" cap="none" strike="noStrike">
+              <a:solidFill>
+                <a:srgbClr val="000000"/>
+              </a:solidFill>
+              <a:latin typeface="Arial"/>
+              <a:ea typeface="Arial"/>
+              <a:cs typeface="Arial"/>
+              <a:sym typeface="Arial"/>
+            </a:endParaRPr>
+          </a:p>
+        </p:txBody>
+      </p:sp>
+      <p:sp>
+        <p:nvSpPr>
+          <p:cNvPr id="82" name="Google Shape;82;g3bd1f6d9d27_0_3"/>
+          <p:cNvSpPr/>
+          <p:nvPr/>
+        </p:nvSpPr>
+        <p:spPr>
+          <a:xfrm>
+            <a:off x="2942625" y="4603500"/>
+            <a:ext cx="252000" cy="385800"/>
+          </a:xfrm>
+          <a:prstGeom prst="rect">
+            <a:avLst/>
+          </a:prstGeom>
+          <a:noFill/>
+          <a:ln cap="flat" cmpd="sng" w="28575">
+            <a:solidFill>
+              <a:srgbClr val="A31515"/>
+            </a:solidFill>
+            <a:prstDash val="solid"/>
+            <a:round/>
+            <a:headEnd len="sm" w="sm" type="none"/>
+            <a:tailEnd len="sm" w="sm" type="none"/>
+          </a:ln>
+        </p:spPr>
+        <p:txBody>
+          <a:bodyPr anchorCtr="0" anchor="ctr" bIns="91425" lIns="91425" spcFirstLastPara="1" rIns="91425" wrap="square" tIns="91425">
+            <a:noAutofit/>
+          </a:bodyPr>
+          <a:lstStyle/>
+          <a:p>
+            <a:pPr indent="0" lvl="0" marL="0" marR="0" rtl="0" algn="ctr">
+              <a:lnSpc>
+                <a:spcPct val="100000"/>
+              </a:lnSpc>
+              <a:spcBef>
+                <a:spcPts val="0"/>
+              </a:spcBef>
+              <a:spcAft>
+                <a:spcPts val="0"/>
+              </a:spcAft>
+              <a:buClr>
+                <a:srgbClr val="000000"/>
+              </a:buClr>
+              <a:buSzPts val="1400"/>
+              <a:buFont typeface="Arial"/>
+              <a:buNone/>
+            </a:pPr>
+            <a:r>
+              <a:t/>
+            </a:r>
+            <a:endParaRPr b="0" i="0" sz="1400" u="none" cap="none" strike="noStrike">
+              <a:solidFill>
+                <a:srgbClr val="000000"/>
+              </a:solidFill>
+              <a:latin typeface="Arial"/>
+              <a:ea typeface="Arial"/>
+              <a:cs typeface="Arial"/>
+              <a:sym typeface="Arial"/>
+            </a:endParaRPr>
+          </a:p>
+        </p:txBody>
+      </p:sp>
+      <p:cxnSp>
+        <p:nvCxnSpPr>
+          <p:cNvPr id="83" name="Google Shape;83;g3bd1f6d9d27_0_3"/>
+          <p:cNvCxnSpPr>
+            <a:stCxn id="81" idx="0"/>
+            <a:endCxn id="82" idx="2"/>
           </p:cNvCxnSpPr>
           <p:nvPr/>
         </p:nvCxnSpPr>
@@ -13173,7 +13727,7 @@
       </p:cxnSp>
       <p:sp>
         <p:nvSpPr>
-          <p:cNvPr id="78" name="Google Shape;78;g3bd1f6d9d27_0_3"/>
+          <p:cNvPr id="84" name="Google Shape;84;g3bd1f6d9d27_0_3"/>
           <p:cNvSpPr txBox="1"/>
           <p:nvPr/>
         </p:nvSpPr>
@@ -13239,338 +13793,22 @@
       </p:sp>
       <p:sp>
         <p:nvSpPr>
-          <p:cNvPr id="79" name="Google Shape;79;g3bd1f6d9d27_0_3"/>
-          <p:cNvSpPr/>
-          <p:nvPr/>
-        </p:nvSpPr>
-        <p:spPr>
-          <a:xfrm rot="5400000">
-            <a:off x="2693150" y="4817950"/>
-            <a:ext cx="233700" cy="2612400"/>
-          </a:xfrm>
-          <a:prstGeom prst="bracePair">
-            <a:avLst/>
-          </a:prstGeom>
-          <a:noFill/>
-          <a:ln cap="flat" cmpd="sng" w="9525">
-            <a:solidFill>
-              <a:srgbClr val="9BA4FF"/>
-            </a:solidFill>
-            <a:prstDash val="solid"/>
-            <a:round/>
-            <a:headEnd len="sm" w="sm" type="none"/>
-            <a:tailEnd len="sm" w="sm" type="none"/>
-          </a:ln>
-        </p:spPr>
-        <p:txBody>
-          <a:bodyPr anchorCtr="0" anchor="ctr" bIns="91425" lIns="91425" spcFirstLastPara="1" rIns="91425" wrap="square" tIns="91425">
-            <a:noAutofit/>
-          </a:bodyPr>
-          <a:lstStyle/>
-          <a:p>
-            <a:pPr indent="0" lvl="0" marL="0" marR="0" rtl="0" algn="ctr">
-              <a:lnSpc>
-                <a:spcPct val="100000"/>
-              </a:lnSpc>
-              <a:spcBef>
-                <a:spcPts val="0"/>
-              </a:spcBef>
-              <a:spcAft>
-                <a:spcPts val="0"/>
-              </a:spcAft>
-              <a:buClr>
-                <a:srgbClr val="000000"/>
-              </a:buClr>
-              <a:buSzPts val="1400"/>
-              <a:buFont typeface="Arial"/>
-              <a:buNone/>
-            </a:pPr>
-            <a:r>
-              <a:t/>
-            </a:r>
-            <a:endParaRPr b="0" i="0" sz="1400" u="none" cap="none" strike="noStrike">
-              <a:solidFill>
-                <a:srgbClr val="000000"/>
-              </a:solidFill>
-              <a:latin typeface="Arial"/>
-              <a:ea typeface="Arial"/>
-              <a:cs typeface="Arial"/>
-              <a:sym typeface="Arial"/>
-            </a:endParaRPr>
-          </a:p>
-        </p:txBody>
-      </p:sp>
-      <p:sp>
-        <p:nvSpPr>
-          <p:cNvPr id="80" name="Google Shape;80;g3bd1f6d9d27_0_3"/>
-          <p:cNvSpPr/>
-          <p:nvPr/>
-        </p:nvSpPr>
-        <p:spPr>
-          <a:xfrm>
-            <a:off x="2453475" y="5384950"/>
-            <a:ext cx="1447200" cy="360600"/>
-          </a:xfrm>
-          <a:prstGeom prst="rect">
-            <a:avLst/>
-          </a:prstGeom>
-          <a:noFill/>
-          <a:ln cap="flat" cmpd="sng" w="28575">
-            <a:solidFill>
-              <a:srgbClr val="9BA4FF"/>
-            </a:solidFill>
-            <a:prstDash val="solid"/>
-            <a:round/>
-            <a:headEnd len="sm" w="sm" type="none"/>
-            <a:tailEnd len="sm" w="sm" type="none"/>
-          </a:ln>
-        </p:spPr>
-        <p:txBody>
-          <a:bodyPr anchorCtr="0" anchor="ctr" bIns="91425" lIns="91425" spcFirstLastPara="1" rIns="91425" wrap="square" tIns="91425">
-            <a:noAutofit/>
-          </a:bodyPr>
-          <a:lstStyle/>
-          <a:p>
-            <a:pPr indent="0" lvl="0" marL="0" marR="0" rtl="0" algn="ctr">
-              <a:lnSpc>
-                <a:spcPct val="100000"/>
-              </a:lnSpc>
-              <a:spcBef>
-                <a:spcPts val="0"/>
-              </a:spcBef>
-              <a:spcAft>
-                <a:spcPts val="0"/>
-              </a:spcAft>
-              <a:buClr>
-                <a:srgbClr val="000000"/>
-              </a:buClr>
-              <a:buSzPts val="1400"/>
-              <a:buFont typeface="Arial"/>
-              <a:buNone/>
-            </a:pPr>
-            <a:r>
-              <a:t/>
-            </a:r>
-            <a:endParaRPr b="0" i="0" sz="1400" u="none" cap="none" strike="noStrike">
-              <a:solidFill>
-                <a:srgbClr val="000000"/>
-              </a:solidFill>
-              <a:latin typeface="Arial"/>
-              <a:ea typeface="Arial"/>
-              <a:cs typeface="Arial"/>
-              <a:sym typeface="Arial"/>
-            </a:endParaRPr>
-          </a:p>
-        </p:txBody>
-      </p:sp>
-      <p:cxnSp>
-        <p:nvCxnSpPr>
-          <p:cNvPr id="81" name="Google Shape;81;g3bd1f6d9d27_0_3"/>
-          <p:cNvCxnSpPr>
-            <a:stCxn id="79" idx="1"/>
-            <a:endCxn id="80" idx="2"/>
-          </p:cNvCxnSpPr>
-          <p:nvPr/>
-        </p:nvCxnSpPr>
-        <p:spPr>
-          <a:xfrm rot="-5400000">
-            <a:off x="2862650" y="5692750"/>
-            <a:ext cx="261900" cy="367200"/>
-          </a:xfrm>
-          <a:prstGeom prst="curvedConnector3">
-            <a:avLst>
-              <a:gd fmla="val 49971" name="adj1"/>
-            </a:avLst>
-          </a:prstGeom>
-          <a:noFill/>
-          <a:ln cap="flat" cmpd="sng" w="9525">
-            <a:solidFill>
-              <a:srgbClr val="9BA4FF"/>
-            </a:solidFill>
-            <a:prstDash val="solid"/>
-            <a:round/>
-            <a:headEnd len="sm" w="sm" type="none"/>
-            <a:tailEnd len="med" w="med" type="triangle"/>
-          </a:ln>
-        </p:spPr>
-      </p:cxnSp>
-      <p:sp>
-        <p:nvSpPr>
-          <p:cNvPr id="82" name="Google Shape;82;g3bd1f6d9d27_0_3"/>
-          <p:cNvSpPr txBox="1"/>
-          <p:nvPr/>
-        </p:nvSpPr>
-        <p:spPr>
-          <a:xfrm>
-            <a:off x="1611799" y="3848375"/>
-            <a:ext cx="2430300" cy="233700"/>
-          </a:xfrm>
-          <a:prstGeom prst="rect">
-            <a:avLst/>
-          </a:prstGeom>
-          <a:noFill/>
-          <a:ln>
-            <a:noFill/>
-          </a:ln>
-        </p:spPr>
-        <p:txBody>
-          <a:bodyPr anchorCtr="0" anchor="t" bIns="91425" lIns="91425" spcFirstLastPara="1" rIns="91425" wrap="square" tIns="91425">
-            <a:noAutofit/>
-          </a:bodyPr>
-          <a:lstStyle/>
-          <a:p>
-            <a:pPr indent="0" lvl="0" marL="0" marR="0" rtl="0" algn="l">
-              <a:lnSpc>
-                <a:spcPct val="100000"/>
-              </a:lnSpc>
-              <a:spcBef>
-                <a:spcPts val="0"/>
-              </a:spcBef>
-              <a:spcAft>
-                <a:spcPts val="0"/>
-              </a:spcAft>
-              <a:buClr>
-                <a:srgbClr val="000000"/>
-              </a:buClr>
-              <a:buSzPts val="600"/>
-              <a:buFont typeface="Arial"/>
-              <a:buNone/>
-            </a:pPr>
-            <a:r>
-              <a:rPr b="0" i="0" lang="en" sz="600" u="none" cap="none" strike="noStrike">
-                <a:solidFill>
-                  <a:schemeClr val="dk1"/>
-                </a:solidFill>
-                <a:latin typeface="Arial"/>
-                <a:ea typeface="Arial"/>
-                <a:cs typeface="Arial"/>
-                <a:sym typeface="Arial"/>
-              </a:rPr>
-              <a:t>&lt;1, 10&gt;         =       &lt;1, 784&gt;     ᐧ    &lt;784, 10&gt;            +        &lt;1, 10&gt;</a:t>
-            </a:r>
-            <a:endParaRPr b="0" i="0" sz="600" u="none" cap="none" strike="noStrike">
-              <a:solidFill>
-                <a:schemeClr val="dk1"/>
-              </a:solidFill>
-              <a:latin typeface="Arial"/>
-              <a:ea typeface="Arial"/>
-              <a:cs typeface="Arial"/>
-              <a:sym typeface="Arial"/>
-            </a:endParaRPr>
-          </a:p>
-        </p:txBody>
-      </p:sp>
-      <p:pic>
-        <p:nvPicPr>
-          <p:cNvPr id="83" name="Google Shape;83;g3bd1f6d9d27_0_3"/>
-          <p:cNvPicPr preferRelativeResize="0"/>
-          <p:nvPr/>
-        </p:nvPicPr>
-        <p:blipFill rotWithShape="1">
-          <a:blip r:embed="rId3">
-            <a:alphaModFix/>
-          </a:blip>
-          <a:srcRect b="0" l="0" r="0" t="0"/>
-          <a:stretch/>
-        </p:blipFill>
-        <p:spPr>
-          <a:xfrm>
-            <a:off x="324408" y="6386450"/>
-            <a:ext cx="406973" cy="405301"/>
-          </a:xfrm>
-          <a:prstGeom prst="rect">
-            <a:avLst/>
-          </a:prstGeom>
-          <a:noFill/>
-          <a:ln>
-            <a:noFill/>
-          </a:ln>
-        </p:spPr>
-      </p:pic>
-      <p:sp>
-        <p:nvSpPr>
-          <p:cNvPr id="84" name="Google Shape;84;g3bd1f6d9d27_0_3"/>
-          <p:cNvSpPr txBox="1"/>
-          <p:nvPr/>
-        </p:nvSpPr>
-        <p:spPr>
-          <a:xfrm>
-            <a:off x="703275" y="6263350"/>
-            <a:ext cx="1133400" cy="506700"/>
-          </a:xfrm>
-          <a:prstGeom prst="rect">
-            <a:avLst/>
-          </a:prstGeom>
-          <a:noFill/>
-          <a:ln>
-            <a:noFill/>
-          </a:ln>
-        </p:spPr>
-        <p:txBody>
-          <a:bodyPr anchorCtr="0" anchor="t" bIns="91425" lIns="91425" spcFirstLastPara="1" rIns="91425" wrap="square" tIns="91425">
-            <a:noAutofit/>
-          </a:bodyPr>
-          <a:lstStyle/>
-          <a:p>
-            <a:pPr indent="0" lvl="0" marL="0" marR="0" rtl="0" algn="l">
-              <a:lnSpc>
-                <a:spcPct val="100000"/>
-              </a:lnSpc>
-              <a:spcBef>
-                <a:spcPts val="0"/>
-              </a:spcBef>
-              <a:spcAft>
-                <a:spcPts val="0"/>
-              </a:spcAft>
-              <a:buClr>
-                <a:srgbClr val="000000"/>
-              </a:buClr>
-              <a:buSzPts val="3000"/>
-              <a:buFont typeface="Arial"/>
-              <a:buNone/>
-            </a:pPr>
-            <a:r>
-              <a:rPr b="0" i="0" lang="en" sz="3000" u="none" cap="none" strike="noStrike">
-                <a:solidFill>
-                  <a:schemeClr val="dk1"/>
-                </a:solidFill>
-                <a:latin typeface="Arial"/>
-                <a:ea typeface="Arial"/>
-                <a:cs typeface="Arial"/>
-                <a:sym typeface="Arial"/>
-              </a:rPr>
-              <a:t>= 5</a:t>
-            </a:r>
-            <a:endParaRPr b="0" i="0" sz="3000" u="none" cap="none" strike="noStrike">
-              <a:solidFill>
-                <a:schemeClr val="dk1"/>
-              </a:solidFill>
-              <a:latin typeface="Arial"/>
-              <a:ea typeface="Arial"/>
-              <a:cs typeface="Arial"/>
-              <a:sym typeface="Arial"/>
-            </a:endParaRPr>
-          </a:p>
-        </p:txBody>
-      </p:sp>
-      <p:sp>
-        <p:nvSpPr>
           <p:cNvPr id="85" name="Google Shape;85;g3bd1f6d9d27_0_3"/>
           <p:cNvSpPr/>
           <p:nvPr/>
         </p:nvSpPr>
         <p:spPr>
-          <a:xfrm>
-            <a:off x="299300" y="6323800"/>
-            <a:ext cx="1059000" cy="506700"/>
-          </a:xfrm>
-          <a:prstGeom prst="rect">
+          <a:xfrm rot="5400000">
+            <a:off x="2693150" y="4817950"/>
+            <a:ext cx="233700" cy="2612400"/>
+          </a:xfrm>
+          <a:prstGeom prst="bracePair">
             <a:avLst/>
           </a:prstGeom>
           <a:noFill/>
-          <a:ln cap="flat" cmpd="sng" w="28575">
+          <a:ln cap="flat" cmpd="sng" w="9525">
             <a:solidFill>
-              <a:srgbClr val="A31515"/>
+              <a:srgbClr val="9BA4FF"/>
             </a:solidFill>
             <a:prstDash val="solid"/>
             <a:round/>
@@ -13619,6 +13857,322 @@
       <p:sp>
         <p:nvSpPr>
           <p:cNvPr id="86" name="Google Shape;86;g3bd1f6d9d27_0_3"/>
+          <p:cNvSpPr/>
+          <p:nvPr/>
+        </p:nvSpPr>
+        <p:spPr>
+          <a:xfrm>
+            <a:off x="2453475" y="5384950"/>
+            <a:ext cx="1447200" cy="360600"/>
+          </a:xfrm>
+          <a:prstGeom prst="rect">
+            <a:avLst/>
+          </a:prstGeom>
+          <a:noFill/>
+          <a:ln cap="flat" cmpd="sng" w="28575">
+            <a:solidFill>
+              <a:srgbClr val="9BA4FF"/>
+            </a:solidFill>
+            <a:prstDash val="solid"/>
+            <a:round/>
+            <a:headEnd len="sm" w="sm" type="none"/>
+            <a:tailEnd len="sm" w="sm" type="none"/>
+          </a:ln>
+        </p:spPr>
+        <p:txBody>
+          <a:bodyPr anchorCtr="0" anchor="ctr" bIns="91425" lIns="91425" spcFirstLastPara="1" rIns="91425" wrap="square" tIns="91425">
+            <a:noAutofit/>
+          </a:bodyPr>
+          <a:lstStyle/>
+          <a:p>
+            <a:pPr indent="0" lvl="0" marL="0" marR="0" rtl="0" algn="ctr">
+              <a:lnSpc>
+                <a:spcPct val="100000"/>
+              </a:lnSpc>
+              <a:spcBef>
+                <a:spcPts val="0"/>
+              </a:spcBef>
+              <a:spcAft>
+                <a:spcPts val="0"/>
+              </a:spcAft>
+              <a:buClr>
+                <a:srgbClr val="000000"/>
+              </a:buClr>
+              <a:buSzPts val="1400"/>
+              <a:buFont typeface="Arial"/>
+              <a:buNone/>
+            </a:pPr>
+            <a:r>
+              <a:t/>
+            </a:r>
+            <a:endParaRPr b="0" i="0" sz="1400" u="none" cap="none" strike="noStrike">
+              <a:solidFill>
+                <a:srgbClr val="000000"/>
+              </a:solidFill>
+              <a:latin typeface="Arial"/>
+              <a:ea typeface="Arial"/>
+              <a:cs typeface="Arial"/>
+              <a:sym typeface="Arial"/>
+            </a:endParaRPr>
+          </a:p>
+        </p:txBody>
+      </p:sp>
+      <p:cxnSp>
+        <p:nvCxnSpPr>
+          <p:cNvPr id="87" name="Google Shape;87;g3bd1f6d9d27_0_3"/>
+          <p:cNvCxnSpPr>
+            <a:stCxn id="85" idx="1"/>
+            <a:endCxn id="86" idx="2"/>
+          </p:cNvCxnSpPr>
+          <p:nvPr/>
+        </p:nvCxnSpPr>
+        <p:spPr>
+          <a:xfrm rot="-5400000">
+            <a:off x="2862650" y="5692750"/>
+            <a:ext cx="261900" cy="367200"/>
+          </a:xfrm>
+          <a:prstGeom prst="curvedConnector3">
+            <a:avLst>
+              <a:gd fmla="val 49971" name="adj1"/>
+            </a:avLst>
+          </a:prstGeom>
+          <a:noFill/>
+          <a:ln cap="flat" cmpd="sng" w="9525">
+            <a:solidFill>
+              <a:srgbClr val="9BA4FF"/>
+            </a:solidFill>
+            <a:prstDash val="solid"/>
+            <a:round/>
+            <a:headEnd len="sm" w="sm" type="none"/>
+            <a:tailEnd len="med" w="med" type="triangle"/>
+          </a:ln>
+        </p:spPr>
+      </p:cxnSp>
+      <p:sp>
+        <p:nvSpPr>
+          <p:cNvPr id="88" name="Google Shape;88;g3bd1f6d9d27_0_3"/>
+          <p:cNvSpPr txBox="1"/>
+          <p:nvPr/>
+        </p:nvSpPr>
+        <p:spPr>
+          <a:xfrm>
+            <a:off x="1611799" y="3848375"/>
+            <a:ext cx="2430300" cy="233700"/>
+          </a:xfrm>
+          <a:prstGeom prst="rect">
+            <a:avLst/>
+          </a:prstGeom>
+          <a:noFill/>
+          <a:ln>
+            <a:noFill/>
+          </a:ln>
+        </p:spPr>
+        <p:txBody>
+          <a:bodyPr anchorCtr="0" anchor="t" bIns="91425" lIns="91425" spcFirstLastPara="1" rIns="91425" wrap="square" tIns="91425">
+            <a:noAutofit/>
+          </a:bodyPr>
+          <a:lstStyle/>
+          <a:p>
+            <a:pPr indent="0" lvl="0" marL="0" marR="0" rtl="0" algn="l">
+              <a:lnSpc>
+                <a:spcPct val="100000"/>
+              </a:lnSpc>
+              <a:spcBef>
+                <a:spcPts val="0"/>
+              </a:spcBef>
+              <a:spcAft>
+                <a:spcPts val="0"/>
+              </a:spcAft>
+              <a:buClr>
+                <a:srgbClr val="000000"/>
+              </a:buClr>
+              <a:buSzPts val="600"/>
+              <a:buFont typeface="Arial"/>
+              <a:buNone/>
+            </a:pPr>
+            <a:r>
+              <a:rPr b="0" i="0" lang="en" sz="600" u="none" cap="none" strike="noStrike">
+                <a:solidFill>
+                  <a:schemeClr val="dk1"/>
+                </a:solidFill>
+                <a:latin typeface="Arial"/>
+                <a:ea typeface="Arial"/>
+                <a:cs typeface="Arial"/>
+                <a:sym typeface="Arial"/>
+              </a:rPr>
+              <a:t>&lt;1, 10&gt;         =       &lt;1, 784&gt;     ᐧ    &lt;784, 10&gt;            +        &lt;1, 10&gt;</a:t>
+            </a:r>
+            <a:endParaRPr b="0" i="0" sz="600" u="none" cap="none" strike="noStrike">
+              <a:solidFill>
+                <a:schemeClr val="dk1"/>
+              </a:solidFill>
+              <a:latin typeface="Arial"/>
+              <a:ea typeface="Arial"/>
+              <a:cs typeface="Arial"/>
+              <a:sym typeface="Arial"/>
+            </a:endParaRPr>
+          </a:p>
+        </p:txBody>
+      </p:sp>
+      <p:pic>
+        <p:nvPicPr>
+          <p:cNvPr id="89" name="Google Shape;89;g3bd1f6d9d27_0_3"/>
+          <p:cNvPicPr preferRelativeResize="0"/>
+          <p:nvPr/>
+        </p:nvPicPr>
+        <p:blipFill rotWithShape="1">
+          <a:blip r:embed="rId3">
+            <a:alphaModFix/>
+          </a:blip>
+          <a:srcRect b="0" l="0" r="0" t="0"/>
+          <a:stretch/>
+        </p:blipFill>
+        <p:spPr>
+          <a:xfrm>
+            <a:off x="324408" y="6386450"/>
+            <a:ext cx="406973" cy="405301"/>
+          </a:xfrm>
+          <a:prstGeom prst="rect">
+            <a:avLst/>
+          </a:prstGeom>
+          <a:noFill/>
+          <a:ln>
+            <a:noFill/>
+          </a:ln>
+        </p:spPr>
+      </p:pic>
+      <p:sp>
+        <p:nvSpPr>
+          <p:cNvPr id="90" name="Google Shape;90;g3bd1f6d9d27_0_3"/>
+          <p:cNvSpPr txBox="1"/>
+          <p:nvPr/>
+        </p:nvSpPr>
+        <p:spPr>
+          <a:xfrm>
+            <a:off x="703275" y="6263350"/>
+            <a:ext cx="1133400" cy="506700"/>
+          </a:xfrm>
+          <a:prstGeom prst="rect">
+            <a:avLst/>
+          </a:prstGeom>
+          <a:noFill/>
+          <a:ln>
+            <a:noFill/>
+          </a:ln>
+        </p:spPr>
+        <p:txBody>
+          <a:bodyPr anchorCtr="0" anchor="t" bIns="91425" lIns="91425" spcFirstLastPara="1" rIns="91425" wrap="square" tIns="91425">
+            <a:noAutofit/>
+          </a:bodyPr>
+          <a:lstStyle/>
+          <a:p>
+            <a:pPr indent="0" lvl="0" marL="0" marR="0" rtl="0" algn="l">
+              <a:lnSpc>
+                <a:spcPct val="100000"/>
+              </a:lnSpc>
+              <a:spcBef>
+                <a:spcPts val="0"/>
+              </a:spcBef>
+              <a:spcAft>
+                <a:spcPts val="0"/>
+              </a:spcAft>
+              <a:buClr>
+                <a:srgbClr val="000000"/>
+              </a:buClr>
+              <a:buSzPts val="3000"/>
+              <a:buFont typeface="Arial"/>
+              <a:buNone/>
+            </a:pPr>
+            <a:r>
+              <a:rPr b="0" i="0" lang="en" sz="3000" u="none" cap="none" strike="noStrike">
+                <a:solidFill>
+                  <a:schemeClr val="dk1"/>
+                </a:solidFill>
+                <a:latin typeface="Arial"/>
+                <a:ea typeface="Arial"/>
+                <a:cs typeface="Arial"/>
+                <a:sym typeface="Arial"/>
+              </a:rPr>
+              <a:t>= 5</a:t>
+            </a:r>
+            <a:endParaRPr b="0" i="0" sz="3000" u="none" cap="none" strike="noStrike">
+              <a:solidFill>
+                <a:schemeClr val="dk1"/>
+              </a:solidFill>
+              <a:latin typeface="Arial"/>
+              <a:ea typeface="Arial"/>
+              <a:cs typeface="Arial"/>
+              <a:sym typeface="Arial"/>
+            </a:endParaRPr>
+          </a:p>
+        </p:txBody>
+      </p:sp>
+      <p:sp>
+        <p:nvSpPr>
+          <p:cNvPr id="91" name="Google Shape;91;g3bd1f6d9d27_0_3"/>
+          <p:cNvSpPr/>
+          <p:nvPr/>
+        </p:nvSpPr>
+        <p:spPr>
+          <a:xfrm>
+            <a:off x="299300" y="6323800"/>
+            <a:ext cx="1059000" cy="506700"/>
+          </a:xfrm>
+          <a:prstGeom prst="rect">
+            <a:avLst/>
+          </a:prstGeom>
+          <a:noFill/>
+          <a:ln cap="flat" cmpd="sng" w="28575">
+            <a:solidFill>
+              <a:srgbClr val="A31515"/>
+            </a:solidFill>
+            <a:prstDash val="solid"/>
+            <a:round/>
+            <a:headEnd len="sm" w="sm" type="none"/>
+            <a:tailEnd len="sm" w="sm" type="none"/>
+          </a:ln>
+        </p:spPr>
+        <p:txBody>
+          <a:bodyPr anchorCtr="0" anchor="ctr" bIns="91425" lIns="91425" spcFirstLastPara="1" rIns="91425" wrap="square" tIns="91425">
+            <a:noAutofit/>
+          </a:bodyPr>
+          <a:lstStyle/>
+          <a:p>
+            <a:pPr indent="0" lvl="0" marL="0" marR="0" rtl="0" algn="ctr">
+              <a:lnSpc>
+                <a:spcPct val="100000"/>
+              </a:lnSpc>
+              <a:spcBef>
+                <a:spcPts val="0"/>
+              </a:spcBef>
+              <a:spcAft>
+                <a:spcPts val="0"/>
+              </a:spcAft>
+              <a:buClr>
+                <a:srgbClr val="000000"/>
+              </a:buClr>
+              <a:buSzPts val="1400"/>
+              <a:buFont typeface="Arial"/>
+              <a:buNone/>
+            </a:pPr>
+            <a:r>
+              <a:t/>
+            </a:r>
+            <a:endParaRPr b="0" i="0" sz="1400" u="none" cap="none" strike="noStrike">
+              <a:solidFill>
+                <a:srgbClr val="000000"/>
+              </a:solidFill>
+              <a:latin typeface="Arial"/>
+              <a:ea typeface="Arial"/>
+              <a:cs typeface="Arial"/>
+              <a:sym typeface="Arial"/>
+            </a:endParaRPr>
+          </a:p>
+        </p:txBody>
+      </p:sp>
+      <p:sp>
+        <p:nvSpPr>
+          <p:cNvPr id="92" name="Google Shape;92;g3bd1f6d9d27_0_3"/>
           <p:cNvSpPr txBox="1"/>
           <p:nvPr/>
         </p:nvSpPr>
@@ -13684,7 +14238,7 @@
       </p:sp>
       <p:sp>
         <p:nvSpPr>
-          <p:cNvPr id="87" name="Google Shape;87;g3bd1f6d9d27_0_3"/>
+          <p:cNvPr id="93" name="Google Shape;93;g3bd1f6d9d27_0_3"/>
           <p:cNvSpPr/>
           <p:nvPr/>
         </p:nvSpPr>
@@ -13747,10 +14301,10 @@
       </p:sp>
       <p:cxnSp>
         <p:nvCxnSpPr>
-          <p:cNvPr id="88" name="Google Shape;88;g3bd1f6d9d27_0_3"/>
+          <p:cNvPr id="94" name="Google Shape;94;g3bd1f6d9d27_0_3"/>
           <p:cNvCxnSpPr>
-            <a:stCxn id="85" idx="3"/>
-            <a:endCxn id="87" idx="2"/>
+            <a:stCxn id="91" idx="3"/>
+            <a:endCxn id="93" idx="2"/>
           </p:cNvCxnSpPr>
           <p:nvPr/>
         </p:nvCxnSpPr>
@@ -13782,12 +14336,12 @@
 </p:sld>
 </file>
 
-<file path=ppt/slides/slide4.xml><?xml version="1.0" encoding="utf-8"?>
+<file path=ppt/slides/slide5.xml><?xml version="1.0" encoding="utf-8"?>
 <p:sld xmlns:a="http://schemas.openxmlformats.org/drawingml/2006/main" xmlns:r="http://schemas.openxmlformats.org/officeDocument/2006/relationships" xmlns:mc="http://schemas.openxmlformats.org/markup-compatibility/2006" xmlns:mv="urn:schemas-microsoft-com:mac:vml" xmlns:p="http://schemas.openxmlformats.org/presentationml/2006/main" xmlns:c="http://schemas.openxmlformats.org/drawingml/2006/chart" xmlns:dgm="http://schemas.openxmlformats.org/drawingml/2006/diagram" xmlns:o="urn:schemas-microsoft-com:office:office" xmlns:v="urn:schemas-microsoft-com:vml" xmlns:pvml="urn:schemas-microsoft-com:office:powerpoint" xmlns:com="http://schemas.openxmlformats.org/drawingml/2006/compatibility" xmlns:p14="http://schemas.microsoft.com/office/powerpoint/2010/main" xmlns:p15="http://schemas.microsoft.com/office/powerpoint/2012/main" xmlns:ahyp="http://schemas.microsoft.com/office/drawing/2018/hyperlinkcolor">
   <p:cSld>
     <p:spTree>
       <p:nvGrpSpPr>
-        <p:cNvPr id="92" name="Shape 92"/>
+        <p:cNvPr id="98" name="Shape 98"/>
         <p:cNvGrpSpPr/>
         <p:nvPr/>
       </p:nvGrpSpPr>
@@ -13801,7 +14355,7 @@
       </p:grpSpPr>
       <p:sp>
         <p:nvSpPr>
-          <p:cNvPr id="93" name="Google Shape;93;g3c70c3f9d8e_0_10"/>
+          <p:cNvPr id="99" name="Google Shape;99;g3c70c3f9d8e_0_10"/>
           <p:cNvSpPr txBox="1"/>
           <p:nvPr>
             <p:ph type="title"/>
@@ -13849,7 +14403,7 @@
       </p:sp>
       <p:sp>
         <p:nvSpPr>
-          <p:cNvPr id="94" name="Google Shape;94;g3c70c3f9d8e_0_10"/>
+          <p:cNvPr id="100" name="Google Shape;100;g3c70c3f9d8e_0_10"/>
           <p:cNvSpPr txBox="1"/>
           <p:nvPr>
             <p:ph idx="1" type="body"/>
@@ -13897,7 +14451,7 @@
       </p:sp>
       <p:pic>
         <p:nvPicPr>
-          <p:cNvPr id="95" name="Google Shape;95;g3c70c3f9d8e_0_10"/>
+          <p:cNvPr id="101" name="Google Shape;101;g3c70c3f9d8e_0_10"/>
           <p:cNvPicPr preferRelativeResize="0"/>
           <p:nvPr/>
         </p:nvPicPr>
@@ -13912,154 +14466,6 @@
           <a:xfrm>
             <a:off x="457203" y="1600203"/>
             <a:ext cx="8229600" cy="3880527"/>
-          </a:xfrm>
-          <a:prstGeom prst="rect">
-            <a:avLst/>
-          </a:prstGeom>
-          <a:noFill/>
-          <a:ln>
-            <a:noFill/>
-          </a:ln>
-        </p:spPr>
-      </p:pic>
-    </p:spTree>
-  </p:cSld>
-  <p:clrMapOvr>
-    <a:masterClrMapping/>
-  </p:clrMapOvr>
-</p:sld>
-</file>
-
-<file path=ppt/slides/slide5.xml><?xml version="1.0" encoding="utf-8"?>
-<p:sld xmlns:a="http://schemas.openxmlformats.org/drawingml/2006/main" xmlns:r="http://schemas.openxmlformats.org/officeDocument/2006/relationships" xmlns:mc="http://schemas.openxmlformats.org/markup-compatibility/2006" xmlns:mv="urn:schemas-microsoft-com:mac:vml" xmlns:p="http://schemas.openxmlformats.org/presentationml/2006/main" xmlns:c="http://schemas.openxmlformats.org/drawingml/2006/chart" xmlns:dgm="http://schemas.openxmlformats.org/drawingml/2006/diagram" xmlns:o="urn:schemas-microsoft-com:office:office" xmlns:v="urn:schemas-microsoft-com:vml" xmlns:pvml="urn:schemas-microsoft-com:office:powerpoint" xmlns:com="http://schemas.openxmlformats.org/drawingml/2006/compatibility" xmlns:p14="http://schemas.microsoft.com/office/powerpoint/2010/main" xmlns:p15="http://schemas.microsoft.com/office/powerpoint/2012/main" xmlns:ahyp="http://schemas.microsoft.com/office/drawing/2018/hyperlinkcolor">
-  <p:cSld>
-    <p:spTree>
-      <p:nvGrpSpPr>
-        <p:cNvPr id="99" name="Shape 99"/>
-        <p:cNvGrpSpPr/>
-        <p:nvPr/>
-      </p:nvGrpSpPr>
-      <p:grpSpPr>
-        <a:xfrm>
-          <a:off x="0" y="0"/>
-          <a:ext cx="0" cy="0"/>
-          <a:chOff x="0" y="0"/>
-          <a:chExt cx="0" cy="0"/>
-        </a:xfrm>
-      </p:grpSpPr>
-      <p:sp>
-        <p:nvSpPr>
-          <p:cNvPr id="100" name="Google Shape;100;g3c70c3f9d8e_0_15"/>
-          <p:cNvSpPr txBox="1"/>
-          <p:nvPr>
-            <p:ph type="title"/>
-          </p:nvPr>
-        </p:nvSpPr>
-        <p:spPr>
-          <a:xfrm>
-            <a:off x="457200" y="274638"/>
-            <a:ext cx="8229600" cy="1143000"/>
-          </a:xfrm>
-          <a:prstGeom prst="rect">
-            <a:avLst/>
-          </a:prstGeom>
-          <a:noFill/>
-          <a:ln>
-            <a:noFill/>
-          </a:ln>
-        </p:spPr>
-        <p:txBody>
-          <a:bodyPr anchorCtr="0" anchor="b" bIns="91425" lIns="91425" spcFirstLastPara="1" rIns="91425" wrap="square" tIns="91425">
-            <a:noAutofit/>
-          </a:bodyPr>
-          <a:lstStyle/>
-          <a:p>
-            <a:pPr indent="0" lvl="0" marL="0" rtl="0" algn="l">
-              <a:lnSpc>
-                <a:spcPct val="100000"/>
-              </a:lnSpc>
-              <a:spcBef>
-                <a:spcPts val="0"/>
-              </a:spcBef>
-              <a:spcAft>
-                <a:spcPts val="0"/>
-              </a:spcAft>
-              <a:buSzPts val="3600"/>
-              <a:buNone/>
-            </a:pPr>
-            <a:r>
-              <a:rPr lang="en"/>
-              <a:t>Activation Functions</a:t>
-            </a:r>
-            <a:endParaRPr/>
-          </a:p>
-        </p:txBody>
-      </p:sp>
-      <p:sp>
-        <p:nvSpPr>
-          <p:cNvPr id="101" name="Google Shape;101;g3c70c3f9d8e_0_15"/>
-          <p:cNvSpPr txBox="1"/>
-          <p:nvPr>
-            <p:ph idx="1" type="body"/>
-          </p:nvPr>
-        </p:nvSpPr>
-        <p:spPr>
-          <a:xfrm>
-            <a:off x="457200" y="1600200"/>
-            <a:ext cx="8229600" cy="4967700"/>
-          </a:xfrm>
-          <a:prstGeom prst="rect">
-            <a:avLst/>
-          </a:prstGeom>
-          <a:noFill/>
-          <a:ln>
-            <a:noFill/>
-          </a:ln>
-        </p:spPr>
-        <p:txBody>
-          <a:bodyPr anchorCtr="0" anchor="t" bIns="91425" lIns="91425" spcFirstLastPara="1" rIns="91425" wrap="square" tIns="91425">
-            <a:noAutofit/>
-          </a:bodyPr>
-          <a:lstStyle/>
-          <a:p>
-            <a:pPr indent="0" lvl="0" marL="0" rtl="0" algn="l">
-              <a:lnSpc>
-                <a:spcPct val="100000"/>
-              </a:lnSpc>
-              <a:spcBef>
-                <a:spcPts val="600"/>
-              </a:spcBef>
-              <a:spcAft>
-                <a:spcPts val="0"/>
-              </a:spcAft>
-              <a:buSzPts val="3000"/>
-              <a:buNone/>
-            </a:pPr>
-            <a:r>
-              <a:rPr lang="en"/>
-              <a:t>We can add non-linearity to our network by wrapping our linear transformations in nonlinear functions called activation functions</a:t>
-            </a:r>
-            <a:endParaRPr/>
-          </a:p>
-        </p:txBody>
-      </p:sp>
-      <p:pic>
-        <p:nvPicPr>
-          <p:cNvPr id="102" name="Google Shape;102;g3c70c3f9d8e_0_15"/>
-          <p:cNvPicPr preferRelativeResize="0"/>
-          <p:nvPr/>
-        </p:nvPicPr>
-        <p:blipFill rotWithShape="1">
-          <a:blip r:embed="rId3">
-            <a:alphaModFix/>
-          </a:blip>
-          <a:srcRect b="0" l="0" r="0" t="14696"/>
-          <a:stretch/>
-        </p:blipFill>
-        <p:spPr>
-          <a:xfrm>
-            <a:off x="598950" y="3251650"/>
-            <a:ext cx="7946100" cy="3406100"/>
           </a:xfrm>
           <a:prstGeom prst="rect">
             <a:avLst/>
@@ -14083,7 +14489,7 @@
   <p:cSld>
     <p:spTree>
       <p:nvGrpSpPr>
-        <p:cNvPr id="106" name="Shape 106"/>
+        <p:cNvPr id="105" name="Shape 105"/>
         <p:cNvGrpSpPr/>
         <p:nvPr/>
       </p:nvGrpSpPr>
@@ -14097,7 +14503,7 @@
       </p:grpSpPr>
       <p:sp>
         <p:nvSpPr>
-          <p:cNvPr id="107" name="Google Shape;107;g3c70c3f9d8e_0_74"/>
+          <p:cNvPr id="106" name="Google Shape;106;g3c70c3f9d8e_0_15"/>
           <p:cNvSpPr txBox="1"/>
           <p:nvPr>
             <p:ph type="title"/>
@@ -14137,7 +14543,55 @@
             </a:pPr>
             <a:r>
               <a:rPr lang="en"/>
-              <a:t>nanochat - MLP</a:t>
+              <a:t>Activation Functions</a:t>
+            </a:r>
+            <a:endParaRPr/>
+          </a:p>
+        </p:txBody>
+      </p:sp>
+      <p:sp>
+        <p:nvSpPr>
+          <p:cNvPr id="107" name="Google Shape;107;g3c70c3f9d8e_0_15"/>
+          <p:cNvSpPr txBox="1"/>
+          <p:nvPr>
+            <p:ph idx="1" type="body"/>
+          </p:nvPr>
+        </p:nvSpPr>
+        <p:spPr>
+          <a:xfrm>
+            <a:off x="457200" y="1600200"/>
+            <a:ext cx="8229600" cy="4967700"/>
+          </a:xfrm>
+          <a:prstGeom prst="rect">
+            <a:avLst/>
+          </a:prstGeom>
+          <a:noFill/>
+          <a:ln>
+            <a:noFill/>
+          </a:ln>
+        </p:spPr>
+        <p:txBody>
+          <a:bodyPr anchorCtr="0" anchor="t" bIns="91425" lIns="91425" spcFirstLastPara="1" rIns="91425" wrap="square" tIns="91425">
+            <a:noAutofit/>
+          </a:bodyPr>
+          <a:lstStyle/>
+          <a:p>
+            <a:pPr indent="0" lvl="0" marL="0" rtl="0" algn="l">
+              <a:lnSpc>
+                <a:spcPct val="100000"/>
+              </a:lnSpc>
+              <a:spcBef>
+                <a:spcPts val="600"/>
+              </a:spcBef>
+              <a:spcAft>
+                <a:spcPts val="0"/>
+              </a:spcAft>
+              <a:buSzPts val="3000"/>
+              <a:buNone/>
+            </a:pPr>
+            <a:r>
+              <a:rPr lang="en"/>
+              <a:t>We can add non-linearity to our network by wrapping our linear transformations in nonlinear functions called activation functions</a:t>
             </a:r>
             <a:endParaRPr/>
           </a:p>
@@ -14145,7 +14599,7 @@
       </p:sp>
       <p:pic>
         <p:nvPicPr>
-          <p:cNvPr id="108" name="Google Shape;108;g3c70c3f9d8e_0_74" title="Screenshot 2026-02-11 at 9.35.26 AM.png"/>
+          <p:cNvPr id="108" name="Google Shape;108;g3c70c3f9d8e_0_15"/>
           <p:cNvPicPr preferRelativeResize="0"/>
           <p:nvPr/>
         </p:nvPicPr>
@@ -14153,13 +14607,13 @@
           <a:blip r:embed="rId3">
             <a:alphaModFix/>
           </a:blip>
-          <a:srcRect b="0" l="0" r="0" t="0"/>
+          <a:srcRect b="0" l="0" r="0" t="14696"/>
           <a:stretch/>
         </p:blipFill>
         <p:spPr>
           <a:xfrm>
-            <a:off x="734075" y="1822724"/>
-            <a:ext cx="7675839" cy="4522650"/>
+            <a:off x="598950" y="3251650"/>
+            <a:ext cx="7946100" cy="3406100"/>
           </a:xfrm>
           <a:prstGeom prst="rect">
             <a:avLst/>
@@ -14197,7 +14651,7 @@
       </p:grpSpPr>
       <p:sp>
         <p:nvSpPr>
-          <p:cNvPr id="113" name="Google Shape;113;g3c70c3f9d8e_0_20"/>
+          <p:cNvPr id="113" name="Google Shape;113;g3c70c3f9d8e_0_74"/>
           <p:cNvSpPr txBox="1"/>
           <p:nvPr>
             <p:ph type="title"/>
@@ -14237,7 +14691,7 @@
             </a:pPr>
             <a:r>
               <a:rPr lang="en"/>
-              <a:t>Convolutional Neural Networks</a:t>
+              <a:t>nanochat - MLP</a:t>
             </a:r>
             <a:endParaRPr/>
           </a:p>
@@ -14245,22 +14699,21 @@
       </p:sp>
       <p:pic>
         <p:nvPicPr>
-          <p:cNvPr id="114" name="Google Shape;114;g3c70c3f9d8e_0_20"/>
+          <p:cNvPr id="114" name="Google Shape;114;g3c70c3f9d8e_0_74" title="Screenshot 2026-02-11 at 9.35.26 AM.png"/>
           <p:cNvPicPr preferRelativeResize="0"/>
           <p:nvPr/>
         </p:nvPicPr>
-        <p:blipFill>
+        <p:blipFill rotWithShape="1">
           <a:blip r:embed="rId3">
             <a:alphaModFix/>
           </a:blip>
-          <a:stretch>
-            <a:fillRect/>
-          </a:stretch>
+          <a:srcRect b="0" l="0" r="0" t="0"/>
+          <a:stretch/>
         </p:blipFill>
         <p:spPr>
           <a:xfrm>
-            <a:off x="152400" y="1417638"/>
-            <a:ext cx="8839197" cy="4154423"/>
+            <a:off x="734075" y="1822724"/>
+            <a:ext cx="7675839" cy="4522650"/>
           </a:xfrm>
           <a:prstGeom prst="rect">
             <a:avLst/>
@@ -14298,7 +14751,7 @@
       </p:grpSpPr>
       <p:sp>
         <p:nvSpPr>
-          <p:cNvPr id="119" name="Google Shape;119;g3c89c144ce9_0_148"/>
+          <p:cNvPr id="119" name="Google Shape;119;g3c70c3f9d8e_0_20"/>
           <p:cNvSpPr txBox="1"/>
           <p:nvPr>
             <p:ph type="title"/>
@@ -14312,6 +14765,10 @@
           <a:prstGeom prst="rect">
             <a:avLst/>
           </a:prstGeom>
+          <a:noFill/>
+          <a:ln>
+            <a:noFill/>
+          </a:ln>
         </p:spPr>
         <p:txBody>
           <a:bodyPr anchorCtr="0" anchor="b" bIns="91425" lIns="91425" spcFirstLastPara="1" rIns="91425" wrap="square" tIns="91425">
@@ -14320,22 +14777,54 @@
           <a:lstStyle/>
           <a:p>
             <a:pPr indent="0" lvl="0" marL="0" rtl="0" algn="l">
-              <a:spcBef>
-                <a:spcPts val="0"/>
-              </a:spcBef>
-              <a:spcAft>
-                <a:spcPts val="0"/>
-              </a:spcAft>
+              <a:lnSpc>
+                <a:spcPct val="100000"/>
+              </a:lnSpc>
+              <a:spcBef>
+                <a:spcPts val="0"/>
+              </a:spcBef>
+              <a:spcAft>
+                <a:spcPts val="0"/>
+              </a:spcAft>
+              <a:buSzPts val="3600"/>
               <a:buNone/>
             </a:pPr>
             <a:r>
               <a:rPr lang="en"/>
-              <a:t>FFN vs. FFN + Dropout vs. CNN</a:t>
+              <a:t>Convolutional Neural Networks</a:t>
             </a:r>
             <a:endParaRPr/>
           </a:p>
         </p:txBody>
       </p:sp>
+      <p:pic>
+        <p:nvPicPr>
+          <p:cNvPr id="120" name="Google Shape;120;g3c70c3f9d8e_0_20"/>
+          <p:cNvPicPr preferRelativeResize="0"/>
+          <p:nvPr/>
+        </p:nvPicPr>
+        <p:blipFill>
+          <a:blip r:embed="rId3">
+            <a:alphaModFix/>
+          </a:blip>
+          <a:stretch>
+            <a:fillRect/>
+          </a:stretch>
+        </p:blipFill>
+        <p:spPr>
+          <a:xfrm>
+            <a:off x="152400" y="1417638"/>
+            <a:ext cx="8839197" cy="4154423"/>
+          </a:xfrm>
+          <a:prstGeom prst="rect">
+            <a:avLst/>
+          </a:prstGeom>
+          <a:noFill/>
+          <a:ln>
+            <a:noFill/>
+          </a:ln>
+        </p:spPr>
+      </p:pic>
     </p:spTree>
   </p:cSld>
   <p:clrMapOvr>
@@ -14349,7 +14838,7 @@
   <p:cSld>
     <p:spTree>
       <p:nvGrpSpPr>
-        <p:cNvPr id="123" name="Shape 123"/>
+        <p:cNvPr id="124" name="Shape 124"/>
         <p:cNvGrpSpPr/>
         <p:nvPr/>
       </p:nvGrpSpPr>
@@ -14363,7 +14852,7 @@
       </p:grpSpPr>
       <p:sp>
         <p:nvSpPr>
-          <p:cNvPr id="124" name="Google Shape;124;g3c89c144ce9_0_1"/>
+          <p:cNvPr id="125" name="Google Shape;125;g3c89c144ce9_0_148"/>
           <p:cNvSpPr txBox="1"/>
           <p:nvPr>
             <p:ph type="title"/>
@@ -14395,86 +14884,15 @@
             </a:pPr>
             <a:r>
               <a:rPr lang="en"/>
-              <a:t>Image vs. Text Data</a:t>
+              <a:t>FFN vs. FFN + Dropout vs. CNN</a:t>
             </a:r>
             <a:endParaRPr/>
-          </a:p>
-        </p:txBody>
-      </p:sp>
-      <p:sp>
-        <p:nvSpPr>
-          <p:cNvPr id="125" name="Google Shape;125;g3c89c144ce9_0_1"/>
-          <p:cNvSpPr txBox="1"/>
-          <p:nvPr>
-            <p:ph idx="1" type="body"/>
-          </p:nvPr>
-        </p:nvSpPr>
-        <p:spPr>
-          <a:xfrm>
-            <a:off x="457200" y="3210750"/>
-            <a:ext cx="8229600" cy="2276100"/>
-          </a:xfrm>
-          <a:prstGeom prst="rect">
-            <a:avLst/>
-          </a:prstGeom>
-        </p:spPr>
-        <p:txBody>
-          <a:bodyPr anchorCtr="0" anchor="t" bIns="91425" lIns="91425" spcFirstLastPara="1" rIns="91425" wrap="square" tIns="91425">
-            <a:noAutofit/>
-          </a:bodyPr>
-          <a:lstStyle/>
-          <a:p>
-            <a:pPr indent="0" lvl="0" marL="0" rtl="0" algn="l">
-              <a:spcBef>
-                <a:spcPts val="600"/>
-              </a:spcBef>
-              <a:spcAft>
-                <a:spcPts val="0"/>
-              </a:spcAft>
-              <a:buNone/>
-            </a:pPr>
-            <a:r>
-              <a:rPr lang="en" sz="2800"/>
-              <a:t>Whether an image of a 5 came before the 0 has no impact on how we predict the 0.</a:t>
-            </a:r>
-            <a:endParaRPr sz="2800"/>
-          </a:p>
-          <a:p>
-            <a:pPr indent="0" lvl="0" marL="0" rtl="0" algn="l">
-              <a:spcBef>
-                <a:spcPts val="600"/>
-              </a:spcBef>
-              <a:spcAft>
-                <a:spcPts val="0"/>
-              </a:spcAft>
-              <a:buNone/>
-            </a:pPr>
-            <a:r>
-              <a:t/>
-            </a:r>
-            <a:endParaRPr sz="2800"/>
-          </a:p>
-          <a:p>
-            <a:pPr indent="0" lvl="0" marL="0" rtl="0" algn="l">
-              <a:spcBef>
-                <a:spcPts val="600"/>
-              </a:spcBef>
-              <a:spcAft>
-                <a:spcPts val="0"/>
-              </a:spcAft>
-              <a:buNone/>
-            </a:pPr>
-            <a:r>
-              <a:rPr lang="en" sz="2800"/>
-              <a:t>However, for text, what came previously matters a LOT</a:t>
-            </a:r>
-            <a:endParaRPr sz="2800"/>
           </a:p>
         </p:txBody>
       </p:sp>
       <p:pic>
         <p:nvPicPr>
-          <p:cNvPr id="126" name="Google Shape;126;g3c89c144ce9_0_1"/>
+          <p:cNvPr id="126" name="Google Shape;126;g3c89c144ce9_0_148"/>
           <p:cNvPicPr preferRelativeResize="0"/>
           <p:nvPr/>
         </p:nvPicPr>
@@ -14488,8 +14906,8 @@
         </p:blipFill>
         <p:spPr>
           <a:xfrm>
-            <a:off x="1324075" y="1417650"/>
-            <a:ext cx="6495851" cy="1793100"/>
+            <a:off x="152400" y="1417638"/>
+            <a:ext cx="8839202" cy="3915575"/>
           </a:xfrm>
           <a:prstGeom prst="rect">
             <a:avLst/>
@@ -14500,266 +14918,6 @@
           </a:ln>
         </p:spPr>
       </p:pic>
-      <p:sp>
-        <p:nvSpPr>
-          <p:cNvPr id="127" name="Google Shape;127;g3c89c144ce9_0_1"/>
-          <p:cNvSpPr/>
-          <p:nvPr/>
-        </p:nvSpPr>
-        <p:spPr>
-          <a:xfrm>
-            <a:off x="1298700" y="5724900"/>
-            <a:ext cx="945600" cy="873000"/>
-          </a:xfrm>
-          <a:prstGeom prst="roundRect">
-            <a:avLst>
-              <a:gd fmla="val 16667" name="adj"/>
-            </a:avLst>
-          </a:prstGeom>
-          <a:solidFill>
-            <a:srgbClr val="B6D7A8"/>
-          </a:solidFill>
-          <a:ln cap="flat" cmpd="sng" w="8700">
-            <a:solidFill>
-              <a:srgbClr val="6AA84F"/>
-            </a:solidFill>
-            <a:prstDash val="solid"/>
-            <a:round/>
-            <a:headEnd len="sm" w="sm" type="none"/>
-            <a:tailEnd len="sm" w="sm" type="none"/>
-          </a:ln>
-        </p:spPr>
-        <p:txBody>
-          <a:bodyPr anchorCtr="0" anchor="ctr" bIns="83450" lIns="83450" spcFirstLastPara="1" rIns="83450" wrap="square" tIns="83450">
-            <a:noAutofit/>
-          </a:bodyPr>
-          <a:lstStyle/>
-          <a:p>
-            <a:pPr indent="0" lvl="0" marL="0" rtl="0" algn="ctr">
-              <a:spcBef>
-                <a:spcPts val="0"/>
-              </a:spcBef>
-              <a:spcAft>
-                <a:spcPts val="0"/>
-              </a:spcAft>
-              <a:buNone/>
-            </a:pPr>
-            <a:r>
-              <a:rPr lang="en" sz="2400"/>
-              <a:t>I</a:t>
-            </a:r>
-            <a:endParaRPr sz="2400"/>
-          </a:p>
-        </p:txBody>
-      </p:sp>
-      <p:sp>
-        <p:nvSpPr>
-          <p:cNvPr id="128" name="Google Shape;128;g3c89c144ce9_0_1"/>
-          <p:cNvSpPr/>
-          <p:nvPr/>
-        </p:nvSpPr>
-        <p:spPr>
-          <a:xfrm>
-            <a:off x="2473050" y="5724900"/>
-            <a:ext cx="945600" cy="873000"/>
-          </a:xfrm>
-          <a:prstGeom prst="roundRect">
-            <a:avLst>
-              <a:gd fmla="val 16667" name="adj"/>
-            </a:avLst>
-          </a:prstGeom>
-          <a:solidFill>
-            <a:srgbClr val="B6D7A8"/>
-          </a:solidFill>
-          <a:ln cap="flat" cmpd="sng" w="8700">
-            <a:solidFill>
-              <a:srgbClr val="6AA84F"/>
-            </a:solidFill>
-            <a:prstDash val="solid"/>
-            <a:round/>
-            <a:headEnd len="sm" w="sm" type="none"/>
-            <a:tailEnd len="sm" w="sm" type="none"/>
-          </a:ln>
-        </p:spPr>
-        <p:txBody>
-          <a:bodyPr anchorCtr="0" anchor="ctr" bIns="83450" lIns="83450" spcFirstLastPara="1" rIns="83450" wrap="square" tIns="83450">
-            <a:noAutofit/>
-          </a:bodyPr>
-          <a:lstStyle/>
-          <a:p>
-            <a:pPr indent="0" lvl="0" marL="0" rtl="0" algn="ctr">
-              <a:spcBef>
-                <a:spcPts val="0"/>
-              </a:spcBef>
-              <a:spcAft>
-                <a:spcPts val="0"/>
-              </a:spcAft>
-              <a:buNone/>
-            </a:pPr>
-            <a:r>
-              <a:rPr lang="en" sz="2400"/>
-              <a:t>like</a:t>
-            </a:r>
-            <a:endParaRPr sz="2400"/>
-          </a:p>
-        </p:txBody>
-      </p:sp>
-      <p:sp>
-        <p:nvSpPr>
-          <p:cNvPr id="129" name="Google Shape;129;g3c89c144ce9_0_1"/>
-          <p:cNvSpPr/>
-          <p:nvPr/>
-        </p:nvSpPr>
-        <p:spPr>
-          <a:xfrm>
-            <a:off x="3647400" y="5724900"/>
-            <a:ext cx="945600" cy="873000"/>
-          </a:xfrm>
-          <a:prstGeom prst="roundRect">
-            <a:avLst>
-              <a:gd fmla="val 16667" name="adj"/>
-            </a:avLst>
-          </a:prstGeom>
-          <a:solidFill>
-            <a:srgbClr val="B6D7A8"/>
-          </a:solidFill>
-          <a:ln cap="flat" cmpd="sng" w="8700">
-            <a:solidFill>
-              <a:srgbClr val="6AA84F"/>
-            </a:solidFill>
-            <a:prstDash val="solid"/>
-            <a:round/>
-            <a:headEnd len="sm" w="sm" type="none"/>
-            <a:tailEnd len="sm" w="sm" type="none"/>
-          </a:ln>
-        </p:spPr>
-        <p:txBody>
-          <a:bodyPr anchorCtr="0" anchor="ctr" bIns="83450" lIns="83450" spcFirstLastPara="1" rIns="83450" wrap="square" tIns="83450">
-            <a:noAutofit/>
-          </a:bodyPr>
-          <a:lstStyle/>
-          <a:p>
-            <a:pPr indent="0" lvl="0" marL="0" rtl="0" algn="ctr">
-              <a:spcBef>
-                <a:spcPts val="0"/>
-              </a:spcBef>
-              <a:spcAft>
-                <a:spcPts val="0"/>
-              </a:spcAft>
-              <a:buNone/>
-            </a:pPr>
-            <a:r>
-              <a:rPr lang="en" sz="2400"/>
-              <a:t>cute</a:t>
-            </a:r>
-            <a:endParaRPr sz="2400"/>
-          </a:p>
-        </p:txBody>
-      </p:sp>
-      <p:sp>
-        <p:nvSpPr>
-          <p:cNvPr id="130" name="Google Shape;130;g3c89c144ce9_0_1"/>
-          <p:cNvSpPr/>
-          <p:nvPr/>
-        </p:nvSpPr>
-        <p:spPr>
-          <a:xfrm>
-            <a:off x="4821750" y="5724900"/>
-            <a:ext cx="1397400" cy="873000"/>
-          </a:xfrm>
-          <a:prstGeom prst="roundRect">
-            <a:avLst>
-              <a:gd fmla="val 16667" name="adj"/>
-            </a:avLst>
-          </a:prstGeom>
-          <a:solidFill>
-            <a:srgbClr val="B6D7A8"/>
-          </a:solidFill>
-          <a:ln cap="flat" cmpd="sng" w="8700">
-            <a:solidFill>
-              <a:srgbClr val="6AA84F"/>
-            </a:solidFill>
-            <a:prstDash val="solid"/>
-            <a:round/>
-            <a:headEnd len="sm" w="sm" type="none"/>
-            <a:tailEnd len="sm" w="sm" type="none"/>
-          </a:ln>
-        </p:spPr>
-        <p:txBody>
-          <a:bodyPr anchorCtr="0" anchor="ctr" bIns="83450" lIns="83450" spcFirstLastPara="1" rIns="83450" wrap="square" tIns="83450">
-            <a:noAutofit/>
-          </a:bodyPr>
-          <a:lstStyle/>
-          <a:p>
-            <a:pPr indent="0" lvl="0" marL="0" rtl="0" algn="ctr">
-              <a:spcBef>
-                <a:spcPts val="0"/>
-              </a:spcBef>
-              <a:spcAft>
-                <a:spcPts val="0"/>
-              </a:spcAft>
-              <a:buNone/>
-            </a:pPr>
-            <a:r>
-              <a:rPr lang="en" sz="2400"/>
-              <a:t>kittens</a:t>
-            </a:r>
-            <a:endParaRPr sz="2400"/>
-          </a:p>
-        </p:txBody>
-      </p:sp>
-      <p:sp>
-        <p:nvSpPr>
-          <p:cNvPr id="131" name="Google Shape;131;g3c89c144ce9_0_1"/>
-          <p:cNvSpPr/>
-          <p:nvPr/>
-        </p:nvSpPr>
-        <p:spPr>
-          <a:xfrm>
-            <a:off x="6447900" y="5724900"/>
-            <a:ext cx="1397400" cy="873000"/>
-          </a:xfrm>
-          <a:prstGeom prst="roundRect">
-            <a:avLst>
-              <a:gd fmla="val 16667" name="adj"/>
-            </a:avLst>
-          </a:prstGeom>
-          <a:solidFill>
-            <a:srgbClr val="B6D7A8"/>
-          </a:solidFill>
-          <a:ln cap="flat" cmpd="sng" w="8700">
-            <a:solidFill>
-              <a:srgbClr val="6AA84F"/>
-            </a:solidFill>
-            <a:prstDash val="solid"/>
-            <a:round/>
-            <a:headEnd len="sm" w="sm" type="none"/>
-            <a:tailEnd len="sm" w="sm" type="none"/>
-          </a:ln>
-        </p:spPr>
-        <p:txBody>
-          <a:bodyPr anchorCtr="0" anchor="ctr" bIns="83450" lIns="83450" spcFirstLastPara="1" rIns="83450" wrap="square" tIns="83450">
-            <a:noAutofit/>
-          </a:bodyPr>
-          <a:lstStyle/>
-          <a:p>
-            <a:pPr indent="0" lvl="0" marL="0" rtl="0" algn="ctr">
-              <a:spcBef>
-                <a:spcPts val="0"/>
-              </a:spcBef>
-              <a:spcAft>
-                <a:spcPts val="0"/>
-              </a:spcAft>
-              <a:buNone/>
-            </a:pPr>
-            <a:r>
-              <a:rPr lang="en" sz="2400"/>
-              <a:t>and</a:t>
-            </a:r>
-            <a:endParaRPr sz="2400"/>
-          </a:p>
-        </p:txBody>
-      </p:sp>
     </p:spTree>
   </p:cSld>
   <p:clrMapOvr>
